--- a/AssignmentRelatedDocuments/WhatWasSubmitted/Graph Lab.pptx
+++ b/AssignmentRelatedDocuments/WhatWasSubmitted/Graph Lab.pptx
@@ -3746,25 +3746,25 @@
           <p:nvPr>
             <p:extLst>
               <p:ext uri="{D42A27DB-BD31-4B8C-83A1-F6EECF244321}">
-                <p14:modId xmlns:p14="http://schemas.microsoft.com/office/powerpoint/2010/main" val="1262824619"/>
+                <p14:modId xmlns:p14="http://schemas.microsoft.com/office/powerpoint/2010/main" val="2544639646"/>
               </p:ext>
             </p:extLst>
           </p:nvPr>
         </p:nvGraphicFramePr>
         <p:xfrm>
-          <a:off x="538163" y="5110163"/>
-          <a:ext cx="5468937" cy="2438400"/>
+          <a:off x="533400" y="5103813"/>
+          <a:ext cx="5422900" cy="2443162"/>
         </p:xfrm>
         <a:graphic>
           <a:graphicData uri="http://schemas.openxmlformats.org/presentationml/2006/ole">
             <mc:AlternateContent xmlns:mc="http://schemas.openxmlformats.org/markup-compatibility/2006">
               <mc:Choice xmlns:v="urn:schemas-microsoft-com:vml" Requires="v">
-                <p:oleObj spid="_x0000_s2060" name="Document" r:id="rId3" imgW="5491805" imgH="2460978" progId="Word.Document.8">
+                <p:oleObj name="Document" r:id="rId2" imgW="5483860" imgH="2476746" progId="Word.Document.8">
                   <p:embed/>
                 </p:oleObj>
               </mc:Choice>
               <mc:Fallback>
-                <p:oleObj name="Document" r:id="rId3" imgW="5491805" imgH="2460978" progId="Word.Document.8">
+                <p:oleObj name="Document" r:id="rId2" imgW="5483860" imgH="2476746" progId="Word.Document.8">
                   <p:embed/>
                   <p:pic>
                     <p:nvPicPr>
@@ -3775,7 +3775,7 @@
                       <p:nvPr/>
                     </p:nvPicPr>
                     <p:blipFill>
-                      <a:blip r:embed="rId4"/>
+                      <a:blip r:embed="rId3"/>
                       <a:srcRect/>
                       <a:stretch>
                         <a:fillRect/>
@@ -3783,8 +3783,8 @@
                     </p:blipFill>
                     <p:spPr bwMode="auto">
                       <a:xfrm>
-                        <a:off x="538163" y="5110163"/>
-                        <a:ext cx="5468937" cy="2438400"/>
+                        <a:off x="533400" y="5103813"/>
+                        <a:ext cx="5422900" cy="2443162"/>
                       </a:xfrm>
                       <a:prstGeom prst="rect">
                         <a:avLst/>
@@ -4056,8 +4056,8 @@
         </p:nvSpPr>
         <p:spPr bwMode="auto">
           <a:xfrm>
-            <a:off x="338138" y="1189038"/>
-            <a:ext cx="6291262" cy="822325"/>
+            <a:off x="338138" y="1277035"/>
+            <a:ext cx="6291262" cy="646331"/>
           </a:xfrm>
           <a:prstGeom prst="rect">
             <a:avLst/>
@@ -4437,8 +4437,24 @@
               <a:buNone/>
             </a:pPr>
             <a:r>
-              <a:rPr lang="en-US" altLang="en-US" sz="1200"/>
-              <a:t>V(StateGraph) = {Oregon, Alaska, Texas, Hawaii, Vermont, NewYork, California}</a:t>
+              <a:rPr lang="en-US" altLang="en-US" sz="1200" dirty="0"/>
+              <a:t>V(</a:t>
+            </a:r>
+            <a:r>
+              <a:rPr lang="en-US" altLang="en-US" sz="1200" dirty="0" err="1"/>
+              <a:t>StateGraph</a:t>
+            </a:r>
+            <a:r>
+              <a:rPr lang="en-US" altLang="en-US" sz="1200" dirty="0"/>
+              <a:t>) = {Oregon, Alaska, Texas, Hawaii, Vermont, </a:t>
+            </a:r>
+            <a:r>
+              <a:rPr lang="en-US" altLang="en-US" sz="1200" dirty="0" err="1"/>
+              <a:t>NewYork</a:t>
+            </a:r>
+            <a:r>
+              <a:rPr lang="en-US" altLang="en-US" sz="1200" dirty="0"/>
+              <a:t>, California}</a:t>
             </a:r>
           </a:p>
           <a:p>
@@ -4450,8 +4466,16 @@
               <a:buNone/>
             </a:pPr>
             <a:r>
-              <a:rPr lang="en-US" altLang="en-US" sz="1200"/>
-              <a:t>E(StateGraph) = {(Alaska, Oregon), (Hawaii, Alaska), (Hawaii, Texas), (Texas, Hawaii), (Hawaii, 	California), (Hawaii, New York), (Texas, Vermont), (Vermont, California), 	(Vermont, Alaska)}</a:t>
+              <a:rPr lang="en-US" altLang="en-US" sz="1200" dirty="0"/>
+              <a:t>E(</a:t>
+            </a:r>
+            <a:r>
+              <a:rPr lang="en-US" altLang="en-US" sz="1200" dirty="0" err="1"/>
+              <a:t>StateGraph</a:t>
+            </a:r>
+            <a:r>
+              <a:rPr lang="en-US" altLang="en-US" sz="1200" dirty="0"/>
+              <a:t>) = {(Alaska, Oregon), (Hawaii, Alaska), (Hawaii, Texas), (Texas, Hawaii), (Hawaii, 	California), (Hawaii, New York), (Texas, Vermont), (Vermont, California), (Vermont, Alaska)}</a:t>
             </a:r>
           </a:p>
         </p:txBody>
@@ -5937,8 +5961,8 @@
         </p:nvSpPr>
         <p:spPr bwMode="auto">
           <a:xfrm>
-            <a:off x="228600" y="3248025"/>
-            <a:ext cx="5653088" cy="1370013"/>
+            <a:off x="233973" y="2895600"/>
+            <a:ext cx="5704254" cy="2308324"/>
           </a:xfrm>
           <a:prstGeom prst="rect">
             <a:avLst/>
@@ -6400,6 +6424,65 @@
               <a:t>	D)	E, C, F, B, A, D, G </a:t>
             </a:r>
           </a:p>
+          <a:p>
+            <a:pPr>
+              <a:spcBef>
+                <a:spcPct val="0"/>
+              </a:spcBef>
+              <a:buFontTx/>
+              <a:buNone/>
+            </a:pPr>
+            <a:endParaRPr lang="en-US" altLang="en-US" sz="1200" dirty="0"/>
+          </a:p>
+          <a:p>
+            <a:pPr>
+              <a:spcBef>
+                <a:spcPct val="0"/>
+              </a:spcBef>
+              <a:buFontTx/>
+              <a:buNone/>
+            </a:pPr>
+            <a:r>
+              <a:rPr lang="en-US" altLang="en-US" sz="1200" dirty="0"/>
+              <a:t>When there is a choice between options, I do alphabetical order, </a:t>
+            </a:r>
+          </a:p>
+          <a:p>
+            <a:pPr>
+              <a:spcBef>
+                <a:spcPct val="0"/>
+              </a:spcBef>
+              <a:buFontTx/>
+              <a:buNone/>
+            </a:pPr>
+            <a:r>
+              <a:rPr lang="en-US" altLang="en-US" sz="1200" dirty="0"/>
+              <a:t>but that leads to none of the options, so I’ll do reverse alphabetical order to get option A</a:t>
+            </a:r>
+          </a:p>
+          <a:p>
+            <a:pPr>
+              <a:spcBef>
+                <a:spcPct val="0"/>
+              </a:spcBef>
+              <a:buFontTx/>
+              <a:buNone/>
+            </a:pPr>
+            <a:endParaRPr lang="en-US" altLang="en-US" sz="1200" dirty="0"/>
+          </a:p>
+          <a:p>
+            <a:pPr>
+              <a:spcBef>
+                <a:spcPct val="0"/>
+              </a:spcBef>
+              <a:buFontTx/>
+              <a:buNone/>
+            </a:pPr>
+            <a:r>
+              <a:rPr lang="en-US" altLang="en-US" sz="1200" dirty="0"/>
+              <a:t>ANSWER: A</a:t>
+            </a:r>
+          </a:p>
         </p:txBody>
       </p:sp>
       <p:sp>
@@ -6418,8 +6501,8 @@
         </p:nvSpPr>
         <p:spPr bwMode="auto">
           <a:xfrm>
-            <a:off x="228600" y="4800600"/>
-            <a:ext cx="5715000" cy="1004888"/>
+            <a:off x="228600" y="5876206"/>
+            <a:ext cx="5715000" cy="1938992"/>
           </a:xfrm>
           <a:prstGeom prst="rect">
             <a:avLst/>
@@ -6583,7 +6666,7 @@
               <a:buNone/>
             </a:pPr>
             <a:r>
-              <a:rPr lang="en-US" altLang="en-US" sz="1200"/>
+              <a:rPr lang="en-US" altLang="en-US" sz="1200" dirty="0"/>
               <a:t>4 b.    Which of the following lists the graph nodes in breadth first order beginning at F? </a:t>
             </a:r>
           </a:p>
@@ -6596,7 +6679,7 @@
               <a:buNone/>
             </a:pPr>
             <a:r>
-              <a:rPr lang="en-US" altLang="en-US" sz="1200"/>
+              <a:rPr lang="en-US" altLang="en-US" sz="1200" dirty="0"/>
               <a:t>	A)  F, C, D, A, B, E, G</a:t>
             </a:r>
           </a:p>
@@ -6609,7 +6692,7 @@
               <a:buNone/>
             </a:pPr>
             <a:r>
-              <a:rPr lang="en-US" altLang="en-US" sz="1200"/>
+              <a:rPr lang="en-US" altLang="en-US" sz="1200" dirty="0"/>
               <a:t>	B)  F, D, C, A, B, C, G </a:t>
             </a:r>
           </a:p>
@@ -6622,7 +6705,7 @@
               <a:buNone/>
             </a:pPr>
             <a:r>
-              <a:rPr lang="en-US" altLang="en-US" sz="1200"/>
+              <a:rPr lang="en-US" altLang="en-US" sz="1200" dirty="0"/>
               <a:t>	C)  F, C, D, B, G, A, E </a:t>
             </a:r>
           </a:p>
@@ -6635,8 +6718,70 @@
               <a:buNone/>
             </a:pPr>
             <a:r>
-              <a:rPr lang="en-US" altLang="en-US" sz="1200"/>
+              <a:rPr lang="en-US" altLang="en-US" sz="1200" dirty="0"/>
               <a:t>	D)  a, b, and c are all breadth first traversals </a:t>
+            </a:r>
+          </a:p>
+          <a:p>
+            <a:pPr>
+              <a:spcBef>
+                <a:spcPct val="0"/>
+              </a:spcBef>
+              <a:buFontTx/>
+              <a:buNone/>
+            </a:pPr>
+            <a:r>
+              <a:rPr lang="en-US" altLang="en-US" sz="1200" dirty="0"/>
+              <a:t>Alphabetical order gets option A</a:t>
+            </a:r>
+          </a:p>
+          <a:p>
+            <a:pPr>
+              <a:spcBef>
+                <a:spcPct val="0"/>
+              </a:spcBef>
+              <a:buFontTx/>
+              <a:buNone/>
+            </a:pPr>
+            <a:r>
+              <a:rPr lang="en-US" altLang="en-US" sz="1200" dirty="0"/>
+              <a:t>Reverse alphabetical order gets FDCAEBG which isn’t an option</a:t>
+            </a:r>
+          </a:p>
+          <a:p>
+            <a:pPr>
+              <a:spcBef>
+                <a:spcPct val="0"/>
+              </a:spcBef>
+              <a:buFontTx/>
+              <a:buNone/>
+            </a:pPr>
+            <a:r>
+              <a:rPr lang="en-US" altLang="en-US" sz="1200" dirty="0"/>
+              <a:t>Option B cannot be correct since it repeats vertices</a:t>
+            </a:r>
+          </a:p>
+          <a:p>
+            <a:pPr>
+              <a:spcBef>
+                <a:spcPct val="0"/>
+              </a:spcBef>
+              <a:buFontTx/>
+              <a:buNone/>
+            </a:pPr>
+            <a:endParaRPr lang="en-US" altLang="en-US" sz="1200" dirty="0"/>
+          </a:p>
+          <a:p>
+            <a:pPr>
+              <a:spcBef>
+                <a:spcPct val="0"/>
+              </a:spcBef>
+              <a:buFontTx/>
+              <a:buNone/>
+            </a:pPr>
+            <a:r>
+              <a:rPr lang="en-US" altLang="en-US" sz="1200" dirty="0"/>
+              <a:t>ANSWER: A</a:t>
             </a:r>
           </a:p>
         </p:txBody>
@@ -6743,7 +6888,7 @@
         <p:spPr bwMode="auto">
           <a:xfrm>
             <a:off x="609600" y="3962400"/>
-            <a:ext cx="3911600" cy="274638"/>
+            <a:ext cx="3978525" cy="646331"/>
           </a:xfrm>
           <a:prstGeom prst="rect">
             <a:avLst/>
@@ -6899,16 +7044,16 @@
             </a:lvl9pPr>
           </a:lstStyle>
           <a:p>
-            <a:pPr>
+            <a:pPr marL="228600" indent="-228600">
               <a:spcBef>
                 <a:spcPct val="0"/>
               </a:spcBef>
               <a:buFontTx/>
-              <a:buNone/>
+              <a:buAutoNum type="arabicPeriod" startAt="5"/>
             </a:pPr>
             <a:r>
               <a:rPr lang="en-US" altLang="en-US" sz="1200" dirty="0"/>
-              <a:t>5.  Find the shortest </a:t>
+              <a:t>Find the shortest </a:t>
             </a:r>
             <a:r>
               <a:rPr lang="en-US" altLang="en-US" sz="1200" u="sng" dirty="0"/>
@@ -6918,6 +7063,25 @@
               <a:rPr lang="en-US" altLang="en-US" sz="1200" dirty="0"/>
               <a:t> from Atlanta to every other city</a:t>
             </a:r>
+          </a:p>
+          <a:p>
+            <a:pPr marL="228600" indent="-228600">
+              <a:spcBef>
+                <a:spcPct val="0"/>
+              </a:spcBef>
+              <a:buFontTx/>
+              <a:buAutoNum type="arabicPeriod" startAt="5"/>
+            </a:pPr>
+            <a:endParaRPr lang="en-US" altLang="en-US" sz="1200" dirty="0"/>
+          </a:p>
+          <a:p>
+            <a:pPr>
+              <a:spcBef>
+                <a:spcPct val="0"/>
+              </a:spcBef>
+              <a:buNone/>
+            </a:pPr>
+            <a:endParaRPr lang="en-US" altLang="en-US" sz="1200" dirty="0"/>
           </a:p>
         </p:txBody>
       </p:sp>
@@ -7216,6 +7380,62 @@
           </a:extLst>
         </p:spPr>
       </p:pic>
+      <p:sp>
+        <p:nvSpPr>
+          <p:cNvPr id="3" name="TextBox 2">
+            <a:extLst>
+              <a:ext uri="{FF2B5EF4-FFF2-40B4-BE49-F238E27FC236}">
+                <a16:creationId xmlns:a16="http://schemas.microsoft.com/office/drawing/2014/main" id="{60E27E15-F937-E0BF-2194-0CEB3BB18E34}"/>
+              </a:ext>
+            </a:extLst>
+          </p:cNvPr>
+          <p:cNvSpPr txBox="1"/>
+          <p:nvPr/>
+        </p:nvSpPr>
+        <p:spPr>
+          <a:xfrm>
+            <a:off x="609600" y="4114800"/>
+            <a:ext cx="2159566" cy="1200329"/>
+          </a:xfrm>
+          <a:prstGeom prst="rect">
+            <a:avLst/>
+          </a:prstGeom>
+          <a:noFill/>
+        </p:spPr>
+        <p:txBody>
+          <a:bodyPr wrap="none" rtlCol="0">
+            <a:spAutoFit/>
+          </a:bodyPr>
+          <a:lstStyle/>
+          <a:p>
+            <a:r>
+              <a:rPr lang="en-US" dirty="0"/>
+              <a:t>0, 2, 5, 1, 4, 3</a:t>
+            </a:r>
+          </a:p>
+          <a:p>
+            <a:r>
+              <a:rPr lang="en-US" dirty="0"/>
+              <a:t>0</a:t>
+            </a:r>
+            <a:r>
+              <a:rPr lang="en-US" dirty="0">
+                <a:sym typeface="Wingdings" panose="05000000000000000000" pitchFamily="2" charset="2"/>
+              </a:rPr>
+              <a:t>2513</a:t>
+            </a:r>
+          </a:p>
+          <a:p>
+            <a:r>
+              <a:rPr lang="en-US" dirty="0">
+                <a:sym typeface="Wingdings" panose="05000000000000000000" pitchFamily="2" charset="2"/>
+              </a:rPr>
+              <a:t>54</a:t>
+            </a:r>
+            <a:endParaRPr lang="en-US" dirty="0"/>
+          </a:p>
+        </p:txBody>
+      </p:sp>
     </p:spTree>
   </p:cSld>
   <p:clrMapOvr>
@@ -8645,6 +8865,41 @@
             <a:r>
               <a:rPr lang="en-US" altLang="en-US" sz="1350" dirty="0"/>
               <a:t>	Minneapolis/St. Paul as the source vertex</a:t>
+            </a:r>
+          </a:p>
+        </p:txBody>
+      </p:sp>
+      <p:sp>
+        <p:nvSpPr>
+          <p:cNvPr id="2" name="TextBox 1">
+            <a:extLst>
+              <a:ext uri="{FF2B5EF4-FFF2-40B4-BE49-F238E27FC236}">
+                <a16:creationId xmlns:a16="http://schemas.microsoft.com/office/drawing/2014/main" id="{25994F80-3CC1-0071-8D65-C78EA83447DB}"/>
+              </a:ext>
+            </a:extLst>
+          </p:cNvPr>
+          <p:cNvSpPr txBox="1"/>
+          <p:nvPr/>
+        </p:nvSpPr>
+        <p:spPr>
+          <a:xfrm>
+            <a:off x="1066800" y="6324600"/>
+            <a:ext cx="1596912" cy="461665"/>
+          </a:xfrm>
+          <a:prstGeom prst="rect">
+            <a:avLst/>
+          </a:prstGeom>
+          <a:noFill/>
+        </p:spPr>
+        <p:txBody>
+          <a:bodyPr wrap="none" rtlCol="0">
+            <a:spAutoFit/>
+          </a:bodyPr>
+          <a:lstStyle/>
+          <a:p>
+            <a:r>
+              <a:rPr lang="en-US" dirty="0"/>
+              <a:t>USE PRIM</a:t>
             </a:r>
           </a:p>
         </p:txBody>

--- a/AssignmentRelatedDocuments/WhatWasSubmitted/Graph Lab.pptx
+++ b/AssignmentRelatedDocuments/WhatWasSubmitted/Graph Lab.pptx
@@ -3746,25 +3746,25 @@
           <p:nvPr>
             <p:extLst>
               <p:ext uri="{D42A27DB-BD31-4B8C-83A1-F6EECF244321}">
-                <p14:modId xmlns:p14="http://schemas.microsoft.com/office/powerpoint/2010/main" val="2544639646"/>
+                <p14:modId xmlns:p14="http://schemas.microsoft.com/office/powerpoint/2010/main" val="2376977632"/>
               </p:ext>
             </p:extLst>
           </p:nvPr>
         </p:nvGraphicFramePr>
         <p:xfrm>
-          <a:off x="533400" y="5103813"/>
-          <a:ext cx="5422900" cy="2443162"/>
+          <a:off x="533400" y="4921250"/>
+          <a:ext cx="5394325" cy="3128963"/>
         </p:xfrm>
         <a:graphic>
           <a:graphicData uri="http://schemas.openxmlformats.org/presentationml/2006/ole">
             <mc:AlternateContent xmlns:mc="http://schemas.openxmlformats.org/markup-compatibility/2006">
               <mc:Choice xmlns:v="urn:schemas-microsoft-com:vml" Requires="v">
-                <p:oleObj name="Document" r:id="rId2" imgW="5483860" imgH="2476746" progId="Word.Document.8">
+                <p:oleObj name="Document" r:id="rId2" imgW="5483860" imgH="2808060" progId="Word.Document.8">
                   <p:embed/>
                 </p:oleObj>
               </mc:Choice>
               <mc:Fallback>
-                <p:oleObj name="Document" r:id="rId2" imgW="5483860" imgH="2476746" progId="Word.Document.8">
+                <p:oleObj name="Document" r:id="rId2" imgW="5483860" imgH="2808060" progId="Word.Document.8">
                   <p:embed/>
                   <p:pic>
                     <p:nvPicPr>
@@ -3783,8 +3783,8 @@
                     </p:blipFill>
                     <p:spPr bwMode="auto">
                       <a:xfrm>
-                        <a:off x="533400" y="5103813"/>
-                        <a:ext cx="5422900" cy="2443162"/>
+                        <a:off x="533400" y="4921250"/>
+                        <a:ext cx="5394325" cy="3128963"/>
                       </a:xfrm>
                       <a:prstGeom prst="rect">
                         <a:avLst/>
@@ -4844,6 +4844,36 @@
           </a:p>
         </p:txBody>
       </p:sp>
+      <p:pic>
+        <p:nvPicPr>
+          <p:cNvPr id="3" name="Picture 2">
+            <a:extLst>
+              <a:ext uri="{FF2B5EF4-FFF2-40B4-BE49-F238E27FC236}">
+                <a16:creationId xmlns:a16="http://schemas.microsoft.com/office/drawing/2014/main" id="{E2B0BCF9-916A-F85E-FA57-EA4085A34BFD}"/>
+              </a:ext>
+            </a:extLst>
+          </p:cNvPr>
+          <p:cNvPicPr>
+            <a:picLocks noChangeAspect="1"/>
+          </p:cNvPicPr>
+          <p:nvPr/>
+        </p:nvPicPr>
+        <p:blipFill>
+          <a:blip r:embed="rId4"/>
+          <a:stretch>
+            <a:fillRect/>
+          </a:stretch>
+        </p:blipFill>
+        <p:spPr>
+          <a:xfrm>
+            <a:off x="533400" y="2513648"/>
+            <a:ext cx="3874567" cy="2443162"/>
+          </a:xfrm>
+          <a:prstGeom prst="rect">
+            <a:avLst/>
+          </a:prstGeom>
+        </p:spPr>
+      </p:pic>
     </p:spTree>
   </p:cSld>
   <p:clrMapOvr>
@@ -5066,183 +5096,6 @@
               <a:rPr lang="en-US" altLang="en-US" sz="1200" dirty="0"/>
               <a:t>            that would describe the edges in the graph</a:t>
             </a:r>
-          </a:p>
-        </p:txBody>
-      </p:sp>
-      <p:sp>
-        <p:nvSpPr>
-          <p:cNvPr id="3075" name="Rectangle 3">
-            <a:extLst>
-              <a:ext uri="{FF2B5EF4-FFF2-40B4-BE49-F238E27FC236}">
-                <a16:creationId xmlns:a16="http://schemas.microsoft.com/office/drawing/2014/main" id="{3F1D4401-FBEF-43F9-BEE5-1B122142E735}"/>
-              </a:ext>
-            </a:extLst>
-          </p:cNvPr>
-          <p:cNvSpPr>
-            <a:spLocks noChangeArrowheads="1"/>
-          </p:cNvSpPr>
-          <p:nvPr/>
-        </p:nvSpPr>
-        <p:spPr bwMode="auto">
-          <a:xfrm>
-            <a:off x="990600" y="6019800"/>
-            <a:ext cx="1295400" cy="2590800"/>
-          </a:xfrm>
-          <a:prstGeom prst="rect">
-            <a:avLst/>
-          </a:prstGeom>
-          <a:noFill/>
-          <a:ln w="9525">
-            <a:solidFill>
-              <a:schemeClr val="tx1"/>
-            </a:solidFill>
-            <a:miter lim="800000"/>
-            <a:headEnd/>
-            <a:tailEnd/>
-          </a:ln>
-          <a:extLst>
-            <a:ext uri="{909E8E84-426E-40DD-AFC4-6F175D3DCCD1}">
-              <a14:hiddenFill xmlns:a14="http://schemas.microsoft.com/office/drawing/2010/main">
-                <a:solidFill>
-                  <a:srgbClr val="FFFFFF"/>
-                </a:solidFill>
-              </a14:hiddenFill>
-            </a:ext>
-          </a:extLst>
-        </p:spPr>
-        <p:txBody>
-          <a:bodyPr wrap="none" anchor="ctr"/>
-          <a:lstStyle>
-            <a:lvl1pPr>
-              <a:spcBef>
-                <a:spcPct val="20000"/>
-              </a:spcBef>
-              <a:buChar char="•"/>
-              <a:defRPr sz="3200">
-                <a:solidFill>
-                  <a:schemeClr val="tx1"/>
-                </a:solidFill>
-                <a:latin typeface="Times New Roman" panose="02020603050405020304" pitchFamily="18" charset="0"/>
-              </a:defRPr>
-            </a:lvl1pPr>
-            <a:lvl2pPr marL="742950" indent="-285750">
-              <a:spcBef>
-                <a:spcPct val="20000"/>
-              </a:spcBef>
-              <a:buChar char="–"/>
-              <a:defRPr sz="2800">
-                <a:solidFill>
-                  <a:schemeClr val="tx1"/>
-                </a:solidFill>
-                <a:latin typeface="Times New Roman" panose="02020603050405020304" pitchFamily="18" charset="0"/>
-              </a:defRPr>
-            </a:lvl2pPr>
-            <a:lvl3pPr marL="1143000" indent="-228600">
-              <a:spcBef>
-                <a:spcPct val="20000"/>
-              </a:spcBef>
-              <a:buChar char="•"/>
-              <a:defRPr sz="2400">
-                <a:solidFill>
-                  <a:schemeClr val="tx1"/>
-                </a:solidFill>
-                <a:latin typeface="Times New Roman" panose="02020603050405020304" pitchFamily="18" charset="0"/>
-              </a:defRPr>
-            </a:lvl3pPr>
-            <a:lvl4pPr marL="1600200" indent="-228600">
-              <a:spcBef>
-                <a:spcPct val="20000"/>
-              </a:spcBef>
-              <a:buChar char="–"/>
-              <a:defRPr sz="2000">
-                <a:solidFill>
-                  <a:schemeClr val="tx1"/>
-                </a:solidFill>
-                <a:latin typeface="Times New Roman" panose="02020603050405020304" pitchFamily="18" charset="0"/>
-              </a:defRPr>
-            </a:lvl4pPr>
-            <a:lvl5pPr marL="2057400" indent="-228600">
-              <a:spcBef>
-                <a:spcPct val="20000"/>
-              </a:spcBef>
-              <a:buChar char="»"/>
-              <a:defRPr sz="2000">
-                <a:solidFill>
-                  <a:schemeClr val="tx1"/>
-                </a:solidFill>
-                <a:latin typeface="Times New Roman" panose="02020603050405020304" pitchFamily="18" charset="0"/>
-              </a:defRPr>
-            </a:lvl5pPr>
-            <a:lvl6pPr marL="2514600" indent="-228600" eaLnBrk="0" fontAlgn="base" hangingPunct="0">
-              <a:spcBef>
-                <a:spcPct val="20000"/>
-              </a:spcBef>
-              <a:spcAft>
-                <a:spcPct val="0"/>
-              </a:spcAft>
-              <a:buChar char="»"/>
-              <a:defRPr sz="2000">
-                <a:solidFill>
-                  <a:schemeClr val="tx1"/>
-                </a:solidFill>
-                <a:latin typeface="Times New Roman" panose="02020603050405020304" pitchFamily="18" charset="0"/>
-              </a:defRPr>
-            </a:lvl6pPr>
-            <a:lvl7pPr marL="2971800" indent="-228600" eaLnBrk="0" fontAlgn="base" hangingPunct="0">
-              <a:spcBef>
-                <a:spcPct val="20000"/>
-              </a:spcBef>
-              <a:spcAft>
-                <a:spcPct val="0"/>
-              </a:spcAft>
-              <a:buChar char="»"/>
-              <a:defRPr sz="2000">
-                <a:solidFill>
-                  <a:schemeClr val="tx1"/>
-                </a:solidFill>
-                <a:latin typeface="Times New Roman" panose="02020603050405020304" pitchFamily="18" charset="0"/>
-              </a:defRPr>
-            </a:lvl7pPr>
-            <a:lvl8pPr marL="3429000" indent="-228600" eaLnBrk="0" fontAlgn="base" hangingPunct="0">
-              <a:spcBef>
-                <a:spcPct val="20000"/>
-              </a:spcBef>
-              <a:spcAft>
-                <a:spcPct val="0"/>
-              </a:spcAft>
-              <a:buChar char="»"/>
-              <a:defRPr sz="2000">
-                <a:solidFill>
-                  <a:schemeClr val="tx1"/>
-                </a:solidFill>
-                <a:latin typeface="Times New Roman" panose="02020603050405020304" pitchFamily="18" charset="0"/>
-              </a:defRPr>
-            </a:lvl8pPr>
-            <a:lvl9pPr marL="3886200" indent="-228600" eaLnBrk="0" fontAlgn="base" hangingPunct="0">
-              <a:spcBef>
-                <a:spcPct val="20000"/>
-              </a:spcBef>
-              <a:spcAft>
-                <a:spcPct val="0"/>
-              </a:spcAft>
-              <a:buChar char="»"/>
-              <a:defRPr sz="2000">
-                <a:solidFill>
-                  <a:schemeClr val="tx1"/>
-                </a:solidFill>
-                <a:latin typeface="Times New Roman" panose="02020603050405020304" pitchFamily="18" charset="0"/>
-              </a:defRPr>
-            </a:lvl9pPr>
-          </a:lstStyle>
-          <a:p>
-            <a:pPr>
-              <a:spcBef>
-                <a:spcPct val="0"/>
-              </a:spcBef>
-              <a:buFontTx/>
-              <a:buNone/>
-            </a:pPr>
-            <a:endParaRPr lang="en-US" altLang="en-US" sz="2400"/>
           </a:p>
         </p:txBody>
       </p:sp>
@@ -5860,6 +5713,998 @@
           </a:p>
         </p:txBody>
       </p:sp>
+      <p:graphicFrame>
+        <p:nvGraphicFramePr>
+          <p:cNvPr id="3" name="Table 2">
+            <a:extLst>
+              <a:ext uri="{FF2B5EF4-FFF2-40B4-BE49-F238E27FC236}">
+                <a16:creationId xmlns:a16="http://schemas.microsoft.com/office/drawing/2014/main" id="{6FE0C131-50E4-F69E-3CB2-F9E5CDF3E96D}"/>
+              </a:ext>
+            </a:extLst>
+          </p:cNvPr>
+          <p:cNvGraphicFramePr>
+            <a:graphicFrameLocks noGrp="1"/>
+          </p:cNvGraphicFramePr>
+          <p:nvPr>
+            <p:extLst>
+              <p:ext uri="{D42A27DB-BD31-4B8C-83A1-F6EECF244321}">
+                <p14:modId xmlns:p14="http://schemas.microsoft.com/office/powerpoint/2010/main" val="4178452875"/>
+              </p:ext>
+            </p:extLst>
+          </p:nvPr>
+        </p:nvGraphicFramePr>
+        <p:xfrm>
+          <a:off x="2438400" y="1691958"/>
+          <a:ext cx="3962399" cy="2560320"/>
+        </p:xfrm>
+        <a:graphic>
+          <a:graphicData uri="http://schemas.openxmlformats.org/drawingml/2006/table">
+            <a:tbl>
+              <a:tblPr firstRow="1" bandRow="1">
+                <a:tableStyleId>{5C22544A-7EE6-4342-B048-85BDC9FD1C3A}</a:tableStyleId>
+              </a:tblPr>
+              <a:tblGrid>
+                <a:gridCol w="566057">
+                  <a:extLst>
+                    <a:ext uri="{9D8B030D-6E8A-4147-A177-3AD203B41FA5}">
+                      <a16:colId xmlns:a16="http://schemas.microsoft.com/office/drawing/2014/main" val="2639885673"/>
+                    </a:ext>
+                  </a:extLst>
+                </a:gridCol>
+                <a:gridCol w="566057">
+                  <a:extLst>
+                    <a:ext uri="{9D8B030D-6E8A-4147-A177-3AD203B41FA5}">
+                      <a16:colId xmlns:a16="http://schemas.microsoft.com/office/drawing/2014/main" val="2381352306"/>
+                    </a:ext>
+                  </a:extLst>
+                </a:gridCol>
+                <a:gridCol w="566057">
+                  <a:extLst>
+                    <a:ext uri="{9D8B030D-6E8A-4147-A177-3AD203B41FA5}">
+                      <a16:colId xmlns:a16="http://schemas.microsoft.com/office/drawing/2014/main" val="1522115056"/>
+                    </a:ext>
+                  </a:extLst>
+                </a:gridCol>
+                <a:gridCol w="566057">
+                  <a:extLst>
+                    <a:ext uri="{9D8B030D-6E8A-4147-A177-3AD203B41FA5}">
+                      <a16:colId xmlns:a16="http://schemas.microsoft.com/office/drawing/2014/main" val="1404255574"/>
+                    </a:ext>
+                  </a:extLst>
+                </a:gridCol>
+                <a:gridCol w="566057">
+                  <a:extLst>
+                    <a:ext uri="{9D8B030D-6E8A-4147-A177-3AD203B41FA5}">
+                      <a16:colId xmlns:a16="http://schemas.microsoft.com/office/drawing/2014/main" val="781784871"/>
+                    </a:ext>
+                  </a:extLst>
+                </a:gridCol>
+                <a:gridCol w="566057">
+                  <a:extLst>
+                    <a:ext uri="{9D8B030D-6E8A-4147-A177-3AD203B41FA5}">
+                      <a16:colId xmlns:a16="http://schemas.microsoft.com/office/drawing/2014/main" val="2891000188"/>
+                    </a:ext>
+                  </a:extLst>
+                </a:gridCol>
+                <a:gridCol w="566057">
+                  <a:extLst>
+                    <a:ext uri="{9D8B030D-6E8A-4147-A177-3AD203B41FA5}">
+                      <a16:colId xmlns:a16="http://schemas.microsoft.com/office/drawing/2014/main" val="1093830682"/>
+                    </a:ext>
+                  </a:extLst>
+                </a:gridCol>
+              </a:tblGrid>
+              <a:tr h="335235">
+                <a:tc>
+                  <a:txBody>
+                    <a:bodyPr/>
+                    <a:lstStyle/>
+                    <a:p>
+                      <a:r>
+                        <a:rPr lang="en-US" dirty="0"/>
+                        <a:t>0</a:t>
+                      </a:r>
+                    </a:p>
+                  </a:txBody>
+                  <a:tcPr/>
+                </a:tc>
+                <a:tc>
+                  <a:txBody>
+                    <a:bodyPr/>
+                    <a:lstStyle/>
+                    <a:p>
+                      <a:r>
+                        <a:rPr lang="en-US" dirty="0"/>
+                        <a:t>0</a:t>
+                      </a:r>
+                    </a:p>
+                  </a:txBody>
+                  <a:tcPr/>
+                </a:tc>
+                <a:tc>
+                  <a:txBody>
+                    <a:bodyPr/>
+                    <a:lstStyle/>
+                    <a:p>
+                      <a:r>
+                        <a:rPr lang="en-US" dirty="0"/>
+                        <a:t>0</a:t>
+                      </a:r>
+                    </a:p>
+                  </a:txBody>
+                  <a:tcPr/>
+                </a:tc>
+                <a:tc>
+                  <a:txBody>
+                    <a:bodyPr/>
+                    <a:lstStyle/>
+                    <a:p>
+                      <a:r>
+                        <a:rPr lang="en-US" dirty="0"/>
+                        <a:t>0</a:t>
+                      </a:r>
+                    </a:p>
+                  </a:txBody>
+                  <a:tcPr/>
+                </a:tc>
+                <a:tc>
+                  <a:txBody>
+                    <a:bodyPr/>
+                    <a:lstStyle/>
+                    <a:p>
+                      <a:r>
+                        <a:rPr lang="en-US" dirty="0"/>
+                        <a:t>1</a:t>
+                      </a:r>
+                    </a:p>
+                  </a:txBody>
+                  <a:tcPr/>
+                </a:tc>
+                <a:tc>
+                  <a:txBody>
+                    <a:bodyPr/>
+                    <a:lstStyle/>
+                    <a:p>
+                      <a:r>
+                        <a:rPr lang="en-US" dirty="0"/>
+                        <a:t>0</a:t>
+                      </a:r>
+                    </a:p>
+                  </a:txBody>
+                  <a:tcPr/>
+                </a:tc>
+                <a:tc>
+                  <a:txBody>
+                    <a:bodyPr/>
+                    <a:lstStyle/>
+                    <a:p>
+                      <a:r>
+                        <a:rPr lang="en-US" dirty="0"/>
+                        <a:t>0</a:t>
+                      </a:r>
+                    </a:p>
+                  </a:txBody>
+                  <a:tcPr/>
+                </a:tc>
+                <a:extLst>
+                  <a:ext uri="{0D108BD9-81ED-4DB2-BD59-A6C34878D82A}">
+                    <a16:rowId xmlns:a16="http://schemas.microsoft.com/office/drawing/2014/main" val="2809932297"/>
+                  </a:ext>
+                </a:extLst>
+              </a:tr>
+              <a:tr h="335235">
+                <a:tc>
+                  <a:txBody>
+                    <a:bodyPr/>
+                    <a:lstStyle/>
+                    <a:p>
+                      <a:r>
+                        <a:rPr lang="en-US" dirty="0"/>
+                        <a:t>0</a:t>
+                      </a:r>
+                    </a:p>
+                  </a:txBody>
+                  <a:tcPr/>
+                </a:tc>
+                <a:tc>
+                  <a:txBody>
+                    <a:bodyPr/>
+                    <a:lstStyle/>
+                    <a:p>
+                      <a:r>
+                        <a:rPr lang="en-US" dirty="0"/>
+                        <a:t>0</a:t>
+                      </a:r>
+                    </a:p>
+                  </a:txBody>
+                  <a:tcPr/>
+                </a:tc>
+                <a:tc>
+                  <a:txBody>
+                    <a:bodyPr/>
+                    <a:lstStyle/>
+                    <a:p>
+                      <a:r>
+                        <a:rPr lang="en-US" dirty="0"/>
+                        <a:t>0</a:t>
+                      </a:r>
+                    </a:p>
+                  </a:txBody>
+                  <a:tcPr/>
+                </a:tc>
+                <a:tc>
+                  <a:txBody>
+                    <a:bodyPr/>
+                    <a:lstStyle/>
+                    <a:p>
+                      <a:r>
+                        <a:rPr lang="en-US" dirty="0"/>
+                        <a:t>0</a:t>
+                      </a:r>
+                    </a:p>
+                  </a:txBody>
+                  <a:tcPr/>
+                </a:tc>
+                <a:tc>
+                  <a:txBody>
+                    <a:bodyPr/>
+                    <a:lstStyle/>
+                    <a:p>
+                      <a:r>
+                        <a:rPr lang="en-US" dirty="0"/>
+                        <a:t>0</a:t>
+                      </a:r>
+                    </a:p>
+                  </a:txBody>
+                  <a:tcPr/>
+                </a:tc>
+                <a:tc>
+                  <a:txBody>
+                    <a:bodyPr/>
+                    <a:lstStyle/>
+                    <a:p>
+                      <a:r>
+                        <a:rPr lang="en-US" dirty="0"/>
+                        <a:t>0</a:t>
+                      </a:r>
+                    </a:p>
+                  </a:txBody>
+                  <a:tcPr/>
+                </a:tc>
+                <a:tc>
+                  <a:txBody>
+                    <a:bodyPr/>
+                    <a:lstStyle/>
+                    <a:p>
+                      <a:r>
+                        <a:rPr lang="en-US" dirty="0"/>
+                        <a:t>0</a:t>
+                      </a:r>
+                    </a:p>
+                  </a:txBody>
+                  <a:tcPr/>
+                </a:tc>
+                <a:extLst>
+                  <a:ext uri="{0D108BD9-81ED-4DB2-BD59-A6C34878D82A}">
+                    <a16:rowId xmlns:a16="http://schemas.microsoft.com/office/drawing/2014/main" val="3621095699"/>
+                  </a:ext>
+                </a:extLst>
+              </a:tr>
+              <a:tr h="335235">
+                <a:tc>
+                  <a:txBody>
+                    <a:bodyPr/>
+                    <a:lstStyle/>
+                    <a:p>
+                      <a:r>
+                        <a:rPr lang="en-US" dirty="0"/>
+                        <a:t>1</a:t>
+                      </a:r>
+                    </a:p>
+                  </a:txBody>
+                  <a:tcPr/>
+                </a:tc>
+                <a:tc>
+                  <a:txBody>
+                    <a:bodyPr/>
+                    <a:lstStyle/>
+                    <a:p>
+                      <a:r>
+                        <a:rPr lang="en-US" dirty="0"/>
+                        <a:t>1</a:t>
+                      </a:r>
+                    </a:p>
+                  </a:txBody>
+                  <a:tcPr/>
+                </a:tc>
+                <a:tc>
+                  <a:txBody>
+                    <a:bodyPr/>
+                    <a:lstStyle/>
+                    <a:p>
+                      <a:r>
+                        <a:rPr lang="en-US" dirty="0"/>
+                        <a:t>0</a:t>
+                      </a:r>
+                    </a:p>
+                  </a:txBody>
+                  <a:tcPr/>
+                </a:tc>
+                <a:tc>
+                  <a:txBody>
+                    <a:bodyPr/>
+                    <a:lstStyle/>
+                    <a:p>
+                      <a:r>
+                        <a:rPr lang="en-US" dirty="0"/>
+                        <a:t>1</a:t>
+                      </a:r>
+                    </a:p>
+                  </a:txBody>
+                  <a:tcPr/>
+                </a:tc>
+                <a:tc>
+                  <a:txBody>
+                    <a:bodyPr/>
+                    <a:lstStyle/>
+                    <a:p>
+                      <a:r>
+                        <a:rPr lang="en-US" dirty="0"/>
+                        <a:t>0</a:t>
+                      </a:r>
+                    </a:p>
+                  </a:txBody>
+                  <a:tcPr/>
+                </a:tc>
+                <a:tc>
+                  <a:txBody>
+                    <a:bodyPr/>
+                    <a:lstStyle/>
+                    <a:p>
+                      <a:r>
+                        <a:rPr lang="en-US" dirty="0"/>
+                        <a:t>1</a:t>
+                      </a:r>
+                    </a:p>
+                  </a:txBody>
+                  <a:tcPr/>
+                </a:tc>
+                <a:tc>
+                  <a:txBody>
+                    <a:bodyPr/>
+                    <a:lstStyle/>
+                    <a:p>
+                      <a:r>
+                        <a:rPr lang="en-US" dirty="0"/>
+                        <a:t>0</a:t>
+                      </a:r>
+                    </a:p>
+                  </a:txBody>
+                  <a:tcPr/>
+                </a:tc>
+                <a:extLst>
+                  <a:ext uri="{0D108BD9-81ED-4DB2-BD59-A6C34878D82A}">
+                    <a16:rowId xmlns:a16="http://schemas.microsoft.com/office/drawing/2014/main" val="3791626340"/>
+                  </a:ext>
+                </a:extLst>
+              </a:tr>
+              <a:tr h="335235">
+                <a:tc>
+                  <a:txBody>
+                    <a:bodyPr/>
+                    <a:lstStyle/>
+                    <a:p>
+                      <a:r>
+                        <a:rPr lang="en-US" dirty="0"/>
+                        <a:t>0</a:t>
+                      </a:r>
+                    </a:p>
+                  </a:txBody>
+                  <a:tcPr/>
+                </a:tc>
+                <a:tc>
+                  <a:txBody>
+                    <a:bodyPr/>
+                    <a:lstStyle/>
+                    <a:p>
+                      <a:r>
+                        <a:rPr lang="en-US" dirty="0"/>
+                        <a:t>0</a:t>
+                      </a:r>
+                    </a:p>
+                  </a:txBody>
+                  <a:tcPr/>
+                </a:tc>
+                <a:tc>
+                  <a:txBody>
+                    <a:bodyPr/>
+                    <a:lstStyle/>
+                    <a:p>
+                      <a:r>
+                        <a:rPr lang="en-US" dirty="0"/>
+                        <a:t>0</a:t>
+                      </a:r>
+                    </a:p>
+                  </a:txBody>
+                  <a:tcPr/>
+                </a:tc>
+                <a:tc>
+                  <a:txBody>
+                    <a:bodyPr/>
+                    <a:lstStyle/>
+                    <a:p>
+                      <a:r>
+                        <a:rPr lang="en-US" dirty="0"/>
+                        <a:t>0</a:t>
+                      </a:r>
+                    </a:p>
+                  </a:txBody>
+                  <a:tcPr/>
+                </a:tc>
+                <a:tc>
+                  <a:txBody>
+                    <a:bodyPr/>
+                    <a:lstStyle/>
+                    <a:p>
+                      <a:r>
+                        <a:rPr lang="en-US" dirty="0"/>
+                        <a:t>0</a:t>
+                      </a:r>
+                    </a:p>
+                  </a:txBody>
+                  <a:tcPr/>
+                </a:tc>
+                <a:tc>
+                  <a:txBody>
+                    <a:bodyPr/>
+                    <a:lstStyle/>
+                    <a:p>
+                      <a:r>
+                        <a:rPr lang="en-US" dirty="0"/>
+                        <a:t>0</a:t>
+                      </a:r>
+                    </a:p>
+                  </a:txBody>
+                  <a:tcPr/>
+                </a:tc>
+                <a:tc>
+                  <a:txBody>
+                    <a:bodyPr/>
+                    <a:lstStyle/>
+                    <a:p>
+                      <a:r>
+                        <a:rPr lang="en-US" dirty="0"/>
+                        <a:t>0</a:t>
+                      </a:r>
+                    </a:p>
+                  </a:txBody>
+                  <a:tcPr/>
+                </a:tc>
+                <a:extLst>
+                  <a:ext uri="{0D108BD9-81ED-4DB2-BD59-A6C34878D82A}">
+                    <a16:rowId xmlns:a16="http://schemas.microsoft.com/office/drawing/2014/main" val="3641211046"/>
+                  </a:ext>
+                </a:extLst>
+              </a:tr>
+              <a:tr h="335235">
+                <a:tc>
+                  <a:txBody>
+                    <a:bodyPr/>
+                    <a:lstStyle/>
+                    <a:p>
+                      <a:r>
+                        <a:rPr lang="en-US" dirty="0"/>
+                        <a:t>0</a:t>
+                      </a:r>
+                    </a:p>
+                  </a:txBody>
+                  <a:tcPr/>
+                </a:tc>
+                <a:tc>
+                  <a:txBody>
+                    <a:bodyPr/>
+                    <a:lstStyle/>
+                    <a:p>
+                      <a:r>
+                        <a:rPr lang="en-US" dirty="0"/>
+                        <a:t>0</a:t>
+                      </a:r>
+                    </a:p>
+                  </a:txBody>
+                  <a:tcPr/>
+                </a:tc>
+                <a:tc>
+                  <a:txBody>
+                    <a:bodyPr/>
+                    <a:lstStyle/>
+                    <a:p>
+                      <a:r>
+                        <a:rPr lang="en-US" dirty="0"/>
+                        <a:t>0</a:t>
+                      </a:r>
+                    </a:p>
+                  </a:txBody>
+                  <a:tcPr/>
+                </a:tc>
+                <a:tc>
+                  <a:txBody>
+                    <a:bodyPr/>
+                    <a:lstStyle/>
+                    <a:p>
+                      <a:r>
+                        <a:rPr lang="en-US" dirty="0"/>
+                        <a:t>0</a:t>
+                      </a:r>
+                    </a:p>
+                  </a:txBody>
+                  <a:tcPr/>
+                </a:tc>
+                <a:tc>
+                  <a:txBody>
+                    <a:bodyPr/>
+                    <a:lstStyle/>
+                    <a:p>
+                      <a:r>
+                        <a:rPr lang="en-US" dirty="0"/>
+                        <a:t>0</a:t>
+                      </a:r>
+                    </a:p>
+                  </a:txBody>
+                  <a:tcPr/>
+                </a:tc>
+                <a:tc>
+                  <a:txBody>
+                    <a:bodyPr/>
+                    <a:lstStyle/>
+                    <a:p>
+                      <a:r>
+                        <a:rPr lang="en-US" dirty="0"/>
+                        <a:t>0</a:t>
+                      </a:r>
+                    </a:p>
+                  </a:txBody>
+                  <a:tcPr/>
+                </a:tc>
+                <a:tc>
+                  <a:txBody>
+                    <a:bodyPr/>
+                    <a:lstStyle/>
+                    <a:p>
+                      <a:r>
+                        <a:rPr lang="en-US" dirty="0"/>
+                        <a:t>0</a:t>
+                      </a:r>
+                    </a:p>
+                  </a:txBody>
+                  <a:tcPr/>
+                </a:tc>
+                <a:extLst>
+                  <a:ext uri="{0D108BD9-81ED-4DB2-BD59-A6C34878D82A}">
+                    <a16:rowId xmlns:a16="http://schemas.microsoft.com/office/drawing/2014/main" val="1153379906"/>
+                  </a:ext>
+                </a:extLst>
+              </a:tr>
+              <a:tr h="335235">
+                <a:tc>
+                  <a:txBody>
+                    <a:bodyPr/>
+                    <a:lstStyle/>
+                    <a:p>
+                      <a:r>
+                        <a:rPr lang="en-US" dirty="0"/>
+                        <a:t>0</a:t>
+                      </a:r>
+                    </a:p>
+                  </a:txBody>
+                  <a:tcPr/>
+                </a:tc>
+                <a:tc>
+                  <a:txBody>
+                    <a:bodyPr/>
+                    <a:lstStyle/>
+                    <a:p>
+                      <a:r>
+                        <a:rPr lang="en-US" dirty="0"/>
+                        <a:t>0</a:t>
+                      </a:r>
+                    </a:p>
+                  </a:txBody>
+                  <a:tcPr/>
+                </a:tc>
+                <a:tc>
+                  <a:txBody>
+                    <a:bodyPr/>
+                    <a:lstStyle/>
+                    <a:p>
+                      <a:r>
+                        <a:rPr lang="en-US" dirty="0"/>
+                        <a:t>1</a:t>
+                      </a:r>
+                    </a:p>
+                  </a:txBody>
+                  <a:tcPr/>
+                </a:tc>
+                <a:tc>
+                  <a:txBody>
+                    <a:bodyPr/>
+                    <a:lstStyle/>
+                    <a:p>
+                      <a:r>
+                        <a:rPr lang="en-US" dirty="0"/>
+                        <a:t>0</a:t>
+                      </a:r>
+                    </a:p>
+                  </a:txBody>
+                  <a:tcPr/>
+                </a:tc>
+                <a:tc>
+                  <a:txBody>
+                    <a:bodyPr/>
+                    <a:lstStyle/>
+                    <a:p>
+                      <a:r>
+                        <a:rPr lang="en-US" dirty="0"/>
+                        <a:t>0</a:t>
+                      </a:r>
+                    </a:p>
+                  </a:txBody>
+                  <a:tcPr/>
+                </a:tc>
+                <a:tc>
+                  <a:txBody>
+                    <a:bodyPr/>
+                    <a:lstStyle/>
+                    <a:p>
+                      <a:r>
+                        <a:rPr lang="en-US" dirty="0"/>
+                        <a:t>0</a:t>
+                      </a:r>
+                    </a:p>
+                  </a:txBody>
+                  <a:tcPr/>
+                </a:tc>
+                <a:tc>
+                  <a:txBody>
+                    <a:bodyPr/>
+                    <a:lstStyle/>
+                    <a:p>
+                      <a:r>
+                        <a:rPr lang="en-US" dirty="0"/>
+                        <a:t>1</a:t>
+                      </a:r>
+                    </a:p>
+                  </a:txBody>
+                  <a:tcPr/>
+                </a:tc>
+                <a:extLst>
+                  <a:ext uri="{0D108BD9-81ED-4DB2-BD59-A6C34878D82A}">
+                    <a16:rowId xmlns:a16="http://schemas.microsoft.com/office/drawing/2014/main" val="1635559399"/>
+                  </a:ext>
+                </a:extLst>
+              </a:tr>
+              <a:tr h="335235">
+                <a:tc>
+                  <a:txBody>
+                    <a:bodyPr/>
+                    <a:lstStyle/>
+                    <a:p>
+                      <a:r>
+                        <a:rPr lang="en-US" dirty="0"/>
+                        <a:t>1</a:t>
+                      </a:r>
+                    </a:p>
+                  </a:txBody>
+                  <a:tcPr/>
+                </a:tc>
+                <a:tc>
+                  <a:txBody>
+                    <a:bodyPr/>
+                    <a:lstStyle/>
+                    <a:p>
+                      <a:r>
+                        <a:rPr lang="en-US" dirty="0"/>
+                        <a:t>1</a:t>
+                      </a:r>
+                    </a:p>
+                  </a:txBody>
+                  <a:tcPr/>
+                </a:tc>
+                <a:tc>
+                  <a:txBody>
+                    <a:bodyPr/>
+                    <a:lstStyle/>
+                    <a:p>
+                      <a:r>
+                        <a:rPr lang="en-US" dirty="0"/>
+                        <a:t>0</a:t>
+                      </a:r>
+                    </a:p>
+                  </a:txBody>
+                  <a:tcPr/>
+                </a:tc>
+                <a:tc>
+                  <a:txBody>
+                    <a:bodyPr/>
+                    <a:lstStyle/>
+                    <a:p>
+                      <a:r>
+                        <a:rPr lang="en-US" dirty="0"/>
+                        <a:t>0</a:t>
+                      </a:r>
+                    </a:p>
+                  </a:txBody>
+                  <a:tcPr/>
+                </a:tc>
+                <a:tc>
+                  <a:txBody>
+                    <a:bodyPr/>
+                    <a:lstStyle/>
+                    <a:p>
+                      <a:r>
+                        <a:rPr lang="en-US" dirty="0"/>
+                        <a:t>0</a:t>
+                      </a:r>
+                    </a:p>
+                  </a:txBody>
+                  <a:tcPr/>
+                </a:tc>
+                <a:tc>
+                  <a:txBody>
+                    <a:bodyPr/>
+                    <a:lstStyle/>
+                    <a:p>
+                      <a:r>
+                        <a:rPr lang="en-US" dirty="0"/>
+                        <a:t>0</a:t>
+                      </a:r>
+                    </a:p>
+                  </a:txBody>
+                  <a:tcPr/>
+                </a:tc>
+                <a:tc>
+                  <a:txBody>
+                    <a:bodyPr/>
+                    <a:lstStyle/>
+                    <a:p>
+                      <a:r>
+                        <a:rPr lang="en-US" dirty="0"/>
+                        <a:t>0</a:t>
+                      </a:r>
+                    </a:p>
+                  </a:txBody>
+                  <a:tcPr/>
+                </a:tc>
+                <a:extLst>
+                  <a:ext uri="{0D108BD9-81ED-4DB2-BD59-A6C34878D82A}">
+                    <a16:rowId xmlns:a16="http://schemas.microsoft.com/office/drawing/2014/main" val="561391955"/>
+                  </a:ext>
+                </a:extLst>
+              </a:tr>
+            </a:tbl>
+          </a:graphicData>
+        </a:graphic>
+      </p:graphicFrame>
+      <p:sp>
+        <p:nvSpPr>
+          <p:cNvPr id="5" name="TextBox 4">
+            <a:extLst>
+              <a:ext uri="{FF2B5EF4-FFF2-40B4-BE49-F238E27FC236}">
+                <a16:creationId xmlns:a16="http://schemas.microsoft.com/office/drawing/2014/main" id="{88C43330-FF0C-297F-CECA-AE1112781F12}"/>
+              </a:ext>
+            </a:extLst>
+          </p:cNvPr>
+          <p:cNvSpPr txBox="1"/>
+          <p:nvPr/>
+        </p:nvSpPr>
+        <p:spPr>
+          <a:xfrm>
+            <a:off x="2438399" y="1276013"/>
+            <a:ext cx="3961854" cy="461665"/>
+          </a:xfrm>
+          <a:prstGeom prst="rect">
+            <a:avLst/>
+          </a:prstGeom>
+          <a:noFill/>
+        </p:spPr>
+        <p:txBody>
+          <a:bodyPr wrap="none" rtlCol="0">
+            <a:spAutoFit/>
+          </a:bodyPr>
+          <a:lstStyle/>
+          <a:p>
+            <a:r>
+              <a:rPr lang="en-US" dirty="0"/>
+              <a:t>AK  CA  HI  NY  OR  TX  VT</a:t>
+            </a:r>
+          </a:p>
+        </p:txBody>
+      </p:sp>
+      <p:sp>
+        <p:nvSpPr>
+          <p:cNvPr id="6" name="TextBox 5">
+            <a:extLst>
+              <a:ext uri="{FF2B5EF4-FFF2-40B4-BE49-F238E27FC236}">
+                <a16:creationId xmlns:a16="http://schemas.microsoft.com/office/drawing/2014/main" id="{3B1DB96C-F75A-2F0A-A50B-38F0E6538CA9}"/>
+              </a:ext>
+            </a:extLst>
+          </p:cNvPr>
+          <p:cNvSpPr txBox="1"/>
+          <p:nvPr/>
+        </p:nvSpPr>
+        <p:spPr>
+          <a:xfrm>
+            <a:off x="1442974" y="1633290"/>
+            <a:ext cx="630301" cy="2677656"/>
+          </a:xfrm>
+          <a:prstGeom prst="rect">
+            <a:avLst/>
+          </a:prstGeom>
+          <a:noFill/>
+        </p:spPr>
+        <p:txBody>
+          <a:bodyPr wrap="none" rtlCol="0">
+            <a:spAutoFit/>
+          </a:bodyPr>
+          <a:lstStyle/>
+          <a:p>
+            <a:r>
+              <a:rPr lang="en-US" dirty="0"/>
+              <a:t>AK</a:t>
+            </a:r>
+          </a:p>
+          <a:p>
+            <a:r>
+              <a:rPr lang="en-US" dirty="0"/>
+              <a:t>CA</a:t>
+            </a:r>
+          </a:p>
+          <a:p>
+            <a:r>
+              <a:rPr lang="en-US" dirty="0"/>
+              <a:t>HI</a:t>
+            </a:r>
+          </a:p>
+          <a:p>
+            <a:r>
+              <a:rPr lang="en-US" dirty="0"/>
+              <a:t>NY</a:t>
+            </a:r>
+          </a:p>
+          <a:p>
+            <a:r>
+              <a:rPr lang="en-US" dirty="0"/>
+              <a:t>OR</a:t>
+            </a:r>
+          </a:p>
+          <a:p>
+            <a:r>
+              <a:rPr lang="en-US" dirty="0"/>
+              <a:t>TX</a:t>
+            </a:r>
+          </a:p>
+          <a:p>
+            <a:r>
+              <a:rPr lang="en-US" dirty="0"/>
+              <a:t>VT</a:t>
+            </a:r>
+          </a:p>
+        </p:txBody>
+      </p:sp>
+      <p:sp>
+        <p:nvSpPr>
+          <p:cNvPr id="11" name="TextBox 10">
+            <a:extLst>
+              <a:ext uri="{FF2B5EF4-FFF2-40B4-BE49-F238E27FC236}">
+                <a16:creationId xmlns:a16="http://schemas.microsoft.com/office/drawing/2014/main" id="{24D4BE4E-99D3-8F0A-F38A-18C99B801D0E}"/>
+              </a:ext>
+            </a:extLst>
+          </p:cNvPr>
+          <p:cNvSpPr txBox="1"/>
+          <p:nvPr/>
+        </p:nvSpPr>
+        <p:spPr>
+          <a:xfrm>
+            <a:off x="1524000" y="6477000"/>
+            <a:ext cx="184731" cy="461665"/>
+          </a:xfrm>
+          <a:prstGeom prst="rect">
+            <a:avLst/>
+          </a:prstGeom>
+          <a:noFill/>
+        </p:spPr>
+        <p:txBody>
+          <a:bodyPr wrap="square" rtlCol="0">
+            <a:spAutoFit/>
+          </a:bodyPr>
+          <a:lstStyle/>
+          <a:p>
+            <a:endParaRPr lang="en-US" dirty="0"/>
+          </a:p>
+        </p:txBody>
+      </p:sp>
+      <p:sp>
+        <p:nvSpPr>
+          <p:cNvPr id="16" name="TextBox 15">
+            <a:extLst>
+              <a:ext uri="{FF2B5EF4-FFF2-40B4-BE49-F238E27FC236}">
+                <a16:creationId xmlns:a16="http://schemas.microsoft.com/office/drawing/2014/main" id="{F09D6D71-5DB7-0A5B-F803-369CBD2355CD}"/>
+              </a:ext>
+            </a:extLst>
+          </p:cNvPr>
+          <p:cNvSpPr txBox="1"/>
+          <p:nvPr/>
+        </p:nvSpPr>
+        <p:spPr>
+          <a:xfrm>
+            <a:off x="288925" y="6091932"/>
+            <a:ext cx="6605206" cy="3046988"/>
+          </a:xfrm>
+          <a:prstGeom prst="rect">
+            <a:avLst/>
+          </a:prstGeom>
+          <a:noFill/>
+        </p:spPr>
+        <p:txBody>
+          <a:bodyPr wrap="none" rtlCol="0">
+            <a:spAutoFit/>
+          </a:bodyPr>
+          <a:lstStyle/>
+          <a:p>
+            <a:r>
+              <a:rPr lang="en-US" dirty="0"/>
+              <a:t>Alaska 	| Oregon</a:t>
+            </a:r>
+          </a:p>
+          <a:p>
+            <a:r>
+              <a:rPr lang="en-US" dirty="0"/>
+              <a:t>California 	| [No neighbors]</a:t>
+            </a:r>
+          </a:p>
+          <a:p>
+            <a:r>
+              <a:rPr lang="en-US" dirty="0"/>
+              <a:t>Hawaii 	| Alaska, Texas, California, </a:t>
+            </a:r>
+            <a:r>
+              <a:rPr lang="en-US" dirty="0" err="1"/>
+              <a:t>NewYork</a:t>
+            </a:r>
+            <a:endParaRPr lang="en-US" dirty="0"/>
+          </a:p>
+          <a:p>
+            <a:r>
+              <a:rPr lang="en-US" dirty="0" err="1"/>
+              <a:t>NewYork</a:t>
+            </a:r>
+            <a:r>
+              <a:rPr lang="en-US" dirty="0"/>
+              <a:t> 	| [No neighbors]</a:t>
+            </a:r>
+          </a:p>
+          <a:p>
+            <a:r>
+              <a:rPr lang="en-US" dirty="0"/>
+              <a:t>Oregon 	| [No neighbors]</a:t>
+            </a:r>
+          </a:p>
+          <a:p>
+            <a:r>
+              <a:rPr lang="en-US" dirty="0"/>
+              <a:t>Texas 		| Hawaii, Vermont</a:t>
+            </a:r>
+          </a:p>
+          <a:p>
+            <a:r>
+              <a:rPr lang="en-US" dirty="0"/>
+              <a:t>Vermont 	| California, Alaska</a:t>
+            </a:r>
+          </a:p>
+          <a:p>
+            <a:endParaRPr lang="en-US" dirty="0"/>
+          </a:p>
+        </p:txBody>
+      </p:sp>
     </p:spTree>
   </p:cSld>
   <p:clrMapOvr>
@@ -6442,9 +7287,19 @@
               <a:buFontTx/>
               <a:buNone/>
             </a:pPr>
+            <a:endParaRPr lang="en-US" altLang="en-US" sz="1200" dirty="0"/>
+          </a:p>
+          <a:p>
+            <a:pPr>
+              <a:spcBef>
+                <a:spcPct val="0"/>
+              </a:spcBef>
+              <a:buFontTx/>
+              <a:buNone/>
+            </a:pPr>
             <a:r>
               <a:rPr lang="en-US" altLang="en-US" sz="1200" dirty="0"/>
-              <a:t>When there is a choice between options, I do alphabetical order, </a:t>
+              <a:t>ANSWER: C</a:t>
             </a:r>
           </a:p>
           <a:p>
@@ -6457,7 +7312,7 @@
             </a:pPr>
             <a:r>
               <a:rPr lang="en-US" altLang="en-US" sz="1200" dirty="0"/>
-              <a:t>but that leads to none of the options, so I’ll do reverse alphabetical order to get option A</a:t>
+              <a:t>(I’m not sure what order was chosen when there were multiple options, </a:t>
             </a:r>
           </a:p>
           <a:p>
@@ -6468,19 +7323,9 @@
               <a:buFontTx/>
               <a:buNone/>
             </a:pPr>
-            <a:endParaRPr lang="en-US" altLang="en-US" sz="1200" dirty="0"/>
-          </a:p>
-          <a:p>
-            <a:pPr>
-              <a:spcBef>
-                <a:spcPct val="0"/>
-              </a:spcBef>
-              <a:buFontTx/>
-              <a:buNone/>
-            </a:pPr>
             <a:r>
               <a:rPr lang="en-US" altLang="en-US" sz="1200" dirty="0"/>
-              <a:t>ANSWER: A</a:t>
+              <a:t>but the other answers are not possible as they backtrack instead of focusing on depth first</a:t>
             </a:r>
           </a:p>
         </p:txBody>
@@ -6502,7 +7347,7 @@
         <p:spPr bwMode="auto">
           <a:xfrm>
             <a:off x="228600" y="5876206"/>
-            <a:ext cx="5715000" cy="1938992"/>
+            <a:ext cx="5715000" cy="2123658"/>
           </a:xfrm>
           <a:prstGeom prst="rect">
             <a:avLst/>
@@ -6721,6 +7566,16 @@
               <a:rPr lang="en-US" altLang="en-US" sz="1200" dirty="0"/>
               <a:t>	D)  a, b, and c are all breadth first traversals </a:t>
             </a:r>
+          </a:p>
+          <a:p>
+            <a:pPr>
+              <a:spcBef>
+                <a:spcPct val="0"/>
+              </a:spcBef>
+              <a:buFontTx/>
+              <a:buNone/>
+            </a:pPr>
+            <a:endParaRPr lang="en-US" altLang="en-US" sz="1200" dirty="0"/>
           </a:p>
           <a:p>
             <a:pPr>
@@ -6888,7 +7743,7 @@
         <p:spPr bwMode="auto">
           <a:xfrm>
             <a:off x="609600" y="3962400"/>
-            <a:ext cx="3978525" cy="646331"/>
+            <a:ext cx="4159472" cy="2197525"/>
           </a:xfrm>
           <a:prstGeom prst="rect">
             <a:avLst/>
@@ -7065,12 +7920,71 @@
             </a:r>
           </a:p>
           <a:p>
-            <a:pPr marL="228600" indent="-228600">
-              <a:spcBef>
-                <a:spcPct val="0"/>
-              </a:spcBef>
-              <a:buFontTx/>
-              <a:buAutoNum type="arabicPeriod" startAt="5"/>
+            <a:pPr>
+              <a:buNone/>
+            </a:pPr>
+            <a:endParaRPr lang="en-US" sz="1200" dirty="0"/>
+          </a:p>
+          <a:p>
+            <a:pPr>
+              <a:buNone/>
+            </a:pPr>
+            <a:r>
+              <a:rPr lang="en-US" sz="1200" dirty="0"/>
+              <a:t>To Austin (2100): Atlanta -&gt; Washington -&gt; Dallas -&gt; Austin</a:t>
+            </a:r>
+          </a:p>
+          <a:p>
+            <a:pPr>
+              <a:buNone/>
+            </a:pPr>
+            <a:r>
+              <a:rPr lang="en-US" sz="1200" dirty="0"/>
+              <a:t>To Chicago (2800): Atlanta -&gt; Washington -&gt; Dallas -&gt; Chicago</a:t>
+            </a:r>
+          </a:p>
+          <a:p>
+            <a:pPr>
+              <a:buNone/>
+            </a:pPr>
+            <a:r>
+              <a:rPr lang="en-US" sz="1200" dirty="0"/>
+              <a:t>To Dallas (1900): Atlanta -&gt; Washington -&gt; Dallas</a:t>
+            </a:r>
+          </a:p>
+          <a:p>
+            <a:pPr>
+              <a:buNone/>
+            </a:pPr>
+            <a:r>
+              <a:rPr lang="en-US" sz="1200" dirty="0"/>
+              <a:t>To Denver (2680): Atlanta -&gt; Washington -&gt; Dallas -&gt; Denver</a:t>
+            </a:r>
+          </a:p>
+          <a:p>
+            <a:pPr>
+              <a:buNone/>
+            </a:pPr>
+            <a:r>
+              <a:rPr lang="en-US" sz="1200" dirty="0"/>
+              <a:t>To Houston (800): Atlanta -&gt; Houston</a:t>
+            </a:r>
+          </a:p>
+          <a:p>
+            <a:pPr>
+              <a:buNone/>
+            </a:pPr>
+            <a:r>
+              <a:rPr lang="en-US" sz="1200" dirty="0"/>
+              <a:t>To Washington (600): Atlanta -&gt; Washington</a:t>
+            </a:r>
+          </a:p>
+          <a:p>
+            <a:pPr>
+              <a:spcBef>
+                <a:spcPct val="0"/>
+              </a:spcBef>
+              <a:buNone/>
             </a:pPr>
             <a:endParaRPr lang="en-US" altLang="en-US" sz="1200" dirty="0"/>
           </a:p>

--- a/AssignmentRelatedDocuments/WhatWasSubmitted/Graph Lab.pptx
+++ b/AssignmentRelatedDocuments/WhatWasSubmitted/Graph Lab.pptx
@@ -1,6 +1,6 @@
 
 <file path=ppt/presentation.xml><?xml version="1.0" encoding="utf-8"?>
-<p:presentation xmlns:a="http://schemas.openxmlformats.org/drawingml/2006/main" xmlns:r="http://schemas.openxmlformats.org/officeDocument/2006/relationships" xmlns:p="http://schemas.openxmlformats.org/presentationml/2006/main" strictFirstAndLastChars="0" saveSubsetFonts="1">
+<p:presentation xmlns:a="http://schemas.openxmlformats.org/drawingml/2006/main" xmlns:r="http://schemas.openxmlformats.org/officeDocument/2006/relationships" xmlns:p="http://schemas.openxmlformats.org/presentationml/2006/main" serverZoom="19591" strictFirstAndLastChars="0" saveSubsetFonts="1">
   <p:sldMasterIdLst>
     <p:sldMasterId id="2147483648" r:id="rId1"/>
   </p:sldMasterIdLst>
@@ -13,7 +13,9 @@
     <p:sldId id="262" r:id="rId7"/>
     <p:sldId id="263" r:id="rId8"/>
     <p:sldId id="264" r:id="rId9"/>
-    <p:sldId id="265" r:id="rId10"/>
+    <p:sldId id="266" r:id="rId10"/>
+    <p:sldId id="267" r:id="rId11"/>
+    <p:sldId id="265" r:id="rId12"/>
   </p:sldIdLst>
   <p:sldSz cx="6858000" cy="9144000" type="screen4x3"/>
   <p:notesSz cx="6858000" cy="9296400"/>
@@ -159,6 +161,1376 @@
     </p:ext>
   </p:extLst>
 </p:presentation>
+</file>
+
+<file path=ppt/ink/ink1.xml><?xml version="1.0" encoding="utf-8"?>
+<inkml:ink xmlns:inkml="http://www.w3.org/2003/InkML">
+  <inkml:definitions>
+    <inkml:context xml:id="ctx0">
+      <inkml:inkSource xml:id="inkSrc0">
+        <inkml:traceFormat>
+          <inkml:channel name="X" type="integer" min="-2.14748E9" max="2.14748E9" units="cm"/>
+          <inkml:channel name="Y" type="integer" min="-2.14748E9" max="2.14748E9" units="cm"/>
+          <inkml:channel name="F" type="integer" max="32767" units="dev"/>
+        </inkml:traceFormat>
+        <inkml:channelProperties>
+          <inkml:channelProperty channel="X" name="resolution" value="1000" units="1/cm"/>
+          <inkml:channelProperty channel="Y" name="resolution" value="1000" units="1/cm"/>
+          <inkml:channelProperty channel="F" name="resolution" value="0" units="1/dev"/>
+        </inkml:channelProperties>
+      </inkml:inkSource>
+      <inkml:timestamp xml:id="ts0" timeString="2026-04-26T03:50:38.928"/>
+    </inkml:context>
+    <inkml:brush xml:id="br0">
+      <inkml:brushProperty name="width" value="0.035" units="cm"/>
+      <inkml:brushProperty name="height" value="0.035" units="cm"/>
+      <inkml:brushProperty name="color" value="#E71224"/>
+    </inkml:brush>
+  </inkml:definitions>
+  <inkml:trace contextRef="#ctx0" brushRef="#br0">23 1 24575,'0'3060'0,"-2"-3031"0,-7 47 0,4-47 0,-2 44 0,8 119-1365,-1-173-5461</inkml:trace>
+</inkml:ink>
+</file>
+
+<file path=ppt/ink/ink10.xml><?xml version="1.0" encoding="utf-8"?>
+<inkml:ink xmlns:inkml="http://www.w3.org/2003/InkML">
+  <inkml:definitions>
+    <inkml:context xml:id="ctx0">
+      <inkml:inkSource xml:id="inkSrc0">
+        <inkml:traceFormat>
+          <inkml:channel name="X" type="integer" min="-2.14748E9" max="2.14748E9" units="cm"/>
+          <inkml:channel name="Y" type="integer" min="-2.14748E9" max="2.14748E9" units="cm"/>
+          <inkml:channel name="F" type="integer" max="32767" units="dev"/>
+        </inkml:traceFormat>
+        <inkml:channelProperties>
+          <inkml:channelProperty channel="X" name="resolution" value="1000" units="1/cm"/>
+          <inkml:channelProperty channel="Y" name="resolution" value="1000" units="1/cm"/>
+          <inkml:channelProperty channel="F" name="resolution" value="0" units="1/dev"/>
+        </inkml:channelProperties>
+      </inkml:inkSource>
+      <inkml:timestamp xml:id="ts0" timeString="2026-04-26T04:02:59.921"/>
+    </inkml:context>
+    <inkml:brush xml:id="br0">
+      <inkml:brushProperty name="width" value="0.035" units="cm"/>
+      <inkml:brushProperty name="height" value="0.035" units="cm"/>
+      <inkml:brushProperty name="color" value="#E71224"/>
+    </inkml:brush>
+  </inkml:definitions>
+  <inkml:trace contextRef="#ctx0" brushRef="#br0">0 1418 24575,'35'1'0,"0"-2"0,0-2 0,-1-1 0,1-2 0,-1-1 0,53-19 0,-35 7 0,-30 12 0,1 0 0,-1-2 0,-1-1 0,1-1 0,-2-1 0,30-21 0,-37 22 0,13-13 0,2 2 0,56-36 0,36-14 0,66-34 0,-138 80 0,60-41 0,-71 42 0,1 1 0,76-34 0,-76 40 0,-1-1 0,-1-2 0,51-38 0,-52 35 0,56-30 0,-68 42 0,-1 0 0,-1-1 0,0-1 0,35-32 0,-42 31 0,2 1 0,0 0 0,0 1 0,22-13 0,0 0 0,-2-1 0,-1-2 0,-1-1 0,30-37 0,-22 25 0,-5 8-168,2 3-1,80-52 1,-87 63-692,-21 12-5966</inkml:trace>
+</inkml:ink>
+</file>
+
+<file path=ppt/ink/ink11.xml><?xml version="1.0" encoding="utf-8"?>
+<inkml:ink xmlns:inkml="http://www.w3.org/2003/InkML">
+  <inkml:definitions>
+    <inkml:context xml:id="ctx0">
+      <inkml:inkSource xml:id="inkSrc0">
+        <inkml:traceFormat>
+          <inkml:channel name="X" type="integer" min="-2.14748E9" max="2.14748E9" units="cm"/>
+          <inkml:channel name="Y" type="integer" min="-2.14748E9" max="2.14748E9" units="cm"/>
+          <inkml:channel name="F" type="integer" max="32767" units="dev"/>
+        </inkml:traceFormat>
+        <inkml:channelProperties>
+          <inkml:channelProperty channel="X" name="resolution" value="1000" units="1/cm"/>
+          <inkml:channelProperty channel="Y" name="resolution" value="1000" units="1/cm"/>
+          <inkml:channelProperty channel="F" name="resolution" value="0" units="1/dev"/>
+        </inkml:channelProperties>
+      </inkml:inkSource>
+      <inkml:timestamp xml:id="ts0" timeString="2026-04-26T04:02:59.922"/>
+    </inkml:context>
+    <inkml:brush xml:id="br0">
+      <inkml:brushProperty name="width" value="0.035" units="cm"/>
+      <inkml:brushProperty name="height" value="0.035" units="cm"/>
+      <inkml:brushProperty name="color" value="#E71224"/>
+    </inkml:brush>
+  </inkml:definitions>
+  <inkml:trace contextRef="#ctx0" brushRef="#br0">1 1485 24575,'9'-9'0,"1"1"0,0 1 0,20-11 0,2-2 0,38-26 0,-32 22 0,-1-1 0,44-40 0,22-24 0,117-77 0,-22 20 0,-81 56 0,248-143 0,-323 211 0,-6 3 0,56-38 0,-72 44 0,0 0 0,1 2 0,35-15 0,-40 19 0,95-52 0,-77 44 0,-20 10 0,1-1 0,-1-1 0,-1-1 0,1 0 0,23-19 0,-34 24-5,0 0-1,-1 0 0,1 0 0,-1 0 1,0-1-1,0 0 0,0 1 1,-1-1-1,1 0 0,-1 0 1,0 1-1,2-9 0,-2-1 73,0 1 0,-2-24 0,2-21-298,-1 53 126,1 0 0,0 0 0,0 0-1,0 0 1,1 0 0,-1 0 0,1 0 0,0 0 0,0 1 0,0-1 0,4-4 0,7-5-6721</inkml:trace>
+</inkml:ink>
+</file>
+
+<file path=ppt/ink/ink12.xml><?xml version="1.0" encoding="utf-8"?>
+<inkml:ink xmlns:inkml="http://www.w3.org/2003/InkML">
+  <inkml:definitions>
+    <inkml:context xml:id="ctx0">
+      <inkml:inkSource xml:id="inkSrc0">
+        <inkml:traceFormat>
+          <inkml:channel name="X" type="integer" min="-2.14748E9" max="2.14748E9" units="cm"/>
+          <inkml:channel name="Y" type="integer" min="-2.14748E9" max="2.14748E9" units="cm"/>
+          <inkml:channel name="F" type="integer" max="32767" units="dev"/>
+        </inkml:traceFormat>
+        <inkml:channelProperties>
+          <inkml:channelProperty channel="X" name="resolution" value="1000" units="1/cm"/>
+          <inkml:channelProperty channel="Y" name="resolution" value="1000" units="1/cm"/>
+          <inkml:channelProperty channel="F" name="resolution" value="0" units="1/dev"/>
+        </inkml:channelProperties>
+      </inkml:inkSource>
+      <inkml:timestamp xml:id="ts0" timeString="2026-04-26T04:02:59.923"/>
+    </inkml:context>
+    <inkml:brush xml:id="br0">
+      <inkml:brushProperty name="width" value="0.035" units="cm"/>
+      <inkml:brushProperty name="height" value="0.035" units="cm"/>
+      <inkml:brushProperty name="color" value="#E71224"/>
+    </inkml:brush>
+  </inkml:definitions>
+  <inkml:trace contextRef="#ctx0" brushRef="#br0">255 0 24575,'-3'0'0,"-5"4"0,-6 0 0,-2 1 0,0 2 0,0 0 0,2 3 0,1 0 0,-2-2 0,-2-3 0,-2-1 0,0-3 0,2 4 0,0-1 0,0 0 0,-1 0 0,3-2-8191</inkml:trace>
+</inkml:ink>
+</file>
+
+<file path=ppt/ink/ink13.xml><?xml version="1.0" encoding="utf-8"?>
+<inkml:ink xmlns:inkml="http://www.w3.org/2003/InkML">
+  <inkml:definitions>
+    <inkml:context xml:id="ctx0">
+      <inkml:inkSource xml:id="inkSrc0">
+        <inkml:traceFormat>
+          <inkml:channel name="X" type="integer" min="-2.14748E9" max="2.14748E9" units="cm"/>
+          <inkml:channel name="Y" type="integer" min="-2.14748E9" max="2.14748E9" units="cm"/>
+          <inkml:channel name="F" type="integer" max="32767" units="dev"/>
+        </inkml:traceFormat>
+        <inkml:channelProperties>
+          <inkml:channelProperty channel="X" name="resolution" value="1000" units="1/cm"/>
+          <inkml:channelProperty channel="Y" name="resolution" value="1000" units="1/cm"/>
+          <inkml:channelProperty channel="F" name="resolution" value="0" units="1/dev"/>
+        </inkml:channelProperties>
+      </inkml:inkSource>
+      <inkml:timestamp xml:id="ts0" timeString="2026-04-26T04:02:59.924"/>
+    </inkml:context>
+    <inkml:brush xml:id="br0">
+      <inkml:brushProperty name="width" value="0.035" units="cm"/>
+      <inkml:brushProperty name="height" value="0.035" units="cm"/>
+      <inkml:brushProperty name="color" value="#E71224"/>
+    </inkml:brush>
+  </inkml:definitions>
+  <inkml:trace contextRef="#ctx0" brushRef="#br0">1 77 24575,'6'-7'0,"1"-1"0,1 0 0,1 0 0,10-7 0,-15 12 0,0 0 0,1 1 0,-1 0 0,1 0 0,0 0 0,0 1 0,0 0 0,0-1 0,9 1 0,54-2 0,-39 2 0,29-4 0,-48 4 0,0 0 0,20 1 0,-29 0 0,1 0 0,0 0 0,-1 1 0,1-1 0,0 0 0,-1 1 0,1-1 0,-1 1 0,1 0 0,-1-1 0,1 1 0,1 1 0,-3-1 0,1-1 0,-1 1 0,0-1 0,1 1 0,-1 0 0,0-1 0,0 1 0,1-1 0,-1 1 0,0 0 0,0-1 0,0 1 0,0 0 0,0-1 0,0 1 0,0-1 0,0 1 0,0 0 0,0-1 0,0 1 0,0 0 0,0-1 0,0 1 0,-1 0 0,1-1 0,0 1 0,-1-1 0,1 1 0,0-1 0,-1 1 0,0 0 0,-2 2 0,0 0 0,0 0 0,-1 0 0,1-1 0,-1 1 0,0-1 0,1 0 0,-1 0 0,0-1 0,0 1 0,-1-1 0,1 0 0,-6 1 0,-16 6 0,-72 31-1365,80-32-5461</inkml:trace>
+</inkml:ink>
+</file>
+
+<file path=ppt/ink/ink14.xml><?xml version="1.0" encoding="utf-8"?>
+<inkml:ink xmlns:inkml="http://www.w3.org/2003/InkML">
+  <inkml:definitions>
+    <inkml:context xml:id="ctx0">
+      <inkml:inkSource xml:id="inkSrc0">
+        <inkml:traceFormat>
+          <inkml:channel name="X" type="integer" min="-2.14748E9" max="2.14748E9" units="cm"/>
+          <inkml:channel name="Y" type="integer" min="-2.14748E9" max="2.14748E9" units="cm"/>
+          <inkml:channel name="F" type="integer" max="32767" units="dev"/>
+        </inkml:traceFormat>
+        <inkml:channelProperties>
+          <inkml:channelProperty channel="X" name="resolution" value="1000" units="1/cm"/>
+          <inkml:channelProperty channel="Y" name="resolution" value="1000" units="1/cm"/>
+          <inkml:channelProperty channel="F" name="resolution" value="0" units="1/dev"/>
+        </inkml:channelProperties>
+      </inkml:inkSource>
+      <inkml:timestamp xml:id="ts0" timeString="2026-04-26T04:03:56.515"/>
+    </inkml:context>
+    <inkml:brush xml:id="br0">
+      <inkml:brushProperty name="width" value="0.035" units="cm"/>
+      <inkml:brushProperty name="height" value="0.035" units="cm"/>
+      <inkml:brushProperty name="color" value="#E71224"/>
+    </inkml:brush>
+  </inkml:definitions>
+  <inkml:trace contextRef="#ctx0" brushRef="#br0">22 1 24575,'-2'3'0,"0"0"0,0 0 0,0 1 0,0-1 0,0 1 0,1-1 0,-1 1 0,1 0 0,0 0 0,0 0 0,0 7 0,-1 49 0,2-43 0,0 893 96,1-409-1557,-1-483-5365</inkml:trace>
+</inkml:ink>
+</file>
+
+<file path=ppt/ink/ink15.xml><?xml version="1.0" encoding="utf-8"?>
+<inkml:ink xmlns:inkml="http://www.w3.org/2003/InkML">
+  <inkml:definitions>
+    <inkml:context xml:id="ctx0">
+      <inkml:inkSource xml:id="inkSrc0">
+        <inkml:traceFormat>
+          <inkml:channel name="X" type="integer" min="-2.14748E9" max="2.14748E9" units="cm"/>
+          <inkml:channel name="Y" type="integer" min="-2.14748E9" max="2.14748E9" units="cm"/>
+          <inkml:channel name="F" type="integer" max="32767" units="dev"/>
+        </inkml:traceFormat>
+        <inkml:channelProperties>
+          <inkml:channelProperty channel="X" name="resolution" value="1000" units="1/cm"/>
+          <inkml:channelProperty channel="Y" name="resolution" value="1000" units="1/cm"/>
+          <inkml:channelProperty channel="F" name="resolution" value="0" units="1/dev"/>
+        </inkml:channelProperties>
+      </inkml:inkSource>
+      <inkml:timestamp xml:id="ts0" timeString="2026-04-26T04:04:09.032"/>
+    </inkml:context>
+    <inkml:brush xml:id="br0">
+      <inkml:brushProperty name="width" value="0.035" units="cm"/>
+      <inkml:brushProperty name="height" value="0.035" units="cm"/>
+      <inkml:brushProperty name="color" value="#E71224"/>
+    </inkml:brush>
+  </inkml:definitions>
+  <inkml:trace contextRef="#ctx0" brushRef="#br0">23 1 24575,'0'3060'0,"-2"-3031"0,-7 47 0,4-47 0,-2 44 0,8 119-1365,-1-173-5461</inkml:trace>
+</inkml:ink>
+</file>
+
+<file path=ppt/ink/ink16.xml><?xml version="1.0" encoding="utf-8"?>
+<inkml:ink xmlns:inkml="http://www.w3.org/2003/InkML">
+  <inkml:definitions>
+    <inkml:context xml:id="ctx0">
+      <inkml:inkSource xml:id="inkSrc0">
+        <inkml:traceFormat>
+          <inkml:channel name="X" type="integer" min="-2.14748E9" max="2.14748E9" units="cm"/>
+          <inkml:channel name="Y" type="integer" min="-2.14748E9" max="2.14748E9" units="cm"/>
+          <inkml:channel name="F" type="integer" max="32767" units="dev"/>
+        </inkml:traceFormat>
+        <inkml:channelProperties>
+          <inkml:channelProperty channel="X" name="resolution" value="1000" units="1/cm"/>
+          <inkml:channelProperty channel="Y" name="resolution" value="1000" units="1/cm"/>
+          <inkml:channelProperty channel="F" name="resolution" value="0" units="1/dev"/>
+        </inkml:channelProperties>
+      </inkml:inkSource>
+      <inkml:timestamp xml:id="ts0" timeString="2026-04-26T04:04:09.033"/>
+    </inkml:context>
+    <inkml:brush xml:id="br0">
+      <inkml:brushProperty name="width" value="0.035" units="cm"/>
+      <inkml:brushProperty name="height" value="0.035" units="cm"/>
+      <inkml:brushProperty name="color" value="#E71224"/>
+    </inkml:brush>
+  </inkml:definitions>
+  <inkml:trace contextRef="#ctx0" brushRef="#br0">0 1418 24575,'35'1'0,"0"-2"0,0-2 0,-1-1 0,1-2 0,-1-1 0,53-19 0,-35 7 0,-30 12 0,1 0 0,-1-2 0,-1-1 0,1-1 0,-2-1 0,30-21 0,-37 22 0,13-13 0,2 2 0,56-36 0,36-14 0,66-34 0,-138 80 0,60-41 0,-71 42 0,1 1 0,76-34 0,-76 40 0,-1-1 0,-1-2 0,51-38 0,-52 35 0,56-30 0,-68 42 0,-1 0 0,-1-1 0,0-1 0,35-32 0,-42 31 0,2 1 0,0 0 0,0 1 0,22-13 0,0 0 0,-2-1 0,-1-2 0,-1-1 0,30-37 0,-22 25 0,-5 8-168,2 3-1,80-52 1,-87 63-692,-21 12-5966</inkml:trace>
+</inkml:ink>
+</file>
+
+<file path=ppt/ink/ink17.xml><?xml version="1.0" encoding="utf-8"?>
+<inkml:ink xmlns:inkml="http://www.w3.org/2003/InkML">
+  <inkml:definitions>
+    <inkml:context xml:id="ctx0">
+      <inkml:inkSource xml:id="inkSrc0">
+        <inkml:traceFormat>
+          <inkml:channel name="X" type="integer" min="-2.14748E9" max="2.14748E9" units="cm"/>
+          <inkml:channel name="Y" type="integer" min="-2.14748E9" max="2.14748E9" units="cm"/>
+          <inkml:channel name="F" type="integer" max="32767" units="dev"/>
+        </inkml:traceFormat>
+        <inkml:channelProperties>
+          <inkml:channelProperty channel="X" name="resolution" value="1000" units="1/cm"/>
+          <inkml:channelProperty channel="Y" name="resolution" value="1000" units="1/cm"/>
+          <inkml:channelProperty channel="F" name="resolution" value="0" units="1/dev"/>
+        </inkml:channelProperties>
+      </inkml:inkSource>
+      <inkml:timestamp xml:id="ts0" timeString="2026-04-26T04:04:09.034"/>
+    </inkml:context>
+    <inkml:brush xml:id="br0">
+      <inkml:brushProperty name="width" value="0.035" units="cm"/>
+      <inkml:brushProperty name="height" value="0.035" units="cm"/>
+      <inkml:brushProperty name="color" value="#E71224"/>
+    </inkml:brush>
+  </inkml:definitions>
+  <inkml:trace contextRef="#ctx0" brushRef="#br0">1 1485 24575,'9'-9'0,"1"1"0,0 1 0,20-11 0,2-2 0,38-26 0,-32 22 0,-1-1 0,44-40 0,22-24 0,117-77 0,-22 20 0,-81 56 0,248-143 0,-323 211 0,-6 3 0,56-38 0,-72 44 0,0 0 0,1 2 0,35-15 0,-40 19 0,95-52 0,-77 44 0,-20 10 0,1-1 0,-1-1 0,-1-1 0,1 0 0,23-19 0,-34 24-5,0 0-1,-1 0 0,1 0 0,-1 0 1,0-1-1,0 0 0,0 1 1,-1-1-1,1 0 0,-1 0 1,0 1-1,2-9 0,-2-1 73,0 1 0,-2-24 0,2-21-298,-1 53 126,1 0 0,0 0 0,0 0-1,0 0 1,1 0 0,-1 0 0,1 0 0,0 0 0,0 1 0,0-1 0,4-4 0,7-5-6721</inkml:trace>
+</inkml:ink>
+</file>
+
+<file path=ppt/ink/ink18.xml><?xml version="1.0" encoding="utf-8"?>
+<inkml:ink xmlns:inkml="http://www.w3.org/2003/InkML">
+  <inkml:definitions>
+    <inkml:context xml:id="ctx0">
+      <inkml:inkSource xml:id="inkSrc0">
+        <inkml:traceFormat>
+          <inkml:channel name="X" type="integer" min="-2.14748E9" max="2.14748E9" units="cm"/>
+          <inkml:channel name="Y" type="integer" min="-2.14748E9" max="2.14748E9" units="cm"/>
+          <inkml:channel name="F" type="integer" max="32767" units="dev"/>
+        </inkml:traceFormat>
+        <inkml:channelProperties>
+          <inkml:channelProperty channel="X" name="resolution" value="1000" units="1/cm"/>
+          <inkml:channelProperty channel="Y" name="resolution" value="1000" units="1/cm"/>
+          <inkml:channelProperty channel="F" name="resolution" value="0" units="1/dev"/>
+        </inkml:channelProperties>
+      </inkml:inkSource>
+      <inkml:timestamp xml:id="ts0" timeString="2026-04-26T04:04:09.035"/>
+    </inkml:context>
+    <inkml:brush xml:id="br0">
+      <inkml:brushProperty name="width" value="0.035" units="cm"/>
+      <inkml:brushProperty name="height" value="0.035" units="cm"/>
+      <inkml:brushProperty name="color" value="#E71224"/>
+    </inkml:brush>
+  </inkml:definitions>
+  <inkml:trace contextRef="#ctx0" brushRef="#br0">255 0 24575,'-3'0'0,"-5"4"0,-6 0 0,-2 1 0,0 2 0,0 0 0,2 3 0,1 0 0,-2-2 0,-2-3 0,-2-1 0,0-3 0,2 4 0,0-1 0,0 0 0,-1 0 0,3-2-8191</inkml:trace>
+</inkml:ink>
+</file>
+
+<file path=ppt/ink/ink19.xml><?xml version="1.0" encoding="utf-8"?>
+<inkml:ink xmlns:inkml="http://www.w3.org/2003/InkML">
+  <inkml:definitions>
+    <inkml:context xml:id="ctx0">
+      <inkml:inkSource xml:id="inkSrc0">
+        <inkml:traceFormat>
+          <inkml:channel name="X" type="integer" min="-2.14748E9" max="2.14748E9" units="cm"/>
+          <inkml:channel name="Y" type="integer" min="-2.14748E9" max="2.14748E9" units="cm"/>
+          <inkml:channel name="F" type="integer" max="32767" units="dev"/>
+        </inkml:traceFormat>
+        <inkml:channelProperties>
+          <inkml:channelProperty channel="X" name="resolution" value="1000" units="1/cm"/>
+          <inkml:channelProperty channel="Y" name="resolution" value="1000" units="1/cm"/>
+          <inkml:channelProperty channel="F" name="resolution" value="0" units="1/dev"/>
+        </inkml:channelProperties>
+      </inkml:inkSource>
+      <inkml:timestamp xml:id="ts0" timeString="2026-04-26T04:04:09.036"/>
+    </inkml:context>
+    <inkml:brush xml:id="br0">
+      <inkml:brushProperty name="width" value="0.035" units="cm"/>
+      <inkml:brushProperty name="height" value="0.035" units="cm"/>
+      <inkml:brushProperty name="color" value="#E71224"/>
+    </inkml:brush>
+  </inkml:definitions>
+  <inkml:trace contextRef="#ctx0" brushRef="#br0">1 77 24575,'6'-7'0,"1"-1"0,1 0 0,1 0 0,10-7 0,-15 12 0,0 0 0,1 1 0,-1 0 0,1 0 0,0 0 0,0 1 0,0 0 0,0-1 0,9 1 0,54-2 0,-39 2 0,29-4 0,-48 4 0,0 0 0,20 1 0,-29 0 0,1 0 0,0 0 0,-1 1 0,1-1 0,0 0 0,-1 1 0,1-1 0,-1 1 0,1 0 0,-1-1 0,1 1 0,1 1 0,-3-1 0,1-1 0,-1 1 0,0-1 0,1 1 0,-1 0 0,0-1 0,0 1 0,1-1 0,-1 1 0,0 0 0,0-1 0,0 1 0,0 0 0,0-1 0,0 1 0,0-1 0,0 1 0,0 0 0,0-1 0,0 1 0,0 0 0,0-1 0,0 1 0,-1 0 0,1-1 0,0 1 0,-1-1 0,1 1 0,0-1 0,-1 1 0,0 0 0,-2 2 0,0 0 0,0 0 0,-1 0 0,1-1 0,-1 1 0,0-1 0,1 0 0,-1 0 0,0-1 0,0 1 0,-1-1 0,1 0 0,-6 1 0,-16 6 0,-72 31-1365,80-32-5461</inkml:trace>
+</inkml:ink>
+</file>
+
+<file path=ppt/ink/ink2.xml><?xml version="1.0" encoding="utf-8"?>
+<inkml:ink xmlns:inkml="http://www.w3.org/2003/InkML">
+  <inkml:definitions>
+    <inkml:context xml:id="ctx0">
+      <inkml:inkSource xml:id="inkSrc0">
+        <inkml:traceFormat>
+          <inkml:channel name="X" type="integer" min="-2.14748E9" max="2.14748E9" units="cm"/>
+          <inkml:channel name="Y" type="integer" min="-2.14748E9" max="2.14748E9" units="cm"/>
+          <inkml:channel name="F" type="integer" max="32767" units="dev"/>
+        </inkml:traceFormat>
+        <inkml:channelProperties>
+          <inkml:channelProperty channel="X" name="resolution" value="1000" units="1/cm"/>
+          <inkml:channelProperty channel="Y" name="resolution" value="1000" units="1/cm"/>
+          <inkml:channelProperty channel="F" name="resolution" value="0" units="1/dev"/>
+        </inkml:channelProperties>
+      </inkml:inkSource>
+      <inkml:timestamp xml:id="ts0" timeString="2026-04-26T03:50:55.267"/>
+    </inkml:context>
+    <inkml:brush xml:id="br0">
+      <inkml:brushProperty name="width" value="0.035" units="cm"/>
+      <inkml:brushProperty name="height" value="0.035" units="cm"/>
+      <inkml:brushProperty name="color" value="#E71224"/>
+    </inkml:brush>
+  </inkml:definitions>
+  <inkml:trace contextRef="#ctx0" brushRef="#br0">23 1 24575,'0'3060'0,"-2"-3031"0,-7 47 0,4-47 0,-2 44 0,8 119-1365,-1-173-5461</inkml:trace>
+</inkml:ink>
+</file>
+
+<file path=ppt/ink/ink20.xml><?xml version="1.0" encoding="utf-8"?>
+<inkml:ink xmlns:inkml="http://www.w3.org/2003/InkML">
+  <inkml:definitions>
+    <inkml:context xml:id="ctx0">
+      <inkml:inkSource xml:id="inkSrc0">
+        <inkml:traceFormat>
+          <inkml:channel name="X" type="integer" min="-2.14748E9" max="2.14748E9" units="cm"/>
+          <inkml:channel name="Y" type="integer" min="-2.14748E9" max="2.14748E9" units="cm"/>
+          <inkml:channel name="F" type="integer" max="32767" units="dev"/>
+        </inkml:traceFormat>
+        <inkml:channelProperties>
+          <inkml:channelProperty channel="X" name="resolution" value="1000" units="1/cm"/>
+          <inkml:channelProperty channel="Y" name="resolution" value="1000" units="1/cm"/>
+          <inkml:channelProperty channel="F" name="resolution" value="0" units="1/dev"/>
+        </inkml:channelProperties>
+      </inkml:inkSource>
+      <inkml:timestamp xml:id="ts0" timeString="2026-04-26T04:04:09.037"/>
+    </inkml:context>
+    <inkml:brush xml:id="br0">
+      <inkml:brushProperty name="width" value="0.035" units="cm"/>
+      <inkml:brushProperty name="height" value="0.035" units="cm"/>
+      <inkml:brushProperty name="color" value="#E71224"/>
+    </inkml:brush>
+  </inkml:definitions>
+  <inkml:trace contextRef="#ctx0" brushRef="#br0">22 1 24575,'-2'3'0,"0"0"0,0 0 0,0 1 0,0-1 0,0 1 0,1-1 0,-1 1 0,1 0 0,0 0 0,0 0 0,0 7 0,-1 49 0,2-43 0,0 893 96,1-409-1557,-1-483-5365</inkml:trace>
+</inkml:ink>
+</file>
+
+<file path=ppt/ink/ink21.xml><?xml version="1.0" encoding="utf-8"?>
+<inkml:ink xmlns:inkml="http://www.w3.org/2003/InkML">
+  <inkml:definitions>
+    <inkml:context xml:id="ctx0">
+      <inkml:inkSource xml:id="inkSrc0">
+        <inkml:traceFormat>
+          <inkml:channel name="X" type="integer" min="-2.14748E9" max="2.14748E9" units="cm"/>
+          <inkml:channel name="Y" type="integer" min="-2.14748E9" max="2.14748E9" units="cm"/>
+          <inkml:channel name="F" type="integer" max="32767" units="dev"/>
+        </inkml:traceFormat>
+        <inkml:channelProperties>
+          <inkml:channelProperty channel="X" name="resolution" value="1000" units="1/cm"/>
+          <inkml:channelProperty channel="Y" name="resolution" value="1000" units="1/cm"/>
+          <inkml:channelProperty channel="F" name="resolution" value="0" units="1/dev"/>
+        </inkml:channelProperties>
+      </inkml:inkSource>
+      <inkml:timestamp xml:id="ts0" timeString="2026-04-26T04:04:17.516"/>
+    </inkml:context>
+    <inkml:brush xml:id="br0">
+      <inkml:brushProperty name="width" value="0.035" units="cm"/>
+      <inkml:brushProperty name="height" value="0.035" units="cm"/>
+      <inkml:brushProperty name="color" value="#E71224"/>
+    </inkml:brush>
+  </inkml:definitions>
+  <inkml:trace contextRef="#ctx0" brushRef="#br0">0 1 24575,'4'0'0,"-1"-1"0,1 1 0,-1 1 0,1-1 0,-1 0 0,1 1 0,-1 0 0,0 0 0,1 0 0,-1 0 0,0 0 0,0 0 0,0 1 0,0 0 0,0 0 0,0 0 0,0 0 0,0 0 0,-1 0 0,1 1 0,-1-1 0,0 1 0,0 0 0,0 0 0,0-1 0,0 1 0,0 1 0,-1-1 0,0 0 0,2 4 0,3 8 0,-2 1 0,1-1 0,-2 1 0,3 20 0,-3-15 0,10 37 0,-6-32 0,-1 1 0,-1 0 0,3 49 0,-7 84 0,-2-87 0,-1 897 845,2-554-3152,0-70-4856,0-335 8307,-1-1 0,0 1-1,-1-1 1,0 1 0,-1-1 0,-5 12 0,-29 59-171,27-62-1044,0 1 0,2 0 0,0 0 0,-6 26 0,10-16 71,1 0 0,2 0 0,3 46 0,1-7 0,-3 465-1365,0-516-5461</inkml:trace>
+</inkml:ink>
+</file>
+
+<file path=ppt/ink/ink22.xml><?xml version="1.0" encoding="utf-8"?>
+<inkml:ink xmlns:inkml="http://www.w3.org/2003/InkML">
+  <inkml:definitions>
+    <inkml:context xml:id="ctx0">
+      <inkml:inkSource xml:id="inkSrc0">
+        <inkml:traceFormat>
+          <inkml:channel name="X" type="integer" min="-2.14748E9" max="2.14748E9" units="cm"/>
+          <inkml:channel name="Y" type="integer" min="-2.14748E9" max="2.14748E9" units="cm"/>
+          <inkml:channel name="F" type="integer" max="32767" units="dev"/>
+        </inkml:traceFormat>
+        <inkml:channelProperties>
+          <inkml:channelProperty channel="X" name="resolution" value="1000" units="1/cm"/>
+          <inkml:channelProperty channel="Y" name="resolution" value="1000" units="1/cm"/>
+          <inkml:channelProperty channel="F" name="resolution" value="0" units="1/dev"/>
+        </inkml:channelProperties>
+      </inkml:inkSource>
+      <inkml:timestamp xml:id="ts0" timeString="2026-04-26T04:04:24.743"/>
+    </inkml:context>
+    <inkml:brush xml:id="br0">
+      <inkml:brushProperty name="width" value="0.035" units="cm"/>
+      <inkml:brushProperty name="height" value="0.035" units="cm"/>
+    </inkml:brush>
+  </inkml:definitions>
+  <inkml:trace contextRef="#ctx0" brushRef="#br0">25 7367 24575,'4'-232'0,"42"-289"0,-36 450 0,49-388 0,-49-50 0,-12 310 0,2-224-6253,0-213 11482,0 290-2897,0 116-3640,-4 91 1308,-6 1 0,-53-255 0,37 266 0,5 0 0,-7-231 0,29-596 0,1 355 0,-2-201 0,0 797 0,0 0 0,0 0 0,0 0 0,0 0 0,1 0 0,-1 1 0,1-1 0,0 0 0,0 0 0,0 0 0,0 0 0,0 1 0,0-1 0,1 0 0,2-2 0,-2 3 0,0 0 0,0 1 0,1-1 0,-1 1 0,1 0 0,-1-1 0,1 1 0,-1 0 0,1 0 0,0 1 0,0-1 0,-1 0 0,1 1 0,0 0 0,0 0 0,3 0 0,28-1 0,1 0 0,0-1 0,38-7 0,-7-3 0,106-3 0,68 13 0,-148 3 0,2283 2-7018,4-4 8059,-371 0 4936,-2003 2-5977,-1-1 0,0 1 0,1 0 0,-1 0 0,1 0 0,-1 0 0,0 1 0,0-1 0,0 1 0,0 1 0,0-1 0,0 0 0,-1 1 0,1 0 0,-1 0 0,1 0 0,-1 0 0,0 0 0,0 1 0,-1-1 0,1 1 0,3 6 0,4 9 0,-1 0 0,-1 1 0,10 32 0,-8-20 0,114 388 0,-23 6 0,9 36 0,-24-150 0,16 61 0,-76-258 0,14 166 0,-14 120 0,-21-290 0,11 570-11482,-18-224 9455,0-48 8752,3 7-7216,-3 465 7172,-4-693-6681,-40 247 0,14-82 130,31 0 347,1-317-490,0-33 13,0 1 0,0-1 0,0 0 0,0 0 0,-1 1 0,1-1 0,-1 0 0,0 0 0,0 0 0,0 0 0,-2 4 0,1-6 0,1 1 0,-1-1 0,1 1 0,-1-1 0,1 0 0,-1 1 0,0-1 0,1 0 0,-1 0 0,0 0 0,0-1 0,0 1 0,0 0 0,0-1 0,0 1 0,0-1 0,0 1 0,0-1 0,-3 0 0,-204-1 0,149-1 0,-30-4 6,-101-19 0,-90-31-274,142 26-212,-199-33 431,-2 14-1,-494-7 1,-195 38 786,667 0-576,-149-3-175,-698 18 14,636 5 0,317-12 0,-332-55 0,439 47 0,-199 1 0,-44-12 0,379 28 0,-20-4 0,0 2 0,-58 1 0,89 2 9,1 0 1,-1 0-1,0 1 0,0-1 0,1 0 1,-1 1-1,0-1 0,1 1 0,-1 0 0,1 0 1,-1 0-1,-1 1 0,3-2-43,-1 0 0,1 1 1,0-1-1,0 1 0,-1-1 0,1 1 1,0-1-1,0 1 0,0-1 0,0 1 1,0-1-1,0 1 0,0-1 0,0 1 1,0-1-1,0 1 0,0-1 0,0 1 1,0-1-1,0 1 0,0-1 0,0 0 1,1 1-1,-1-1 0,0 1 0,0-1 1,1 1-1,-1-1 0,0 0 0,1 1 1,-1-1-1,0 1 0,1-1 0,-1 0 1,0 0-1,1 1 0,-1-1 0,1 0 1,-1 0-1,0 1 0,1-1 0,-1 0 1,1 0-1,11 8-6792</inkml:trace>
+</inkml:ink>
+</file>
+
+<file path=ppt/ink/ink23.xml><?xml version="1.0" encoding="utf-8"?>
+<inkml:ink xmlns:inkml="http://www.w3.org/2003/InkML">
+  <inkml:definitions>
+    <inkml:context xml:id="ctx0">
+      <inkml:inkSource xml:id="inkSrc0">
+        <inkml:traceFormat>
+          <inkml:channel name="X" type="integer" min="-2.14748E9" max="2.14748E9" units="cm"/>
+          <inkml:channel name="Y" type="integer" min="-2.14748E9" max="2.14748E9" units="cm"/>
+          <inkml:channel name="F" type="integer" max="32767" units="dev"/>
+        </inkml:traceFormat>
+        <inkml:channelProperties>
+          <inkml:channelProperty channel="X" name="resolution" value="1000" units="1/cm"/>
+          <inkml:channelProperty channel="Y" name="resolution" value="1000" units="1/cm"/>
+          <inkml:channelProperty channel="F" name="resolution" value="0" units="1/dev"/>
+        </inkml:channelProperties>
+      </inkml:inkSource>
+      <inkml:timestamp xml:id="ts0" timeString="2026-04-26T04:08:15.551"/>
+    </inkml:context>
+    <inkml:brush xml:id="br0">
+      <inkml:brushProperty name="width" value="0.035" units="cm"/>
+      <inkml:brushProperty name="height" value="0.035" units="cm"/>
+      <inkml:brushProperty name="color" value="#E71224"/>
+    </inkml:brush>
+  </inkml:definitions>
+  <inkml:trace contextRef="#ctx0" brushRef="#br0">1 1522 24575,'68'1'0,"78"-2"0,-136-1 0,1 1 0,-1-1 0,0-1 0,0 1 0,0-2 0,0 0 0,-1 0 0,14-8 0,8-7 0,31-26 0,-24 17 0,200-125 0,-214 139 0,0-1 0,-1-2 0,0 0 0,-2-1 0,32-33 0,-31 29 0,1 1 0,0 0 0,2 2 0,1 1 0,33-17 0,-28 15 0,35-28 0,-37 26 0,40-24 0,180-101 0,-218 130 0,2 0 0,59-20 0,-66 28 0,0-1 0,0-1 0,-1-2 0,-1 0 0,0-1 0,26-21 0,-15 5 0,16-14 0,50-54 0,10-10 0,-106 103 0,38-39 0,-27 28 0,32-28 0,-8 11 0,-30 23 0,2 0 0,-1 1 0,2 1 0,-1 0 0,17-8 0,21-8-1365,-35 15-5461</inkml:trace>
+</inkml:ink>
+</file>
+
+<file path=ppt/ink/ink24.xml><?xml version="1.0" encoding="utf-8"?>
+<inkml:ink xmlns:inkml="http://www.w3.org/2003/InkML">
+  <inkml:definitions>
+    <inkml:context xml:id="ctx0">
+      <inkml:inkSource xml:id="inkSrc0">
+        <inkml:traceFormat>
+          <inkml:channel name="X" type="integer" min="-2.14748E9" max="2.14748E9" units="cm"/>
+          <inkml:channel name="Y" type="integer" min="-2.14748E9" max="2.14748E9" units="cm"/>
+          <inkml:channel name="F" type="integer" max="32767" units="dev"/>
+        </inkml:traceFormat>
+        <inkml:channelProperties>
+          <inkml:channelProperty channel="X" name="resolution" value="1000" units="1/cm"/>
+          <inkml:channelProperty channel="Y" name="resolution" value="1000" units="1/cm"/>
+          <inkml:channelProperty channel="F" name="resolution" value="0" units="1/dev"/>
+        </inkml:channelProperties>
+      </inkml:inkSource>
+      <inkml:timestamp xml:id="ts0" timeString="2026-04-26T04:08:29.235"/>
+    </inkml:context>
+    <inkml:brush xml:id="br0">
+      <inkml:brushProperty name="width" value="0.035" units="cm"/>
+      <inkml:brushProperty name="height" value="0.035" units="cm"/>
+      <inkml:brushProperty name="color" value="#E71224"/>
+    </inkml:brush>
+  </inkml:definitions>
+  <inkml:trace contextRef="#ctx0" brushRef="#br0">1 1522 24575,'68'1'0,"78"-2"0,-136-1 0,1 1 0,-1-1 0,0-1 0,0 1 0,0-2 0,0 0 0,-1 0 0,14-8 0,8-7 0,31-26 0,-24 17 0,200-125 0,-214 139 0,0-1 0,-1-2 0,0 0 0,-2-1 0,32-33 0,-31 29 0,1 1 0,0 0 0,2 2 0,1 1 0,33-17 0,-28 15 0,35-28 0,-37 26 0,40-24 0,180-101 0,-218 130 0,2 0 0,59-20 0,-66 28 0,0-1 0,0-1 0,-1-2 0,-1 0 0,0-1 0,26-21 0,-15 5 0,16-14 0,50-54 0,10-10 0,-106 103 0,38-39 0,-27 28 0,32-28 0,-8 11 0,-30 23 0,2 0 0,-1 1 0,2 1 0,-1 0 0,17-8 0,21-8-1365,-35 15-5461</inkml:trace>
+</inkml:ink>
+</file>
+
+<file path=ppt/ink/ink25.xml><?xml version="1.0" encoding="utf-8"?>
+<inkml:ink xmlns:inkml="http://www.w3.org/2003/InkML">
+  <inkml:definitions>
+    <inkml:context xml:id="ctx0">
+      <inkml:inkSource xml:id="inkSrc0">
+        <inkml:traceFormat>
+          <inkml:channel name="X" type="integer" min="-2.14748E9" max="2.14748E9" units="cm"/>
+          <inkml:channel name="Y" type="integer" min="-2.14748E9" max="2.14748E9" units="cm"/>
+          <inkml:channel name="F" type="integer" max="32767" units="dev"/>
+        </inkml:traceFormat>
+        <inkml:channelProperties>
+          <inkml:channelProperty channel="X" name="resolution" value="1000" units="1/cm"/>
+          <inkml:channelProperty channel="Y" name="resolution" value="1000" units="1/cm"/>
+          <inkml:channelProperty channel="F" name="resolution" value="0" units="1/dev"/>
+        </inkml:channelProperties>
+      </inkml:inkSource>
+      <inkml:timestamp xml:id="ts0" timeString="2026-04-26T04:08:35.238"/>
+    </inkml:context>
+    <inkml:brush xml:id="br0">
+      <inkml:brushProperty name="width" value="0.035" units="cm"/>
+      <inkml:brushProperty name="height" value="0.035" units="cm"/>
+      <inkml:brushProperty name="color" value="#E71224"/>
+    </inkml:brush>
+  </inkml:definitions>
+  <inkml:trace contextRef="#ctx0" brushRef="#br0">1 0 24575</inkml:trace>
+</inkml:ink>
+</file>
+
+<file path=ppt/ink/ink26.xml><?xml version="1.0" encoding="utf-8"?>
+<inkml:ink xmlns:inkml="http://www.w3.org/2003/InkML">
+  <inkml:definitions>
+    <inkml:context xml:id="ctx0">
+      <inkml:inkSource xml:id="inkSrc0">
+        <inkml:traceFormat>
+          <inkml:channel name="X" type="integer" min="-2.14748E9" max="2.14748E9" units="cm"/>
+          <inkml:channel name="Y" type="integer" min="-2.14748E9" max="2.14748E9" units="cm"/>
+          <inkml:channel name="F" type="integer" max="32767" units="dev"/>
+        </inkml:traceFormat>
+        <inkml:channelProperties>
+          <inkml:channelProperty channel="X" name="resolution" value="1000" units="1/cm"/>
+          <inkml:channelProperty channel="Y" name="resolution" value="1000" units="1/cm"/>
+          <inkml:channelProperty channel="F" name="resolution" value="0" units="1/dev"/>
+        </inkml:channelProperties>
+      </inkml:inkSource>
+      <inkml:timestamp xml:id="ts0" timeString="2026-04-26T04:08:37.307"/>
+    </inkml:context>
+    <inkml:brush xml:id="br0">
+      <inkml:brushProperty name="width" value="0.035" units="cm"/>
+      <inkml:brushProperty name="height" value="0.035" units="cm"/>
+      <inkml:brushProperty name="color" value="#E71224"/>
+    </inkml:brush>
+  </inkml:definitions>
+  <inkml:trace contextRef="#ctx0" brushRef="#br0">0 1555 24575,'1'-6'0,"-1"1"0,1 0 0,0 0 0,0-1 0,0 1 0,1 0 0,0 0 0,0 0 0,0 0 0,1 1 0,-1-1 0,1 0 0,0 1 0,1 0 0,-1 0 0,1 0 0,6-5 0,6-4 0,0 0 0,1 1 0,23-10 0,-30 16 0,171-86 0,-84 45 0,116-47 0,-147 67 0,118-65 0,-120 58 0,127-78 0,-139 77 0,55-50 0,-24 18 0,102-85 0,-151 122 0,36-25 0,-37 30 0,49-48 0,-58 49 0,-10 11 0,-1-1 0,21-29 0,-13 12 0,1 0 0,29-30 0,10 2 62,-34 35-775,29-36-1,-42 42-6112</inkml:trace>
+</inkml:ink>
+</file>
+
+<file path=ppt/ink/ink27.xml><?xml version="1.0" encoding="utf-8"?>
+<inkml:ink xmlns:inkml="http://www.w3.org/2003/InkML">
+  <inkml:definitions>
+    <inkml:context xml:id="ctx0">
+      <inkml:inkSource xml:id="inkSrc0">
+        <inkml:traceFormat>
+          <inkml:channel name="X" type="integer" min="-2.14748E9" max="2.14748E9" units="cm"/>
+          <inkml:channel name="Y" type="integer" min="-2.14748E9" max="2.14748E9" units="cm"/>
+          <inkml:channel name="F" type="integer" max="32767" units="dev"/>
+        </inkml:traceFormat>
+        <inkml:channelProperties>
+          <inkml:channelProperty channel="X" name="resolution" value="1000" units="1/cm"/>
+          <inkml:channelProperty channel="Y" name="resolution" value="1000" units="1/cm"/>
+          <inkml:channelProperty channel="F" name="resolution" value="0" units="1/dev"/>
+        </inkml:channelProperties>
+      </inkml:inkSource>
+      <inkml:timestamp xml:id="ts0" timeString="2026-04-26T04:08:41.986"/>
+    </inkml:context>
+    <inkml:brush xml:id="br0">
+      <inkml:brushProperty name="width" value="0.035" units="cm"/>
+      <inkml:brushProperty name="height" value="0.035" units="cm"/>
+      <inkml:brushProperty name="color" value="#E71224"/>
+    </inkml:brush>
+  </inkml:definitions>
+  <inkml:trace contextRef="#ctx0" brushRef="#br0">1 1522 24575,'68'1'0,"78"-2"0,-136-1 0,1 1 0,-1-1 0,0-1 0,0 1 0,0-2 0,0 0 0,-1 0 0,14-8 0,8-7 0,31-26 0,-24 17 0,200-125 0,-214 139 0,0-1 0,-1-2 0,0 0 0,-2-1 0,32-33 0,-31 29 0,1 1 0,0 0 0,2 2 0,1 1 0,33-17 0,-28 15 0,35-28 0,-37 26 0,40-24 0,180-101 0,-218 130 0,2 0 0,59-20 0,-66 28 0,0-1 0,0-1 0,-1-2 0,-1 0 0,0-1 0,26-21 0,-15 5 0,16-14 0,50-54 0,10-10 0,-106 103 0,38-39 0,-27 28 0,32-28 0,-8 11 0,-30 23 0,2 0 0,-1 1 0,2 1 0,-1 0 0,17-8 0,21-8-1365,-35 15-5461</inkml:trace>
+</inkml:ink>
+</file>
+
+<file path=ppt/ink/ink28.xml><?xml version="1.0" encoding="utf-8"?>
+<inkml:ink xmlns:inkml="http://www.w3.org/2003/InkML">
+  <inkml:definitions>
+    <inkml:context xml:id="ctx0">
+      <inkml:inkSource xml:id="inkSrc0">
+        <inkml:traceFormat>
+          <inkml:channel name="X" type="integer" min="-2.14748E9" max="2.14748E9" units="cm"/>
+          <inkml:channel name="Y" type="integer" min="-2.14748E9" max="2.14748E9" units="cm"/>
+          <inkml:channel name="F" type="integer" max="32767" units="dev"/>
+        </inkml:traceFormat>
+        <inkml:channelProperties>
+          <inkml:channelProperty channel="X" name="resolution" value="1000" units="1/cm"/>
+          <inkml:channelProperty channel="Y" name="resolution" value="1000" units="1/cm"/>
+          <inkml:channelProperty channel="F" name="resolution" value="0" units="1/dev"/>
+        </inkml:channelProperties>
+      </inkml:inkSource>
+      <inkml:timestamp xml:id="ts0" timeString="2026-04-26T04:08:41.987"/>
+    </inkml:context>
+    <inkml:brush xml:id="br0">
+      <inkml:brushProperty name="width" value="0.035" units="cm"/>
+      <inkml:brushProperty name="height" value="0.035" units="cm"/>
+      <inkml:brushProperty name="color" value="#E71224"/>
+    </inkml:brush>
+  </inkml:definitions>
+  <inkml:trace contextRef="#ctx0" brushRef="#br0">0 1555 24575,'1'-6'0,"-1"1"0,1 0 0,0 0 0,0-1 0,0 1 0,1 0 0,0 0 0,0 0 0,0 0 0,1 1 0,-1-1 0,1 0 0,0 1 0,1 0 0,-1 0 0,1 0 0,6-5 0,6-4 0,0 0 0,1 1 0,23-10 0,-30 16 0,171-86 0,-84 45 0,116-47 0,-147 67 0,118-65 0,-120 58 0,127-78 0,-139 77 0,55-50 0,-24 18 0,102-85 0,-151 122 0,36-25 0,-37 30 0,49-48 0,-58 49 0,-10 11 0,-1-1 0,21-29 0,-13 12 0,1 0 0,29-30 0,10 2 62,-34 35-775,29-36-1,-42 42-6112</inkml:trace>
+</inkml:ink>
+</file>
+
+<file path=ppt/ink/ink29.xml><?xml version="1.0" encoding="utf-8"?>
+<inkml:ink xmlns:inkml="http://www.w3.org/2003/InkML">
+  <inkml:definitions>
+    <inkml:context xml:id="ctx0">
+      <inkml:inkSource xml:id="inkSrc0">
+        <inkml:traceFormat>
+          <inkml:channel name="X" type="integer" min="-2.14748E9" max="2.14748E9" units="cm"/>
+          <inkml:channel name="Y" type="integer" min="-2.14748E9" max="2.14748E9" units="cm"/>
+          <inkml:channel name="F" type="integer" max="32767" units="dev"/>
+        </inkml:traceFormat>
+        <inkml:channelProperties>
+          <inkml:channelProperty channel="X" name="resolution" value="1000" units="1/cm"/>
+          <inkml:channelProperty channel="Y" name="resolution" value="1000" units="1/cm"/>
+          <inkml:channelProperty channel="F" name="resolution" value="0" units="1/dev"/>
+        </inkml:channelProperties>
+      </inkml:inkSource>
+      <inkml:timestamp xml:id="ts0" timeString="2026-04-26T04:08:55.003"/>
+    </inkml:context>
+    <inkml:brush xml:id="br0">
+      <inkml:brushProperty name="width" value="0.035" units="cm"/>
+      <inkml:brushProperty name="height" value="0.035" units="cm"/>
+      <inkml:brushProperty name="color" value="#E71224"/>
+    </inkml:brush>
+  </inkml:definitions>
+  <inkml:trace contextRef="#ctx0" brushRef="#br0">1 1 24575,'1'0'0,"1"1"0,-1 0 0,1 0 0,-1 0 0,1 0 0,-1 0 0,0 0 0,1 0 0,-1 0 0,0 1 0,0-1 0,0 1 0,0-1 0,0 0 0,0 1 0,0 0 0,-1-1 0,1 1 0,-1-1 0,1 4 0,2 0 0,7 20 0,0 1 0,-2 0 0,-1 0 0,5 32 0,3 111 0,-9-106 0,20 89 0,-15-96 0,-2 1 0,3 72 0,-13 601-7198,0-294 3893,1-193 4114,0 647 7228,0-509-7745,0-363-7118</inkml:trace>
+</inkml:ink>
+</file>
+
+<file path=ppt/ink/ink3.xml><?xml version="1.0" encoding="utf-8"?>
+<inkml:ink xmlns:inkml="http://www.w3.org/2003/InkML">
+  <inkml:definitions>
+    <inkml:context xml:id="ctx0">
+      <inkml:inkSource xml:id="inkSrc0">
+        <inkml:traceFormat>
+          <inkml:channel name="X" type="integer" min="-2.14748E9" max="2.14748E9" units="cm"/>
+          <inkml:channel name="Y" type="integer" min="-2.14748E9" max="2.14748E9" units="cm"/>
+          <inkml:channel name="F" type="integer" max="32767" units="dev"/>
+        </inkml:traceFormat>
+        <inkml:channelProperties>
+          <inkml:channelProperty channel="X" name="resolution" value="1000" units="1/cm"/>
+          <inkml:channelProperty channel="Y" name="resolution" value="1000" units="1/cm"/>
+          <inkml:channelProperty channel="F" name="resolution" value="0" units="1/dev"/>
+        </inkml:channelProperties>
+      </inkml:inkSource>
+      <inkml:timestamp xml:id="ts0" timeString="2026-04-26T04:02:21.171"/>
+    </inkml:context>
+    <inkml:brush xml:id="br0">
+      <inkml:brushProperty name="width" value="0.035" units="cm"/>
+      <inkml:brushProperty name="height" value="0.035" units="cm"/>
+      <inkml:brushProperty name="color" value="#E71224"/>
+    </inkml:brush>
+  </inkml:definitions>
+  <inkml:trace contextRef="#ctx0" brushRef="#br0">0 1418 24575,'35'1'0,"0"-2"0,0-2 0,-1-1 0,1-2 0,-1-1 0,53-19 0,-35 7 0,-30 12 0,1 0 0,-1-2 0,-1-1 0,1-1 0,-2-1 0,30-21 0,-37 22 0,13-13 0,2 2 0,56-36 0,36-14 0,66-34 0,-138 80 0,60-41 0,-71 42 0,1 1 0,76-34 0,-76 40 0,-1-1 0,-1-2 0,51-38 0,-52 35 0,56-30 0,-68 42 0,-1 0 0,-1-1 0,0-1 0,35-32 0,-42 31 0,2 1 0,0 0 0,0 1 0,22-13 0,0 0 0,-2-1 0,-1-2 0,-1-1 0,30-37 0,-22 25 0,-5 8-168,2 3-1,80-52 1,-87 63-692,-21 12-5966</inkml:trace>
+</inkml:ink>
+</file>
+
+<file path=ppt/ink/ink30.xml><?xml version="1.0" encoding="utf-8"?>
+<inkml:ink xmlns:inkml="http://www.w3.org/2003/InkML">
+  <inkml:definitions>
+    <inkml:context xml:id="ctx0">
+      <inkml:inkSource xml:id="inkSrc0">
+        <inkml:traceFormat>
+          <inkml:channel name="X" type="integer" min="-2.14748E9" max="2.14748E9" units="cm"/>
+          <inkml:channel name="Y" type="integer" min="-2.14748E9" max="2.14748E9" units="cm"/>
+          <inkml:channel name="F" type="integer" max="32767" units="dev"/>
+        </inkml:traceFormat>
+        <inkml:channelProperties>
+          <inkml:channelProperty channel="X" name="resolution" value="1000" units="1/cm"/>
+          <inkml:channelProperty channel="Y" name="resolution" value="1000" units="1/cm"/>
+          <inkml:channelProperty channel="F" name="resolution" value="0" units="1/dev"/>
+        </inkml:channelProperties>
+      </inkml:inkSource>
+      <inkml:timestamp xml:id="ts0" timeString="2026-04-26T04:09:07.317"/>
+    </inkml:context>
+    <inkml:brush xml:id="br0">
+      <inkml:brushProperty name="width" value="0.035" units="cm"/>
+      <inkml:brushProperty name="height" value="0.035" units="cm"/>
+      <inkml:brushProperty name="color" value="#E71224"/>
+    </inkml:brush>
+  </inkml:definitions>
+  <inkml:trace contextRef="#ctx0" brushRef="#br0">1 1522 24575,'68'1'0,"78"-2"0,-136-1 0,1 1 0,-1-1 0,0-1 0,0 1 0,0-2 0,0 0 0,-1 0 0,14-8 0,8-7 0,31-26 0,-24 17 0,200-125 0,-214 139 0,0-1 0,-1-2 0,0 0 0,-2-1 0,32-33 0,-31 29 0,1 1 0,0 0 0,2 2 0,1 1 0,33-17 0,-28 15 0,35-28 0,-37 26 0,40-24 0,180-101 0,-218 130 0,2 0 0,59-20 0,-66 28 0,0-1 0,0-1 0,-1-2 0,-1 0 0,0-1 0,26-21 0,-15 5 0,16-14 0,50-54 0,10-10 0,-106 103 0,38-39 0,-27 28 0,32-28 0,-8 11 0,-30 23 0,2 0 0,-1 1 0,2 1 0,-1 0 0,17-8 0,21-8-1365,-35 15-5461</inkml:trace>
+</inkml:ink>
+</file>
+
+<file path=ppt/ink/ink31.xml><?xml version="1.0" encoding="utf-8"?>
+<inkml:ink xmlns:inkml="http://www.w3.org/2003/InkML">
+  <inkml:definitions>
+    <inkml:context xml:id="ctx0">
+      <inkml:inkSource xml:id="inkSrc0">
+        <inkml:traceFormat>
+          <inkml:channel name="X" type="integer" min="-2.14748E9" max="2.14748E9" units="cm"/>
+          <inkml:channel name="Y" type="integer" min="-2.14748E9" max="2.14748E9" units="cm"/>
+          <inkml:channel name="F" type="integer" max="32767" units="dev"/>
+        </inkml:traceFormat>
+        <inkml:channelProperties>
+          <inkml:channelProperty channel="X" name="resolution" value="1000" units="1/cm"/>
+          <inkml:channelProperty channel="Y" name="resolution" value="1000" units="1/cm"/>
+          <inkml:channelProperty channel="F" name="resolution" value="0" units="1/dev"/>
+        </inkml:channelProperties>
+      </inkml:inkSource>
+      <inkml:timestamp xml:id="ts0" timeString="2026-04-26T04:09:07.318"/>
+    </inkml:context>
+    <inkml:brush xml:id="br0">
+      <inkml:brushProperty name="width" value="0.035" units="cm"/>
+      <inkml:brushProperty name="height" value="0.035" units="cm"/>
+      <inkml:brushProperty name="color" value="#E71224"/>
+    </inkml:brush>
+  </inkml:definitions>
+  <inkml:trace contextRef="#ctx0" brushRef="#br0">0 1555 24575,'1'-6'0,"-1"1"0,1 0 0,0 0 0,0-1 0,0 1 0,1 0 0,0 0 0,0 0 0,0 0 0,1 1 0,-1-1 0,1 0 0,0 1 0,1 0 0,-1 0 0,1 0 0,6-5 0,6-4 0,0 0 0,1 1 0,23-10 0,-30 16 0,171-86 0,-84 45 0,116-47 0,-147 67 0,118-65 0,-120 58 0,127-78 0,-139 77 0,55-50 0,-24 18 0,102-85 0,-151 122 0,36-25 0,-37 30 0,49-48 0,-58 49 0,-10 11 0,-1-1 0,21-29 0,-13 12 0,1 0 0,29-30 0,10 2 62,-34 35-775,29-36-1,-42 42-6112</inkml:trace>
+</inkml:ink>
+</file>
+
+<file path=ppt/ink/ink32.xml><?xml version="1.0" encoding="utf-8"?>
+<inkml:ink xmlns:inkml="http://www.w3.org/2003/InkML">
+  <inkml:definitions>
+    <inkml:context xml:id="ctx0">
+      <inkml:inkSource xml:id="inkSrc0">
+        <inkml:traceFormat>
+          <inkml:channel name="X" type="integer" min="-2.14748E9" max="2.14748E9" units="cm"/>
+          <inkml:channel name="Y" type="integer" min="-2.14748E9" max="2.14748E9" units="cm"/>
+          <inkml:channel name="F" type="integer" max="32767" units="dev"/>
+        </inkml:traceFormat>
+        <inkml:channelProperties>
+          <inkml:channelProperty channel="X" name="resolution" value="1000" units="1/cm"/>
+          <inkml:channelProperty channel="Y" name="resolution" value="1000" units="1/cm"/>
+          <inkml:channelProperty channel="F" name="resolution" value="0" units="1/dev"/>
+        </inkml:channelProperties>
+      </inkml:inkSource>
+      <inkml:timestamp xml:id="ts0" timeString="2026-04-26T04:09:21.172"/>
+    </inkml:context>
+    <inkml:brush xml:id="br0">
+      <inkml:brushProperty name="width" value="0.035" units="cm"/>
+      <inkml:brushProperty name="height" value="0.035" units="cm"/>
+      <inkml:brushProperty name="color" value="#E71224"/>
+    </inkml:brush>
+  </inkml:definitions>
+  <inkml:trace contextRef="#ctx0" brushRef="#br0">92 1723 24575,'0'-1496'0,"-1"1488"0,1-1 0,-1 0 0,-1 0 0,1 1 0,-2-1 0,1 1 0,-1-1 0,0 1 0,-1 0 0,0 0 0,0 1 0,-9-13 0,9 13 22,0 0 0,1-1 0,-1 0 0,-1-9 0,3 10-268,-1 0 0,1 0 0,-1 1 1,-1-1-1,-5-8 0,1 5-6580</inkml:trace>
+</inkml:ink>
+</file>
+
+<file path=ppt/ink/ink33.xml><?xml version="1.0" encoding="utf-8"?>
+<inkml:ink xmlns:inkml="http://www.w3.org/2003/InkML">
+  <inkml:definitions>
+    <inkml:context xml:id="ctx0">
+      <inkml:inkSource xml:id="inkSrc0">
+        <inkml:traceFormat>
+          <inkml:channel name="X" type="integer" min="-2.14748E9" max="2.14748E9" units="cm"/>
+          <inkml:channel name="Y" type="integer" min="-2.14748E9" max="2.14748E9" units="cm"/>
+          <inkml:channel name="F" type="integer" max="32767" units="dev"/>
+        </inkml:traceFormat>
+        <inkml:channelProperties>
+          <inkml:channelProperty channel="X" name="resolution" value="1000" units="1/cm"/>
+          <inkml:channelProperty channel="Y" name="resolution" value="1000" units="1/cm"/>
+          <inkml:channelProperty channel="F" name="resolution" value="0" units="1/dev"/>
+        </inkml:channelProperties>
+      </inkml:inkSource>
+      <inkml:timestamp xml:id="ts0" timeString="2026-04-26T04:09:07.316"/>
+    </inkml:context>
+    <inkml:brush xml:id="br0">
+      <inkml:brushProperty name="width" value="0.035" units="cm"/>
+      <inkml:brushProperty name="height" value="0.035" units="cm"/>
+      <inkml:brushProperty name="color" value="#E71224"/>
+    </inkml:brush>
+  </inkml:definitions>
+  <inkml:trace contextRef="#ctx0" brushRef="#br0">1 0 24575</inkml:trace>
+</inkml:ink>
+</file>
+
+<file path=ppt/ink/ink34.xml><?xml version="1.0" encoding="utf-8"?>
+<inkml:ink xmlns:inkml="http://www.w3.org/2003/InkML">
+  <inkml:definitions>
+    <inkml:context xml:id="ctx0">
+      <inkml:inkSource xml:id="inkSrc0">
+        <inkml:traceFormat>
+          <inkml:channel name="X" type="integer" min="-2.14748E9" max="2.14748E9" units="cm"/>
+          <inkml:channel name="Y" type="integer" min="-2.14748E9" max="2.14748E9" units="cm"/>
+          <inkml:channel name="F" type="integer" max="32767" units="dev"/>
+        </inkml:traceFormat>
+        <inkml:channelProperties>
+          <inkml:channelProperty channel="X" name="resolution" value="1000" units="1/cm"/>
+          <inkml:channelProperty channel="Y" name="resolution" value="1000" units="1/cm"/>
+          <inkml:channelProperty channel="F" name="resolution" value="0" units="1/dev"/>
+        </inkml:channelProperties>
+      </inkml:inkSource>
+      <inkml:timestamp xml:id="ts0" timeString="2026-04-26T04:09:07.319"/>
+    </inkml:context>
+    <inkml:brush xml:id="br0">
+      <inkml:brushProperty name="width" value="0.035" units="cm"/>
+      <inkml:brushProperty name="height" value="0.035" units="cm"/>
+      <inkml:brushProperty name="color" value="#E71224"/>
+    </inkml:brush>
+  </inkml:definitions>
+  <inkml:trace contextRef="#ctx0" brushRef="#br0">1 1 24575,'1'0'0,"1"1"0,-1 0 0,1 0 0,-1 0 0,1 0 0,-1 0 0,0 0 0,1 0 0,-1 0 0,0 1 0,0-1 0,0 1 0,0-1 0,0 0 0,0 1 0,0 0 0,-1-1 0,1 1 0,-1-1 0,1 4 0,2 0 0,7 20 0,0 1 0,-2 0 0,-1 0 0,5 32 0,3 111 0,-9-106 0,20 89 0,-15-96 0,-2 1 0,3 72 0,-13 601-7198,0-294 3893,1-193 4114,0 647 7228,0-509-7745,0-363-7118</inkml:trace>
+</inkml:ink>
+</file>
+
+<file path=ppt/ink/ink35.xml><?xml version="1.0" encoding="utf-8"?>
+<inkml:ink xmlns:inkml="http://www.w3.org/2003/InkML">
+  <inkml:definitions>
+    <inkml:context xml:id="ctx0">
+      <inkml:inkSource xml:id="inkSrc0">
+        <inkml:traceFormat>
+          <inkml:channel name="X" type="integer" min="-2.14748E9" max="2.14748E9" units="cm"/>
+          <inkml:channel name="Y" type="integer" min="-2.14748E9" max="2.14748E9" units="cm"/>
+          <inkml:channel name="F" type="integer" max="32767" units="dev"/>
+        </inkml:traceFormat>
+        <inkml:channelProperties>
+          <inkml:channelProperty channel="X" name="resolution" value="1000" units="1/cm"/>
+          <inkml:channelProperty channel="Y" name="resolution" value="1000" units="1/cm"/>
+          <inkml:channelProperty channel="F" name="resolution" value="0" units="1/dev"/>
+        </inkml:channelProperties>
+      </inkml:inkSource>
+      <inkml:timestamp xml:id="ts0" timeString="2026-04-26T04:18:42.106"/>
+    </inkml:context>
+    <inkml:brush xml:id="br0">
+      <inkml:brushProperty name="width" value="0.035" units="cm"/>
+      <inkml:brushProperty name="height" value="0.035" units="cm"/>
+      <inkml:brushProperty name="color" value="#E71224"/>
+    </inkml:brush>
+  </inkml:definitions>
+  <inkml:trace contextRef="#ctx0" brushRef="#br0">23 1 24575,'0'3060'0,"-2"-3031"0,-7 47 0,4-47 0,-2 44 0,8 119-1365,-1-173-5461</inkml:trace>
+</inkml:ink>
+</file>
+
+<file path=ppt/ink/ink36.xml><?xml version="1.0" encoding="utf-8"?>
+<inkml:ink xmlns:inkml="http://www.w3.org/2003/InkML">
+  <inkml:definitions>
+    <inkml:context xml:id="ctx0">
+      <inkml:inkSource xml:id="inkSrc0">
+        <inkml:traceFormat>
+          <inkml:channel name="X" type="integer" min="-2.14748E9" max="2.14748E9" units="cm"/>
+          <inkml:channel name="Y" type="integer" min="-2.14748E9" max="2.14748E9" units="cm"/>
+          <inkml:channel name="F" type="integer" max="32767" units="dev"/>
+        </inkml:traceFormat>
+        <inkml:channelProperties>
+          <inkml:channelProperty channel="X" name="resolution" value="1000" units="1/cm"/>
+          <inkml:channelProperty channel="Y" name="resolution" value="1000" units="1/cm"/>
+          <inkml:channelProperty channel="F" name="resolution" value="0" units="1/dev"/>
+        </inkml:channelProperties>
+      </inkml:inkSource>
+      <inkml:timestamp xml:id="ts0" timeString="2026-04-26T04:18:42.107"/>
+    </inkml:context>
+    <inkml:brush xml:id="br0">
+      <inkml:brushProperty name="width" value="0.035" units="cm"/>
+      <inkml:brushProperty name="height" value="0.035" units="cm"/>
+      <inkml:brushProperty name="color" value="#E71224"/>
+    </inkml:brush>
+  </inkml:definitions>
+  <inkml:trace contextRef="#ctx0" brushRef="#br0">0 1418 24575,'35'1'0,"0"-2"0,0-2 0,-1-1 0,1-2 0,-1-1 0,53-19 0,-35 7 0,-30 12 0,1 0 0,-1-2 0,-1-1 0,1-1 0,-2-1 0,30-21 0,-37 22 0,13-13 0,2 2 0,56-36 0,36-14 0,66-34 0,-138 80 0,60-41 0,-71 42 0,1 1 0,76-34 0,-76 40 0,-1-1 0,-1-2 0,51-38 0,-52 35 0,56-30 0,-68 42 0,-1 0 0,-1-1 0,0-1 0,35-32 0,-42 31 0,2 1 0,0 0 0,0 1 0,22-13 0,0 0 0,-2-1 0,-1-2 0,-1-1 0,30-37 0,-22 25 0,-5 8-168,2 3-1,80-52 1,-87 63-692,-21 12-5966</inkml:trace>
+</inkml:ink>
+</file>
+
+<file path=ppt/ink/ink37.xml><?xml version="1.0" encoding="utf-8"?>
+<inkml:ink xmlns:inkml="http://www.w3.org/2003/InkML">
+  <inkml:definitions>
+    <inkml:context xml:id="ctx0">
+      <inkml:inkSource xml:id="inkSrc0">
+        <inkml:traceFormat>
+          <inkml:channel name="X" type="integer" min="-2.14748E9" max="2.14748E9" units="cm"/>
+          <inkml:channel name="Y" type="integer" min="-2.14748E9" max="2.14748E9" units="cm"/>
+          <inkml:channel name="F" type="integer" max="32767" units="dev"/>
+        </inkml:traceFormat>
+        <inkml:channelProperties>
+          <inkml:channelProperty channel="X" name="resolution" value="1000" units="1/cm"/>
+          <inkml:channelProperty channel="Y" name="resolution" value="1000" units="1/cm"/>
+          <inkml:channelProperty channel="F" name="resolution" value="0" units="1/dev"/>
+        </inkml:channelProperties>
+      </inkml:inkSource>
+      <inkml:timestamp xml:id="ts0" timeString="2026-04-26T04:18:42.108"/>
+    </inkml:context>
+    <inkml:brush xml:id="br0">
+      <inkml:brushProperty name="width" value="0.035" units="cm"/>
+      <inkml:brushProperty name="height" value="0.035" units="cm"/>
+      <inkml:brushProperty name="color" value="#E71224"/>
+    </inkml:brush>
+  </inkml:definitions>
+  <inkml:trace contextRef="#ctx0" brushRef="#br0">1 1485 24575,'9'-9'0,"1"1"0,0 1 0,20-11 0,2-2 0,38-26 0,-32 22 0,-1-1 0,44-40 0,22-24 0,117-77 0,-22 20 0,-81 56 0,248-143 0,-323 211 0,-6 3 0,56-38 0,-72 44 0,0 0 0,1 2 0,35-15 0,-40 19 0,95-52 0,-77 44 0,-20 10 0,1-1 0,-1-1 0,-1-1 0,1 0 0,23-19 0,-34 24-5,0 0-1,-1 0 0,1 0 0,-1 0 1,0-1-1,0 0 0,0 1 1,-1-1-1,1 0 0,-1 0 1,0 1-1,2-9 0,-2-1 73,0 1 0,-2-24 0,2-21-298,-1 53 126,1 0 0,0 0 0,0 0-1,0 0 1,1 0 0,-1 0 0,1 0 0,0 0 0,0 1 0,0-1 0,4-4 0,7-5-6721</inkml:trace>
+</inkml:ink>
+</file>
+
+<file path=ppt/ink/ink38.xml><?xml version="1.0" encoding="utf-8"?>
+<inkml:ink xmlns:inkml="http://www.w3.org/2003/InkML">
+  <inkml:definitions>
+    <inkml:context xml:id="ctx0">
+      <inkml:inkSource xml:id="inkSrc0">
+        <inkml:traceFormat>
+          <inkml:channel name="X" type="integer" min="-2.14748E9" max="2.14748E9" units="cm"/>
+          <inkml:channel name="Y" type="integer" min="-2.14748E9" max="2.14748E9" units="cm"/>
+          <inkml:channel name="F" type="integer" max="32767" units="dev"/>
+        </inkml:traceFormat>
+        <inkml:channelProperties>
+          <inkml:channelProperty channel="X" name="resolution" value="1000" units="1/cm"/>
+          <inkml:channelProperty channel="Y" name="resolution" value="1000" units="1/cm"/>
+          <inkml:channelProperty channel="F" name="resolution" value="0" units="1/dev"/>
+        </inkml:channelProperties>
+      </inkml:inkSource>
+      <inkml:timestamp xml:id="ts0" timeString="2026-04-26T04:18:42.109"/>
+    </inkml:context>
+    <inkml:brush xml:id="br0">
+      <inkml:brushProperty name="width" value="0.035" units="cm"/>
+      <inkml:brushProperty name="height" value="0.035" units="cm"/>
+      <inkml:brushProperty name="color" value="#E71224"/>
+    </inkml:brush>
+  </inkml:definitions>
+  <inkml:trace contextRef="#ctx0" brushRef="#br0">255 0 24575,'-3'0'0,"-5"4"0,-6 0 0,-2 1 0,0 2 0,0 0 0,2 3 0,1 0 0,-2-2 0,-2-3 0,-2-1 0,0-3 0,2 4 0,0-1 0,0 0 0,-1 0 0,3-2-8191</inkml:trace>
+</inkml:ink>
+</file>
+
+<file path=ppt/ink/ink39.xml><?xml version="1.0" encoding="utf-8"?>
+<inkml:ink xmlns:inkml="http://www.w3.org/2003/InkML">
+  <inkml:definitions>
+    <inkml:context xml:id="ctx0">
+      <inkml:inkSource xml:id="inkSrc0">
+        <inkml:traceFormat>
+          <inkml:channel name="X" type="integer" min="-2.14748E9" max="2.14748E9" units="cm"/>
+          <inkml:channel name="Y" type="integer" min="-2.14748E9" max="2.14748E9" units="cm"/>
+          <inkml:channel name="F" type="integer" max="32767" units="dev"/>
+        </inkml:traceFormat>
+        <inkml:channelProperties>
+          <inkml:channelProperty channel="X" name="resolution" value="1000" units="1/cm"/>
+          <inkml:channelProperty channel="Y" name="resolution" value="1000" units="1/cm"/>
+          <inkml:channelProperty channel="F" name="resolution" value="0" units="1/dev"/>
+        </inkml:channelProperties>
+      </inkml:inkSource>
+      <inkml:timestamp xml:id="ts0" timeString="2026-04-26T04:18:42.110"/>
+    </inkml:context>
+    <inkml:brush xml:id="br0">
+      <inkml:brushProperty name="width" value="0.035" units="cm"/>
+      <inkml:brushProperty name="height" value="0.035" units="cm"/>
+      <inkml:brushProperty name="color" value="#E71224"/>
+    </inkml:brush>
+  </inkml:definitions>
+  <inkml:trace contextRef="#ctx0" brushRef="#br0">1 77 24575,'6'-7'0,"1"-1"0,1 0 0,1 0 0,10-7 0,-15 12 0,0 0 0,1 1 0,-1 0 0,1 0 0,0 0 0,0 1 0,0 0 0,0-1 0,9 1 0,54-2 0,-39 2 0,29-4 0,-48 4 0,0 0 0,20 1 0,-29 0 0,1 0 0,0 0 0,-1 1 0,1-1 0,0 0 0,-1 1 0,1-1 0,-1 1 0,1 0 0,-1-1 0,1 1 0,1 1 0,-3-1 0,1-1 0,-1 1 0,0-1 0,1 1 0,-1 0 0,0-1 0,0 1 0,1-1 0,-1 1 0,0 0 0,0-1 0,0 1 0,0 0 0,0-1 0,0 1 0,0-1 0,0 1 0,0 0 0,0-1 0,0 1 0,0 0 0,0-1 0,0 1 0,-1 0 0,1-1 0,0 1 0,-1-1 0,1 1 0,0-1 0,-1 1 0,0 0 0,-2 2 0,0 0 0,0 0 0,-1 0 0,1-1 0,-1 1 0,0-1 0,1 0 0,-1 0 0,0-1 0,0 1 0,-1-1 0,1 0 0,-6 1 0,-16 6 0,-72 31-1365,80-32-5461</inkml:trace>
+</inkml:ink>
+</file>
+
+<file path=ppt/ink/ink4.xml><?xml version="1.0" encoding="utf-8"?>
+<inkml:ink xmlns:inkml="http://www.w3.org/2003/InkML">
+  <inkml:definitions>
+    <inkml:context xml:id="ctx0">
+      <inkml:inkSource xml:id="inkSrc0">
+        <inkml:traceFormat>
+          <inkml:channel name="X" type="integer" min="-2.14748E9" max="2.14748E9" units="cm"/>
+          <inkml:channel name="Y" type="integer" min="-2.14748E9" max="2.14748E9" units="cm"/>
+          <inkml:channel name="F" type="integer" max="32767" units="dev"/>
+        </inkml:traceFormat>
+        <inkml:channelProperties>
+          <inkml:channelProperty channel="X" name="resolution" value="1000" units="1/cm"/>
+          <inkml:channelProperty channel="Y" name="resolution" value="1000" units="1/cm"/>
+          <inkml:channelProperty channel="F" name="resolution" value="0" units="1/dev"/>
+        </inkml:channelProperties>
+      </inkml:inkSource>
+      <inkml:timestamp xml:id="ts0" timeString="2026-04-26T04:02:35.372"/>
+    </inkml:context>
+    <inkml:brush xml:id="br0">
+      <inkml:brushProperty name="width" value="0.035" units="cm"/>
+      <inkml:brushProperty name="height" value="0.035" units="cm"/>
+      <inkml:brushProperty name="color" value="#E71224"/>
+    </inkml:brush>
+  </inkml:definitions>
+  <inkml:trace contextRef="#ctx0" brushRef="#br0">23 1 24575,'0'3060'0,"-2"-3031"0,-7 47 0,4-47 0,-2 44 0,8 119-1365,-1-173-5461</inkml:trace>
+</inkml:ink>
+</file>
+
+<file path=ppt/ink/ink40.xml><?xml version="1.0" encoding="utf-8"?>
+<inkml:ink xmlns:inkml="http://www.w3.org/2003/InkML">
+  <inkml:definitions>
+    <inkml:context xml:id="ctx0">
+      <inkml:inkSource xml:id="inkSrc0">
+        <inkml:traceFormat>
+          <inkml:channel name="X" type="integer" min="-2.14748E9" max="2.14748E9" units="cm"/>
+          <inkml:channel name="Y" type="integer" min="-2.14748E9" max="2.14748E9" units="cm"/>
+          <inkml:channel name="F" type="integer" max="32767" units="dev"/>
+        </inkml:traceFormat>
+        <inkml:channelProperties>
+          <inkml:channelProperty channel="X" name="resolution" value="1000" units="1/cm"/>
+          <inkml:channelProperty channel="Y" name="resolution" value="1000" units="1/cm"/>
+          <inkml:channelProperty channel="F" name="resolution" value="0" units="1/dev"/>
+        </inkml:channelProperties>
+      </inkml:inkSource>
+      <inkml:timestamp xml:id="ts0" timeString="2026-04-26T04:18:42.111"/>
+    </inkml:context>
+    <inkml:brush xml:id="br0">
+      <inkml:brushProperty name="width" value="0.035" units="cm"/>
+      <inkml:brushProperty name="height" value="0.035" units="cm"/>
+      <inkml:brushProperty name="color" value="#E71224"/>
+    </inkml:brush>
+  </inkml:definitions>
+  <inkml:trace contextRef="#ctx0" brushRef="#br0">22 1 24575,'-2'3'0,"0"0"0,0 0 0,0 1 0,0-1 0,0 1 0,1-1 0,-1 1 0,1 0 0,0 0 0,0 0 0,0 7 0,-1 49 0,2-43 0,0 893 96,1-409-1557,-1-483-5365</inkml:trace>
+</inkml:ink>
+</file>
+
+<file path=ppt/ink/ink41.xml><?xml version="1.0" encoding="utf-8"?>
+<inkml:ink xmlns:inkml="http://www.w3.org/2003/InkML">
+  <inkml:definitions>
+    <inkml:context xml:id="ctx0">
+      <inkml:inkSource xml:id="inkSrc0">
+        <inkml:traceFormat>
+          <inkml:channel name="X" type="integer" min="-2.14748E9" max="2.14748E9" units="cm"/>
+          <inkml:channel name="Y" type="integer" min="-2.14748E9" max="2.14748E9" units="cm"/>
+          <inkml:channel name="F" type="integer" max="32767" units="dev"/>
+        </inkml:traceFormat>
+        <inkml:channelProperties>
+          <inkml:channelProperty channel="X" name="resolution" value="1000" units="1/cm"/>
+          <inkml:channelProperty channel="Y" name="resolution" value="1000" units="1/cm"/>
+          <inkml:channelProperty channel="F" name="resolution" value="0" units="1/dev"/>
+        </inkml:channelProperties>
+      </inkml:inkSource>
+      <inkml:timestamp xml:id="ts0" timeString="2026-04-26T04:18:42.112"/>
+    </inkml:context>
+    <inkml:brush xml:id="br0">
+      <inkml:brushProperty name="width" value="0.035" units="cm"/>
+      <inkml:brushProperty name="height" value="0.035" units="cm"/>
+      <inkml:brushProperty name="color" value="#E71224"/>
+    </inkml:brush>
+  </inkml:definitions>
+  <inkml:trace contextRef="#ctx0" brushRef="#br0">0 1 24575,'4'0'0,"-1"-1"0,1 1 0,-1 1 0,1-1 0,-1 0 0,1 1 0,-1 0 0,0 0 0,1 0 0,-1 0 0,0 0 0,0 0 0,0 1 0,0 0 0,0 0 0,0 0 0,0 0 0,0 0 0,-1 0 0,1 1 0,-1-1 0,0 1 0,0 0 0,0 0 0,0-1 0,0 1 0,0 1 0,-1-1 0,0 0 0,2 4 0,3 8 0,-2 1 0,1-1 0,-2 1 0,3 20 0,-3-15 0,10 37 0,-6-32 0,-1 1 0,-1 0 0,3 49 0,-7 84 0,-2-87 0,-1 897 845,2-554-3152,0-70-4856,0-335 8307,-1-1 0,0 1-1,-1-1 1,0 1 0,-1-1 0,-5 12 0,-29 59-171,27-62-1044,0 1 0,2 0 0,0 0 0,-6 26 0,10-16 71,1 0 0,2 0 0,3 46 0,1-7 0,-3 465-1365,0-516-5461</inkml:trace>
+</inkml:ink>
+</file>
+
+<file path=ppt/ink/ink42.xml><?xml version="1.0" encoding="utf-8"?>
+<inkml:ink xmlns:inkml="http://www.w3.org/2003/InkML">
+  <inkml:definitions>
+    <inkml:context xml:id="ctx0">
+      <inkml:inkSource xml:id="inkSrc0">
+        <inkml:traceFormat>
+          <inkml:channel name="X" type="integer" min="-2.14748E9" max="2.14748E9" units="cm"/>
+          <inkml:channel name="Y" type="integer" min="-2.14748E9" max="2.14748E9" units="cm"/>
+          <inkml:channel name="F" type="integer" max="32767" units="dev"/>
+        </inkml:traceFormat>
+        <inkml:channelProperties>
+          <inkml:channelProperty channel="X" name="resolution" value="1000" units="1/cm"/>
+          <inkml:channelProperty channel="Y" name="resolution" value="1000" units="1/cm"/>
+          <inkml:channelProperty channel="F" name="resolution" value="0" units="1/dev"/>
+        </inkml:channelProperties>
+      </inkml:inkSource>
+      <inkml:timestamp xml:id="ts0" timeString="2026-04-26T04:18:42.113"/>
+    </inkml:context>
+    <inkml:brush xml:id="br0">
+      <inkml:brushProperty name="width" value="0.035" units="cm"/>
+      <inkml:brushProperty name="height" value="0.035" units="cm"/>
+    </inkml:brush>
+  </inkml:definitions>
+  <inkml:trace contextRef="#ctx0" brushRef="#br0">25 7367 24575,'4'-232'0,"42"-289"0,-36 450 0,49-388 0,-49-50 0,-12 310 0,2-224-6253,0-213 11482,0 290-2897,0 116-3640,-4 91 1308,-6 1 0,-53-255 0,37 266 0,5 0 0,-7-231 0,29-596 0,1 355 0,-2-201 0,0 797 0,0 0 0,0 0 0,0 0 0,0 0 0,1 0 0,-1 1 0,1-1 0,0 0 0,0 0 0,0 0 0,0 0 0,0 1 0,0-1 0,1 0 0,2-2 0,-2 3 0,0 0 0,0 1 0,1-1 0,-1 1 0,1 0 0,-1-1 0,1 1 0,-1 0 0,1 0 0,0 1 0,0-1 0,-1 0 0,1 1 0,0 0 0,0 0 0,3 0 0,28-1 0,1 0 0,0-1 0,38-7 0,-7-3 0,106-3 0,68 13 0,-148 3 0,2283 2-7018,4-4 8059,-371 0 4936,-2003 2-5977,-1-1 0,0 1 0,1 0 0,-1 0 0,1 0 0,-1 0 0,0 1 0,0-1 0,0 1 0,0 1 0,0-1 0,0 0 0,-1 1 0,1 0 0,-1 0 0,1 0 0,-1 0 0,0 0 0,0 1 0,-1-1 0,1 1 0,3 6 0,4 9 0,-1 0 0,-1 1 0,10 32 0,-8-20 0,114 388 0,-23 6 0,9 36 0,-24-150 0,16 61 0,-76-258 0,14 166 0,-14 120 0,-21-290 0,11 570-11482,-18-224 9455,0-48 8752,3 7-7216,-3 465 7172,-4-693-6681,-40 247 0,14-82 130,31 0 347,1-317-490,0-33 13,0 1 0,0-1 0,0 0 0,0 0 0,-1 1 0,1-1 0,-1 0 0,0 0 0,0 0 0,0 0 0,-2 4 0,1-6 0,1 1 0,-1-1 0,1 1 0,-1-1 0,1 0 0,-1 1 0,0-1 0,1 0 0,-1 0 0,0 0 0,0-1 0,0 1 0,0 0 0,0-1 0,0 1 0,0-1 0,0 1 0,0-1 0,-3 0 0,-204-1 0,149-1 0,-30-4 6,-101-19 0,-90-31-274,142 26-212,-199-33 431,-2 14-1,-494-7 1,-195 38 786,667 0-576,-149-3-175,-698 18 14,636 5 0,317-12 0,-332-55 0,439 47 0,-199 1 0,-44-12 0,379 28 0,-20-4 0,0 2 0,-58 1 0,89 2 9,1 0 1,-1 0-1,0 1 0,0-1 0,1 0 1,-1 1-1,0-1 0,1 1 0,-1 0 0,1 0 1,-1 0-1,-1 1 0,3-2-43,-1 0 0,1 1 1,0-1-1,0 1 0,-1-1 0,1 1 1,0-1-1,0 1 0,0-1 0,0 1 1,0-1-1,0 1 0,0-1 0,0 1 1,0-1-1,0 1 0,0-1 0,0 1 1,0-1-1,0 1 0,0-1 0,0 0 1,1 1-1,-1-1 0,0 1 0,0-1 1,1 1-1,-1-1 0,0 0 0,1 1 1,-1-1-1,0 1 0,1-1 0,-1 0 1,0 0-1,1 1 0,-1-1 0,1 0 1,-1 0-1,0 1 0,1-1 0,-1 0 1,1 0-1,11 8-6792</inkml:trace>
+</inkml:ink>
+</file>
+
+<file path=ppt/ink/ink43.xml><?xml version="1.0" encoding="utf-8"?>
+<inkml:ink xmlns:inkml="http://www.w3.org/2003/InkML">
+  <inkml:definitions>
+    <inkml:context xml:id="ctx0">
+      <inkml:inkSource xml:id="inkSrc0">
+        <inkml:traceFormat>
+          <inkml:channel name="X" type="integer" min="-2.14748E9" max="2.14748E9" units="cm"/>
+          <inkml:channel name="Y" type="integer" min="-2.14748E9" max="2.14748E9" units="cm"/>
+          <inkml:channel name="F" type="integer" max="32767" units="dev"/>
+        </inkml:traceFormat>
+        <inkml:channelProperties>
+          <inkml:channelProperty channel="X" name="resolution" value="1000" units="1/cm"/>
+          <inkml:channelProperty channel="Y" name="resolution" value="1000" units="1/cm"/>
+          <inkml:channelProperty channel="F" name="resolution" value="0" units="1/dev"/>
+        </inkml:channelProperties>
+      </inkml:inkSource>
+      <inkml:timestamp xml:id="ts0" timeString="2026-04-26T04:09:44.054"/>
+    </inkml:context>
+    <inkml:brush xml:id="br0">
+      <inkml:brushProperty name="width" value="0.035" units="cm"/>
+      <inkml:brushProperty name="height" value="0.035" units="cm"/>
+      <inkml:brushProperty name="color" value="#E71224"/>
+    </inkml:brush>
+  </inkml:definitions>
+  <inkml:trace contextRef="#ctx0" brushRef="#br0">0 0 24575,'0'0'-8191</inkml:trace>
+</inkml:ink>
+</file>
+
+<file path=ppt/ink/ink44.xml><?xml version="1.0" encoding="utf-8"?>
+<inkml:ink xmlns:inkml="http://www.w3.org/2003/InkML">
+  <inkml:definitions>
+    <inkml:context xml:id="ctx0">
+      <inkml:inkSource xml:id="inkSrc0">
+        <inkml:traceFormat>
+          <inkml:channel name="X" type="integer" min="-2.14748E9" max="2.14748E9" units="cm"/>
+          <inkml:channel name="Y" type="integer" min="-2.14748E9" max="2.14748E9" units="cm"/>
+          <inkml:channel name="F" type="integer" max="32767" units="dev"/>
+        </inkml:traceFormat>
+        <inkml:channelProperties>
+          <inkml:channelProperty channel="X" name="resolution" value="1000" units="1/cm"/>
+          <inkml:channelProperty channel="Y" name="resolution" value="1000" units="1/cm"/>
+          <inkml:channelProperty channel="F" name="resolution" value="0" units="1/dev"/>
+        </inkml:channelProperties>
+      </inkml:inkSource>
+      <inkml:timestamp xml:id="ts0" timeString="2026-04-26T04:10:32.681"/>
+    </inkml:context>
+    <inkml:brush xml:id="br0">
+      <inkml:brushProperty name="width" value="0.035" units="cm"/>
+      <inkml:brushProperty name="height" value="0.035" units="cm"/>
+      <inkml:brushProperty name="color" value="#E71224"/>
+    </inkml:brush>
+  </inkml:definitions>
+  <inkml:trace contextRef="#ctx0" brushRef="#br0">0 348 24575,'144'1'0,"159"-3"0,-43-22 0,-228 18 0,61-19 0,-59 14 0,53-9 0,-58 15 0,-1-2 0,0 0 0,29-13 0,79-40 0,-66 27 0,166-86-1365,-218 109-5461</inkml:trace>
+</inkml:ink>
+</file>
+
+<file path=ppt/ink/ink45.xml><?xml version="1.0" encoding="utf-8"?>
+<inkml:ink xmlns:inkml="http://www.w3.org/2003/InkML">
+  <inkml:definitions>
+    <inkml:context xml:id="ctx0">
+      <inkml:inkSource xml:id="inkSrc0">
+        <inkml:traceFormat>
+          <inkml:channel name="X" type="integer" min="-2.14748E9" max="2.14748E9" units="cm"/>
+          <inkml:channel name="Y" type="integer" min="-2.14748E9" max="2.14748E9" units="cm"/>
+          <inkml:channel name="F" type="integer" max="32767" units="dev"/>
+        </inkml:traceFormat>
+        <inkml:channelProperties>
+          <inkml:channelProperty channel="X" name="resolution" value="1000" units="1/cm"/>
+          <inkml:channelProperty channel="Y" name="resolution" value="1000" units="1/cm"/>
+          <inkml:channelProperty channel="F" name="resolution" value="0" units="1/dev"/>
+        </inkml:channelProperties>
+      </inkml:inkSource>
+      <inkml:timestamp xml:id="ts0" timeString="2026-04-26T04:10:35.744"/>
+    </inkml:context>
+    <inkml:brush xml:id="br0">
+      <inkml:brushProperty name="width" value="0.035" units="cm"/>
+      <inkml:brushProperty name="height" value="0.035" units="cm"/>
+      <inkml:brushProperty name="color" value="#E71224"/>
+    </inkml:brush>
+  </inkml:definitions>
+  <inkml:trace contextRef="#ctx0" brushRef="#br0">1 1 24575,'2'0'0,"1"0"0,-1 0 0,0 0 0,1 1 0,-1-1 0,0 1 0,0-1 0,0 1 0,1 0 0,-1 0 0,0 0 0,0 0 0,0 0 0,0 1 0,0-1 0,-1 0 0,1 1 0,0-1 0,0 1 0,-1 0 0,0 0 0,1 0 0,-1-1 0,0 1 0,0 0 0,2 5 0,1 3 0,-2-1 0,1 2 0,-1-1 0,1 19 0,2 6 0,40 118 0,54 129 0,-31-103 0,-54-139 0,-4-15 0,-2 0 0,0 1 0,-1 0 0,-2 0 0,4 46 0,-9-54 0,1 0 0,0-1 0,2 1 0,0-1 0,1 0 0,6 18 0,-3-11 0,-2 1 0,-1-1 0,-1 1 0,-1-1 0,-1 1 0,-3 37 0,1-28 0,1 0 0,7 53 0,0-27 0,-6-46 0,0-1 0,1 0 0,0 1 0,0-1 0,2 0 0,0-1 0,0 1 0,1-1 0,10 19 0,-8-19 27,0 0-1,-2 1 0,1-1 1,5 23-1,12 26-1523,-17-49-5329</inkml:trace>
+</inkml:ink>
+</file>
+
+<file path=ppt/ink/ink46.xml><?xml version="1.0" encoding="utf-8"?>
+<inkml:ink xmlns:inkml="http://www.w3.org/2003/InkML">
+  <inkml:definitions>
+    <inkml:context xml:id="ctx0">
+      <inkml:inkSource xml:id="inkSrc0">
+        <inkml:traceFormat>
+          <inkml:channel name="X" type="integer" min="-2.14748E9" max="2.14748E9" units="cm"/>
+          <inkml:channel name="Y" type="integer" min="-2.14748E9" max="2.14748E9" units="cm"/>
+          <inkml:channel name="F" type="integer" max="32767" units="dev"/>
+        </inkml:traceFormat>
+        <inkml:channelProperties>
+          <inkml:channelProperty channel="X" name="resolution" value="1000" units="1/cm"/>
+          <inkml:channelProperty channel="Y" name="resolution" value="1000" units="1/cm"/>
+          <inkml:channelProperty channel="F" name="resolution" value="0" units="1/dev"/>
+        </inkml:channelProperties>
+      </inkml:inkSource>
+      <inkml:timestamp xml:id="ts0" timeString="2026-04-26T04:10:27.440"/>
+    </inkml:context>
+    <inkml:brush xml:id="br0">
+      <inkml:brushProperty name="width" value="0.035" units="cm"/>
+      <inkml:brushProperty name="height" value="0.035" units="cm"/>
+      <inkml:brushProperty name="color" value="#E71224"/>
+    </inkml:brush>
+  </inkml:definitions>
+  <inkml:trace contextRef="#ctx0" brushRef="#br0">1267 1 24575,'0'1132'0,"-1"-1111"14,0 1 1,-2-1-1,0 0 0,-1 0 0,-1 0 0,-15 37 0,5-26-321,-1 1 0,-1-2-1,-28 38 1,-6 9-5130,-21 42 5230,10-15 197,-25 44 6653,51-79-6572,-35 93-1,53-115-70,-1 0 0,-3-1 0,-2-1 0,-55 79 0,6-36 462,23-28-6577,-1 13 4874,36-51 1278,-1 0-1,-24 26 1,-32 19 5812,53-52-5693,0 1 0,1 1 0,1 1 0,1 1-1,-20 29 1,12-15-156,18-26 0,1 0 0,0-1 0,0 2 0,-7 15 0,-16 40 0,18-45 0,1 1 0,2 0 0,-7 25 0,1-11 0,10-28 0,1 0 0,-1 0 0,1 0 0,1 0 0,-1 0 0,0 7 0,2-12 0,0 1 0,0 0 0,0-1 0,0 1 0,1-1 0,-1 1 0,1 0 0,-1-1 0,1 1 0,-1-1 0,1 1 0,0-1 0,0 0 0,0 1 0,-1-1 0,1 0 0,1 0 0,-1 1 0,0-1 0,0 0 0,0 0 0,1 0 0,-1 0 0,0-1 0,1 1 0,-1 0 0,1 0 0,1 0 0,1 0-136,-1 0-1,1 0 1,0 0-1,0 0 1,-1-1-1,1 1 1,0-1-1,0 0 0,5-1 1,14-2-6690</inkml:trace>
+</inkml:ink>
+</file>
+
+<file path=ppt/ink/ink47.xml><?xml version="1.0" encoding="utf-8"?>
+<inkml:ink xmlns:inkml="http://www.w3.org/2003/InkML">
+  <inkml:definitions>
+    <inkml:context xml:id="ctx0">
+      <inkml:inkSource xml:id="inkSrc0">
+        <inkml:traceFormat>
+          <inkml:channel name="X" type="integer" min="-2.14748E9" max="2.14748E9" units="cm"/>
+          <inkml:channel name="Y" type="integer" min="-2.14748E9" max="2.14748E9" units="cm"/>
+          <inkml:channel name="F" type="integer" max="32767" units="dev"/>
+        </inkml:traceFormat>
+        <inkml:channelProperties>
+          <inkml:channelProperty channel="X" name="resolution" value="1000" units="1/cm"/>
+          <inkml:channelProperty channel="Y" name="resolution" value="1000" units="1/cm"/>
+          <inkml:channelProperty channel="F" name="resolution" value="0" units="1/dev"/>
+        </inkml:channelProperties>
+      </inkml:inkSource>
+      <inkml:timestamp xml:id="ts0" timeString="2026-04-26T04:10:29.620"/>
+    </inkml:context>
+    <inkml:brush xml:id="br0">
+      <inkml:brushProperty name="width" value="0.035" units="cm"/>
+      <inkml:brushProperty name="height" value="0.035" units="cm"/>
+      <inkml:brushProperty name="color" value="#E71224"/>
+    </inkml:brush>
+  </inkml:definitions>
+  <inkml:trace contextRef="#ctx0" brushRef="#br0">0 0 24575,'1'11'0,"0"0"0,1 0 0,0 0 0,0 0 0,1-1 0,7 17 0,32 60 0,-38-79 0,164 290 0,-46-84 0,113 194 0,-109-213 17,-70-113-1164,124 160-6591,-77-107 5286,55 51 7719,13 18 786,-106-110-6053,116 148 0,-160-219-185,1-2 0,1 0 0,37 26-1,82 43-5357,-55-38 5043,-61-38 1720,0-2-1,0 0 1,1-2-1,1-1 1,50 9-1,25 9-1752,-82-22 533,0-1 0,0-1 0,1 0 0,32-1 0,-33-3 0,0 2 0,-1 1 0,1 1 0,37 9 0,-34-5 0,0 2 0,0 0 0,-1 2 0,36 21 0,-52-28 15,0-1-1,0 1 0,0-2 1,1 1-1,-1-1 1,1 0-1,0 0 1,11 0-1,-11-1-228,1 0 1,-1 1-1,1 0 1,-1 0-1,0 1 1,11 5-1,-7-1-6612</inkml:trace>
+</inkml:ink>
+</file>
+
+<file path=ppt/ink/ink48.xml><?xml version="1.0" encoding="utf-8"?>
+<inkml:ink xmlns:inkml="http://www.w3.org/2003/InkML">
+  <inkml:definitions>
+    <inkml:context xml:id="ctx0">
+      <inkml:inkSource xml:id="inkSrc0">
+        <inkml:traceFormat>
+          <inkml:channel name="X" type="integer" min="-2.14748E9" max="2.14748E9" units="cm"/>
+          <inkml:channel name="Y" type="integer" min="-2.14748E9" max="2.14748E9" units="cm"/>
+          <inkml:channel name="F" type="integer" max="32767" units="dev"/>
+        </inkml:traceFormat>
+        <inkml:channelProperties>
+          <inkml:channelProperty channel="X" name="resolution" value="1000" units="1/cm"/>
+          <inkml:channelProperty channel="Y" name="resolution" value="1000" units="1/cm"/>
+          <inkml:channelProperty channel="F" name="resolution" value="0" units="1/dev"/>
+        </inkml:channelProperties>
+      </inkml:inkSource>
+      <inkml:timestamp xml:id="ts0" timeString="2026-04-26T04:10:42.788"/>
+    </inkml:context>
+    <inkml:brush xml:id="br0">
+      <inkml:brushProperty name="width" value="0.035" units="cm"/>
+      <inkml:brushProperty name="height" value="0.035" units="cm"/>
+      <inkml:brushProperty name="color" value="#E71224"/>
+    </inkml:brush>
+  </inkml:definitions>
+  <inkml:trace contextRef="#ctx0" brushRef="#br0">3260 0 24575,'-1'0'0,"-1"1"0,1-1 0,-1 1 0,1-1 0,0 1 0,-1-1 0,1 1 0,-1 0 0,1 0 0,0-1 0,0 1 0,-1 0 0,1 0 0,0 1 0,-2 1 0,-16 22 0,15-19 0,-3 3 0,0-1 0,0 0 0,-1 0 0,0-1 0,-1 0 0,0 0 0,-15 8 0,-6 1 0,-36 14 0,47-23 0,0 1 0,0 1 0,1 1 0,0 0 0,1 1 0,-20 17 0,26-17 0,2 0 0,-14 21 0,15-21 0,1-1 0,-1 0 0,-19 18 0,-103 99 0,-5 3 0,107-109 0,-58 33 0,-10 7 0,-144 122 0,218-166 0,-25 22 0,-2-3 0,-89 50 0,-2-18 0,25-13 0,-155 100 0,160-67 0,76-59 0,-55 38 0,48-39 0,2 2 0,-44 42 0,62-53 0,0 0 0,0 0 0,1 2 0,2 0 0,-27 38 0,-57 83 0,43-64 0,35-50 0,0 0 0,-2-2 0,-43 35 0,-5 4 0,55-45 0,2 0 0,1 1 0,-16 25 0,13-18 0,-26 32 0,41-56 0,1 1 0,0 0 0,0 0 0,0 0 0,1 1 0,0-1 0,0 0 0,1 1 0,-1 0 0,1-1 0,0 1 0,0 0 0,1-1 0,0 13 0,0-10 0,0 0 0,0-1 0,-1 1 0,-1 0 0,1 0 0,-1-1 0,-4 11 0,-29 44 0,24-44 0,1 0 0,-14 35 0,19-41 0,-1-1 0,1 0 0,-2 0 0,0-1 0,0 1 0,0-1 0,-2-1 0,-12 13 0,19-20 0,-4 5-341,0 0 0,0 1-1,-5 9 1,1 1-6485</inkml:trace>
+</inkml:ink>
+</file>
+
+<file path=ppt/ink/ink49.xml><?xml version="1.0" encoding="utf-8"?>
+<inkml:ink xmlns:inkml="http://www.w3.org/2003/InkML">
+  <inkml:definitions>
+    <inkml:context xml:id="ctx0">
+      <inkml:inkSource xml:id="inkSrc0">
+        <inkml:traceFormat>
+          <inkml:channel name="X" type="integer" min="-2.14748E9" max="2.14748E9" units="cm"/>
+          <inkml:channel name="Y" type="integer" min="-2.14748E9" max="2.14748E9" units="cm"/>
+          <inkml:channel name="F" type="integer" max="32767" units="dev"/>
+        </inkml:traceFormat>
+        <inkml:channelProperties>
+          <inkml:channelProperty channel="X" name="resolution" value="1000" units="1/cm"/>
+          <inkml:channelProperty channel="Y" name="resolution" value="1000" units="1/cm"/>
+          <inkml:channelProperty channel="F" name="resolution" value="0" units="1/dev"/>
+        </inkml:channelProperties>
+      </inkml:inkSource>
+      <inkml:timestamp xml:id="ts0" timeString="2026-04-26T04:10:44.855"/>
+    </inkml:context>
+    <inkml:brush xml:id="br0">
+      <inkml:brushProperty name="width" value="0.035" units="cm"/>
+      <inkml:brushProperty name="height" value="0.035" units="cm"/>
+      <inkml:brushProperty name="color" value="#E71224"/>
+    </inkml:brush>
+  </inkml:definitions>
+  <inkml:trace contextRef="#ctx0" brushRef="#br0">1 1410 24575,'2'2'0,"1"1"0,0-1 0,0-1 0,0 1 0,1 0 0,-1-1 0,0 1 0,0-1 0,1 0 0,-1 0 0,1 0 0,6 0 0,49 1 0,-42-2 0,98 2-211,157-2-6875,-174-3 8730,-74 2 984,38-8 0,25-14-1763,79-39-1333,-34 5 468,-3-6 0,201-133 0,-271 159-2830,1 3 0,2 2 0,110-39 0,-165 68 2837,436-148 11306,-159 36-11313,-207 79 0,1 4 0,125-35 0,66-12 0,-28 8 0,-217 64 0,-1 0 0,1-2 0,-1 0 0,-1-2 0,30-17 0,-44 23 0,0 1 0,1 0 0,0 1 0,18-5 0,-18 6 0,0 0 0,0-1 0,-1 0 0,16-9 0,-6 2 0,-1 2 0,2 0 0,31-9 0,-27 9 0,39-17 0,-45 18 0,1 0 0,1 1 0,-1 1 0,1 1 0,24-3 0,-16 3 0,42-12 0,-44 8-64,-17 6-153,1 0 0,-1-1 0,0 0 1,1 0-1,12-8 0,-8 0-6609</inkml:trace>
+</inkml:ink>
+</file>
+
+<file path=ppt/ink/ink5.xml><?xml version="1.0" encoding="utf-8"?>
+<inkml:ink xmlns:inkml="http://www.w3.org/2003/InkML">
+  <inkml:definitions>
+    <inkml:context xml:id="ctx0">
+      <inkml:inkSource xml:id="inkSrc0">
+        <inkml:traceFormat>
+          <inkml:channel name="X" type="integer" min="-2.14748E9" max="2.14748E9" units="cm"/>
+          <inkml:channel name="Y" type="integer" min="-2.14748E9" max="2.14748E9" units="cm"/>
+          <inkml:channel name="F" type="integer" max="32767" units="dev"/>
+        </inkml:traceFormat>
+        <inkml:channelProperties>
+          <inkml:channelProperty channel="X" name="resolution" value="1000" units="1/cm"/>
+          <inkml:channelProperty channel="Y" name="resolution" value="1000" units="1/cm"/>
+          <inkml:channelProperty channel="F" name="resolution" value="0" units="1/dev"/>
+        </inkml:channelProperties>
+      </inkml:inkSource>
+      <inkml:timestamp xml:id="ts0" timeString="2026-04-26T04:02:35.373"/>
+    </inkml:context>
+    <inkml:brush xml:id="br0">
+      <inkml:brushProperty name="width" value="0.035" units="cm"/>
+      <inkml:brushProperty name="height" value="0.035" units="cm"/>
+      <inkml:brushProperty name="color" value="#E71224"/>
+    </inkml:brush>
+  </inkml:definitions>
+  <inkml:trace contextRef="#ctx0" brushRef="#br0">0 1418 24575,'35'1'0,"0"-2"0,0-2 0,-1-1 0,1-2 0,-1-1 0,53-19 0,-35 7 0,-30 12 0,1 0 0,-1-2 0,-1-1 0,1-1 0,-2-1 0,30-21 0,-37 22 0,13-13 0,2 2 0,56-36 0,36-14 0,66-34 0,-138 80 0,60-41 0,-71 42 0,1 1 0,76-34 0,-76 40 0,-1-1 0,-1-2 0,51-38 0,-52 35 0,56-30 0,-68 42 0,-1 0 0,-1-1 0,0-1 0,35-32 0,-42 31 0,2 1 0,0 0 0,0 1 0,22-13 0,0 0 0,-2-1 0,-1-2 0,-1-1 0,30-37 0,-22 25 0,-5 8-168,2 3-1,80-52 1,-87 63-692,-21 12-5966</inkml:trace>
+</inkml:ink>
+</file>
+
+<file path=ppt/ink/ink6.xml><?xml version="1.0" encoding="utf-8"?>
+<inkml:ink xmlns:inkml="http://www.w3.org/2003/InkML">
+  <inkml:definitions>
+    <inkml:context xml:id="ctx0">
+      <inkml:inkSource xml:id="inkSrc0">
+        <inkml:traceFormat>
+          <inkml:channel name="X" type="integer" min="-2.14748E9" max="2.14748E9" units="cm"/>
+          <inkml:channel name="Y" type="integer" min="-2.14748E9" max="2.14748E9" units="cm"/>
+          <inkml:channel name="F" type="integer" max="32767" units="dev"/>
+        </inkml:traceFormat>
+        <inkml:channelProperties>
+          <inkml:channelProperty channel="X" name="resolution" value="1000" units="1/cm"/>
+          <inkml:channelProperty channel="Y" name="resolution" value="1000" units="1/cm"/>
+          <inkml:channelProperty channel="F" name="resolution" value="0" units="1/dev"/>
+        </inkml:channelProperties>
+      </inkml:inkSource>
+      <inkml:timestamp xml:id="ts0" timeString="2026-04-26T04:02:49.867"/>
+    </inkml:context>
+    <inkml:brush xml:id="br0">
+      <inkml:brushProperty name="width" value="0.035" units="cm"/>
+      <inkml:brushProperty name="height" value="0.035" units="cm"/>
+      <inkml:brushProperty name="color" value="#E71224"/>
+    </inkml:brush>
+  </inkml:definitions>
+  <inkml:trace contextRef="#ctx0" brushRef="#br0">1 1485 24575,'9'-9'0,"1"1"0,0 1 0,20-11 0,2-2 0,38-26 0,-32 22 0,-1-1 0,44-40 0,22-24 0,117-77 0,-22 20 0,-81 56 0,248-143 0,-323 211 0,-6 3 0,56-38 0,-72 44 0,0 0 0,1 2 0,35-15 0,-40 19 0,95-52 0,-77 44 0,-20 10 0,1-1 0,-1-1 0,-1-1 0,1 0 0,23-19 0,-34 24-5,0 0-1,-1 0 0,1 0 0,-1 0 1,0-1-1,0 0 0,0 1 1,-1-1-1,1 0 0,-1 0 1,0 1-1,2-9 0,-2-1 73,0 1 0,-2-24 0,2-21-298,-1 53 126,1 0 0,0 0 0,0 0-1,0 0 1,1 0 0,-1 0 0,1 0 0,0 0 0,0 1 0,0-1 0,4-4 0,7-5-6721</inkml:trace>
+</inkml:ink>
+</file>
+
+<file path=ppt/ink/ink7.xml><?xml version="1.0" encoding="utf-8"?>
+<inkml:ink xmlns:inkml="http://www.w3.org/2003/InkML">
+  <inkml:definitions>
+    <inkml:context xml:id="ctx0">
+      <inkml:inkSource xml:id="inkSrc0">
+        <inkml:traceFormat>
+          <inkml:channel name="X" type="integer" min="-2.14748E9" max="2.14748E9" units="cm"/>
+          <inkml:channel name="Y" type="integer" min="-2.14748E9" max="2.14748E9" units="cm"/>
+          <inkml:channel name="F" type="integer" max="32767" units="dev"/>
+        </inkml:traceFormat>
+        <inkml:channelProperties>
+          <inkml:channelProperty channel="X" name="resolution" value="1000" units="1/cm"/>
+          <inkml:channelProperty channel="Y" name="resolution" value="1000" units="1/cm"/>
+          <inkml:channelProperty channel="F" name="resolution" value="0" units="1/dev"/>
+        </inkml:channelProperties>
+      </inkml:inkSource>
+      <inkml:timestamp xml:id="ts0" timeString="2026-04-26T04:02:51.121"/>
+    </inkml:context>
+    <inkml:brush xml:id="br0">
+      <inkml:brushProperty name="width" value="0.035" units="cm"/>
+      <inkml:brushProperty name="height" value="0.035" units="cm"/>
+      <inkml:brushProperty name="color" value="#E71224"/>
+    </inkml:brush>
+  </inkml:definitions>
+  <inkml:trace contextRef="#ctx0" brushRef="#br0">255 0 24575,'-3'0'0,"-5"4"0,-6 0 0,-2 1 0,0 2 0,0 0 0,2 3 0,1 0 0,-2-2 0,-2-3 0,-2-1 0,0-3 0,2 4 0,0-1 0,0 0 0,-1 0 0,3-2-8191</inkml:trace>
+</inkml:ink>
+</file>
+
+<file path=ppt/ink/ink8.xml><?xml version="1.0" encoding="utf-8"?>
+<inkml:ink xmlns:inkml="http://www.w3.org/2003/InkML">
+  <inkml:definitions>
+    <inkml:context xml:id="ctx0">
+      <inkml:inkSource xml:id="inkSrc0">
+        <inkml:traceFormat>
+          <inkml:channel name="X" type="integer" min="-2.14748E9" max="2.14748E9" units="cm"/>
+          <inkml:channel name="Y" type="integer" min="-2.14748E9" max="2.14748E9" units="cm"/>
+          <inkml:channel name="F" type="integer" max="32767" units="dev"/>
+        </inkml:traceFormat>
+        <inkml:channelProperties>
+          <inkml:channelProperty channel="X" name="resolution" value="1000" units="1/cm"/>
+          <inkml:channelProperty channel="Y" name="resolution" value="1000" units="1/cm"/>
+          <inkml:channelProperty channel="F" name="resolution" value="0" units="1/dev"/>
+        </inkml:channelProperties>
+      </inkml:inkSource>
+      <inkml:timestamp xml:id="ts0" timeString="2026-04-26T04:02:52.661"/>
+    </inkml:context>
+    <inkml:brush xml:id="br0">
+      <inkml:brushProperty name="width" value="0.035" units="cm"/>
+      <inkml:brushProperty name="height" value="0.035" units="cm"/>
+      <inkml:brushProperty name="color" value="#E71224"/>
+    </inkml:brush>
+  </inkml:definitions>
+  <inkml:trace contextRef="#ctx0" brushRef="#br0">1 77 24575,'6'-7'0,"1"-1"0,1 0 0,1 0 0,10-7 0,-15 12 0,0 0 0,1 1 0,-1 0 0,1 0 0,0 0 0,0 1 0,0 0 0,0-1 0,9 1 0,54-2 0,-39 2 0,29-4 0,-48 4 0,0 0 0,20 1 0,-29 0 0,1 0 0,0 0 0,-1 1 0,1-1 0,0 0 0,-1 1 0,1-1 0,-1 1 0,1 0 0,-1-1 0,1 1 0,1 1 0,-3-1 0,1-1 0,-1 1 0,0-1 0,1 1 0,-1 0 0,0-1 0,0 1 0,1-1 0,-1 1 0,0 0 0,0-1 0,0 1 0,0 0 0,0-1 0,0 1 0,0-1 0,0 1 0,0 0 0,0-1 0,0 1 0,0 0 0,0-1 0,0 1 0,-1 0 0,1-1 0,0 1 0,-1-1 0,1 1 0,0-1 0,-1 1 0,0 0 0,-2 2 0,0 0 0,0 0 0,-1 0 0,1-1 0,-1 1 0,0-1 0,1 0 0,-1 0 0,0-1 0,0 1 0,-1-1 0,1 0 0,-6 1 0,-16 6 0,-72 31-1365,80-32-5461</inkml:trace>
+</inkml:ink>
+</file>
+
+<file path=ppt/ink/ink9.xml><?xml version="1.0" encoding="utf-8"?>
+<inkml:ink xmlns:inkml="http://www.w3.org/2003/InkML">
+  <inkml:definitions>
+    <inkml:context xml:id="ctx0">
+      <inkml:inkSource xml:id="inkSrc0">
+        <inkml:traceFormat>
+          <inkml:channel name="X" type="integer" min="-2.14748E9" max="2.14748E9" units="cm"/>
+          <inkml:channel name="Y" type="integer" min="-2.14748E9" max="2.14748E9" units="cm"/>
+          <inkml:channel name="F" type="integer" max="32767" units="dev"/>
+        </inkml:traceFormat>
+        <inkml:channelProperties>
+          <inkml:channelProperty channel="X" name="resolution" value="1000" units="1/cm"/>
+          <inkml:channelProperty channel="Y" name="resolution" value="1000" units="1/cm"/>
+          <inkml:channelProperty channel="F" name="resolution" value="0" units="1/dev"/>
+        </inkml:channelProperties>
+      </inkml:inkSource>
+      <inkml:timestamp xml:id="ts0" timeString="2026-04-26T04:02:59.920"/>
+    </inkml:context>
+    <inkml:brush xml:id="br0">
+      <inkml:brushProperty name="width" value="0.035" units="cm"/>
+      <inkml:brushProperty name="height" value="0.035" units="cm"/>
+      <inkml:brushProperty name="color" value="#E71224"/>
+    </inkml:brush>
+  </inkml:definitions>
+  <inkml:trace contextRef="#ctx0" brushRef="#br0">23 1 24575,'0'3060'0,"-2"-3031"0,-7 47 0,4-47 0,-2 44 0,8 119-1365,-1-173-5461</inkml:trace>
+</inkml:ink>
 </file>
 
 <file path=ppt/slideLayouts/slideLayout1.xml><?xml version="1.0" encoding="utf-8"?>
@@ -4874,6 +6246,754 @@
           </a:prstGeom>
         </p:spPr>
       </p:pic>
+    </p:spTree>
+  </p:cSld>
+  <p:clrMapOvr>
+    <a:masterClrMapping/>
+  </p:clrMapOvr>
+</p:sld>
+</file>
+
+<file path=ppt/slides/slide10.xml><?xml version="1.0" encoding="utf-8"?>
+<p:sld xmlns:a="http://schemas.openxmlformats.org/drawingml/2006/main" xmlns:r="http://schemas.openxmlformats.org/officeDocument/2006/relationships" xmlns:p="http://schemas.openxmlformats.org/presentationml/2006/main">
+  <p:cSld>
+    <p:spTree>
+      <p:nvGrpSpPr>
+        <p:cNvPr id="1" name=""/>
+        <p:cNvGrpSpPr/>
+        <p:nvPr/>
+      </p:nvGrpSpPr>
+      <p:grpSpPr>
+        <a:xfrm>
+          <a:off x="0" y="0"/>
+          <a:ext cx="0" cy="0"/>
+          <a:chOff x="0" y="0"/>
+          <a:chExt cx="0" cy="0"/>
+        </a:xfrm>
+      </p:grpSpPr>
+      <p:sp>
+        <p:nvSpPr>
+          <p:cNvPr id="3" name="Content Placeholder 2">
+            <a:extLst>
+              <a:ext uri="{FF2B5EF4-FFF2-40B4-BE49-F238E27FC236}">
+                <a16:creationId xmlns:a16="http://schemas.microsoft.com/office/drawing/2014/main" id="{4DEED2D6-6D86-41DA-BD6D-E6B4FC599EE1}"/>
+              </a:ext>
+            </a:extLst>
+          </p:cNvPr>
+          <p:cNvSpPr>
+            <a:spLocks noGrp="1"/>
+          </p:cNvSpPr>
+          <p:nvPr>
+            <p:ph idx="1"/>
+          </p:nvPr>
+        </p:nvSpPr>
+        <p:spPr>
+          <a:xfrm>
+            <a:off x="-12700" y="0"/>
+            <a:ext cx="6870700" cy="5486400"/>
+          </a:xfrm>
+        </p:spPr>
+        <p:txBody>
+          <a:bodyPr/>
+          <a:lstStyle/>
+          <a:p>
+            <a:pPr marL="0" indent="0">
+              <a:buNone/>
+            </a:pPr>
+            <a:r>
+              <a:rPr lang="en-US" sz="1800" dirty="0"/>
+              <a:t>Processing: 6</a:t>
+            </a:r>
+          </a:p>
+          <a:p>
+            <a:pPr marL="0" indent="0">
+              <a:buNone/>
+            </a:pPr>
+            <a:r>
+              <a:rPr lang="en-US" sz="1800" dirty="0"/>
+              <a:t>	-&gt; Decrementing </a:t>
+            </a:r>
+            <a:r>
+              <a:rPr lang="en-US" sz="1800" dirty="0" err="1"/>
+              <a:t>predCount</a:t>
+            </a:r>
+            <a:r>
+              <a:rPr lang="en-US" sz="1800" dirty="0"/>
+              <a:t> for 3 (New count: 1)</a:t>
+            </a:r>
+          </a:p>
+          <a:p>
+            <a:pPr marL="0" indent="0">
+              <a:buNone/>
+            </a:pPr>
+            <a:r>
+              <a:rPr lang="en-US" sz="1800" dirty="0"/>
+              <a:t>	-&gt; Decrementing </a:t>
+            </a:r>
+            <a:r>
+              <a:rPr lang="en-US" sz="1800" dirty="0" err="1"/>
+              <a:t>predCount</a:t>
+            </a:r>
+            <a:r>
+              <a:rPr lang="en-US" sz="1800" dirty="0"/>
+              <a:t> for 8 (New count: 0)</a:t>
+            </a:r>
+          </a:p>
+          <a:p>
+            <a:pPr marL="0" indent="0">
+              <a:buNone/>
+            </a:pPr>
+            <a:r>
+              <a:rPr lang="en-US" sz="1800" dirty="0"/>
+              <a:t>	-&gt; 8 hit 0 </a:t>
+            </a:r>
+            <a:r>
+              <a:rPr lang="en-US" sz="1800" dirty="0" err="1"/>
+              <a:t>predCount</a:t>
+            </a:r>
+            <a:r>
+              <a:rPr lang="en-US" sz="1800" dirty="0"/>
+              <a:t>. Adding to queue.</a:t>
+            </a:r>
+          </a:p>
+          <a:p>
+            <a:pPr marL="0" indent="0">
+              <a:buNone/>
+            </a:pPr>
+            <a:r>
+              <a:rPr lang="en-US" sz="1800" dirty="0"/>
+              <a:t>Current </a:t>
+            </a:r>
+            <a:r>
+              <a:rPr lang="en-US" sz="1800" dirty="0" err="1"/>
+              <a:t>predCounts</a:t>
+            </a:r>
+            <a:r>
+              <a:rPr lang="en-US" sz="1800" dirty="0"/>
+              <a:t>: [0:0, 1:0, 2:0, 3:1, 4:0, 5:0, 6:0, 7:0, 8:0, 9:1]</a:t>
+            </a:r>
+          </a:p>
+          <a:p>
+            <a:pPr marL="0" indent="0">
+              <a:buNone/>
+            </a:pPr>
+            <a:endParaRPr lang="en-US" sz="1800" dirty="0"/>
+          </a:p>
+          <a:p>
+            <a:pPr marL="0" indent="0">
+              <a:buNone/>
+            </a:pPr>
+            <a:r>
+              <a:rPr lang="en-US" sz="1800" dirty="0"/>
+              <a:t>Current Queue: [4, 8]</a:t>
+            </a:r>
+          </a:p>
+          <a:p>
+            <a:pPr marL="0" indent="0">
+              <a:buNone/>
+            </a:pPr>
+            <a:r>
+              <a:rPr lang="en-US" sz="1800" dirty="0"/>
+              <a:t>Processing: 4</a:t>
+            </a:r>
+          </a:p>
+          <a:p>
+            <a:pPr marL="0" indent="0">
+              <a:buNone/>
+            </a:pPr>
+            <a:r>
+              <a:rPr lang="en-US" sz="1800" dirty="0"/>
+              <a:t>	-&gt; Decrementing </a:t>
+            </a:r>
+            <a:r>
+              <a:rPr lang="en-US" sz="1800" dirty="0" err="1"/>
+              <a:t>predCount</a:t>
+            </a:r>
+            <a:r>
+              <a:rPr lang="en-US" sz="1800" dirty="0"/>
+              <a:t> for 3 (New count: 0)</a:t>
+            </a:r>
+          </a:p>
+          <a:p>
+            <a:pPr marL="0" indent="0">
+              <a:buNone/>
+            </a:pPr>
+            <a:r>
+              <a:rPr lang="en-US" sz="1800" dirty="0"/>
+              <a:t>	-&gt; 3 hit 0 </a:t>
+            </a:r>
+            <a:r>
+              <a:rPr lang="en-US" sz="1800" dirty="0" err="1"/>
+              <a:t>predCount</a:t>
+            </a:r>
+            <a:r>
+              <a:rPr lang="en-US" sz="1800" dirty="0"/>
+              <a:t>. Adding to queue.</a:t>
+            </a:r>
+          </a:p>
+          <a:p>
+            <a:pPr marL="0" indent="0">
+              <a:buNone/>
+            </a:pPr>
+            <a:r>
+              <a:rPr lang="en-US" sz="1800" dirty="0"/>
+              <a:t>Current </a:t>
+            </a:r>
+            <a:r>
+              <a:rPr lang="en-US" sz="1800" dirty="0" err="1"/>
+              <a:t>predCounts</a:t>
+            </a:r>
+            <a:r>
+              <a:rPr lang="en-US" sz="1800" dirty="0"/>
+              <a:t>: [0:0, 1:0, 2:0, 3:0, 4:0, 5:0, 6:0, 7:0, 8:0, 9:1]</a:t>
+            </a:r>
+          </a:p>
+          <a:p>
+            <a:pPr marL="0" indent="0">
+              <a:buNone/>
+            </a:pPr>
+            <a:endParaRPr lang="en-US" sz="1800" dirty="0"/>
+          </a:p>
+          <a:p>
+            <a:pPr marL="0" indent="0">
+              <a:buNone/>
+            </a:pPr>
+            <a:r>
+              <a:rPr lang="en-US" sz="1800" dirty="0"/>
+              <a:t>Current Queue: [8, 3]</a:t>
+            </a:r>
+          </a:p>
+          <a:p>
+            <a:pPr marL="0" indent="0">
+              <a:buNone/>
+            </a:pPr>
+            <a:r>
+              <a:rPr lang="en-US" sz="1800" dirty="0"/>
+              <a:t>Processing: 8</a:t>
+            </a:r>
+          </a:p>
+          <a:p>
+            <a:pPr marL="0" indent="0">
+              <a:buNone/>
+            </a:pPr>
+            <a:r>
+              <a:rPr lang="en-US" sz="1800" dirty="0"/>
+              <a:t>	-&gt; Decrementing </a:t>
+            </a:r>
+            <a:r>
+              <a:rPr lang="en-US" sz="1800" dirty="0" err="1"/>
+              <a:t>predCount</a:t>
+            </a:r>
+            <a:r>
+              <a:rPr lang="en-US" sz="1800" dirty="0"/>
+              <a:t> for 9 (New count: 0)</a:t>
+            </a:r>
+          </a:p>
+          <a:p>
+            <a:pPr marL="0" indent="0">
+              <a:buNone/>
+            </a:pPr>
+            <a:r>
+              <a:rPr lang="en-US" sz="1800" dirty="0"/>
+              <a:t>	-&gt; 9 hit 0 </a:t>
+            </a:r>
+            <a:r>
+              <a:rPr lang="en-US" sz="1800" dirty="0" err="1"/>
+              <a:t>predCount</a:t>
+            </a:r>
+            <a:r>
+              <a:rPr lang="en-US" sz="1800" dirty="0"/>
+              <a:t>. Adding to queue.</a:t>
+            </a:r>
+          </a:p>
+          <a:p>
+            <a:pPr marL="0" indent="0">
+              <a:buNone/>
+            </a:pPr>
+            <a:r>
+              <a:rPr lang="en-US" sz="1800" dirty="0"/>
+              <a:t>Current </a:t>
+            </a:r>
+            <a:r>
+              <a:rPr lang="en-US" sz="1800" dirty="0" err="1"/>
+              <a:t>predCounts</a:t>
+            </a:r>
+            <a:r>
+              <a:rPr lang="en-US" sz="1800" dirty="0"/>
+              <a:t>: [0:0, 1:0, 2:0, 3:0, 4:0, 5:0, 6:0, 7:0, 8:0, 9:0]</a:t>
+            </a:r>
+          </a:p>
+          <a:p>
+            <a:pPr marL="0" indent="0">
+              <a:buNone/>
+            </a:pPr>
+            <a:endParaRPr lang="en-US" sz="1800" dirty="0"/>
+          </a:p>
+          <a:p>
+            <a:pPr marL="0" indent="0">
+              <a:buNone/>
+            </a:pPr>
+            <a:r>
+              <a:rPr lang="en-US" sz="1800" dirty="0"/>
+              <a:t>Current Queue: [3, 9]</a:t>
+            </a:r>
+          </a:p>
+          <a:p>
+            <a:pPr marL="0" indent="0">
+              <a:buNone/>
+            </a:pPr>
+            <a:r>
+              <a:rPr lang="en-US" sz="1800" dirty="0"/>
+              <a:t>Processing: 3</a:t>
+            </a:r>
+          </a:p>
+          <a:p>
+            <a:pPr marL="0" indent="0">
+              <a:buNone/>
+            </a:pPr>
+            <a:r>
+              <a:rPr lang="en-US" sz="1800" dirty="0"/>
+              <a:t>Current </a:t>
+            </a:r>
+            <a:r>
+              <a:rPr lang="en-US" sz="1800" dirty="0" err="1"/>
+              <a:t>predCounts</a:t>
+            </a:r>
+            <a:r>
+              <a:rPr lang="en-US" sz="1800" dirty="0"/>
+              <a:t>: [0:0, 1:0, 2:0, 3:0, 4:0, 5:0, 6:0, 7:0, 8:0, 9:0]</a:t>
+            </a:r>
+          </a:p>
+          <a:p>
+            <a:pPr marL="0" indent="0">
+              <a:buNone/>
+            </a:pPr>
+            <a:endParaRPr lang="en-US" sz="1800" dirty="0"/>
+          </a:p>
+          <a:p>
+            <a:pPr marL="0" indent="0">
+              <a:buNone/>
+            </a:pPr>
+            <a:r>
+              <a:rPr lang="en-US" sz="1800" dirty="0"/>
+              <a:t>Current Queue: [9]</a:t>
+            </a:r>
+          </a:p>
+          <a:p>
+            <a:pPr marL="0" indent="0">
+              <a:buNone/>
+            </a:pPr>
+            <a:r>
+              <a:rPr lang="en-US" sz="1800" dirty="0"/>
+              <a:t>Processing: 9</a:t>
+            </a:r>
+          </a:p>
+          <a:p>
+            <a:pPr marL="0" indent="0">
+              <a:buNone/>
+            </a:pPr>
+            <a:r>
+              <a:rPr lang="en-US" sz="1800" dirty="0"/>
+              <a:t>Current </a:t>
+            </a:r>
+            <a:r>
+              <a:rPr lang="en-US" sz="1800" dirty="0" err="1"/>
+              <a:t>predCounts</a:t>
+            </a:r>
+            <a:r>
+              <a:rPr lang="en-US" sz="1800" dirty="0"/>
+              <a:t>: [0:0, 1:0, 2:0, 3:0, 4:0, 5:0, 6:0, 7:0, 8:0, 9:0]</a:t>
+            </a:r>
+          </a:p>
+          <a:p>
+            <a:pPr marL="0" indent="0">
+              <a:buNone/>
+            </a:pPr>
+            <a:endParaRPr lang="en-US" sz="1800" dirty="0"/>
+          </a:p>
+          <a:p>
+            <a:pPr marL="0" indent="0">
+              <a:buNone/>
+            </a:pPr>
+            <a:r>
+              <a:rPr lang="en-US" sz="1800" dirty="0"/>
+              <a:t>Final order: 0, 7, 1, 2, 5, 6, 4, 8, 3, 9</a:t>
+            </a:r>
+          </a:p>
+          <a:p>
+            <a:pPr marL="0" indent="0">
+              <a:buNone/>
+            </a:pPr>
+            <a:r>
+              <a:rPr lang="en-US" sz="1400" dirty="0"/>
+              <a:t>(too big to fit on one page)</a:t>
+            </a:r>
+          </a:p>
+          <a:p>
+            <a:pPr marL="0" indent="0">
+              <a:buNone/>
+            </a:pPr>
+            <a:endParaRPr lang="en-US" sz="1800" dirty="0"/>
+          </a:p>
+        </p:txBody>
+      </p:sp>
+    </p:spTree>
+    <p:extLst>
+      <p:ext uri="{BB962C8B-B14F-4D97-AF65-F5344CB8AC3E}">
+        <p14:creationId xmlns:p14="http://schemas.microsoft.com/office/powerpoint/2010/main" val="3151798318"/>
+      </p:ext>
+    </p:extLst>
+  </p:cSld>
+  <p:clrMapOvr>
+    <a:masterClrMapping/>
+  </p:clrMapOvr>
+</p:sld>
+</file>
+
+<file path=ppt/slides/slide11.xml><?xml version="1.0" encoding="utf-8"?>
+<p:sld xmlns:a="http://schemas.openxmlformats.org/drawingml/2006/main" xmlns:r="http://schemas.openxmlformats.org/officeDocument/2006/relationships" xmlns:p="http://schemas.openxmlformats.org/presentationml/2006/main">
+  <p:cSld>
+    <p:spTree>
+      <p:nvGrpSpPr>
+        <p:cNvPr id="1" name=""/>
+        <p:cNvGrpSpPr/>
+        <p:nvPr/>
+      </p:nvGrpSpPr>
+      <p:grpSpPr>
+        <a:xfrm>
+          <a:off x="0" y="0"/>
+          <a:ext cx="0" cy="0"/>
+          <a:chOff x="0" y="0"/>
+          <a:chExt cx="0" cy="0"/>
+        </a:xfrm>
+      </p:grpSpPr>
+      <p:pic>
+        <p:nvPicPr>
+          <p:cNvPr id="6146" name="Picture 4" descr="08">
+            <a:extLst>
+              <a:ext uri="{FF2B5EF4-FFF2-40B4-BE49-F238E27FC236}">
+                <a16:creationId xmlns:a16="http://schemas.microsoft.com/office/drawing/2014/main" id="{9FE784F9-D9A7-4F7B-AD49-6C3E9EEF2890}"/>
+              </a:ext>
+            </a:extLst>
+          </p:cNvPr>
+          <p:cNvPicPr>
+            <a:picLocks noChangeAspect="1" noChangeArrowheads="1"/>
+          </p:cNvPicPr>
+          <p:nvPr/>
+        </p:nvPicPr>
+        <p:blipFill>
+          <a:blip r:embed="rId2">
+            <a:extLst>
+              <a:ext uri="{28A0092B-C50C-407E-A947-70E740481C1C}">
+                <a14:useLocalDpi xmlns:a14="http://schemas.microsoft.com/office/drawing/2010/main" val="0"/>
+              </a:ext>
+            </a:extLst>
+          </a:blip>
+          <a:srcRect/>
+          <a:stretch>
+            <a:fillRect/>
+          </a:stretch>
+        </p:blipFill>
+        <p:spPr bwMode="auto">
+          <a:xfrm>
+            <a:off x="533400" y="1219200"/>
+            <a:ext cx="5715000" cy="2514600"/>
+          </a:xfrm>
+          <a:prstGeom prst="rect">
+            <a:avLst/>
+          </a:prstGeom>
+          <a:noFill/>
+          <a:ln>
+            <a:noFill/>
+          </a:ln>
+          <a:extLst>
+            <a:ext uri="{909E8E84-426E-40DD-AFC4-6F175D3DCCD1}">
+              <a14:hiddenFill xmlns:a14="http://schemas.microsoft.com/office/drawing/2010/main">
+                <a:solidFill>
+                  <a:srgbClr val="FFFFFF"/>
+                </a:solidFill>
+              </a14:hiddenFill>
+            </a:ext>
+            <a:ext uri="{91240B29-F687-4F45-9708-019B960494DF}">
+              <a14:hiddenLine xmlns:a14="http://schemas.microsoft.com/office/drawing/2010/main" w="9525">
+                <a:solidFill>
+                  <a:srgbClr val="000000"/>
+                </a:solidFill>
+                <a:miter lim="800000"/>
+                <a:headEnd/>
+                <a:tailEnd/>
+              </a14:hiddenLine>
+            </a:ext>
+          </a:extLst>
+        </p:spPr>
+      </p:pic>
+      <p:sp>
+        <p:nvSpPr>
+          <p:cNvPr id="6147" name="Rectangle 5">
+            <a:extLst>
+              <a:ext uri="{FF2B5EF4-FFF2-40B4-BE49-F238E27FC236}">
+                <a16:creationId xmlns:a16="http://schemas.microsoft.com/office/drawing/2014/main" id="{FF2496EF-C9B8-49EF-A543-7502752ACE06}"/>
+              </a:ext>
+            </a:extLst>
+          </p:cNvPr>
+          <p:cNvSpPr>
+            <a:spLocks noChangeArrowheads="1"/>
+          </p:cNvSpPr>
+          <p:nvPr/>
+        </p:nvSpPr>
+        <p:spPr bwMode="auto">
+          <a:xfrm>
+            <a:off x="457200" y="609600"/>
+            <a:ext cx="5416868" cy="300082"/>
+          </a:xfrm>
+          <a:prstGeom prst="rect">
+            <a:avLst/>
+          </a:prstGeom>
+          <a:noFill/>
+          <a:ln>
+            <a:noFill/>
+          </a:ln>
+          <a:extLst>
+            <a:ext uri="{909E8E84-426E-40DD-AFC4-6F175D3DCCD1}">
+              <a14:hiddenFill xmlns:a14="http://schemas.microsoft.com/office/drawing/2010/main">
+                <a:solidFill>
+                  <a:srgbClr val="FFFFFF"/>
+                </a:solidFill>
+              </a14:hiddenFill>
+            </a:ext>
+            <a:ext uri="{91240B29-F687-4F45-9708-019B960494DF}">
+              <a14:hiddenLine xmlns:a14="http://schemas.microsoft.com/office/drawing/2010/main" w="9525">
+                <a:solidFill>
+                  <a:srgbClr val="000000"/>
+                </a:solidFill>
+                <a:miter lim="800000"/>
+                <a:headEnd/>
+                <a:tailEnd/>
+              </a14:hiddenLine>
+            </a:ext>
+          </a:extLst>
+        </p:spPr>
+        <p:txBody>
+          <a:bodyPr wrap="none">
+            <a:spAutoFit/>
+          </a:bodyPr>
+          <a:lstStyle>
+            <a:lvl1pPr>
+              <a:spcBef>
+                <a:spcPct val="20000"/>
+              </a:spcBef>
+              <a:buChar char="•"/>
+              <a:defRPr sz="3200">
+                <a:solidFill>
+                  <a:schemeClr val="tx1"/>
+                </a:solidFill>
+                <a:latin typeface="Arial" panose="020B0604020202020204" pitchFamily="34" charset="0"/>
+              </a:defRPr>
+            </a:lvl1pPr>
+            <a:lvl2pPr marL="742950" indent="-285750">
+              <a:spcBef>
+                <a:spcPct val="20000"/>
+              </a:spcBef>
+              <a:buChar char="–"/>
+              <a:defRPr sz="2800">
+                <a:solidFill>
+                  <a:schemeClr val="tx1"/>
+                </a:solidFill>
+                <a:latin typeface="Arial" panose="020B0604020202020204" pitchFamily="34" charset="0"/>
+              </a:defRPr>
+            </a:lvl2pPr>
+            <a:lvl3pPr marL="1143000" indent="-228600">
+              <a:spcBef>
+                <a:spcPct val="20000"/>
+              </a:spcBef>
+              <a:buChar char="•"/>
+              <a:defRPr sz="2400">
+                <a:solidFill>
+                  <a:schemeClr val="tx1"/>
+                </a:solidFill>
+                <a:latin typeface="Arial" panose="020B0604020202020204" pitchFamily="34" charset="0"/>
+              </a:defRPr>
+            </a:lvl3pPr>
+            <a:lvl4pPr marL="1600200" indent="-228600">
+              <a:spcBef>
+                <a:spcPct val="20000"/>
+              </a:spcBef>
+              <a:buChar char="–"/>
+              <a:defRPr sz="2000">
+                <a:solidFill>
+                  <a:schemeClr val="tx1"/>
+                </a:solidFill>
+                <a:latin typeface="Arial" panose="020B0604020202020204" pitchFamily="34" charset="0"/>
+              </a:defRPr>
+            </a:lvl4pPr>
+            <a:lvl5pPr marL="2057400" indent="-228600">
+              <a:spcBef>
+                <a:spcPct val="20000"/>
+              </a:spcBef>
+              <a:buChar char="»"/>
+              <a:defRPr sz="2000">
+                <a:solidFill>
+                  <a:schemeClr val="tx1"/>
+                </a:solidFill>
+                <a:latin typeface="Arial" panose="020B0604020202020204" pitchFamily="34" charset="0"/>
+              </a:defRPr>
+            </a:lvl5pPr>
+            <a:lvl6pPr marL="2514600" indent="-228600" eaLnBrk="0" fontAlgn="base" hangingPunct="0">
+              <a:spcBef>
+                <a:spcPct val="20000"/>
+              </a:spcBef>
+              <a:spcAft>
+                <a:spcPct val="0"/>
+              </a:spcAft>
+              <a:buChar char="»"/>
+              <a:defRPr sz="2000">
+                <a:solidFill>
+                  <a:schemeClr val="tx1"/>
+                </a:solidFill>
+                <a:latin typeface="Arial" panose="020B0604020202020204" pitchFamily="34" charset="0"/>
+              </a:defRPr>
+            </a:lvl6pPr>
+            <a:lvl7pPr marL="2971800" indent="-228600" eaLnBrk="0" fontAlgn="base" hangingPunct="0">
+              <a:spcBef>
+                <a:spcPct val="20000"/>
+              </a:spcBef>
+              <a:spcAft>
+                <a:spcPct val="0"/>
+              </a:spcAft>
+              <a:buChar char="»"/>
+              <a:defRPr sz="2000">
+                <a:solidFill>
+                  <a:schemeClr val="tx1"/>
+                </a:solidFill>
+                <a:latin typeface="Arial" panose="020B0604020202020204" pitchFamily="34" charset="0"/>
+              </a:defRPr>
+            </a:lvl7pPr>
+            <a:lvl8pPr marL="3429000" indent="-228600" eaLnBrk="0" fontAlgn="base" hangingPunct="0">
+              <a:spcBef>
+                <a:spcPct val="20000"/>
+              </a:spcBef>
+              <a:spcAft>
+                <a:spcPct val="0"/>
+              </a:spcAft>
+              <a:buChar char="»"/>
+              <a:defRPr sz="2000">
+                <a:solidFill>
+                  <a:schemeClr val="tx1"/>
+                </a:solidFill>
+                <a:latin typeface="Arial" panose="020B0604020202020204" pitchFamily="34" charset="0"/>
+              </a:defRPr>
+            </a:lvl8pPr>
+            <a:lvl9pPr marL="3886200" indent="-228600" eaLnBrk="0" fontAlgn="base" hangingPunct="0">
+              <a:spcBef>
+                <a:spcPct val="20000"/>
+              </a:spcBef>
+              <a:spcAft>
+                <a:spcPct val="0"/>
+              </a:spcAft>
+              <a:buChar char="»"/>
+              <a:defRPr sz="2000">
+                <a:solidFill>
+                  <a:schemeClr val="tx1"/>
+                </a:solidFill>
+                <a:latin typeface="Arial" panose="020B0604020202020204" pitchFamily="34" charset="0"/>
+              </a:defRPr>
+            </a:lvl9pPr>
+          </a:lstStyle>
+          <a:p>
+            <a:pPr eaLnBrk="1" hangingPunct="1">
+              <a:spcBef>
+                <a:spcPct val="0"/>
+              </a:spcBef>
+              <a:buFontTx/>
+              <a:buNone/>
+            </a:pPr>
+            <a:r>
+              <a:rPr lang="en-US" altLang="en-US" sz="1350" dirty="0"/>
+              <a:t>10. List the nodes of the graph in a breadth first topological ordering.</a:t>
+            </a:r>
+          </a:p>
+        </p:txBody>
+      </p:sp>
+      <p:sp>
+        <p:nvSpPr>
+          <p:cNvPr id="2" name="TextBox 1">
+            <a:extLst>
+              <a:ext uri="{FF2B5EF4-FFF2-40B4-BE49-F238E27FC236}">
+                <a16:creationId xmlns:a16="http://schemas.microsoft.com/office/drawing/2014/main" id="{331A64A4-9C71-9C22-8E60-75E48468830A}"/>
+              </a:ext>
+            </a:extLst>
+          </p:cNvPr>
+          <p:cNvSpPr txBox="1"/>
+          <p:nvPr/>
+        </p:nvSpPr>
+        <p:spPr>
+          <a:xfrm>
+            <a:off x="0" y="4114800"/>
+            <a:ext cx="7205819" cy="3416320"/>
+          </a:xfrm>
+          <a:prstGeom prst="rect">
+            <a:avLst/>
+          </a:prstGeom>
+          <a:noFill/>
+        </p:spPr>
+        <p:txBody>
+          <a:bodyPr wrap="none" rtlCol="0">
+            <a:spAutoFit/>
+          </a:bodyPr>
+          <a:lstStyle/>
+          <a:p>
+            <a:r>
+              <a:rPr lang="en-US" dirty="0"/>
+              <a:t>Start, </a:t>
+            </a:r>
+          </a:p>
+          <a:p>
+            <a:r>
+              <a:rPr lang="en-US" dirty="0"/>
+              <a:t>Discrete Math, Programming 1, </a:t>
+            </a:r>
+          </a:p>
+          <a:p>
+            <a:r>
+              <a:rPr lang="en-US" dirty="0"/>
+              <a:t>Programming 2, Computer Organization, </a:t>
+            </a:r>
+          </a:p>
+          <a:p>
+            <a:r>
+              <a:rPr lang="en-US" dirty="0"/>
+              <a:t>Algorithms, High-Level Languages, Operating Systems, </a:t>
+            </a:r>
+          </a:p>
+          <a:p>
+            <a:r>
+              <a:rPr lang="en-US" dirty="0"/>
+              <a:t>Theory Of Computation, Compilers, </a:t>
+            </a:r>
+          </a:p>
+          <a:p>
+            <a:r>
+              <a:rPr lang="en-US" dirty="0"/>
+              <a:t>Senior Seminar, </a:t>
+            </a:r>
+          </a:p>
+          <a:p>
+            <a:r>
+              <a:rPr lang="en-US" dirty="0"/>
+              <a:t>End</a:t>
+            </a:r>
+          </a:p>
+          <a:p>
+            <a:endParaRPr lang="en-US" dirty="0"/>
+          </a:p>
+          <a:p>
+            <a:r>
+              <a:rPr lang="en-US" dirty="0"/>
+              <a:t>(it wouldn’t fit on one line so it’s broken into pieces)</a:t>
+            </a:r>
+          </a:p>
+        </p:txBody>
+      </p:sp>
     </p:spTree>
   </p:cSld>
   <p:clrMapOvr>
@@ -8253,7 +10373,7 @@
         </p:blipFill>
         <p:spPr bwMode="auto">
           <a:xfrm>
-            <a:off x="762000" y="1524000"/>
+            <a:off x="381000" y="1066800"/>
             <a:ext cx="2686050" cy="2128838"/>
           </a:xfrm>
           <a:prstGeom prst="rect">
@@ -8294,12 +10414,1547 @@
           </a:extLst>
         </p:spPr>
       </p:pic>
+      <p:pic>
+        <p:nvPicPr>
+          <p:cNvPr id="2" name="Picture 5">
+            <a:extLst>
+              <a:ext uri="{FF2B5EF4-FFF2-40B4-BE49-F238E27FC236}">
+                <a16:creationId xmlns:a16="http://schemas.microsoft.com/office/drawing/2014/main" id="{0F8D125E-99A2-3EE8-7B59-0BBF755A2665}"/>
+              </a:ext>
+            </a:extLst>
+          </p:cNvPr>
+          <p:cNvPicPr>
+            <a:picLocks noChangeAspect="1" noChangeArrowheads="1"/>
+          </p:cNvPicPr>
+          <p:nvPr/>
+        </p:nvPicPr>
+        <p:blipFill>
+          <a:blip r:embed="rId2">
+            <a:extLst>
+              <a:ext uri="{28A0092B-C50C-407E-A947-70E740481C1C}">
+                <a14:useLocalDpi xmlns:a14="http://schemas.microsoft.com/office/drawing/2010/main" val="0"/>
+              </a:ext>
+            </a:extLst>
+          </a:blip>
+          <a:srcRect/>
+          <a:stretch>
+            <a:fillRect/>
+          </a:stretch>
+        </p:blipFill>
+        <p:spPr bwMode="auto">
+          <a:xfrm>
+            <a:off x="3276600" y="1066800"/>
+            <a:ext cx="2686050" cy="2128838"/>
+          </a:xfrm>
+          <a:prstGeom prst="rect">
+            <a:avLst/>
+          </a:prstGeom>
+          <a:noFill/>
+          <a:ln>
+            <a:noFill/>
+          </a:ln>
+          <a:effectLst/>
+          <a:extLst>
+            <a:ext uri="{909E8E84-426E-40DD-AFC4-6F175D3DCCD1}">
+              <a14:hiddenFill xmlns:a14="http://schemas.microsoft.com/office/drawing/2010/main">
+                <a:solidFill>
+                  <a:schemeClr val="accent1"/>
+                </a:solidFill>
+              </a14:hiddenFill>
+            </a:ext>
+            <a:ext uri="{91240B29-F687-4F45-9708-019B960494DF}">
+              <a14:hiddenLine xmlns:a14="http://schemas.microsoft.com/office/drawing/2010/main" w="9525">
+                <a:solidFill>
+                  <a:schemeClr val="tx1"/>
+                </a:solidFill>
+                <a:miter lim="800000"/>
+                <a:headEnd/>
+                <a:tailEnd/>
+              </a14:hiddenLine>
+            </a:ext>
+            <a:ext uri="{AF507438-7753-43E0-B8FC-AC1667EBCBE1}">
+              <a14:hiddenEffects xmlns:a14="http://schemas.microsoft.com/office/drawing/2010/main">
+                <a:effectLst>
+                  <a:outerShdw dist="35921" dir="2700000" algn="ctr" rotWithShape="0">
+                    <a:schemeClr val="bg2"/>
+                  </a:outerShdw>
+                </a:effectLst>
+              </a14:hiddenEffects>
+            </a:ext>
+          </a:extLst>
+        </p:spPr>
+      </p:pic>
+      <mc:AlternateContent xmlns:mc="http://schemas.openxmlformats.org/markup-compatibility/2006">
+        <mc:Choice xmlns:p14="http://schemas.microsoft.com/office/powerpoint/2010/main" Requires="p14">
+          <p:contentPart p14:bwMode="auto" r:id="rId3">
+            <p14:nvContentPartPr>
+              <p14:cNvPr id="6" name="Ink 5">
+                <a:extLst>
+                  <a:ext uri="{FF2B5EF4-FFF2-40B4-BE49-F238E27FC236}">
+                    <a16:creationId xmlns:a16="http://schemas.microsoft.com/office/drawing/2014/main" id="{A267689F-D54F-439C-A424-BEFB7E53856B}"/>
+                  </a:ext>
+                </a:extLst>
+              </p14:cNvPr>
+              <p14:cNvContentPartPr/>
+              <p14:nvPr/>
+            </p14:nvContentPartPr>
+            <p14:xfrm>
+              <a:off x="3460602" y="1540379"/>
+              <a:ext cx="8640" cy="1252440"/>
+            </p14:xfrm>
+          </p:contentPart>
+        </mc:Choice>
+        <mc:Fallback>
+          <p:pic>
+            <p:nvPicPr>
+              <p:cNvPr id="6" name="Ink 5">
+                <a:extLst>
+                  <a:ext uri="{FF2B5EF4-FFF2-40B4-BE49-F238E27FC236}">
+                    <a16:creationId xmlns:a16="http://schemas.microsoft.com/office/drawing/2014/main" id="{A267689F-D54F-439C-A424-BEFB7E53856B}"/>
+                  </a:ext>
+                </a:extLst>
+              </p:cNvPr>
+              <p:cNvPicPr/>
+              <p:nvPr/>
+            </p:nvPicPr>
+            <p:blipFill>
+              <a:blip r:embed="rId4"/>
+              <a:stretch>
+                <a:fillRect/>
+              </a:stretch>
+            </p:blipFill>
+            <p:spPr>
+              <a:xfrm>
+                <a:off x="3454482" y="1534259"/>
+                <a:ext cx="20880" cy="1264680"/>
+              </a:xfrm>
+              <a:prstGeom prst="rect">
+                <a:avLst/>
+              </a:prstGeom>
+            </p:spPr>
+          </p:pic>
+        </mc:Fallback>
+      </mc:AlternateContent>
+      <p:pic>
+        <p:nvPicPr>
+          <p:cNvPr id="8" name="Picture 5">
+            <a:extLst>
+              <a:ext uri="{FF2B5EF4-FFF2-40B4-BE49-F238E27FC236}">
+                <a16:creationId xmlns:a16="http://schemas.microsoft.com/office/drawing/2014/main" id="{D192BFB9-C19B-F268-6FA0-4543931ED4F7}"/>
+              </a:ext>
+            </a:extLst>
+          </p:cNvPr>
+          <p:cNvPicPr>
+            <a:picLocks noChangeAspect="1" noChangeArrowheads="1"/>
+          </p:cNvPicPr>
+          <p:nvPr/>
+        </p:nvPicPr>
+        <p:blipFill>
+          <a:blip r:embed="rId2">
+            <a:extLst>
+              <a:ext uri="{28A0092B-C50C-407E-A947-70E740481C1C}">
+                <a14:useLocalDpi xmlns:a14="http://schemas.microsoft.com/office/drawing/2010/main" val="0"/>
+              </a:ext>
+            </a:extLst>
+          </a:blip>
+          <a:srcRect/>
+          <a:stretch>
+            <a:fillRect/>
+          </a:stretch>
+        </p:blipFill>
+        <p:spPr bwMode="auto">
+          <a:xfrm>
+            <a:off x="361950" y="3276600"/>
+            <a:ext cx="2686050" cy="2128838"/>
+          </a:xfrm>
+          <a:prstGeom prst="rect">
+            <a:avLst/>
+          </a:prstGeom>
+          <a:noFill/>
+          <a:ln>
+            <a:noFill/>
+          </a:ln>
+          <a:effectLst/>
+          <a:extLst>
+            <a:ext uri="{909E8E84-426E-40DD-AFC4-6F175D3DCCD1}">
+              <a14:hiddenFill xmlns:a14="http://schemas.microsoft.com/office/drawing/2010/main">
+                <a:solidFill>
+                  <a:schemeClr val="accent1"/>
+                </a:solidFill>
+              </a14:hiddenFill>
+            </a:ext>
+            <a:ext uri="{91240B29-F687-4F45-9708-019B960494DF}">
+              <a14:hiddenLine xmlns:a14="http://schemas.microsoft.com/office/drawing/2010/main" w="9525">
+                <a:solidFill>
+                  <a:schemeClr val="tx1"/>
+                </a:solidFill>
+                <a:miter lim="800000"/>
+                <a:headEnd/>
+                <a:tailEnd/>
+              </a14:hiddenLine>
+            </a:ext>
+            <a:ext uri="{AF507438-7753-43E0-B8FC-AC1667EBCBE1}">
+              <a14:hiddenEffects xmlns:a14="http://schemas.microsoft.com/office/drawing/2010/main">
+                <a:effectLst>
+                  <a:outerShdw dist="35921" dir="2700000" algn="ctr" rotWithShape="0">
+                    <a:schemeClr val="bg2"/>
+                  </a:outerShdw>
+                </a:effectLst>
+              </a14:hiddenEffects>
+            </a:ext>
+          </a:extLst>
+        </p:spPr>
+      </p:pic>
+      <mc:AlternateContent xmlns:mc="http://schemas.openxmlformats.org/markup-compatibility/2006">
+        <mc:Choice xmlns:p14="http://schemas.microsoft.com/office/powerpoint/2010/main" Requires="p14">
+          <p:contentPart p14:bwMode="auto" r:id="rId5">
+            <p14:nvContentPartPr>
+              <p14:cNvPr id="9" name="Ink 8">
+                <a:extLst>
+                  <a:ext uri="{FF2B5EF4-FFF2-40B4-BE49-F238E27FC236}">
+                    <a16:creationId xmlns:a16="http://schemas.microsoft.com/office/drawing/2014/main" id="{0ED168D9-6022-D989-5FB7-D56A96410068}"/>
+                  </a:ext>
+                </a:extLst>
+              </p14:cNvPr>
+              <p14:cNvContentPartPr/>
+              <p14:nvPr/>
+            </p14:nvContentPartPr>
+            <p14:xfrm>
+              <a:off x="545952" y="3750179"/>
+              <a:ext cx="8640" cy="1252440"/>
+            </p14:xfrm>
+          </p:contentPart>
+        </mc:Choice>
+        <mc:Fallback>
+          <p:pic>
+            <p:nvPicPr>
+              <p:cNvPr id="9" name="Ink 8">
+                <a:extLst>
+                  <a:ext uri="{FF2B5EF4-FFF2-40B4-BE49-F238E27FC236}">
+                    <a16:creationId xmlns:a16="http://schemas.microsoft.com/office/drawing/2014/main" id="{0ED168D9-6022-D989-5FB7-D56A96410068}"/>
+                  </a:ext>
+                </a:extLst>
+              </p:cNvPr>
+              <p:cNvPicPr/>
+              <p:nvPr/>
+            </p:nvPicPr>
+            <p:blipFill>
+              <a:blip r:embed="rId4"/>
+              <a:stretch>
+                <a:fillRect/>
+              </a:stretch>
+            </p:blipFill>
+            <p:spPr>
+              <a:xfrm>
+                <a:off x="539832" y="3744059"/>
+                <a:ext cx="20880" cy="1264680"/>
+              </a:xfrm>
+              <a:prstGeom prst="rect">
+                <a:avLst/>
+              </a:prstGeom>
+            </p:spPr>
+          </p:pic>
+        </mc:Fallback>
+      </mc:AlternateContent>
+      <mc:AlternateContent xmlns:mc="http://schemas.openxmlformats.org/markup-compatibility/2006">
+        <mc:Choice xmlns:p14="http://schemas.microsoft.com/office/powerpoint/2010/main" Requires="p14">
+          <p:contentPart p14:bwMode="auto" r:id="rId6">
+            <p14:nvContentPartPr>
+              <p14:cNvPr id="10" name="Ink 9">
+                <a:extLst>
+                  <a:ext uri="{FF2B5EF4-FFF2-40B4-BE49-F238E27FC236}">
+                    <a16:creationId xmlns:a16="http://schemas.microsoft.com/office/drawing/2014/main" id="{C8B8749A-6D38-B4DB-DF7E-4EDDD2095CFB}"/>
+                  </a:ext>
+                </a:extLst>
+              </p14:cNvPr>
+              <p14:cNvContentPartPr/>
+              <p14:nvPr/>
+            </p14:nvContentPartPr>
+            <p14:xfrm>
+              <a:off x="732882" y="4464659"/>
+              <a:ext cx="857880" cy="510840"/>
+            </p14:xfrm>
+          </p:contentPart>
+        </mc:Choice>
+        <mc:Fallback>
+          <p:pic>
+            <p:nvPicPr>
+              <p:cNvPr id="10" name="Ink 9">
+                <a:extLst>
+                  <a:ext uri="{FF2B5EF4-FFF2-40B4-BE49-F238E27FC236}">
+                    <a16:creationId xmlns:a16="http://schemas.microsoft.com/office/drawing/2014/main" id="{C8B8749A-6D38-B4DB-DF7E-4EDDD2095CFB}"/>
+                  </a:ext>
+                </a:extLst>
+              </p:cNvPr>
+              <p:cNvPicPr/>
+              <p:nvPr/>
+            </p:nvPicPr>
+            <p:blipFill>
+              <a:blip r:embed="rId7"/>
+              <a:stretch>
+                <a:fillRect/>
+              </a:stretch>
+            </p:blipFill>
+            <p:spPr>
+              <a:xfrm>
+                <a:off x="726762" y="4458539"/>
+                <a:ext cx="870120" cy="523080"/>
+              </a:xfrm>
+              <a:prstGeom prst="rect">
+                <a:avLst/>
+              </a:prstGeom>
+            </p:spPr>
+          </p:pic>
+        </mc:Fallback>
+      </mc:AlternateContent>
+      <p:pic>
+        <p:nvPicPr>
+          <p:cNvPr id="11" name="Picture 5">
+            <a:extLst>
+              <a:ext uri="{FF2B5EF4-FFF2-40B4-BE49-F238E27FC236}">
+                <a16:creationId xmlns:a16="http://schemas.microsoft.com/office/drawing/2014/main" id="{32A5768F-9ADD-0525-EDF0-77A49B3477B1}"/>
+              </a:ext>
+            </a:extLst>
+          </p:cNvPr>
+          <p:cNvPicPr>
+            <a:picLocks noChangeAspect="1" noChangeArrowheads="1"/>
+          </p:cNvPicPr>
+          <p:nvPr/>
+        </p:nvPicPr>
+        <p:blipFill>
+          <a:blip r:embed="rId2">
+            <a:extLst>
+              <a:ext uri="{28A0092B-C50C-407E-A947-70E740481C1C}">
+                <a14:useLocalDpi xmlns:a14="http://schemas.microsoft.com/office/drawing/2010/main" val="0"/>
+              </a:ext>
+            </a:extLst>
+          </a:blip>
+          <a:srcRect/>
+          <a:stretch>
+            <a:fillRect/>
+          </a:stretch>
+        </p:blipFill>
+        <p:spPr bwMode="auto">
+          <a:xfrm>
+            <a:off x="3282363" y="3293292"/>
+            <a:ext cx="2686050" cy="2128838"/>
+          </a:xfrm>
+          <a:prstGeom prst="rect">
+            <a:avLst/>
+          </a:prstGeom>
+          <a:noFill/>
+          <a:ln>
+            <a:noFill/>
+          </a:ln>
+          <a:effectLst/>
+          <a:extLst>
+            <a:ext uri="{909E8E84-426E-40DD-AFC4-6F175D3DCCD1}">
+              <a14:hiddenFill xmlns:a14="http://schemas.microsoft.com/office/drawing/2010/main">
+                <a:solidFill>
+                  <a:schemeClr val="accent1"/>
+                </a:solidFill>
+              </a14:hiddenFill>
+            </a:ext>
+            <a:ext uri="{91240B29-F687-4F45-9708-019B960494DF}">
+              <a14:hiddenLine xmlns:a14="http://schemas.microsoft.com/office/drawing/2010/main" w="9525">
+                <a:solidFill>
+                  <a:schemeClr val="tx1"/>
+                </a:solidFill>
+                <a:miter lim="800000"/>
+                <a:headEnd/>
+                <a:tailEnd/>
+              </a14:hiddenLine>
+            </a:ext>
+            <a:ext uri="{AF507438-7753-43E0-B8FC-AC1667EBCBE1}">
+              <a14:hiddenEffects xmlns:a14="http://schemas.microsoft.com/office/drawing/2010/main">
+                <a:effectLst>
+                  <a:outerShdw dist="35921" dir="2700000" algn="ctr" rotWithShape="0">
+                    <a:schemeClr val="bg2"/>
+                  </a:outerShdw>
+                </a:effectLst>
+              </a14:hiddenEffects>
+            </a:ext>
+          </a:extLst>
+        </p:spPr>
+      </p:pic>
+      <mc:AlternateContent xmlns:mc="http://schemas.openxmlformats.org/markup-compatibility/2006">
+        <mc:Choice xmlns:p14="http://schemas.microsoft.com/office/powerpoint/2010/main" Requires="p14">
+          <p:contentPart p14:bwMode="auto" r:id="rId8">
+            <p14:nvContentPartPr>
+              <p14:cNvPr id="12" name="Ink 11">
+                <a:extLst>
+                  <a:ext uri="{FF2B5EF4-FFF2-40B4-BE49-F238E27FC236}">
+                    <a16:creationId xmlns:a16="http://schemas.microsoft.com/office/drawing/2014/main" id="{57B55AD8-8320-DE7B-77DC-BEE74BE03D03}"/>
+                  </a:ext>
+                </a:extLst>
+              </p14:cNvPr>
+              <p14:cNvContentPartPr/>
+              <p14:nvPr/>
+            </p14:nvContentPartPr>
+            <p14:xfrm>
+              <a:off x="3466365" y="3766871"/>
+              <a:ext cx="8640" cy="1252440"/>
+            </p14:xfrm>
+          </p:contentPart>
+        </mc:Choice>
+        <mc:Fallback>
+          <p:pic>
+            <p:nvPicPr>
+              <p:cNvPr id="12" name="Ink 11">
+                <a:extLst>
+                  <a:ext uri="{FF2B5EF4-FFF2-40B4-BE49-F238E27FC236}">
+                    <a16:creationId xmlns:a16="http://schemas.microsoft.com/office/drawing/2014/main" id="{57B55AD8-8320-DE7B-77DC-BEE74BE03D03}"/>
+                  </a:ext>
+                </a:extLst>
+              </p:cNvPr>
+              <p:cNvPicPr/>
+              <p:nvPr/>
+            </p:nvPicPr>
+            <p:blipFill>
+              <a:blip r:embed="rId4"/>
+              <a:stretch>
+                <a:fillRect/>
+              </a:stretch>
+            </p:blipFill>
+            <p:spPr>
+              <a:xfrm>
+                <a:off x="3460245" y="3760751"/>
+                <a:ext cx="20880" cy="1264680"/>
+              </a:xfrm>
+              <a:prstGeom prst="rect">
+                <a:avLst/>
+              </a:prstGeom>
+            </p:spPr>
+          </p:pic>
+        </mc:Fallback>
+      </mc:AlternateContent>
+      <mc:AlternateContent xmlns:mc="http://schemas.openxmlformats.org/markup-compatibility/2006">
+        <mc:Choice xmlns:p14="http://schemas.microsoft.com/office/powerpoint/2010/main" Requires="p14">
+          <p:contentPart p14:bwMode="auto" r:id="rId9">
+            <p14:nvContentPartPr>
+              <p14:cNvPr id="13" name="Ink 12">
+                <a:extLst>
+                  <a:ext uri="{FF2B5EF4-FFF2-40B4-BE49-F238E27FC236}">
+                    <a16:creationId xmlns:a16="http://schemas.microsoft.com/office/drawing/2014/main" id="{C3A2AAAB-0ABF-E44D-A489-1671AFBC3F35}"/>
+                  </a:ext>
+                </a:extLst>
+              </p14:cNvPr>
+              <p14:cNvContentPartPr/>
+              <p14:nvPr/>
+            </p14:nvContentPartPr>
+            <p14:xfrm>
+              <a:off x="3653295" y="4481351"/>
+              <a:ext cx="857880" cy="510840"/>
+            </p14:xfrm>
+          </p:contentPart>
+        </mc:Choice>
+        <mc:Fallback>
+          <p:pic>
+            <p:nvPicPr>
+              <p:cNvPr id="13" name="Ink 12">
+                <a:extLst>
+                  <a:ext uri="{FF2B5EF4-FFF2-40B4-BE49-F238E27FC236}">
+                    <a16:creationId xmlns:a16="http://schemas.microsoft.com/office/drawing/2014/main" id="{C3A2AAAB-0ABF-E44D-A489-1671AFBC3F35}"/>
+                  </a:ext>
+                </a:extLst>
+              </p:cNvPr>
+              <p:cNvPicPr/>
+              <p:nvPr/>
+            </p:nvPicPr>
+            <p:blipFill>
+              <a:blip r:embed="rId7"/>
+              <a:stretch>
+                <a:fillRect/>
+              </a:stretch>
+            </p:blipFill>
+            <p:spPr>
+              <a:xfrm>
+                <a:off x="3647175" y="4475231"/>
+                <a:ext cx="870120" cy="523080"/>
+              </a:xfrm>
+              <a:prstGeom prst="rect">
+                <a:avLst/>
+              </a:prstGeom>
+            </p:spPr>
+          </p:pic>
+        </mc:Fallback>
+      </mc:AlternateContent>
+      <p:grpSp>
+        <p:nvGrpSpPr>
+          <p:cNvPr id="19" name="Group 18">
+            <a:extLst>
+              <a:ext uri="{FF2B5EF4-FFF2-40B4-BE49-F238E27FC236}">
+                <a16:creationId xmlns:a16="http://schemas.microsoft.com/office/drawing/2014/main" id="{84DDA79F-2B64-316A-12FB-8604B4D908DD}"/>
+              </a:ext>
+            </a:extLst>
+          </p:cNvPr>
+          <p:cNvGrpSpPr/>
+          <p:nvPr/>
+        </p:nvGrpSpPr>
+        <p:grpSpPr>
+          <a:xfrm>
+            <a:off x="4767402" y="3757259"/>
+            <a:ext cx="812880" cy="580320"/>
+            <a:chOff x="5148402" y="4214459"/>
+            <a:chExt cx="812880" cy="580320"/>
+          </a:xfrm>
+        </p:grpSpPr>
+        <mc:AlternateContent xmlns:mc="http://schemas.openxmlformats.org/markup-compatibility/2006">
+          <mc:Choice xmlns:p14="http://schemas.microsoft.com/office/powerpoint/2010/main" Requires="p14">
+            <p:contentPart p14:bwMode="auto" r:id="rId10">
+              <p14:nvContentPartPr>
+                <p14:cNvPr id="15" name="Ink 14">
+                  <a:extLst>
+                    <a:ext uri="{FF2B5EF4-FFF2-40B4-BE49-F238E27FC236}">
+                      <a16:creationId xmlns:a16="http://schemas.microsoft.com/office/drawing/2014/main" id="{A257B6A4-AB21-E68F-5DBE-999CE3E38CB9}"/>
+                    </a:ext>
+                  </a:extLst>
+                </p14:cNvPr>
+                <p14:cNvContentPartPr/>
+                <p14:nvPr/>
+              </p14:nvContentPartPr>
+              <p14:xfrm>
+                <a:off x="5263242" y="4214459"/>
+                <a:ext cx="698040" cy="534600"/>
+              </p14:xfrm>
+            </p:contentPart>
+          </mc:Choice>
+          <mc:Fallback>
+            <p:pic>
+              <p:nvPicPr>
+                <p:cNvPr id="15" name="Ink 14">
+                  <a:extLst>
+                    <a:ext uri="{FF2B5EF4-FFF2-40B4-BE49-F238E27FC236}">
+                      <a16:creationId xmlns:a16="http://schemas.microsoft.com/office/drawing/2014/main" id="{A257B6A4-AB21-E68F-5DBE-999CE3E38CB9}"/>
+                    </a:ext>
+                  </a:extLst>
+                </p:cNvPr>
+                <p:cNvPicPr/>
+                <p:nvPr/>
+              </p:nvPicPr>
+              <p:blipFill>
+                <a:blip r:embed="rId11"/>
+                <a:stretch>
+                  <a:fillRect/>
+                </a:stretch>
+              </p:blipFill>
+              <p:spPr>
+                <a:xfrm>
+                  <a:off x="5257122" y="4208339"/>
+                  <a:ext cx="710280" cy="546840"/>
+                </a:xfrm>
+                <a:prstGeom prst="rect">
+                  <a:avLst/>
+                </a:prstGeom>
+              </p:spPr>
+            </p:pic>
+          </mc:Fallback>
+        </mc:AlternateContent>
+        <mc:AlternateContent xmlns:mc="http://schemas.openxmlformats.org/markup-compatibility/2006">
+          <mc:Choice xmlns:p14="http://schemas.microsoft.com/office/powerpoint/2010/main" Requires="p14">
+            <p:contentPart p14:bwMode="auto" r:id="rId12">
+              <p14:nvContentPartPr>
+                <p14:cNvPr id="16" name="Ink 15">
+                  <a:extLst>
+                    <a:ext uri="{FF2B5EF4-FFF2-40B4-BE49-F238E27FC236}">
+                      <a16:creationId xmlns:a16="http://schemas.microsoft.com/office/drawing/2014/main" id="{2BAAC9A5-080B-768E-ADB3-2F7F7EC90130}"/>
+                    </a:ext>
+                  </a:extLst>
+                </p14:cNvPr>
+                <p14:cNvContentPartPr/>
+                <p14:nvPr/>
+              </p14:nvContentPartPr>
+              <p14:xfrm>
+                <a:off x="5148402" y="4764179"/>
+                <a:ext cx="92160" cy="30600"/>
+              </p14:xfrm>
+            </p:contentPart>
+          </mc:Choice>
+          <mc:Fallback>
+            <p:pic>
+              <p:nvPicPr>
+                <p:cNvPr id="16" name="Ink 15">
+                  <a:extLst>
+                    <a:ext uri="{FF2B5EF4-FFF2-40B4-BE49-F238E27FC236}">
+                      <a16:creationId xmlns:a16="http://schemas.microsoft.com/office/drawing/2014/main" id="{2BAAC9A5-080B-768E-ADB3-2F7F7EC90130}"/>
+                    </a:ext>
+                  </a:extLst>
+                </p:cNvPr>
+                <p:cNvPicPr/>
+                <p:nvPr/>
+              </p:nvPicPr>
+              <p:blipFill>
+                <a:blip r:embed="rId13"/>
+                <a:stretch>
+                  <a:fillRect/>
+                </a:stretch>
+              </p:blipFill>
+              <p:spPr>
+                <a:xfrm>
+                  <a:off x="5142282" y="4758059"/>
+                  <a:ext cx="104400" cy="42840"/>
+                </a:xfrm>
+                <a:prstGeom prst="rect">
+                  <a:avLst/>
+                </a:prstGeom>
+              </p:spPr>
+            </p:pic>
+          </mc:Fallback>
+        </mc:AlternateContent>
+        <mc:AlternateContent xmlns:mc="http://schemas.openxmlformats.org/markup-compatibility/2006">
+          <mc:Choice xmlns:p14="http://schemas.microsoft.com/office/powerpoint/2010/main" Requires="p14">
+            <p:contentPart p14:bwMode="auto" r:id="rId14">
+              <p14:nvContentPartPr>
+                <p14:cNvPr id="18" name="Ink 17">
+                  <a:extLst>
+                    <a:ext uri="{FF2B5EF4-FFF2-40B4-BE49-F238E27FC236}">
+                      <a16:creationId xmlns:a16="http://schemas.microsoft.com/office/drawing/2014/main" id="{FFE869D1-4286-3F49-DA76-A2FBD62CB1D4}"/>
+                    </a:ext>
+                  </a:extLst>
+                </p14:cNvPr>
+                <p14:cNvContentPartPr/>
+                <p14:nvPr/>
+              </p14:nvContentPartPr>
+              <p14:xfrm>
+                <a:off x="5232642" y="4721339"/>
+                <a:ext cx="121320" cy="40320"/>
+              </p14:xfrm>
+            </p:contentPart>
+          </mc:Choice>
+          <mc:Fallback>
+            <p:pic>
+              <p:nvPicPr>
+                <p:cNvPr id="18" name="Ink 17">
+                  <a:extLst>
+                    <a:ext uri="{FF2B5EF4-FFF2-40B4-BE49-F238E27FC236}">
+                      <a16:creationId xmlns:a16="http://schemas.microsoft.com/office/drawing/2014/main" id="{FFE869D1-4286-3F49-DA76-A2FBD62CB1D4}"/>
+                    </a:ext>
+                  </a:extLst>
+                </p:cNvPr>
+                <p:cNvPicPr/>
+                <p:nvPr/>
+              </p:nvPicPr>
+              <p:blipFill>
+                <a:blip r:embed="rId15"/>
+                <a:stretch>
+                  <a:fillRect/>
+                </a:stretch>
+              </p:blipFill>
+              <p:spPr>
+                <a:xfrm>
+                  <a:off x="5226522" y="4715219"/>
+                  <a:ext cx="133560" cy="52560"/>
+                </a:xfrm>
+                <a:prstGeom prst="rect">
+                  <a:avLst/>
+                </a:prstGeom>
+              </p:spPr>
+            </p:pic>
+          </mc:Fallback>
+        </mc:AlternateContent>
+      </p:grpSp>
+      <p:pic>
+        <p:nvPicPr>
+          <p:cNvPr id="20" name="Picture 5">
+            <a:extLst>
+              <a:ext uri="{FF2B5EF4-FFF2-40B4-BE49-F238E27FC236}">
+                <a16:creationId xmlns:a16="http://schemas.microsoft.com/office/drawing/2014/main" id="{D11939B2-6145-0280-C677-72D5773D676E}"/>
+              </a:ext>
+            </a:extLst>
+          </p:cNvPr>
+          <p:cNvPicPr>
+            <a:picLocks noChangeAspect="1" noChangeArrowheads="1"/>
+          </p:cNvPicPr>
+          <p:nvPr/>
+        </p:nvPicPr>
+        <p:blipFill>
+          <a:blip r:embed="rId2">
+            <a:extLst>
+              <a:ext uri="{28A0092B-C50C-407E-A947-70E740481C1C}">
+                <a14:useLocalDpi xmlns:a14="http://schemas.microsoft.com/office/drawing/2010/main" val="0"/>
+              </a:ext>
+            </a:extLst>
+          </a:blip>
+          <a:srcRect/>
+          <a:stretch>
+            <a:fillRect/>
+          </a:stretch>
+        </p:blipFill>
+        <p:spPr bwMode="auto">
+          <a:xfrm>
+            <a:off x="381000" y="5422130"/>
+            <a:ext cx="2686050" cy="2128838"/>
+          </a:xfrm>
+          <a:prstGeom prst="rect">
+            <a:avLst/>
+          </a:prstGeom>
+          <a:noFill/>
+          <a:ln>
+            <a:noFill/>
+          </a:ln>
+          <a:effectLst/>
+          <a:extLst>
+            <a:ext uri="{909E8E84-426E-40DD-AFC4-6F175D3DCCD1}">
+              <a14:hiddenFill xmlns:a14="http://schemas.microsoft.com/office/drawing/2010/main">
+                <a:solidFill>
+                  <a:schemeClr val="accent1"/>
+                </a:solidFill>
+              </a14:hiddenFill>
+            </a:ext>
+            <a:ext uri="{91240B29-F687-4F45-9708-019B960494DF}">
+              <a14:hiddenLine xmlns:a14="http://schemas.microsoft.com/office/drawing/2010/main" w="9525">
+                <a:solidFill>
+                  <a:schemeClr val="tx1"/>
+                </a:solidFill>
+                <a:miter lim="800000"/>
+                <a:headEnd/>
+                <a:tailEnd/>
+              </a14:hiddenLine>
+            </a:ext>
+            <a:ext uri="{AF507438-7753-43E0-B8FC-AC1667EBCBE1}">
+              <a14:hiddenEffects xmlns:a14="http://schemas.microsoft.com/office/drawing/2010/main">
+                <a:effectLst>
+                  <a:outerShdw dist="35921" dir="2700000" algn="ctr" rotWithShape="0">
+                    <a:schemeClr val="bg2"/>
+                  </a:outerShdw>
+                </a:effectLst>
+              </a14:hiddenEffects>
+            </a:ext>
+          </a:extLst>
+        </p:spPr>
+      </p:pic>
+      <mc:AlternateContent xmlns:mc="http://schemas.openxmlformats.org/markup-compatibility/2006">
+        <mc:Choice xmlns:p14="http://schemas.microsoft.com/office/powerpoint/2010/main" Requires="p14">
+          <p:contentPart p14:bwMode="auto" r:id="rId16">
+            <p14:nvContentPartPr>
+              <p14:cNvPr id="21" name="Ink 20">
+                <a:extLst>
+                  <a:ext uri="{FF2B5EF4-FFF2-40B4-BE49-F238E27FC236}">
+                    <a16:creationId xmlns:a16="http://schemas.microsoft.com/office/drawing/2014/main" id="{40738E2E-8D7F-DF79-5AEE-5AA1C3D8DB86}"/>
+                  </a:ext>
+                </a:extLst>
+              </p14:cNvPr>
+              <p14:cNvContentPartPr/>
+              <p14:nvPr/>
+            </p14:nvContentPartPr>
+            <p14:xfrm>
+              <a:off x="565002" y="5895709"/>
+              <a:ext cx="8640" cy="1252440"/>
+            </p14:xfrm>
+          </p:contentPart>
+        </mc:Choice>
+        <mc:Fallback>
+          <p:pic>
+            <p:nvPicPr>
+              <p:cNvPr id="21" name="Ink 20">
+                <a:extLst>
+                  <a:ext uri="{FF2B5EF4-FFF2-40B4-BE49-F238E27FC236}">
+                    <a16:creationId xmlns:a16="http://schemas.microsoft.com/office/drawing/2014/main" id="{40738E2E-8D7F-DF79-5AEE-5AA1C3D8DB86}"/>
+                  </a:ext>
+                </a:extLst>
+              </p:cNvPr>
+              <p:cNvPicPr/>
+              <p:nvPr/>
+            </p:nvPicPr>
+            <p:blipFill>
+              <a:blip r:embed="rId4"/>
+              <a:stretch>
+                <a:fillRect/>
+              </a:stretch>
+            </p:blipFill>
+            <p:spPr>
+              <a:xfrm>
+                <a:off x="558882" y="5889589"/>
+                <a:ext cx="20880" cy="1264680"/>
+              </a:xfrm>
+              <a:prstGeom prst="rect">
+                <a:avLst/>
+              </a:prstGeom>
+            </p:spPr>
+          </p:pic>
+        </mc:Fallback>
+      </mc:AlternateContent>
+      <mc:AlternateContent xmlns:mc="http://schemas.openxmlformats.org/markup-compatibility/2006">
+        <mc:Choice xmlns:p14="http://schemas.microsoft.com/office/powerpoint/2010/main" Requires="p14">
+          <p:contentPart p14:bwMode="auto" r:id="rId17">
+            <p14:nvContentPartPr>
+              <p14:cNvPr id="22" name="Ink 21">
+                <a:extLst>
+                  <a:ext uri="{FF2B5EF4-FFF2-40B4-BE49-F238E27FC236}">
+                    <a16:creationId xmlns:a16="http://schemas.microsoft.com/office/drawing/2014/main" id="{E0C61FD6-268F-050D-9D5F-92417759006B}"/>
+                  </a:ext>
+                </a:extLst>
+              </p14:cNvPr>
+              <p14:cNvContentPartPr/>
+              <p14:nvPr/>
+            </p14:nvContentPartPr>
+            <p14:xfrm>
+              <a:off x="751932" y="6610189"/>
+              <a:ext cx="857880" cy="510840"/>
+            </p14:xfrm>
+          </p:contentPart>
+        </mc:Choice>
+        <mc:Fallback>
+          <p:pic>
+            <p:nvPicPr>
+              <p:cNvPr id="22" name="Ink 21">
+                <a:extLst>
+                  <a:ext uri="{FF2B5EF4-FFF2-40B4-BE49-F238E27FC236}">
+                    <a16:creationId xmlns:a16="http://schemas.microsoft.com/office/drawing/2014/main" id="{E0C61FD6-268F-050D-9D5F-92417759006B}"/>
+                  </a:ext>
+                </a:extLst>
+              </p:cNvPr>
+              <p:cNvPicPr/>
+              <p:nvPr/>
+            </p:nvPicPr>
+            <p:blipFill>
+              <a:blip r:embed="rId7"/>
+              <a:stretch>
+                <a:fillRect/>
+              </a:stretch>
+            </p:blipFill>
+            <p:spPr>
+              <a:xfrm>
+                <a:off x="745812" y="6604069"/>
+                <a:ext cx="870120" cy="523080"/>
+              </a:xfrm>
+              <a:prstGeom prst="rect">
+                <a:avLst/>
+              </a:prstGeom>
+            </p:spPr>
+          </p:pic>
+        </mc:Fallback>
+      </mc:AlternateContent>
+      <p:grpSp>
+        <p:nvGrpSpPr>
+          <p:cNvPr id="23" name="Group 22">
+            <a:extLst>
+              <a:ext uri="{FF2B5EF4-FFF2-40B4-BE49-F238E27FC236}">
+                <a16:creationId xmlns:a16="http://schemas.microsoft.com/office/drawing/2014/main" id="{84A6891D-94A7-34F3-903B-C1AFA00F3BEE}"/>
+              </a:ext>
+            </a:extLst>
+          </p:cNvPr>
+          <p:cNvGrpSpPr/>
+          <p:nvPr/>
+        </p:nvGrpSpPr>
+        <p:grpSpPr>
+          <a:xfrm>
+            <a:off x="1866039" y="5886097"/>
+            <a:ext cx="812880" cy="580320"/>
+            <a:chOff x="5148402" y="4214459"/>
+            <a:chExt cx="812880" cy="580320"/>
+          </a:xfrm>
+        </p:grpSpPr>
+        <mc:AlternateContent xmlns:mc="http://schemas.openxmlformats.org/markup-compatibility/2006">
+          <mc:Choice xmlns:p14="http://schemas.microsoft.com/office/powerpoint/2010/main" Requires="p14">
+            <p:contentPart p14:bwMode="auto" r:id="rId18">
+              <p14:nvContentPartPr>
+                <p14:cNvPr id="24" name="Ink 23">
+                  <a:extLst>
+                    <a:ext uri="{FF2B5EF4-FFF2-40B4-BE49-F238E27FC236}">
+                      <a16:creationId xmlns:a16="http://schemas.microsoft.com/office/drawing/2014/main" id="{5D687A94-AB05-720C-E62E-0BAD01BE25FB}"/>
+                    </a:ext>
+                  </a:extLst>
+                </p14:cNvPr>
+                <p14:cNvContentPartPr/>
+                <p14:nvPr/>
+              </p14:nvContentPartPr>
+              <p14:xfrm>
+                <a:off x="5263242" y="4214459"/>
+                <a:ext cx="698040" cy="534600"/>
+              </p14:xfrm>
+            </p:contentPart>
+          </mc:Choice>
+          <mc:Fallback>
+            <p:pic>
+              <p:nvPicPr>
+                <p:cNvPr id="24" name="Ink 23">
+                  <a:extLst>
+                    <a:ext uri="{FF2B5EF4-FFF2-40B4-BE49-F238E27FC236}">
+                      <a16:creationId xmlns:a16="http://schemas.microsoft.com/office/drawing/2014/main" id="{5D687A94-AB05-720C-E62E-0BAD01BE25FB}"/>
+                    </a:ext>
+                  </a:extLst>
+                </p:cNvPr>
+                <p:cNvPicPr/>
+                <p:nvPr/>
+              </p:nvPicPr>
+              <p:blipFill>
+                <a:blip r:embed="rId11"/>
+                <a:stretch>
+                  <a:fillRect/>
+                </a:stretch>
+              </p:blipFill>
+              <p:spPr>
+                <a:xfrm>
+                  <a:off x="5257122" y="4208339"/>
+                  <a:ext cx="710280" cy="546840"/>
+                </a:xfrm>
+                <a:prstGeom prst="rect">
+                  <a:avLst/>
+                </a:prstGeom>
+              </p:spPr>
+            </p:pic>
+          </mc:Fallback>
+        </mc:AlternateContent>
+        <mc:AlternateContent xmlns:mc="http://schemas.openxmlformats.org/markup-compatibility/2006">
+          <mc:Choice xmlns:p14="http://schemas.microsoft.com/office/powerpoint/2010/main" Requires="p14">
+            <p:contentPart p14:bwMode="auto" r:id="rId19">
+              <p14:nvContentPartPr>
+                <p14:cNvPr id="25" name="Ink 24">
+                  <a:extLst>
+                    <a:ext uri="{FF2B5EF4-FFF2-40B4-BE49-F238E27FC236}">
+                      <a16:creationId xmlns:a16="http://schemas.microsoft.com/office/drawing/2014/main" id="{12164786-DBB2-8EEE-FE2F-F9D08EF8D88F}"/>
+                    </a:ext>
+                  </a:extLst>
+                </p14:cNvPr>
+                <p14:cNvContentPartPr/>
+                <p14:nvPr/>
+              </p14:nvContentPartPr>
+              <p14:xfrm>
+                <a:off x="5148402" y="4764179"/>
+                <a:ext cx="92160" cy="30600"/>
+              </p14:xfrm>
+            </p:contentPart>
+          </mc:Choice>
+          <mc:Fallback>
+            <p:pic>
+              <p:nvPicPr>
+                <p:cNvPr id="25" name="Ink 24">
+                  <a:extLst>
+                    <a:ext uri="{FF2B5EF4-FFF2-40B4-BE49-F238E27FC236}">
+                      <a16:creationId xmlns:a16="http://schemas.microsoft.com/office/drawing/2014/main" id="{12164786-DBB2-8EEE-FE2F-F9D08EF8D88F}"/>
+                    </a:ext>
+                  </a:extLst>
+                </p:cNvPr>
+                <p:cNvPicPr/>
+                <p:nvPr/>
+              </p:nvPicPr>
+              <p:blipFill>
+                <a:blip r:embed="rId13"/>
+                <a:stretch>
+                  <a:fillRect/>
+                </a:stretch>
+              </p:blipFill>
+              <p:spPr>
+                <a:xfrm>
+                  <a:off x="5142282" y="4758059"/>
+                  <a:ext cx="104400" cy="42840"/>
+                </a:xfrm>
+                <a:prstGeom prst="rect">
+                  <a:avLst/>
+                </a:prstGeom>
+              </p:spPr>
+            </p:pic>
+          </mc:Fallback>
+        </mc:AlternateContent>
+        <mc:AlternateContent xmlns:mc="http://schemas.openxmlformats.org/markup-compatibility/2006">
+          <mc:Choice xmlns:p14="http://schemas.microsoft.com/office/powerpoint/2010/main" Requires="p14">
+            <p:contentPart p14:bwMode="auto" r:id="rId20">
+              <p14:nvContentPartPr>
+                <p14:cNvPr id="26" name="Ink 25">
+                  <a:extLst>
+                    <a:ext uri="{FF2B5EF4-FFF2-40B4-BE49-F238E27FC236}">
+                      <a16:creationId xmlns:a16="http://schemas.microsoft.com/office/drawing/2014/main" id="{1DC684B0-CE0B-C15A-B5C7-B3B731E84B35}"/>
+                    </a:ext>
+                  </a:extLst>
+                </p14:cNvPr>
+                <p14:cNvContentPartPr/>
+                <p14:nvPr/>
+              </p14:nvContentPartPr>
+              <p14:xfrm>
+                <a:off x="5232642" y="4721339"/>
+                <a:ext cx="121320" cy="40320"/>
+              </p14:xfrm>
+            </p:contentPart>
+          </mc:Choice>
+          <mc:Fallback>
+            <p:pic>
+              <p:nvPicPr>
+                <p:cNvPr id="26" name="Ink 25">
+                  <a:extLst>
+                    <a:ext uri="{FF2B5EF4-FFF2-40B4-BE49-F238E27FC236}">
+                      <a16:creationId xmlns:a16="http://schemas.microsoft.com/office/drawing/2014/main" id="{1DC684B0-CE0B-C15A-B5C7-B3B731E84B35}"/>
+                    </a:ext>
+                  </a:extLst>
+                </p:cNvPr>
+                <p:cNvPicPr/>
+                <p:nvPr/>
+              </p:nvPicPr>
+              <p:blipFill>
+                <a:blip r:embed="rId15"/>
+                <a:stretch>
+                  <a:fillRect/>
+                </a:stretch>
+              </p:blipFill>
+              <p:spPr>
+                <a:xfrm>
+                  <a:off x="5226522" y="4715219"/>
+                  <a:ext cx="133560" cy="52560"/>
+                </a:xfrm>
+                <a:prstGeom prst="rect">
+                  <a:avLst/>
+                </a:prstGeom>
+              </p:spPr>
+            </p:pic>
+          </mc:Fallback>
+        </mc:AlternateContent>
+      </p:grpSp>
+      <mc:AlternateContent xmlns:mc="http://schemas.openxmlformats.org/markup-compatibility/2006">
+        <mc:Choice xmlns:p14="http://schemas.microsoft.com/office/powerpoint/2010/main" Requires="p14">
+          <p:contentPart p14:bwMode="auto" r:id="rId21">
+            <p14:nvContentPartPr>
+              <p14:cNvPr id="35" name="Ink 34">
+                <a:extLst>
+                  <a:ext uri="{FF2B5EF4-FFF2-40B4-BE49-F238E27FC236}">
+                    <a16:creationId xmlns:a16="http://schemas.microsoft.com/office/drawing/2014/main" id="{7E937D0A-4A2D-4416-184B-3B07EE5CE387}"/>
+                  </a:ext>
+                </a:extLst>
+              </p14:cNvPr>
+              <p14:cNvContentPartPr/>
+              <p14:nvPr/>
+            </p14:nvContentPartPr>
+            <p14:xfrm>
+              <a:off x="1659282" y="6600179"/>
+              <a:ext cx="8280" cy="560520"/>
+            </p14:xfrm>
+          </p:contentPart>
+        </mc:Choice>
+        <mc:Fallback>
+          <p:pic>
+            <p:nvPicPr>
+              <p:cNvPr id="35" name="Ink 34">
+                <a:extLst>
+                  <a:ext uri="{FF2B5EF4-FFF2-40B4-BE49-F238E27FC236}">
+                    <a16:creationId xmlns:a16="http://schemas.microsoft.com/office/drawing/2014/main" id="{7E937D0A-4A2D-4416-184B-3B07EE5CE387}"/>
+                  </a:ext>
+                </a:extLst>
+              </p:cNvPr>
+              <p:cNvPicPr/>
+              <p:nvPr/>
+            </p:nvPicPr>
+            <p:blipFill>
+              <a:blip r:embed="rId22"/>
+              <a:stretch>
+                <a:fillRect/>
+              </a:stretch>
+            </p:blipFill>
+            <p:spPr>
+              <a:xfrm>
+                <a:off x="1653162" y="6594059"/>
+                <a:ext cx="20520" cy="572760"/>
+              </a:xfrm>
+              <a:prstGeom prst="rect">
+                <a:avLst/>
+              </a:prstGeom>
+            </p:spPr>
+          </p:pic>
+        </mc:Fallback>
+      </mc:AlternateContent>
+      <p:pic>
+        <p:nvPicPr>
+          <p:cNvPr id="43" name="Picture 5">
+            <a:extLst>
+              <a:ext uri="{FF2B5EF4-FFF2-40B4-BE49-F238E27FC236}">
+                <a16:creationId xmlns:a16="http://schemas.microsoft.com/office/drawing/2014/main" id="{19281043-A15C-3181-E3E2-C1F38E7FED19}"/>
+              </a:ext>
+            </a:extLst>
+          </p:cNvPr>
+          <p:cNvPicPr>
+            <a:picLocks noChangeAspect="1" noChangeArrowheads="1"/>
+          </p:cNvPicPr>
+          <p:nvPr/>
+        </p:nvPicPr>
+        <p:blipFill>
+          <a:blip r:embed="rId2">
+            <a:extLst>
+              <a:ext uri="{28A0092B-C50C-407E-A947-70E740481C1C}">
+                <a14:useLocalDpi xmlns:a14="http://schemas.microsoft.com/office/drawing/2010/main" val="0"/>
+              </a:ext>
+            </a:extLst>
+          </a:blip>
+          <a:srcRect/>
+          <a:stretch>
+            <a:fillRect/>
+          </a:stretch>
+        </p:blipFill>
+        <p:spPr bwMode="auto">
+          <a:xfrm>
+            <a:off x="3207770" y="5454787"/>
+            <a:ext cx="2686050" cy="2128838"/>
+          </a:xfrm>
+          <a:prstGeom prst="rect">
+            <a:avLst/>
+          </a:prstGeom>
+          <a:noFill/>
+          <a:ln>
+            <a:noFill/>
+          </a:ln>
+          <a:effectLst/>
+          <a:extLst>
+            <a:ext uri="{909E8E84-426E-40DD-AFC4-6F175D3DCCD1}">
+              <a14:hiddenFill xmlns:a14="http://schemas.microsoft.com/office/drawing/2010/main">
+                <a:solidFill>
+                  <a:schemeClr val="accent1"/>
+                </a:solidFill>
+              </a14:hiddenFill>
+            </a:ext>
+            <a:ext uri="{91240B29-F687-4F45-9708-019B960494DF}">
+              <a14:hiddenLine xmlns:a14="http://schemas.microsoft.com/office/drawing/2010/main" w="9525">
+                <a:solidFill>
+                  <a:schemeClr val="tx1"/>
+                </a:solidFill>
+                <a:miter lim="800000"/>
+                <a:headEnd/>
+                <a:tailEnd/>
+              </a14:hiddenLine>
+            </a:ext>
+            <a:ext uri="{AF507438-7753-43E0-B8FC-AC1667EBCBE1}">
+              <a14:hiddenEffects xmlns:a14="http://schemas.microsoft.com/office/drawing/2010/main">
+                <a:effectLst>
+                  <a:outerShdw dist="35921" dir="2700000" algn="ctr" rotWithShape="0">
+                    <a:schemeClr val="bg2"/>
+                  </a:outerShdw>
+                </a:effectLst>
+              </a14:hiddenEffects>
+            </a:ext>
+          </a:extLst>
+        </p:spPr>
+      </p:pic>
+      <mc:AlternateContent xmlns:mc="http://schemas.openxmlformats.org/markup-compatibility/2006">
+        <mc:Choice xmlns:p14="http://schemas.microsoft.com/office/powerpoint/2010/main" Requires="p14">
+          <p:contentPart p14:bwMode="auto" r:id="rId23">
+            <p14:nvContentPartPr>
+              <p14:cNvPr id="44" name="Ink 43">
+                <a:extLst>
+                  <a:ext uri="{FF2B5EF4-FFF2-40B4-BE49-F238E27FC236}">
+                    <a16:creationId xmlns:a16="http://schemas.microsoft.com/office/drawing/2014/main" id="{B9EF0581-B2FD-B1AE-76B6-43C252B74BAE}"/>
+                  </a:ext>
+                </a:extLst>
+              </p14:cNvPr>
+              <p14:cNvContentPartPr/>
+              <p14:nvPr/>
+            </p14:nvContentPartPr>
+            <p14:xfrm>
+              <a:off x="3391772" y="5928366"/>
+              <a:ext cx="8640" cy="1252440"/>
+            </p14:xfrm>
+          </p:contentPart>
+        </mc:Choice>
+        <mc:Fallback>
+          <p:pic>
+            <p:nvPicPr>
+              <p:cNvPr id="44" name="Ink 43">
+                <a:extLst>
+                  <a:ext uri="{FF2B5EF4-FFF2-40B4-BE49-F238E27FC236}">
+                    <a16:creationId xmlns:a16="http://schemas.microsoft.com/office/drawing/2014/main" id="{B9EF0581-B2FD-B1AE-76B6-43C252B74BAE}"/>
+                  </a:ext>
+                </a:extLst>
+              </p:cNvPr>
+              <p:cNvPicPr/>
+              <p:nvPr/>
+            </p:nvPicPr>
+            <p:blipFill>
+              <a:blip r:embed="rId4"/>
+              <a:stretch>
+                <a:fillRect/>
+              </a:stretch>
+            </p:blipFill>
+            <p:spPr>
+              <a:xfrm>
+                <a:off x="3385652" y="5922246"/>
+                <a:ext cx="20880" cy="1264680"/>
+              </a:xfrm>
+              <a:prstGeom prst="rect">
+                <a:avLst/>
+              </a:prstGeom>
+            </p:spPr>
+          </p:pic>
+        </mc:Fallback>
+      </mc:AlternateContent>
+      <mc:AlternateContent xmlns:mc="http://schemas.openxmlformats.org/markup-compatibility/2006">
+        <mc:Choice xmlns:p14="http://schemas.microsoft.com/office/powerpoint/2010/main" Requires="p14">
+          <p:contentPart p14:bwMode="auto" r:id="rId24">
+            <p14:nvContentPartPr>
+              <p14:cNvPr id="45" name="Ink 44">
+                <a:extLst>
+                  <a:ext uri="{FF2B5EF4-FFF2-40B4-BE49-F238E27FC236}">
+                    <a16:creationId xmlns:a16="http://schemas.microsoft.com/office/drawing/2014/main" id="{8A6AE177-77BB-F80B-6BAA-2F92290613E2}"/>
+                  </a:ext>
+                </a:extLst>
+              </p14:cNvPr>
+              <p14:cNvContentPartPr/>
+              <p14:nvPr/>
+            </p14:nvContentPartPr>
+            <p14:xfrm>
+              <a:off x="3578702" y="6642846"/>
+              <a:ext cx="857880" cy="510840"/>
+            </p14:xfrm>
+          </p:contentPart>
+        </mc:Choice>
+        <mc:Fallback>
+          <p:pic>
+            <p:nvPicPr>
+              <p:cNvPr id="45" name="Ink 44">
+                <a:extLst>
+                  <a:ext uri="{FF2B5EF4-FFF2-40B4-BE49-F238E27FC236}">
+                    <a16:creationId xmlns:a16="http://schemas.microsoft.com/office/drawing/2014/main" id="{8A6AE177-77BB-F80B-6BAA-2F92290613E2}"/>
+                  </a:ext>
+                </a:extLst>
+              </p:cNvPr>
+              <p:cNvPicPr/>
+              <p:nvPr/>
+            </p:nvPicPr>
+            <p:blipFill>
+              <a:blip r:embed="rId7"/>
+              <a:stretch>
+                <a:fillRect/>
+              </a:stretch>
+            </p:blipFill>
+            <p:spPr>
+              <a:xfrm>
+                <a:off x="3572582" y="6636726"/>
+                <a:ext cx="870120" cy="523080"/>
+              </a:xfrm>
+              <a:prstGeom prst="rect">
+                <a:avLst/>
+              </a:prstGeom>
+            </p:spPr>
+          </p:pic>
+        </mc:Fallback>
+      </mc:AlternateContent>
+      <p:grpSp>
+        <p:nvGrpSpPr>
+          <p:cNvPr id="46" name="Group 45">
+            <a:extLst>
+              <a:ext uri="{FF2B5EF4-FFF2-40B4-BE49-F238E27FC236}">
+                <a16:creationId xmlns:a16="http://schemas.microsoft.com/office/drawing/2014/main" id="{9B4F77BF-2CE5-D295-251E-F248DCF2A88F}"/>
+              </a:ext>
+            </a:extLst>
+          </p:cNvPr>
+          <p:cNvGrpSpPr/>
+          <p:nvPr/>
+        </p:nvGrpSpPr>
+        <p:grpSpPr>
+          <a:xfrm>
+            <a:off x="4692809" y="5918754"/>
+            <a:ext cx="812880" cy="580320"/>
+            <a:chOff x="5148402" y="4214459"/>
+            <a:chExt cx="812880" cy="580320"/>
+          </a:xfrm>
+        </p:grpSpPr>
+        <mc:AlternateContent xmlns:mc="http://schemas.openxmlformats.org/markup-compatibility/2006">
+          <mc:Choice xmlns:p14="http://schemas.microsoft.com/office/powerpoint/2010/main" Requires="p14">
+            <p:contentPart p14:bwMode="auto" r:id="rId25">
+              <p14:nvContentPartPr>
+                <p14:cNvPr id="47" name="Ink 46">
+                  <a:extLst>
+                    <a:ext uri="{FF2B5EF4-FFF2-40B4-BE49-F238E27FC236}">
+                      <a16:creationId xmlns:a16="http://schemas.microsoft.com/office/drawing/2014/main" id="{0BF62ADA-8D4A-90E4-36ED-EC1D3701240E}"/>
+                    </a:ext>
+                  </a:extLst>
+                </p14:cNvPr>
+                <p14:cNvContentPartPr/>
+                <p14:nvPr/>
+              </p14:nvContentPartPr>
+              <p14:xfrm>
+                <a:off x="5263242" y="4214459"/>
+                <a:ext cx="698040" cy="534600"/>
+              </p14:xfrm>
+            </p:contentPart>
+          </mc:Choice>
+          <mc:Fallback>
+            <p:pic>
+              <p:nvPicPr>
+                <p:cNvPr id="47" name="Ink 46">
+                  <a:extLst>
+                    <a:ext uri="{FF2B5EF4-FFF2-40B4-BE49-F238E27FC236}">
+                      <a16:creationId xmlns:a16="http://schemas.microsoft.com/office/drawing/2014/main" id="{0BF62ADA-8D4A-90E4-36ED-EC1D3701240E}"/>
+                    </a:ext>
+                  </a:extLst>
+                </p:cNvPr>
+                <p:cNvPicPr/>
+                <p:nvPr/>
+              </p:nvPicPr>
+              <p:blipFill>
+                <a:blip r:embed="rId11"/>
+                <a:stretch>
+                  <a:fillRect/>
+                </a:stretch>
+              </p:blipFill>
+              <p:spPr>
+                <a:xfrm>
+                  <a:off x="5257122" y="4208339"/>
+                  <a:ext cx="710280" cy="546840"/>
+                </a:xfrm>
+                <a:prstGeom prst="rect">
+                  <a:avLst/>
+                </a:prstGeom>
+              </p:spPr>
+            </p:pic>
+          </mc:Fallback>
+        </mc:AlternateContent>
+        <mc:AlternateContent xmlns:mc="http://schemas.openxmlformats.org/markup-compatibility/2006">
+          <mc:Choice xmlns:p14="http://schemas.microsoft.com/office/powerpoint/2010/main" Requires="p14">
+            <p:contentPart p14:bwMode="auto" r:id="rId26">
+              <p14:nvContentPartPr>
+                <p14:cNvPr id="48" name="Ink 47">
+                  <a:extLst>
+                    <a:ext uri="{FF2B5EF4-FFF2-40B4-BE49-F238E27FC236}">
+                      <a16:creationId xmlns:a16="http://schemas.microsoft.com/office/drawing/2014/main" id="{E010A242-1547-79CD-16B1-323DF90AC513}"/>
+                    </a:ext>
+                  </a:extLst>
+                </p14:cNvPr>
+                <p14:cNvContentPartPr/>
+                <p14:nvPr/>
+              </p14:nvContentPartPr>
+              <p14:xfrm>
+                <a:off x="5148402" y="4764179"/>
+                <a:ext cx="92160" cy="30600"/>
+              </p14:xfrm>
+            </p:contentPart>
+          </mc:Choice>
+          <mc:Fallback>
+            <p:pic>
+              <p:nvPicPr>
+                <p:cNvPr id="48" name="Ink 47">
+                  <a:extLst>
+                    <a:ext uri="{FF2B5EF4-FFF2-40B4-BE49-F238E27FC236}">
+                      <a16:creationId xmlns:a16="http://schemas.microsoft.com/office/drawing/2014/main" id="{E010A242-1547-79CD-16B1-323DF90AC513}"/>
+                    </a:ext>
+                  </a:extLst>
+                </p:cNvPr>
+                <p:cNvPicPr/>
+                <p:nvPr/>
+              </p:nvPicPr>
+              <p:blipFill>
+                <a:blip r:embed="rId13"/>
+                <a:stretch>
+                  <a:fillRect/>
+                </a:stretch>
+              </p:blipFill>
+              <p:spPr>
+                <a:xfrm>
+                  <a:off x="5142282" y="4758059"/>
+                  <a:ext cx="104400" cy="42840"/>
+                </a:xfrm>
+                <a:prstGeom prst="rect">
+                  <a:avLst/>
+                </a:prstGeom>
+              </p:spPr>
+            </p:pic>
+          </mc:Fallback>
+        </mc:AlternateContent>
+        <mc:AlternateContent xmlns:mc="http://schemas.openxmlformats.org/markup-compatibility/2006">
+          <mc:Choice xmlns:p14="http://schemas.microsoft.com/office/powerpoint/2010/main" Requires="p14">
+            <p:contentPart p14:bwMode="auto" r:id="rId27">
+              <p14:nvContentPartPr>
+                <p14:cNvPr id="49" name="Ink 48">
+                  <a:extLst>
+                    <a:ext uri="{FF2B5EF4-FFF2-40B4-BE49-F238E27FC236}">
+                      <a16:creationId xmlns:a16="http://schemas.microsoft.com/office/drawing/2014/main" id="{C9D6B7FB-5B20-995A-0780-02B60D22C00A}"/>
+                    </a:ext>
+                  </a:extLst>
+                </p14:cNvPr>
+                <p14:cNvContentPartPr/>
+                <p14:nvPr/>
+              </p14:nvContentPartPr>
+              <p14:xfrm>
+                <a:off x="5232642" y="4721339"/>
+                <a:ext cx="121320" cy="40320"/>
+              </p14:xfrm>
+            </p:contentPart>
+          </mc:Choice>
+          <mc:Fallback>
+            <p:pic>
+              <p:nvPicPr>
+                <p:cNvPr id="49" name="Ink 48">
+                  <a:extLst>
+                    <a:ext uri="{FF2B5EF4-FFF2-40B4-BE49-F238E27FC236}">
+                      <a16:creationId xmlns:a16="http://schemas.microsoft.com/office/drawing/2014/main" id="{C9D6B7FB-5B20-995A-0780-02B60D22C00A}"/>
+                    </a:ext>
+                  </a:extLst>
+                </p:cNvPr>
+                <p:cNvPicPr/>
+                <p:nvPr/>
+              </p:nvPicPr>
+              <p:blipFill>
+                <a:blip r:embed="rId15"/>
+                <a:stretch>
+                  <a:fillRect/>
+                </a:stretch>
+              </p:blipFill>
+              <p:spPr>
+                <a:xfrm>
+                  <a:off x="5226522" y="4715219"/>
+                  <a:ext cx="133560" cy="52560"/>
+                </a:xfrm>
+                <a:prstGeom prst="rect">
+                  <a:avLst/>
+                </a:prstGeom>
+              </p:spPr>
+            </p:pic>
+          </mc:Fallback>
+        </mc:AlternateContent>
+      </p:grpSp>
+      <mc:AlternateContent xmlns:mc="http://schemas.openxmlformats.org/markup-compatibility/2006">
+        <mc:Choice xmlns:p14="http://schemas.microsoft.com/office/powerpoint/2010/main" Requires="p14">
+          <p:contentPart p14:bwMode="auto" r:id="rId28">
+            <p14:nvContentPartPr>
+              <p14:cNvPr id="50" name="Ink 49">
+                <a:extLst>
+                  <a:ext uri="{FF2B5EF4-FFF2-40B4-BE49-F238E27FC236}">
+                    <a16:creationId xmlns:a16="http://schemas.microsoft.com/office/drawing/2014/main" id="{0D6BB520-3F0A-193B-35E2-74E0E0544F04}"/>
+                  </a:ext>
+                </a:extLst>
+              </p14:cNvPr>
+              <p14:cNvContentPartPr/>
+              <p14:nvPr/>
+            </p14:nvContentPartPr>
+            <p14:xfrm>
+              <a:off x="4486052" y="6632836"/>
+              <a:ext cx="8280" cy="560520"/>
+            </p14:xfrm>
+          </p:contentPart>
+        </mc:Choice>
+        <mc:Fallback>
+          <p:pic>
+            <p:nvPicPr>
+              <p:cNvPr id="50" name="Ink 49">
+                <a:extLst>
+                  <a:ext uri="{FF2B5EF4-FFF2-40B4-BE49-F238E27FC236}">
+                    <a16:creationId xmlns:a16="http://schemas.microsoft.com/office/drawing/2014/main" id="{0D6BB520-3F0A-193B-35E2-74E0E0544F04}"/>
+                  </a:ext>
+                </a:extLst>
+              </p:cNvPr>
+              <p:cNvPicPr/>
+              <p:nvPr/>
+            </p:nvPicPr>
+            <p:blipFill>
+              <a:blip r:embed="rId22"/>
+              <a:stretch>
+                <a:fillRect/>
+              </a:stretch>
+            </p:blipFill>
+            <p:spPr>
+              <a:xfrm>
+                <a:off x="4479932" y="6626716"/>
+                <a:ext cx="20520" cy="572760"/>
+              </a:xfrm>
+              <a:prstGeom prst="rect">
+                <a:avLst/>
+              </a:prstGeom>
+            </p:spPr>
+          </p:pic>
+        </mc:Fallback>
+      </mc:AlternateContent>
+      <mc:AlternateContent xmlns:mc="http://schemas.openxmlformats.org/markup-compatibility/2006">
+        <mc:Choice xmlns:p14="http://schemas.microsoft.com/office/powerpoint/2010/main" Requires="p14">
+          <p:contentPart p14:bwMode="auto" r:id="rId29">
+            <p14:nvContentPartPr>
+              <p14:cNvPr id="51" name="Ink 50">
+                <a:extLst>
+                  <a:ext uri="{FF2B5EF4-FFF2-40B4-BE49-F238E27FC236}">
+                    <a16:creationId xmlns:a16="http://schemas.microsoft.com/office/drawing/2014/main" id="{3CB149D5-7D80-D4FD-BCDF-DFCA219D2823}"/>
+                  </a:ext>
+                </a:extLst>
+              </p14:cNvPr>
+              <p14:cNvContentPartPr/>
+              <p14:nvPr/>
+            </p14:nvContentPartPr>
+            <p14:xfrm>
+              <a:off x="5609202" y="5916539"/>
+              <a:ext cx="55440" cy="1236600"/>
+            </p14:xfrm>
+          </p:contentPart>
+        </mc:Choice>
+        <mc:Fallback>
+          <p:pic>
+            <p:nvPicPr>
+              <p:cNvPr id="51" name="Ink 50">
+                <a:extLst>
+                  <a:ext uri="{FF2B5EF4-FFF2-40B4-BE49-F238E27FC236}">
+                    <a16:creationId xmlns:a16="http://schemas.microsoft.com/office/drawing/2014/main" id="{3CB149D5-7D80-D4FD-BCDF-DFCA219D2823}"/>
+                  </a:ext>
+                </a:extLst>
+              </p:cNvPr>
+              <p:cNvPicPr/>
+              <p:nvPr/>
+            </p:nvPicPr>
+            <p:blipFill>
+              <a:blip r:embed="rId30"/>
+              <a:stretch>
+                <a:fillRect/>
+              </a:stretch>
+            </p:blipFill>
+            <p:spPr>
+              <a:xfrm>
+                <a:off x="5603082" y="5910419"/>
+                <a:ext cx="67680" cy="1248840"/>
+              </a:xfrm>
+              <a:prstGeom prst="rect">
+                <a:avLst/>
+              </a:prstGeom>
+            </p:spPr>
+          </p:pic>
+        </mc:Fallback>
+      </mc:AlternateContent>
+      <mc:AlternateContent xmlns:mc="http://schemas.openxmlformats.org/markup-compatibility/2006">
+        <mc:Choice xmlns:p14="http://schemas.microsoft.com/office/powerpoint/2010/main" Requires="p14">
+          <p:contentPart p14:bwMode="auto" r:id="rId31">
+            <p14:nvContentPartPr>
+              <p14:cNvPr id="52" name="Ink 51">
+                <a:extLst>
+                  <a:ext uri="{FF2B5EF4-FFF2-40B4-BE49-F238E27FC236}">
+                    <a16:creationId xmlns:a16="http://schemas.microsoft.com/office/drawing/2014/main" id="{CC689175-F0CF-E8EB-E695-46CBFCD23C7B}"/>
+                  </a:ext>
+                </a:extLst>
+              </p14:cNvPr>
+              <p14:cNvContentPartPr/>
+              <p14:nvPr/>
+            </p14:nvContentPartPr>
+            <p14:xfrm>
+              <a:off x="3164802" y="5454659"/>
+              <a:ext cx="3007440" cy="2653920"/>
+            </p14:xfrm>
+          </p:contentPart>
+        </mc:Choice>
+        <mc:Fallback>
+          <p:pic>
+            <p:nvPicPr>
+              <p:cNvPr id="52" name="Ink 51">
+                <a:extLst>
+                  <a:ext uri="{FF2B5EF4-FFF2-40B4-BE49-F238E27FC236}">
+                    <a16:creationId xmlns:a16="http://schemas.microsoft.com/office/drawing/2014/main" id="{CC689175-F0CF-E8EB-E695-46CBFCD23C7B}"/>
+                  </a:ext>
+                </a:extLst>
+              </p:cNvPr>
+              <p:cNvPicPr/>
+              <p:nvPr/>
+            </p:nvPicPr>
+            <p:blipFill>
+              <a:blip r:embed="rId32"/>
+              <a:stretch>
+                <a:fillRect/>
+              </a:stretch>
+            </p:blipFill>
+            <p:spPr>
+              <a:xfrm>
+                <a:off x="3158682" y="5448539"/>
+                <a:ext cx="3019680" cy="2666160"/>
+              </a:xfrm>
+              <a:prstGeom prst="rect">
+                <a:avLst/>
+              </a:prstGeom>
+            </p:spPr>
+          </p:pic>
+        </mc:Fallback>
+      </mc:AlternateContent>
       <p:sp>
         <p:nvSpPr>
-          <p:cNvPr id="3" name="TextBox 2">
+          <p:cNvPr id="2054" name="TextBox 2053">
             <a:extLst>
               <a:ext uri="{FF2B5EF4-FFF2-40B4-BE49-F238E27FC236}">
-                <a16:creationId xmlns:a16="http://schemas.microsoft.com/office/drawing/2014/main" id="{60E27E15-F937-E0BF-2194-0CEB3BB18E34}"/>
+                <a16:creationId xmlns:a16="http://schemas.microsoft.com/office/drawing/2014/main" id="{42FAFC96-6E67-8F0C-D3BA-7A5350336B4C}"/>
               </a:ext>
             </a:extLst>
           </p:cNvPr>
@@ -8308,8 +11963,8 @@
         </p:nvSpPr>
         <p:spPr>
           <a:xfrm>
-            <a:off x="609600" y="4114800"/>
-            <a:ext cx="2159566" cy="1200329"/>
+            <a:off x="3643050" y="7501875"/>
+            <a:ext cx="1484702" cy="461665"/>
           </a:xfrm>
           <a:prstGeom prst="rect">
             <a:avLst/>
@@ -8324,29 +11979,8 @@
           <a:p>
             <a:r>
               <a:rPr lang="en-US" dirty="0"/>
-              <a:t>0, 2, 5, 1, 4, 3</a:t>
-            </a:r>
-          </a:p>
-          <a:p>
-            <a:r>
-              <a:rPr lang="en-US" dirty="0"/>
-              <a:t>0</a:t>
-            </a:r>
-            <a:r>
-              <a:rPr lang="en-US" dirty="0">
-                <a:sym typeface="Wingdings" panose="05000000000000000000" pitchFamily="2" charset="2"/>
-              </a:rPr>
-              <a:t>2513</a:t>
-            </a:r>
-          </a:p>
-          <a:p>
-            <a:r>
-              <a:rPr lang="en-US" dirty="0">
-                <a:sym typeface="Wingdings" panose="05000000000000000000" pitchFamily="2" charset="2"/>
-              </a:rPr>
-              <a:t>54</a:t>
-            </a:r>
-            <a:endParaRPr lang="en-US" dirty="0"/>
+              <a:t>ANSWER</a:t>
+            </a:r>
           </a:p>
         </p:txBody>
       </p:sp>
@@ -8543,891 +12177,6 @@
           </a:p>
         </p:txBody>
       </p:sp>
-      <p:sp>
-        <p:nvSpPr>
-          <p:cNvPr id="3075" name="Rectangle 4">
-            <a:extLst>
-              <a:ext uri="{FF2B5EF4-FFF2-40B4-BE49-F238E27FC236}">
-                <a16:creationId xmlns:a16="http://schemas.microsoft.com/office/drawing/2014/main" id="{E71DD7EA-C580-43B3-BC05-FA24AC85E0A2}"/>
-              </a:ext>
-            </a:extLst>
-          </p:cNvPr>
-          <p:cNvSpPr>
-            <a:spLocks noChangeArrowheads="1"/>
-          </p:cNvSpPr>
-          <p:nvPr/>
-        </p:nvSpPr>
-        <p:spPr bwMode="auto">
-          <a:xfrm>
-            <a:off x="171450" y="4800600"/>
-            <a:ext cx="2571750" cy="285750"/>
-          </a:xfrm>
-          <a:prstGeom prst="rect">
-            <a:avLst/>
-          </a:prstGeom>
-          <a:solidFill>
-            <a:schemeClr val="bg1"/>
-          </a:solidFill>
-          <a:ln>
-            <a:noFill/>
-          </a:ln>
-          <a:extLst>
-            <a:ext uri="{91240B29-F687-4F45-9708-019B960494DF}">
-              <a14:hiddenLine xmlns:a14="http://schemas.microsoft.com/office/drawing/2010/main" w="9525">
-                <a:solidFill>
-                  <a:srgbClr val="000000"/>
-                </a:solidFill>
-                <a:miter lim="800000"/>
-                <a:headEnd/>
-                <a:tailEnd/>
-              </a14:hiddenLine>
-            </a:ext>
-          </a:extLst>
-        </p:spPr>
-        <p:txBody>
-          <a:bodyPr wrap="none" anchor="ctr"/>
-          <a:lstStyle>
-            <a:lvl1pPr>
-              <a:spcBef>
-                <a:spcPct val="20000"/>
-              </a:spcBef>
-              <a:buChar char="•"/>
-              <a:defRPr sz="3200">
-                <a:solidFill>
-                  <a:schemeClr val="tx1"/>
-                </a:solidFill>
-                <a:latin typeface="Arial" panose="020B0604020202020204" pitchFamily="34" charset="0"/>
-              </a:defRPr>
-            </a:lvl1pPr>
-            <a:lvl2pPr marL="742950" indent="-285750">
-              <a:spcBef>
-                <a:spcPct val="20000"/>
-              </a:spcBef>
-              <a:buChar char="–"/>
-              <a:defRPr sz="2800">
-                <a:solidFill>
-                  <a:schemeClr val="tx1"/>
-                </a:solidFill>
-                <a:latin typeface="Arial" panose="020B0604020202020204" pitchFamily="34" charset="0"/>
-              </a:defRPr>
-            </a:lvl2pPr>
-            <a:lvl3pPr marL="1143000" indent="-228600">
-              <a:spcBef>
-                <a:spcPct val="20000"/>
-              </a:spcBef>
-              <a:buChar char="•"/>
-              <a:defRPr sz="2400">
-                <a:solidFill>
-                  <a:schemeClr val="tx1"/>
-                </a:solidFill>
-                <a:latin typeface="Arial" panose="020B0604020202020204" pitchFamily="34" charset="0"/>
-              </a:defRPr>
-            </a:lvl3pPr>
-            <a:lvl4pPr marL="1600200" indent="-228600">
-              <a:spcBef>
-                <a:spcPct val="20000"/>
-              </a:spcBef>
-              <a:buChar char="–"/>
-              <a:defRPr sz="2000">
-                <a:solidFill>
-                  <a:schemeClr val="tx1"/>
-                </a:solidFill>
-                <a:latin typeface="Arial" panose="020B0604020202020204" pitchFamily="34" charset="0"/>
-              </a:defRPr>
-            </a:lvl4pPr>
-            <a:lvl5pPr marL="2057400" indent="-228600">
-              <a:spcBef>
-                <a:spcPct val="20000"/>
-              </a:spcBef>
-              <a:buChar char="»"/>
-              <a:defRPr sz="2000">
-                <a:solidFill>
-                  <a:schemeClr val="tx1"/>
-                </a:solidFill>
-                <a:latin typeface="Arial" panose="020B0604020202020204" pitchFamily="34" charset="0"/>
-              </a:defRPr>
-            </a:lvl5pPr>
-            <a:lvl6pPr marL="2514600" indent="-228600" eaLnBrk="0" fontAlgn="base" hangingPunct="0">
-              <a:spcBef>
-                <a:spcPct val="20000"/>
-              </a:spcBef>
-              <a:spcAft>
-                <a:spcPct val="0"/>
-              </a:spcAft>
-              <a:buChar char="»"/>
-              <a:defRPr sz="2000">
-                <a:solidFill>
-                  <a:schemeClr val="tx1"/>
-                </a:solidFill>
-                <a:latin typeface="Arial" panose="020B0604020202020204" pitchFamily="34" charset="0"/>
-              </a:defRPr>
-            </a:lvl6pPr>
-            <a:lvl7pPr marL="2971800" indent="-228600" eaLnBrk="0" fontAlgn="base" hangingPunct="0">
-              <a:spcBef>
-                <a:spcPct val="20000"/>
-              </a:spcBef>
-              <a:spcAft>
-                <a:spcPct val="0"/>
-              </a:spcAft>
-              <a:buChar char="»"/>
-              <a:defRPr sz="2000">
-                <a:solidFill>
-                  <a:schemeClr val="tx1"/>
-                </a:solidFill>
-                <a:latin typeface="Arial" panose="020B0604020202020204" pitchFamily="34" charset="0"/>
-              </a:defRPr>
-            </a:lvl7pPr>
-            <a:lvl8pPr marL="3429000" indent="-228600" eaLnBrk="0" fontAlgn="base" hangingPunct="0">
-              <a:spcBef>
-                <a:spcPct val="20000"/>
-              </a:spcBef>
-              <a:spcAft>
-                <a:spcPct val="0"/>
-              </a:spcAft>
-              <a:buChar char="»"/>
-              <a:defRPr sz="2000">
-                <a:solidFill>
-                  <a:schemeClr val="tx1"/>
-                </a:solidFill>
-                <a:latin typeface="Arial" panose="020B0604020202020204" pitchFamily="34" charset="0"/>
-              </a:defRPr>
-            </a:lvl8pPr>
-            <a:lvl9pPr marL="3886200" indent="-228600" eaLnBrk="0" fontAlgn="base" hangingPunct="0">
-              <a:spcBef>
-                <a:spcPct val="20000"/>
-              </a:spcBef>
-              <a:spcAft>
-                <a:spcPct val="0"/>
-              </a:spcAft>
-              <a:buChar char="»"/>
-              <a:defRPr sz="2000">
-                <a:solidFill>
-                  <a:schemeClr val="tx1"/>
-                </a:solidFill>
-                <a:latin typeface="Arial" panose="020B0604020202020204" pitchFamily="34" charset="0"/>
-              </a:defRPr>
-            </a:lvl9pPr>
-          </a:lstStyle>
-          <a:p>
-            <a:pPr eaLnBrk="1" hangingPunct="1">
-              <a:spcBef>
-                <a:spcPct val="0"/>
-              </a:spcBef>
-              <a:buFontTx/>
-              <a:buNone/>
-            </a:pPr>
-            <a:endParaRPr lang="en-US" altLang="en-US" sz="1350"/>
-          </a:p>
-        </p:txBody>
-      </p:sp>
-      <p:sp>
-        <p:nvSpPr>
-          <p:cNvPr id="3076" name="Rectangle 5">
-            <a:extLst>
-              <a:ext uri="{FF2B5EF4-FFF2-40B4-BE49-F238E27FC236}">
-                <a16:creationId xmlns:a16="http://schemas.microsoft.com/office/drawing/2014/main" id="{5A054E60-1451-4BFE-A023-A4DF0B7F1663}"/>
-              </a:ext>
-            </a:extLst>
-          </p:cNvPr>
-          <p:cNvSpPr>
-            <a:spLocks noChangeArrowheads="1"/>
-          </p:cNvSpPr>
-          <p:nvPr/>
-        </p:nvSpPr>
-        <p:spPr bwMode="auto">
-          <a:xfrm>
-            <a:off x="0" y="2743200"/>
-            <a:ext cx="2228850" cy="2171700"/>
-          </a:xfrm>
-          <a:prstGeom prst="rect">
-            <a:avLst/>
-          </a:prstGeom>
-          <a:solidFill>
-            <a:schemeClr val="bg1"/>
-          </a:solidFill>
-          <a:ln>
-            <a:noFill/>
-          </a:ln>
-          <a:extLst>
-            <a:ext uri="{91240B29-F687-4F45-9708-019B960494DF}">
-              <a14:hiddenLine xmlns:a14="http://schemas.microsoft.com/office/drawing/2010/main" w="9525">
-                <a:solidFill>
-                  <a:srgbClr val="000000"/>
-                </a:solidFill>
-                <a:miter lim="800000"/>
-                <a:headEnd/>
-                <a:tailEnd/>
-              </a14:hiddenLine>
-            </a:ext>
-          </a:extLst>
-        </p:spPr>
-        <p:txBody>
-          <a:bodyPr wrap="none" anchor="ctr"/>
-          <a:lstStyle>
-            <a:lvl1pPr>
-              <a:spcBef>
-                <a:spcPct val="20000"/>
-              </a:spcBef>
-              <a:buChar char="•"/>
-              <a:defRPr sz="3200">
-                <a:solidFill>
-                  <a:schemeClr val="tx1"/>
-                </a:solidFill>
-                <a:latin typeface="Arial" panose="020B0604020202020204" pitchFamily="34" charset="0"/>
-              </a:defRPr>
-            </a:lvl1pPr>
-            <a:lvl2pPr marL="742950" indent="-285750">
-              <a:spcBef>
-                <a:spcPct val="20000"/>
-              </a:spcBef>
-              <a:buChar char="–"/>
-              <a:defRPr sz="2800">
-                <a:solidFill>
-                  <a:schemeClr val="tx1"/>
-                </a:solidFill>
-                <a:latin typeface="Arial" panose="020B0604020202020204" pitchFamily="34" charset="0"/>
-              </a:defRPr>
-            </a:lvl2pPr>
-            <a:lvl3pPr marL="1143000" indent="-228600">
-              <a:spcBef>
-                <a:spcPct val="20000"/>
-              </a:spcBef>
-              <a:buChar char="•"/>
-              <a:defRPr sz="2400">
-                <a:solidFill>
-                  <a:schemeClr val="tx1"/>
-                </a:solidFill>
-                <a:latin typeface="Arial" panose="020B0604020202020204" pitchFamily="34" charset="0"/>
-              </a:defRPr>
-            </a:lvl3pPr>
-            <a:lvl4pPr marL="1600200" indent="-228600">
-              <a:spcBef>
-                <a:spcPct val="20000"/>
-              </a:spcBef>
-              <a:buChar char="–"/>
-              <a:defRPr sz="2000">
-                <a:solidFill>
-                  <a:schemeClr val="tx1"/>
-                </a:solidFill>
-                <a:latin typeface="Arial" panose="020B0604020202020204" pitchFamily="34" charset="0"/>
-              </a:defRPr>
-            </a:lvl4pPr>
-            <a:lvl5pPr marL="2057400" indent="-228600">
-              <a:spcBef>
-                <a:spcPct val="20000"/>
-              </a:spcBef>
-              <a:buChar char="»"/>
-              <a:defRPr sz="2000">
-                <a:solidFill>
-                  <a:schemeClr val="tx1"/>
-                </a:solidFill>
-                <a:latin typeface="Arial" panose="020B0604020202020204" pitchFamily="34" charset="0"/>
-              </a:defRPr>
-            </a:lvl5pPr>
-            <a:lvl6pPr marL="2514600" indent="-228600" eaLnBrk="0" fontAlgn="base" hangingPunct="0">
-              <a:spcBef>
-                <a:spcPct val="20000"/>
-              </a:spcBef>
-              <a:spcAft>
-                <a:spcPct val="0"/>
-              </a:spcAft>
-              <a:buChar char="»"/>
-              <a:defRPr sz="2000">
-                <a:solidFill>
-                  <a:schemeClr val="tx1"/>
-                </a:solidFill>
-                <a:latin typeface="Arial" panose="020B0604020202020204" pitchFamily="34" charset="0"/>
-              </a:defRPr>
-            </a:lvl6pPr>
-            <a:lvl7pPr marL="2971800" indent="-228600" eaLnBrk="0" fontAlgn="base" hangingPunct="0">
-              <a:spcBef>
-                <a:spcPct val="20000"/>
-              </a:spcBef>
-              <a:spcAft>
-                <a:spcPct val="0"/>
-              </a:spcAft>
-              <a:buChar char="»"/>
-              <a:defRPr sz="2000">
-                <a:solidFill>
-                  <a:schemeClr val="tx1"/>
-                </a:solidFill>
-                <a:latin typeface="Arial" panose="020B0604020202020204" pitchFamily="34" charset="0"/>
-              </a:defRPr>
-            </a:lvl7pPr>
-            <a:lvl8pPr marL="3429000" indent="-228600" eaLnBrk="0" fontAlgn="base" hangingPunct="0">
-              <a:spcBef>
-                <a:spcPct val="20000"/>
-              </a:spcBef>
-              <a:spcAft>
-                <a:spcPct val="0"/>
-              </a:spcAft>
-              <a:buChar char="»"/>
-              <a:defRPr sz="2000">
-                <a:solidFill>
-                  <a:schemeClr val="tx1"/>
-                </a:solidFill>
-                <a:latin typeface="Arial" panose="020B0604020202020204" pitchFamily="34" charset="0"/>
-              </a:defRPr>
-            </a:lvl8pPr>
-            <a:lvl9pPr marL="3886200" indent="-228600" eaLnBrk="0" fontAlgn="base" hangingPunct="0">
-              <a:spcBef>
-                <a:spcPct val="20000"/>
-              </a:spcBef>
-              <a:spcAft>
-                <a:spcPct val="0"/>
-              </a:spcAft>
-              <a:buChar char="»"/>
-              <a:defRPr sz="2000">
-                <a:solidFill>
-                  <a:schemeClr val="tx1"/>
-                </a:solidFill>
-                <a:latin typeface="Arial" panose="020B0604020202020204" pitchFamily="34" charset="0"/>
-              </a:defRPr>
-            </a:lvl9pPr>
-          </a:lstStyle>
-          <a:p>
-            <a:pPr eaLnBrk="1" hangingPunct="1">
-              <a:spcBef>
-                <a:spcPct val="0"/>
-              </a:spcBef>
-              <a:buFontTx/>
-              <a:buNone/>
-            </a:pPr>
-            <a:endParaRPr lang="en-US" altLang="en-US" sz="1350"/>
-          </a:p>
-        </p:txBody>
-      </p:sp>
-      <p:sp>
-        <p:nvSpPr>
-          <p:cNvPr id="3077" name="Rectangle 6">
-            <a:extLst>
-              <a:ext uri="{FF2B5EF4-FFF2-40B4-BE49-F238E27FC236}">
-                <a16:creationId xmlns:a16="http://schemas.microsoft.com/office/drawing/2014/main" id="{D4108B9B-143E-4D5F-B2C5-7B979A64B87F}"/>
-              </a:ext>
-            </a:extLst>
-          </p:cNvPr>
-          <p:cNvSpPr>
-            <a:spLocks noChangeArrowheads="1"/>
-          </p:cNvSpPr>
-          <p:nvPr/>
-        </p:nvSpPr>
-        <p:spPr bwMode="auto">
-          <a:xfrm>
-            <a:off x="4286250" y="2743200"/>
-            <a:ext cx="2114550" cy="2000250"/>
-          </a:xfrm>
-          <a:prstGeom prst="rect">
-            <a:avLst/>
-          </a:prstGeom>
-          <a:solidFill>
-            <a:schemeClr val="bg1"/>
-          </a:solidFill>
-          <a:ln>
-            <a:noFill/>
-          </a:ln>
-          <a:extLst>
-            <a:ext uri="{91240B29-F687-4F45-9708-019B960494DF}">
-              <a14:hiddenLine xmlns:a14="http://schemas.microsoft.com/office/drawing/2010/main" w="9525">
-                <a:solidFill>
-                  <a:srgbClr val="000000"/>
-                </a:solidFill>
-                <a:miter lim="800000"/>
-                <a:headEnd/>
-                <a:tailEnd/>
-              </a14:hiddenLine>
-            </a:ext>
-          </a:extLst>
-        </p:spPr>
-        <p:txBody>
-          <a:bodyPr wrap="none" anchor="ctr"/>
-          <a:lstStyle>
-            <a:lvl1pPr>
-              <a:spcBef>
-                <a:spcPct val="20000"/>
-              </a:spcBef>
-              <a:buChar char="•"/>
-              <a:defRPr sz="3200">
-                <a:solidFill>
-                  <a:schemeClr val="tx1"/>
-                </a:solidFill>
-                <a:latin typeface="Arial" panose="020B0604020202020204" pitchFamily="34" charset="0"/>
-              </a:defRPr>
-            </a:lvl1pPr>
-            <a:lvl2pPr marL="742950" indent="-285750">
-              <a:spcBef>
-                <a:spcPct val="20000"/>
-              </a:spcBef>
-              <a:buChar char="–"/>
-              <a:defRPr sz="2800">
-                <a:solidFill>
-                  <a:schemeClr val="tx1"/>
-                </a:solidFill>
-                <a:latin typeface="Arial" panose="020B0604020202020204" pitchFamily="34" charset="0"/>
-              </a:defRPr>
-            </a:lvl2pPr>
-            <a:lvl3pPr marL="1143000" indent="-228600">
-              <a:spcBef>
-                <a:spcPct val="20000"/>
-              </a:spcBef>
-              <a:buChar char="•"/>
-              <a:defRPr sz="2400">
-                <a:solidFill>
-                  <a:schemeClr val="tx1"/>
-                </a:solidFill>
-                <a:latin typeface="Arial" panose="020B0604020202020204" pitchFamily="34" charset="0"/>
-              </a:defRPr>
-            </a:lvl3pPr>
-            <a:lvl4pPr marL="1600200" indent="-228600">
-              <a:spcBef>
-                <a:spcPct val="20000"/>
-              </a:spcBef>
-              <a:buChar char="–"/>
-              <a:defRPr sz="2000">
-                <a:solidFill>
-                  <a:schemeClr val="tx1"/>
-                </a:solidFill>
-                <a:latin typeface="Arial" panose="020B0604020202020204" pitchFamily="34" charset="0"/>
-              </a:defRPr>
-            </a:lvl4pPr>
-            <a:lvl5pPr marL="2057400" indent="-228600">
-              <a:spcBef>
-                <a:spcPct val="20000"/>
-              </a:spcBef>
-              <a:buChar char="»"/>
-              <a:defRPr sz="2000">
-                <a:solidFill>
-                  <a:schemeClr val="tx1"/>
-                </a:solidFill>
-                <a:latin typeface="Arial" panose="020B0604020202020204" pitchFamily="34" charset="0"/>
-              </a:defRPr>
-            </a:lvl5pPr>
-            <a:lvl6pPr marL="2514600" indent="-228600" eaLnBrk="0" fontAlgn="base" hangingPunct="0">
-              <a:spcBef>
-                <a:spcPct val="20000"/>
-              </a:spcBef>
-              <a:spcAft>
-                <a:spcPct val="0"/>
-              </a:spcAft>
-              <a:buChar char="»"/>
-              <a:defRPr sz="2000">
-                <a:solidFill>
-                  <a:schemeClr val="tx1"/>
-                </a:solidFill>
-                <a:latin typeface="Arial" panose="020B0604020202020204" pitchFamily="34" charset="0"/>
-              </a:defRPr>
-            </a:lvl6pPr>
-            <a:lvl7pPr marL="2971800" indent="-228600" eaLnBrk="0" fontAlgn="base" hangingPunct="0">
-              <a:spcBef>
-                <a:spcPct val="20000"/>
-              </a:spcBef>
-              <a:spcAft>
-                <a:spcPct val="0"/>
-              </a:spcAft>
-              <a:buChar char="»"/>
-              <a:defRPr sz="2000">
-                <a:solidFill>
-                  <a:schemeClr val="tx1"/>
-                </a:solidFill>
-                <a:latin typeface="Arial" panose="020B0604020202020204" pitchFamily="34" charset="0"/>
-              </a:defRPr>
-            </a:lvl7pPr>
-            <a:lvl8pPr marL="3429000" indent="-228600" eaLnBrk="0" fontAlgn="base" hangingPunct="0">
-              <a:spcBef>
-                <a:spcPct val="20000"/>
-              </a:spcBef>
-              <a:spcAft>
-                <a:spcPct val="0"/>
-              </a:spcAft>
-              <a:buChar char="»"/>
-              <a:defRPr sz="2000">
-                <a:solidFill>
-                  <a:schemeClr val="tx1"/>
-                </a:solidFill>
-                <a:latin typeface="Arial" panose="020B0604020202020204" pitchFamily="34" charset="0"/>
-              </a:defRPr>
-            </a:lvl8pPr>
-            <a:lvl9pPr marL="3886200" indent="-228600" eaLnBrk="0" fontAlgn="base" hangingPunct="0">
-              <a:spcBef>
-                <a:spcPct val="20000"/>
-              </a:spcBef>
-              <a:spcAft>
-                <a:spcPct val="0"/>
-              </a:spcAft>
-              <a:buChar char="»"/>
-              <a:defRPr sz="2000">
-                <a:solidFill>
-                  <a:schemeClr val="tx1"/>
-                </a:solidFill>
-                <a:latin typeface="Arial" panose="020B0604020202020204" pitchFamily="34" charset="0"/>
-              </a:defRPr>
-            </a:lvl9pPr>
-          </a:lstStyle>
-          <a:p>
-            <a:pPr eaLnBrk="1" hangingPunct="1">
-              <a:spcBef>
-                <a:spcPct val="0"/>
-              </a:spcBef>
-              <a:buFontTx/>
-              <a:buNone/>
-            </a:pPr>
-            <a:endParaRPr lang="en-US" altLang="en-US" sz="1350"/>
-          </a:p>
-        </p:txBody>
-      </p:sp>
-      <p:sp>
-        <p:nvSpPr>
-          <p:cNvPr id="3078" name="Rectangle 7">
-            <a:extLst>
-              <a:ext uri="{FF2B5EF4-FFF2-40B4-BE49-F238E27FC236}">
-                <a16:creationId xmlns:a16="http://schemas.microsoft.com/office/drawing/2014/main" id="{2C2C5CBD-8904-410A-901D-4499337BD262}"/>
-              </a:ext>
-            </a:extLst>
-          </p:cNvPr>
-          <p:cNvSpPr>
-            <a:spLocks noChangeArrowheads="1"/>
-          </p:cNvSpPr>
-          <p:nvPr/>
-        </p:nvSpPr>
-        <p:spPr bwMode="auto">
-          <a:xfrm>
-            <a:off x="2000250" y="4572000"/>
-            <a:ext cx="2400300" cy="228600"/>
-          </a:xfrm>
-          <a:prstGeom prst="rect">
-            <a:avLst/>
-          </a:prstGeom>
-          <a:solidFill>
-            <a:schemeClr val="bg1"/>
-          </a:solidFill>
-          <a:ln>
-            <a:noFill/>
-          </a:ln>
-          <a:extLst>
-            <a:ext uri="{91240B29-F687-4F45-9708-019B960494DF}">
-              <a14:hiddenLine xmlns:a14="http://schemas.microsoft.com/office/drawing/2010/main" w="9525">
-                <a:solidFill>
-                  <a:srgbClr val="000000"/>
-                </a:solidFill>
-                <a:miter lim="800000"/>
-                <a:headEnd/>
-                <a:tailEnd/>
-              </a14:hiddenLine>
-            </a:ext>
-          </a:extLst>
-        </p:spPr>
-        <p:txBody>
-          <a:bodyPr wrap="none" anchor="ctr"/>
-          <a:lstStyle>
-            <a:lvl1pPr>
-              <a:spcBef>
-                <a:spcPct val="20000"/>
-              </a:spcBef>
-              <a:buChar char="•"/>
-              <a:defRPr sz="3200">
-                <a:solidFill>
-                  <a:schemeClr val="tx1"/>
-                </a:solidFill>
-                <a:latin typeface="Arial" panose="020B0604020202020204" pitchFamily="34" charset="0"/>
-              </a:defRPr>
-            </a:lvl1pPr>
-            <a:lvl2pPr marL="742950" indent="-285750">
-              <a:spcBef>
-                <a:spcPct val="20000"/>
-              </a:spcBef>
-              <a:buChar char="–"/>
-              <a:defRPr sz="2800">
-                <a:solidFill>
-                  <a:schemeClr val="tx1"/>
-                </a:solidFill>
-                <a:latin typeface="Arial" panose="020B0604020202020204" pitchFamily="34" charset="0"/>
-              </a:defRPr>
-            </a:lvl2pPr>
-            <a:lvl3pPr marL="1143000" indent="-228600">
-              <a:spcBef>
-                <a:spcPct val="20000"/>
-              </a:spcBef>
-              <a:buChar char="•"/>
-              <a:defRPr sz="2400">
-                <a:solidFill>
-                  <a:schemeClr val="tx1"/>
-                </a:solidFill>
-                <a:latin typeface="Arial" panose="020B0604020202020204" pitchFamily="34" charset="0"/>
-              </a:defRPr>
-            </a:lvl3pPr>
-            <a:lvl4pPr marL="1600200" indent="-228600">
-              <a:spcBef>
-                <a:spcPct val="20000"/>
-              </a:spcBef>
-              <a:buChar char="–"/>
-              <a:defRPr sz="2000">
-                <a:solidFill>
-                  <a:schemeClr val="tx1"/>
-                </a:solidFill>
-                <a:latin typeface="Arial" panose="020B0604020202020204" pitchFamily="34" charset="0"/>
-              </a:defRPr>
-            </a:lvl4pPr>
-            <a:lvl5pPr marL="2057400" indent="-228600">
-              <a:spcBef>
-                <a:spcPct val="20000"/>
-              </a:spcBef>
-              <a:buChar char="»"/>
-              <a:defRPr sz="2000">
-                <a:solidFill>
-                  <a:schemeClr val="tx1"/>
-                </a:solidFill>
-                <a:latin typeface="Arial" panose="020B0604020202020204" pitchFamily="34" charset="0"/>
-              </a:defRPr>
-            </a:lvl5pPr>
-            <a:lvl6pPr marL="2514600" indent="-228600" eaLnBrk="0" fontAlgn="base" hangingPunct="0">
-              <a:spcBef>
-                <a:spcPct val="20000"/>
-              </a:spcBef>
-              <a:spcAft>
-                <a:spcPct val="0"/>
-              </a:spcAft>
-              <a:buChar char="»"/>
-              <a:defRPr sz="2000">
-                <a:solidFill>
-                  <a:schemeClr val="tx1"/>
-                </a:solidFill>
-                <a:latin typeface="Arial" panose="020B0604020202020204" pitchFamily="34" charset="0"/>
-              </a:defRPr>
-            </a:lvl6pPr>
-            <a:lvl7pPr marL="2971800" indent="-228600" eaLnBrk="0" fontAlgn="base" hangingPunct="0">
-              <a:spcBef>
-                <a:spcPct val="20000"/>
-              </a:spcBef>
-              <a:spcAft>
-                <a:spcPct val="0"/>
-              </a:spcAft>
-              <a:buChar char="»"/>
-              <a:defRPr sz="2000">
-                <a:solidFill>
-                  <a:schemeClr val="tx1"/>
-                </a:solidFill>
-                <a:latin typeface="Arial" panose="020B0604020202020204" pitchFamily="34" charset="0"/>
-              </a:defRPr>
-            </a:lvl7pPr>
-            <a:lvl8pPr marL="3429000" indent="-228600" eaLnBrk="0" fontAlgn="base" hangingPunct="0">
-              <a:spcBef>
-                <a:spcPct val="20000"/>
-              </a:spcBef>
-              <a:spcAft>
-                <a:spcPct val="0"/>
-              </a:spcAft>
-              <a:buChar char="»"/>
-              <a:defRPr sz="2000">
-                <a:solidFill>
-                  <a:schemeClr val="tx1"/>
-                </a:solidFill>
-                <a:latin typeface="Arial" panose="020B0604020202020204" pitchFamily="34" charset="0"/>
-              </a:defRPr>
-            </a:lvl8pPr>
-            <a:lvl9pPr marL="3886200" indent="-228600" eaLnBrk="0" fontAlgn="base" hangingPunct="0">
-              <a:spcBef>
-                <a:spcPct val="20000"/>
-              </a:spcBef>
-              <a:spcAft>
-                <a:spcPct val="0"/>
-              </a:spcAft>
-              <a:buChar char="»"/>
-              <a:defRPr sz="2000">
-                <a:solidFill>
-                  <a:schemeClr val="tx1"/>
-                </a:solidFill>
-                <a:latin typeface="Arial" panose="020B0604020202020204" pitchFamily="34" charset="0"/>
-              </a:defRPr>
-            </a:lvl9pPr>
-          </a:lstStyle>
-          <a:p>
-            <a:pPr eaLnBrk="1" hangingPunct="1">
-              <a:spcBef>
-                <a:spcPct val="0"/>
-              </a:spcBef>
-              <a:buFontTx/>
-              <a:buNone/>
-            </a:pPr>
-            <a:endParaRPr lang="en-US" altLang="en-US" sz="1350"/>
-          </a:p>
-        </p:txBody>
-      </p:sp>
-      <p:sp>
-        <p:nvSpPr>
-          <p:cNvPr id="3079" name="Rectangle 8">
-            <a:extLst>
-              <a:ext uri="{FF2B5EF4-FFF2-40B4-BE49-F238E27FC236}">
-                <a16:creationId xmlns:a16="http://schemas.microsoft.com/office/drawing/2014/main" id="{4FDBE91F-B50C-4798-9349-2A662252E334}"/>
-              </a:ext>
-            </a:extLst>
-          </p:cNvPr>
-          <p:cNvSpPr>
-            <a:spLocks noChangeArrowheads="1"/>
-          </p:cNvSpPr>
-          <p:nvPr/>
-        </p:nvSpPr>
-        <p:spPr bwMode="auto">
-          <a:xfrm>
-            <a:off x="2114550" y="2743200"/>
-            <a:ext cx="2343150" cy="171450"/>
-          </a:xfrm>
-          <a:prstGeom prst="rect">
-            <a:avLst/>
-          </a:prstGeom>
-          <a:solidFill>
-            <a:schemeClr val="bg1"/>
-          </a:solidFill>
-          <a:ln>
-            <a:noFill/>
-          </a:ln>
-          <a:extLst>
-            <a:ext uri="{91240B29-F687-4F45-9708-019B960494DF}">
-              <a14:hiddenLine xmlns:a14="http://schemas.microsoft.com/office/drawing/2010/main" w="9525">
-                <a:solidFill>
-                  <a:srgbClr val="000000"/>
-                </a:solidFill>
-                <a:miter lim="800000"/>
-                <a:headEnd/>
-                <a:tailEnd/>
-              </a14:hiddenLine>
-            </a:ext>
-          </a:extLst>
-        </p:spPr>
-        <p:txBody>
-          <a:bodyPr wrap="none" anchor="ctr"/>
-          <a:lstStyle>
-            <a:lvl1pPr>
-              <a:spcBef>
-                <a:spcPct val="20000"/>
-              </a:spcBef>
-              <a:buChar char="•"/>
-              <a:defRPr sz="3200">
-                <a:solidFill>
-                  <a:schemeClr val="tx1"/>
-                </a:solidFill>
-                <a:latin typeface="Arial" panose="020B0604020202020204" pitchFamily="34" charset="0"/>
-              </a:defRPr>
-            </a:lvl1pPr>
-            <a:lvl2pPr marL="742950" indent="-285750">
-              <a:spcBef>
-                <a:spcPct val="20000"/>
-              </a:spcBef>
-              <a:buChar char="–"/>
-              <a:defRPr sz="2800">
-                <a:solidFill>
-                  <a:schemeClr val="tx1"/>
-                </a:solidFill>
-                <a:latin typeface="Arial" panose="020B0604020202020204" pitchFamily="34" charset="0"/>
-              </a:defRPr>
-            </a:lvl2pPr>
-            <a:lvl3pPr marL="1143000" indent="-228600">
-              <a:spcBef>
-                <a:spcPct val="20000"/>
-              </a:spcBef>
-              <a:buChar char="•"/>
-              <a:defRPr sz="2400">
-                <a:solidFill>
-                  <a:schemeClr val="tx1"/>
-                </a:solidFill>
-                <a:latin typeface="Arial" panose="020B0604020202020204" pitchFamily="34" charset="0"/>
-              </a:defRPr>
-            </a:lvl3pPr>
-            <a:lvl4pPr marL="1600200" indent="-228600">
-              <a:spcBef>
-                <a:spcPct val="20000"/>
-              </a:spcBef>
-              <a:buChar char="–"/>
-              <a:defRPr sz="2000">
-                <a:solidFill>
-                  <a:schemeClr val="tx1"/>
-                </a:solidFill>
-                <a:latin typeface="Arial" panose="020B0604020202020204" pitchFamily="34" charset="0"/>
-              </a:defRPr>
-            </a:lvl4pPr>
-            <a:lvl5pPr marL="2057400" indent="-228600">
-              <a:spcBef>
-                <a:spcPct val="20000"/>
-              </a:spcBef>
-              <a:buChar char="»"/>
-              <a:defRPr sz="2000">
-                <a:solidFill>
-                  <a:schemeClr val="tx1"/>
-                </a:solidFill>
-                <a:latin typeface="Arial" panose="020B0604020202020204" pitchFamily="34" charset="0"/>
-              </a:defRPr>
-            </a:lvl5pPr>
-            <a:lvl6pPr marL="2514600" indent="-228600" eaLnBrk="0" fontAlgn="base" hangingPunct="0">
-              <a:spcBef>
-                <a:spcPct val="20000"/>
-              </a:spcBef>
-              <a:spcAft>
-                <a:spcPct val="0"/>
-              </a:spcAft>
-              <a:buChar char="»"/>
-              <a:defRPr sz="2000">
-                <a:solidFill>
-                  <a:schemeClr val="tx1"/>
-                </a:solidFill>
-                <a:latin typeface="Arial" panose="020B0604020202020204" pitchFamily="34" charset="0"/>
-              </a:defRPr>
-            </a:lvl6pPr>
-            <a:lvl7pPr marL="2971800" indent="-228600" eaLnBrk="0" fontAlgn="base" hangingPunct="0">
-              <a:spcBef>
-                <a:spcPct val="20000"/>
-              </a:spcBef>
-              <a:spcAft>
-                <a:spcPct val="0"/>
-              </a:spcAft>
-              <a:buChar char="»"/>
-              <a:defRPr sz="2000">
-                <a:solidFill>
-                  <a:schemeClr val="tx1"/>
-                </a:solidFill>
-                <a:latin typeface="Arial" panose="020B0604020202020204" pitchFamily="34" charset="0"/>
-              </a:defRPr>
-            </a:lvl7pPr>
-            <a:lvl8pPr marL="3429000" indent="-228600" eaLnBrk="0" fontAlgn="base" hangingPunct="0">
-              <a:spcBef>
-                <a:spcPct val="20000"/>
-              </a:spcBef>
-              <a:spcAft>
-                <a:spcPct val="0"/>
-              </a:spcAft>
-              <a:buChar char="»"/>
-              <a:defRPr sz="2000">
-                <a:solidFill>
-                  <a:schemeClr val="tx1"/>
-                </a:solidFill>
-                <a:latin typeface="Arial" panose="020B0604020202020204" pitchFamily="34" charset="0"/>
-              </a:defRPr>
-            </a:lvl8pPr>
-            <a:lvl9pPr marL="3886200" indent="-228600" eaLnBrk="0" fontAlgn="base" hangingPunct="0">
-              <a:spcBef>
-                <a:spcPct val="20000"/>
-              </a:spcBef>
-              <a:spcAft>
-                <a:spcPct val="0"/>
-              </a:spcAft>
-              <a:buChar char="»"/>
-              <a:defRPr sz="2000">
-                <a:solidFill>
-                  <a:schemeClr val="tx1"/>
-                </a:solidFill>
-                <a:latin typeface="Arial" panose="020B0604020202020204" pitchFamily="34" charset="0"/>
-              </a:defRPr>
-            </a:lvl9pPr>
-          </a:lstStyle>
-          <a:p>
-            <a:pPr eaLnBrk="1" hangingPunct="1">
-              <a:spcBef>
-                <a:spcPct val="0"/>
-              </a:spcBef>
-              <a:buFontTx/>
-              <a:buNone/>
-            </a:pPr>
-            <a:endParaRPr lang="en-US" altLang="en-US" sz="1350"/>
-          </a:p>
-        </p:txBody>
-      </p:sp>
       <p:pic>
         <p:nvPicPr>
           <p:cNvPr id="3080" name="Picture 5">
@@ -9457,7 +12206,7 @@
         </p:blipFill>
         <p:spPr bwMode="auto">
           <a:xfrm>
-            <a:off x="914400" y="1600200"/>
+            <a:off x="220916" y="1447800"/>
             <a:ext cx="2686050" cy="2128838"/>
           </a:xfrm>
           <a:prstGeom prst="rect">
@@ -9498,6 +12247,1432 @@
           </a:extLst>
         </p:spPr>
       </p:pic>
+      <p:pic>
+        <p:nvPicPr>
+          <p:cNvPr id="4" name="Picture 5">
+            <a:extLst>
+              <a:ext uri="{FF2B5EF4-FFF2-40B4-BE49-F238E27FC236}">
+                <a16:creationId xmlns:a16="http://schemas.microsoft.com/office/drawing/2014/main" id="{87672A4D-893A-1223-0E7F-7E2AFC38DC6C}"/>
+              </a:ext>
+            </a:extLst>
+          </p:cNvPr>
+          <p:cNvPicPr>
+            <a:picLocks noChangeAspect="1" noChangeArrowheads="1"/>
+          </p:cNvPicPr>
+          <p:nvPr/>
+        </p:nvPicPr>
+        <p:blipFill>
+          <a:blip r:embed="rId2">
+            <a:extLst>
+              <a:ext uri="{28A0092B-C50C-407E-A947-70E740481C1C}">
+                <a14:useLocalDpi xmlns:a14="http://schemas.microsoft.com/office/drawing/2010/main" val="0"/>
+              </a:ext>
+            </a:extLst>
+          </a:blip>
+          <a:srcRect/>
+          <a:stretch>
+            <a:fillRect/>
+          </a:stretch>
+        </p:blipFill>
+        <p:spPr bwMode="auto">
+          <a:xfrm>
+            <a:off x="3124200" y="1472133"/>
+            <a:ext cx="2686050" cy="2128838"/>
+          </a:xfrm>
+          <a:prstGeom prst="rect">
+            <a:avLst/>
+          </a:prstGeom>
+          <a:noFill/>
+          <a:ln>
+            <a:noFill/>
+          </a:ln>
+          <a:effectLst/>
+          <a:extLst>
+            <a:ext uri="{909E8E84-426E-40DD-AFC4-6F175D3DCCD1}">
+              <a14:hiddenFill xmlns:a14="http://schemas.microsoft.com/office/drawing/2010/main">
+                <a:solidFill>
+                  <a:schemeClr val="accent1"/>
+                </a:solidFill>
+              </a14:hiddenFill>
+            </a:ext>
+            <a:ext uri="{91240B29-F687-4F45-9708-019B960494DF}">
+              <a14:hiddenLine xmlns:a14="http://schemas.microsoft.com/office/drawing/2010/main" w="9525">
+                <a:solidFill>
+                  <a:schemeClr val="tx1"/>
+                </a:solidFill>
+                <a:miter lim="800000"/>
+                <a:headEnd/>
+                <a:tailEnd/>
+              </a14:hiddenLine>
+            </a:ext>
+            <a:ext uri="{AF507438-7753-43E0-B8FC-AC1667EBCBE1}">
+              <a14:hiddenEffects xmlns:a14="http://schemas.microsoft.com/office/drawing/2010/main">
+                <a:effectLst>
+                  <a:outerShdw dist="35921" dir="2700000" algn="ctr" rotWithShape="0">
+                    <a:schemeClr val="bg2"/>
+                  </a:outerShdw>
+                </a:effectLst>
+              </a14:hiddenEffects>
+            </a:ext>
+          </a:extLst>
+        </p:spPr>
+      </p:pic>
+      <mc:AlternateContent xmlns:mc="http://schemas.openxmlformats.org/markup-compatibility/2006">
+        <mc:Choice xmlns:p14="http://schemas.microsoft.com/office/powerpoint/2010/main" Requires="p14">
+          <p:contentPart p14:bwMode="auto" r:id="rId3">
+            <p14:nvContentPartPr>
+              <p14:cNvPr id="5" name="Ink 4">
+                <a:extLst>
+                  <a:ext uri="{FF2B5EF4-FFF2-40B4-BE49-F238E27FC236}">
+                    <a16:creationId xmlns:a16="http://schemas.microsoft.com/office/drawing/2014/main" id="{718A0336-F28B-55B1-A68F-DBF6BB340191}"/>
+                  </a:ext>
+                </a:extLst>
+              </p14:cNvPr>
+              <p14:cNvContentPartPr/>
+              <p14:nvPr/>
+            </p14:nvContentPartPr>
+            <p14:xfrm>
+              <a:off x="3457482" y="2563859"/>
+              <a:ext cx="876960" cy="548640"/>
+            </p14:xfrm>
+          </p:contentPart>
+        </mc:Choice>
+        <mc:Fallback>
+          <p:pic>
+            <p:nvPicPr>
+              <p:cNvPr id="5" name="Ink 4">
+                <a:extLst>
+                  <a:ext uri="{FF2B5EF4-FFF2-40B4-BE49-F238E27FC236}">
+                    <a16:creationId xmlns:a16="http://schemas.microsoft.com/office/drawing/2014/main" id="{718A0336-F28B-55B1-A68F-DBF6BB340191}"/>
+                  </a:ext>
+                </a:extLst>
+              </p:cNvPr>
+              <p:cNvPicPr/>
+              <p:nvPr/>
+            </p:nvPicPr>
+            <p:blipFill>
+              <a:blip r:embed="rId4"/>
+              <a:stretch>
+                <a:fillRect/>
+              </a:stretch>
+            </p:blipFill>
+            <p:spPr>
+              <a:xfrm>
+                <a:off x="3451362" y="2557739"/>
+                <a:ext cx="889200" cy="560880"/>
+              </a:xfrm>
+              <a:prstGeom prst="rect">
+                <a:avLst/>
+              </a:prstGeom>
+            </p:spPr>
+          </p:pic>
+        </mc:Fallback>
+      </mc:AlternateContent>
+      <p:pic>
+        <p:nvPicPr>
+          <p:cNvPr id="7" name="Picture 5">
+            <a:extLst>
+              <a:ext uri="{FF2B5EF4-FFF2-40B4-BE49-F238E27FC236}">
+                <a16:creationId xmlns:a16="http://schemas.microsoft.com/office/drawing/2014/main" id="{E5E89655-9416-86B8-01E3-B456D2210F66}"/>
+              </a:ext>
+            </a:extLst>
+          </p:cNvPr>
+          <p:cNvPicPr>
+            <a:picLocks noChangeAspect="1" noChangeArrowheads="1"/>
+          </p:cNvPicPr>
+          <p:nvPr/>
+        </p:nvPicPr>
+        <p:blipFill>
+          <a:blip r:embed="rId2">
+            <a:extLst>
+              <a:ext uri="{28A0092B-C50C-407E-A947-70E740481C1C}">
+                <a14:useLocalDpi xmlns:a14="http://schemas.microsoft.com/office/drawing/2010/main" val="0"/>
+              </a:ext>
+            </a:extLst>
+          </a:blip>
+          <a:srcRect/>
+          <a:stretch>
+            <a:fillRect/>
+          </a:stretch>
+        </p:blipFill>
+        <p:spPr bwMode="auto">
+          <a:xfrm>
+            <a:off x="329533" y="3581714"/>
+            <a:ext cx="2686050" cy="2128838"/>
+          </a:xfrm>
+          <a:prstGeom prst="rect">
+            <a:avLst/>
+          </a:prstGeom>
+          <a:noFill/>
+          <a:ln>
+            <a:noFill/>
+          </a:ln>
+          <a:effectLst/>
+          <a:extLst>
+            <a:ext uri="{909E8E84-426E-40DD-AFC4-6F175D3DCCD1}">
+              <a14:hiddenFill xmlns:a14="http://schemas.microsoft.com/office/drawing/2010/main">
+                <a:solidFill>
+                  <a:schemeClr val="accent1"/>
+                </a:solidFill>
+              </a14:hiddenFill>
+            </a:ext>
+            <a:ext uri="{91240B29-F687-4F45-9708-019B960494DF}">
+              <a14:hiddenLine xmlns:a14="http://schemas.microsoft.com/office/drawing/2010/main" w="9525">
+                <a:solidFill>
+                  <a:schemeClr val="tx1"/>
+                </a:solidFill>
+                <a:miter lim="800000"/>
+                <a:headEnd/>
+                <a:tailEnd/>
+              </a14:hiddenLine>
+            </a:ext>
+            <a:ext uri="{AF507438-7753-43E0-B8FC-AC1667EBCBE1}">
+              <a14:hiddenEffects xmlns:a14="http://schemas.microsoft.com/office/drawing/2010/main">
+                <a:effectLst>
+                  <a:outerShdw dist="35921" dir="2700000" algn="ctr" rotWithShape="0">
+                    <a:schemeClr val="bg2"/>
+                  </a:outerShdw>
+                </a:effectLst>
+              </a14:hiddenEffects>
+            </a:ext>
+          </a:extLst>
+        </p:spPr>
+      </p:pic>
+      <mc:AlternateContent xmlns:mc="http://schemas.openxmlformats.org/markup-compatibility/2006">
+        <mc:Choice xmlns:p14="http://schemas.microsoft.com/office/powerpoint/2010/main" Requires="p14">
+          <p:contentPart p14:bwMode="auto" r:id="rId5">
+            <p14:nvContentPartPr>
+              <p14:cNvPr id="8" name="Ink 7">
+                <a:extLst>
+                  <a:ext uri="{FF2B5EF4-FFF2-40B4-BE49-F238E27FC236}">
+                    <a16:creationId xmlns:a16="http://schemas.microsoft.com/office/drawing/2014/main" id="{B0F8FFFD-2FBC-FC49-ED36-7083689E2D34}"/>
+                  </a:ext>
+                </a:extLst>
+              </p14:cNvPr>
+              <p14:cNvContentPartPr/>
+              <p14:nvPr/>
+            </p14:nvContentPartPr>
+            <p14:xfrm>
+              <a:off x="662815" y="4673440"/>
+              <a:ext cx="876960" cy="548640"/>
+            </p14:xfrm>
+          </p:contentPart>
+        </mc:Choice>
+        <mc:Fallback>
+          <p:pic>
+            <p:nvPicPr>
+              <p:cNvPr id="8" name="Ink 7">
+                <a:extLst>
+                  <a:ext uri="{FF2B5EF4-FFF2-40B4-BE49-F238E27FC236}">
+                    <a16:creationId xmlns:a16="http://schemas.microsoft.com/office/drawing/2014/main" id="{B0F8FFFD-2FBC-FC49-ED36-7083689E2D34}"/>
+                  </a:ext>
+                </a:extLst>
+              </p:cNvPr>
+              <p:cNvPicPr/>
+              <p:nvPr/>
+            </p:nvPicPr>
+            <p:blipFill>
+              <a:blip r:embed="rId4"/>
+              <a:stretch>
+                <a:fillRect/>
+              </a:stretch>
+            </p:blipFill>
+            <p:spPr>
+              <a:xfrm>
+                <a:off x="656695" y="4667320"/>
+                <a:ext cx="889200" cy="560880"/>
+              </a:xfrm>
+              <a:prstGeom prst="rect">
+                <a:avLst/>
+              </a:prstGeom>
+            </p:spPr>
+          </p:pic>
+        </mc:Fallback>
+      </mc:AlternateContent>
+      <mc:AlternateContent xmlns:mc="http://schemas.openxmlformats.org/markup-compatibility/2006">
+        <mc:Choice xmlns:p14="http://schemas.microsoft.com/office/powerpoint/2010/main" Requires="p14">
+          <p:contentPart p14:bwMode="auto" r:id="rId6">
+            <p14:nvContentPartPr>
+              <p14:cNvPr id="9" name="Ink 8">
+                <a:extLst>
+                  <a:ext uri="{FF2B5EF4-FFF2-40B4-BE49-F238E27FC236}">
+                    <a16:creationId xmlns:a16="http://schemas.microsoft.com/office/drawing/2014/main" id="{2DFEA6D5-6A92-7846-9E54-2D32F4EF55CE}"/>
+                  </a:ext>
+                </a:extLst>
+              </p14:cNvPr>
+              <p14:cNvContentPartPr/>
+              <p14:nvPr/>
+            </p14:nvContentPartPr>
+            <p14:xfrm>
+              <a:off x="3926202" y="4733219"/>
+              <a:ext cx="360" cy="360"/>
+            </p14:xfrm>
+          </p:contentPart>
+        </mc:Choice>
+        <mc:Fallback>
+          <p:pic>
+            <p:nvPicPr>
+              <p:cNvPr id="9" name="Ink 8">
+                <a:extLst>
+                  <a:ext uri="{FF2B5EF4-FFF2-40B4-BE49-F238E27FC236}">
+                    <a16:creationId xmlns:a16="http://schemas.microsoft.com/office/drawing/2014/main" id="{2DFEA6D5-6A92-7846-9E54-2D32F4EF55CE}"/>
+                  </a:ext>
+                </a:extLst>
+              </p:cNvPr>
+              <p:cNvPicPr/>
+              <p:nvPr/>
+            </p:nvPicPr>
+            <p:blipFill>
+              <a:blip r:embed="rId7"/>
+              <a:stretch>
+                <a:fillRect/>
+              </a:stretch>
+            </p:blipFill>
+            <p:spPr>
+              <a:xfrm>
+                <a:off x="3920082" y="4727099"/>
+                <a:ext cx="12600" cy="12600"/>
+              </a:xfrm>
+              <a:prstGeom prst="rect">
+                <a:avLst/>
+              </a:prstGeom>
+            </p:spPr>
+          </p:pic>
+        </mc:Fallback>
+      </mc:AlternateContent>
+      <mc:AlternateContent xmlns:mc="http://schemas.openxmlformats.org/markup-compatibility/2006">
+        <mc:Choice xmlns:p14="http://schemas.microsoft.com/office/powerpoint/2010/main" Requires="p14">
+          <p:contentPart p14:bwMode="auto" r:id="rId8">
+            <p14:nvContentPartPr>
+              <p14:cNvPr id="10" name="Ink 9">
+                <a:extLst>
+                  <a:ext uri="{FF2B5EF4-FFF2-40B4-BE49-F238E27FC236}">
+                    <a16:creationId xmlns:a16="http://schemas.microsoft.com/office/drawing/2014/main" id="{A772F61E-3206-CBDE-8BFB-FBF64A7282A2}"/>
+                  </a:ext>
+                </a:extLst>
+              </p14:cNvPr>
+              <p14:cNvContentPartPr/>
+              <p14:nvPr/>
+            </p14:nvContentPartPr>
+            <p14:xfrm>
+              <a:off x="1851882" y="4027619"/>
+              <a:ext cx="764640" cy="560160"/>
+            </p14:xfrm>
+          </p:contentPart>
+        </mc:Choice>
+        <mc:Fallback>
+          <p:pic>
+            <p:nvPicPr>
+              <p:cNvPr id="10" name="Ink 9">
+                <a:extLst>
+                  <a:ext uri="{FF2B5EF4-FFF2-40B4-BE49-F238E27FC236}">
+                    <a16:creationId xmlns:a16="http://schemas.microsoft.com/office/drawing/2014/main" id="{A772F61E-3206-CBDE-8BFB-FBF64A7282A2}"/>
+                  </a:ext>
+                </a:extLst>
+              </p:cNvPr>
+              <p:cNvPicPr/>
+              <p:nvPr/>
+            </p:nvPicPr>
+            <p:blipFill>
+              <a:blip r:embed="rId9"/>
+              <a:stretch>
+                <a:fillRect/>
+              </a:stretch>
+            </p:blipFill>
+            <p:spPr>
+              <a:xfrm>
+                <a:off x="1845762" y="4021499"/>
+                <a:ext cx="776880" cy="572400"/>
+              </a:xfrm>
+              <a:prstGeom prst="rect">
+                <a:avLst/>
+              </a:prstGeom>
+            </p:spPr>
+          </p:pic>
+        </mc:Fallback>
+      </mc:AlternateContent>
+      <p:pic>
+        <p:nvPicPr>
+          <p:cNvPr id="11" name="Picture 5">
+            <a:extLst>
+              <a:ext uri="{FF2B5EF4-FFF2-40B4-BE49-F238E27FC236}">
+                <a16:creationId xmlns:a16="http://schemas.microsoft.com/office/drawing/2014/main" id="{9F07C72D-C768-13C9-539C-184A165885C8}"/>
+              </a:ext>
+            </a:extLst>
+          </p:cNvPr>
+          <p:cNvPicPr>
+            <a:picLocks noChangeAspect="1" noChangeArrowheads="1"/>
+          </p:cNvPicPr>
+          <p:nvPr/>
+        </p:nvPicPr>
+        <p:blipFill>
+          <a:blip r:embed="rId2">
+            <a:extLst>
+              <a:ext uri="{28A0092B-C50C-407E-A947-70E740481C1C}">
+                <a14:useLocalDpi xmlns:a14="http://schemas.microsoft.com/office/drawing/2010/main" val="0"/>
+              </a:ext>
+            </a:extLst>
+          </a:blip>
+          <a:srcRect/>
+          <a:stretch>
+            <a:fillRect/>
+          </a:stretch>
+        </p:blipFill>
+        <p:spPr bwMode="auto">
+          <a:xfrm>
+            <a:off x="3174255" y="3581714"/>
+            <a:ext cx="2686050" cy="2128838"/>
+          </a:xfrm>
+          <a:prstGeom prst="rect">
+            <a:avLst/>
+          </a:prstGeom>
+          <a:noFill/>
+          <a:ln>
+            <a:noFill/>
+          </a:ln>
+          <a:effectLst/>
+          <a:extLst>
+            <a:ext uri="{909E8E84-426E-40DD-AFC4-6F175D3DCCD1}">
+              <a14:hiddenFill xmlns:a14="http://schemas.microsoft.com/office/drawing/2010/main">
+                <a:solidFill>
+                  <a:schemeClr val="accent1"/>
+                </a:solidFill>
+              </a14:hiddenFill>
+            </a:ext>
+            <a:ext uri="{91240B29-F687-4F45-9708-019B960494DF}">
+              <a14:hiddenLine xmlns:a14="http://schemas.microsoft.com/office/drawing/2010/main" w="9525">
+                <a:solidFill>
+                  <a:schemeClr val="tx1"/>
+                </a:solidFill>
+                <a:miter lim="800000"/>
+                <a:headEnd/>
+                <a:tailEnd/>
+              </a14:hiddenLine>
+            </a:ext>
+            <a:ext uri="{AF507438-7753-43E0-B8FC-AC1667EBCBE1}">
+              <a14:hiddenEffects xmlns:a14="http://schemas.microsoft.com/office/drawing/2010/main">
+                <a:effectLst>
+                  <a:outerShdw dist="35921" dir="2700000" algn="ctr" rotWithShape="0">
+                    <a:schemeClr val="bg2"/>
+                  </a:outerShdw>
+                </a:effectLst>
+              </a14:hiddenEffects>
+            </a:ext>
+          </a:extLst>
+        </p:spPr>
+      </p:pic>
+      <mc:AlternateContent xmlns:mc="http://schemas.openxmlformats.org/markup-compatibility/2006">
+        <mc:Choice xmlns:p14="http://schemas.microsoft.com/office/powerpoint/2010/main" Requires="p14">
+          <p:contentPart p14:bwMode="auto" r:id="rId10">
+            <p14:nvContentPartPr>
+              <p14:cNvPr id="12" name="Ink 11">
+                <a:extLst>
+                  <a:ext uri="{FF2B5EF4-FFF2-40B4-BE49-F238E27FC236}">
+                    <a16:creationId xmlns:a16="http://schemas.microsoft.com/office/drawing/2014/main" id="{FA14DB24-8D53-FF96-E0A3-77B65A9594C7}"/>
+                  </a:ext>
+                </a:extLst>
+              </p14:cNvPr>
+              <p14:cNvContentPartPr/>
+              <p14:nvPr/>
+            </p14:nvContentPartPr>
+            <p14:xfrm>
+              <a:off x="3507537" y="4673440"/>
+              <a:ext cx="876960" cy="548640"/>
+            </p14:xfrm>
+          </p:contentPart>
+        </mc:Choice>
+        <mc:Fallback>
+          <p:pic>
+            <p:nvPicPr>
+              <p:cNvPr id="12" name="Ink 11">
+                <a:extLst>
+                  <a:ext uri="{FF2B5EF4-FFF2-40B4-BE49-F238E27FC236}">
+                    <a16:creationId xmlns:a16="http://schemas.microsoft.com/office/drawing/2014/main" id="{FA14DB24-8D53-FF96-E0A3-77B65A9594C7}"/>
+                  </a:ext>
+                </a:extLst>
+              </p:cNvPr>
+              <p:cNvPicPr/>
+              <p:nvPr/>
+            </p:nvPicPr>
+            <p:blipFill>
+              <a:blip r:embed="rId4"/>
+              <a:stretch>
+                <a:fillRect/>
+              </a:stretch>
+            </p:blipFill>
+            <p:spPr>
+              <a:xfrm>
+                <a:off x="3501417" y="4667320"/>
+                <a:ext cx="889200" cy="560880"/>
+              </a:xfrm>
+              <a:prstGeom prst="rect">
+                <a:avLst/>
+              </a:prstGeom>
+            </p:spPr>
+          </p:pic>
+        </mc:Fallback>
+      </mc:AlternateContent>
+      <mc:AlternateContent xmlns:mc="http://schemas.openxmlformats.org/markup-compatibility/2006">
+        <mc:Choice xmlns:p14="http://schemas.microsoft.com/office/powerpoint/2010/main" Requires="p14">
+          <p:contentPart p14:bwMode="auto" r:id="rId11">
+            <p14:nvContentPartPr>
+              <p14:cNvPr id="13" name="Ink 12">
+                <a:extLst>
+                  <a:ext uri="{FF2B5EF4-FFF2-40B4-BE49-F238E27FC236}">
+                    <a16:creationId xmlns:a16="http://schemas.microsoft.com/office/drawing/2014/main" id="{7EEC5637-0993-EF11-0E88-DFE38480949E}"/>
+                  </a:ext>
+                </a:extLst>
+              </p14:cNvPr>
+              <p14:cNvContentPartPr/>
+              <p14:nvPr/>
+            </p14:nvContentPartPr>
+            <p14:xfrm>
+              <a:off x="4696604" y="4027619"/>
+              <a:ext cx="764640" cy="560160"/>
+            </p14:xfrm>
+          </p:contentPart>
+        </mc:Choice>
+        <mc:Fallback>
+          <p:pic>
+            <p:nvPicPr>
+              <p:cNvPr id="13" name="Ink 12">
+                <a:extLst>
+                  <a:ext uri="{FF2B5EF4-FFF2-40B4-BE49-F238E27FC236}">
+                    <a16:creationId xmlns:a16="http://schemas.microsoft.com/office/drawing/2014/main" id="{7EEC5637-0993-EF11-0E88-DFE38480949E}"/>
+                  </a:ext>
+                </a:extLst>
+              </p:cNvPr>
+              <p:cNvPicPr/>
+              <p:nvPr/>
+            </p:nvPicPr>
+            <p:blipFill>
+              <a:blip r:embed="rId9"/>
+              <a:stretch>
+                <a:fillRect/>
+              </a:stretch>
+            </p:blipFill>
+            <p:spPr>
+              <a:xfrm>
+                <a:off x="4690484" y="4021499"/>
+                <a:ext cx="776880" cy="572400"/>
+              </a:xfrm>
+              <a:prstGeom prst="rect">
+                <a:avLst/>
+              </a:prstGeom>
+            </p:spPr>
+          </p:pic>
+        </mc:Fallback>
+      </mc:AlternateContent>
+      <mc:AlternateContent xmlns:mc="http://schemas.openxmlformats.org/markup-compatibility/2006">
+        <mc:Choice xmlns:p14="http://schemas.microsoft.com/office/powerpoint/2010/main" Requires="p14">
+          <p:contentPart p14:bwMode="auto" r:id="rId12">
+            <p14:nvContentPartPr>
+              <p14:cNvPr id="15" name="Ink 14">
+                <a:extLst>
+                  <a:ext uri="{FF2B5EF4-FFF2-40B4-BE49-F238E27FC236}">
+                    <a16:creationId xmlns:a16="http://schemas.microsoft.com/office/drawing/2014/main" id="{F3A120A0-0CE2-5626-B9D6-A07BA6A00261}"/>
+                  </a:ext>
+                </a:extLst>
+              </p14:cNvPr>
+              <p14:cNvContentPartPr/>
+              <p14:nvPr/>
+            </p14:nvContentPartPr>
+            <p14:xfrm>
+              <a:off x="3326802" y="4018619"/>
+              <a:ext cx="55080" cy="1267200"/>
+            </p14:xfrm>
+          </p:contentPart>
+        </mc:Choice>
+        <mc:Fallback>
+          <p:pic>
+            <p:nvPicPr>
+              <p:cNvPr id="15" name="Ink 14">
+                <a:extLst>
+                  <a:ext uri="{FF2B5EF4-FFF2-40B4-BE49-F238E27FC236}">
+                    <a16:creationId xmlns:a16="http://schemas.microsoft.com/office/drawing/2014/main" id="{F3A120A0-0CE2-5626-B9D6-A07BA6A00261}"/>
+                  </a:ext>
+                </a:extLst>
+              </p:cNvPr>
+              <p:cNvPicPr/>
+              <p:nvPr/>
+            </p:nvPicPr>
+            <p:blipFill>
+              <a:blip r:embed="rId13"/>
+              <a:stretch>
+                <a:fillRect/>
+              </a:stretch>
+            </p:blipFill>
+            <p:spPr>
+              <a:xfrm>
+                <a:off x="3320682" y="4012499"/>
+                <a:ext cx="67320" cy="1279440"/>
+              </a:xfrm>
+              <a:prstGeom prst="rect">
+                <a:avLst/>
+              </a:prstGeom>
+            </p:spPr>
+          </p:pic>
+        </mc:Fallback>
+      </mc:AlternateContent>
+      <p:pic>
+        <p:nvPicPr>
+          <p:cNvPr id="17" name="Picture 5">
+            <a:extLst>
+              <a:ext uri="{FF2B5EF4-FFF2-40B4-BE49-F238E27FC236}">
+                <a16:creationId xmlns:a16="http://schemas.microsoft.com/office/drawing/2014/main" id="{A5A81A51-391F-D579-3A8C-950A2F0AEF4F}"/>
+              </a:ext>
+            </a:extLst>
+          </p:cNvPr>
+          <p:cNvPicPr>
+            <a:picLocks noChangeAspect="1" noChangeArrowheads="1"/>
+          </p:cNvPicPr>
+          <p:nvPr/>
+        </p:nvPicPr>
+        <p:blipFill>
+          <a:blip r:embed="rId2">
+            <a:extLst>
+              <a:ext uri="{28A0092B-C50C-407E-A947-70E740481C1C}">
+                <a14:useLocalDpi xmlns:a14="http://schemas.microsoft.com/office/drawing/2010/main" val="0"/>
+              </a:ext>
+            </a:extLst>
+          </a:blip>
+          <a:srcRect/>
+          <a:stretch>
+            <a:fillRect/>
+          </a:stretch>
+        </p:blipFill>
+        <p:spPr bwMode="auto">
+          <a:xfrm>
+            <a:off x="353866" y="5712194"/>
+            <a:ext cx="2686050" cy="2128838"/>
+          </a:xfrm>
+          <a:prstGeom prst="rect">
+            <a:avLst/>
+          </a:prstGeom>
+          <a:noFill/>
+          <a:ln>
+            <a:noFill/>
+          </a:ln>
+          <a:effectLst/>
+          <a:extLst>
+            <a:ext uri="{909E8E84-426E-40DD-AFC4-6F175D3DCCD1}">
+              <a14:hiddenFill xmlns:a14="http://schemas.microsoft.com/office/drawing/2010/main">
+                <a:solidFill>
+                  <a:schemeClr val="accent1"/>
+                </a:solidFill>
+              </a14:hiddenFill>
+            </a:ext>
+            <a:ext uri="{91240B29-F687-4F45-9708-019B960494DF}">
+              <a14:hiddenLine xmlns:a14="http://schemas.microsoft.com/office/drawing/2010/main" w="9525">
+                <a:solidFill>
+                  <a:schemeClr val="tx1"/>
+                </a:solidFill>
+                <a:miter lim="800000"/>
+                <a:headEnd/>
+                <a:tailEnd/>
+              </a14:hiddenLine>
+            </a:ext>
+            <a:ext uri="{AF507438-7753-43E0-B8FC-AC1667EBCBE1}">
+              <a14:hiddenEffects xmlns:a14="http://schemas.microsoft.com/office/drawing/2010/main">
+                <a:effectLst>
+                  <a:outerShdw dist="35921" dir="2700000" algn="ctr" rotWithShape="0">
+                    <a:schemeClr val="bg2"/>
+                  </a:outerShdw>
+                </a:effectLst>
+              </a14:hiddenEffects>
+            </a:ext>
+          </a:extLst>
+        </p:spPr>
+      </p:pic>
+      <mc:AlternateContent xmlns:mc="http://schemas.openxmlformats.org/markup-compatibility/2006">
+        <mc:Choice xmlns:p14="http://schemas.microsoft.com/office/powerpoint/2010/main" Requires="p14">
+          <p:contentPart p14:bwMode="auto" r:id="rId14">
+            <p14:nvContentPartPr>
+              <p14:cNvPr id="18" name="Ink 17">
+                <a:extLst>
+                  <a:ext uri="{FF2B5EF4-FFF2-40B4-BE49-F238E27FC236}">
+                    <a16:creationId xmlns:a16="http://schemas.microsoft.com/office/drawing/2014/main" id="{C8393C93-21FC-FFCC-CD63-90EC2636CD3E}"/>
+                  </a:ext>
+                </a:extLst>
+              </p14:cNvPr>
+              <p14:cNvContentPartPr/>
+              <p14:nvPr/>
+            </p14:nvContentPartPr>
+            <p14:xfrm>
+              <a:off x="687148" y="6803920"/>
+              <a:ext cx="876960" cy="548640"/>
+            </p14:xfrm>
+          </p:contentPart>
+        </mc:Choice>
+        <mc:Fallback>
+          <p:pic>
+            <p:nvPicPr>
+              <p:cNvPr id="18" name="Ink 17">
+                <a:extLst>
+                  <a:ext uri="{FF2B5EF4-FFF2-40B4-BE49-F238E27FC236}">
+                    <a16:creationId xmlns:a16="http://schemas.microsoft.com/office/drawing/2014/main" id="{C8393C93-21FC-FFCC-CD63-90EC2636CD3E}"/>
+                  </a:ext>
+                </a:extLst>
+              </p:cNvPr>
+              <p:cNvPicPr/>
+              <p:nvPr/>
+            </p:nvPicPr>
+            <p:blipFill>
+              <a:blip r:embed="rId4"/>
+              <a:stretch>
+                <a:fillRect/>
+              </a:stretch>
+            </p:blipFill>
+            <p:spPr>
+              <a:xfrm>
+                <a:off x="681028" y="6797800"/>
+                <a:ext cx="889200" cy="560880"/>
+              </a:xfrm>
+              <a:prstGeom prst="rect">
+                <a:avLst/>
+              </a:prstGeom>
+            </p:spPr>
+          </p:pic>
+        </mc:Fallback>
+      </mc:AlternateContent>
+      <mc:AlternateContent xmlns:mc="http://schemas.openxmlformats.org/markup-compatibility/2006">
+        <mc:Choice xmlns:p14="http://schemas.microsoft.com/office/powerpoint/2010/main" Requires="p14">
+          <p:contentPart p14:bwMode="auto" r:id="rId15">
+            <p14:nvContentPartPr>
+              <p14:cNvPr id="19" name="Ink 18">
+                <a:extLst>
+                  <a:ext uri="{FF2B5EF4-FFF2-40B4-BE49-F238E27FC236}">
+                    <a16:creationId xmlns:a16="http://schemas.microsoft.com/office/drawing/2014/main" id="{3CC59984-4758-9A1F-10D9-04D39CA9F862}"/>
+                  </a:ext>
+                </a:extLst>
+              </p14:cNvPr>
+              <p14:cNvContentPartPr/>
+              <p14:nvPr/>
+            </p14:nvContentPartPr>
+            <p14:xfrm>
+              <a:off x="1876215" y="6158099"/>
+              <a:ext cx="764640" cy="560160"/>
+            </p14:xfrm>
+          </p:contentPart>
+        </mc:Choice>
+        <mc:Fallback>
+          <p:pic>
+            <p:nvPicPr>
+              <p:cNvPr id="19" name="Ink 18">
+                <a:extLst>
+                  <a:ext uri="{FF2B5EF4-FFF2-40B4-BE49-F238E27FC236}">
+                    <a16:creationId xmlns:a16="http://schemas.microsoft.com/office/drawing/2014/main" id="{3CC59984-4758-9A1F-10D9-04D39CA9F862}"/>
+                  </a:ext>
+                </a:extLst>
+              </p:cNvPr>
+              <p:cNvPicPr/>
+              <p:nvPr/>
+            </p:nvPicPr>
+            <p:blipFill>
+              <a:blip r:embed="rId9"/>
+              <a:stretch>
+                <a:fillRect/>
+              </a:stretch>
+            </p:blipFill>
+            <p:spPr>
+              <a:xfrm>
+                <a:off x="1870095" y="6151979"/>
+                <a:ext cx="776880" cy="572400"/>
+              </a:xfrm>
+              <a:prstGeom prst="rect">
+                <a:avLst/>
+              </a:prstGeom>
+            </p:spPr>
+          </p:pic>
+        </mc:Fallback>
+      </mc:AlternateContent>
+      <mc:AlternateContent xmlns:mc="http://schemas.openxmlformats.org/markup-compatibility/2006">
+        <mc:Choice xmlns:p14="http://schemas.microsoft.com/office/powerpoint/2010/main" Requires="p14">
+          <p:contentPart p14:bwMode="auto" r:id="rId16">
+            <p14:nvContentPartPr>
+              <p14:cNvPr id="21" name="Ink 20">
+                <a:extLst>
+                  <a:ext uri="{FF2B5EF4-FFF2-40B4-BE49-F238E27FC236}">
+                    <a16:creationId xmlns:a16="http://schemas.microsoft.com/office/drawing/2014/main" id="{D54BDA90-3658-19A8-0218-0A7C33C4697D}"/>
+                  </a:ext>
+                </a:extLst>
+              </p14:cNvPr>
+              <p14:cNvContentPartPr/>
+              <p14:nvPr/>
+            </p14:nvContentPartPr>
+            <p14:xfrm>
+              <a:off x="1834242" y="6841019"/>
+              <a:ext cx="33120" cy="620280"/>
+            </p14:xfrm>
+          </p:contentPart>
+        </mc:Choice>
+        <mc:Fallback>
+          <p:pic>
+            <p:nvPicPr>
+              <p:cNvPr id="21" name="Ink 20">
+                <a:extLst>
+                  <a:ext uri="{FF2B5EF4-FFF2-40B4-BE49-F238E27FC236}">
+                    <a16:creationId xmlns:a16="http://schemas.microsoft.com/office/drawing/2014/main" id="{D54BDA90-3658-19A8-0218-0A7C33C4697D}"/>
+                  </a:ext>
+                </a:extLst>
+              </p:cNvPr>
+              <p:cNvPicPr/>
+              <p:nvPr/>
+            </p:nvPicPr>
+            <p:blipFill>
+              <a:blip r:embed="rId17"/>
+              <a:stretch>
+                <a:fillRect/>
+              </a:stretch>
+            </p:blipFill>
+            <p:spPr>
+              <a:xfrm>
+                <a:off x="1828122" y="6834899"/>
+                <a:ext cx="45360" cy="632520"/>
+              </a:xfrm>
+              <a:prstGeom prst="rect">
+                <a:avLst/>
+              </a:prstGeom>
+            </p:spPr>
+          </p:pic>
+        </mc:Fallback>
+      </mc:AlternateContent>
+      <mc:AlternateContent xmlns:mc="http://schemas.openxmlformats.org/markup-compatibility/2006">
+        <mc:Choice xmlns:p14="http://schemas.microsoft.com/office/powerpoint/2010/main" Requires="p14">
+          <p:contentPart p14:bwMode="auto" r:id="rId18">
+            <p14:nvContentPartPr>
+              <p14:cNvPr id="40" name="Ink 39">
+                <a:extLst>
+                  <a:ext uri="{FF2B5EF4-FFF2-40B4-BE49-F238E27FC236}">
+                    <a16:creationId xmlns:a16="http://schemas.microsoft.com/office/drawing/2014/main" id="{4F8D1672-AC80-FA6A-54CE-6A10935B0D7F}"/>
+                  </a:ext>
+                </a:extLst>
+              </p14:cNvPr>
+              <p14:cNvContentPartPr/>
+              <p14:nvPr/>
+            </p14:nvContentPartPr>
+            <p14:xfrm>
+              <a:off x="6246922" y="7555619"/>
+              <a:ext cx="360" cy="360"/>
+            </p14:xfrm>
+          </p:contentPart>
+        </mc:Choice>
+        <mc:Fallback>
+          <p:pic>
+            <p:nvPicPr>
+              <p:cNvPr id="40" name="Ink 39">
+                <a:extLst>
+                  <a:ext uri="{FF2B5EF4-FFF2-40B4-BE49-F238E27FC236}">
+                    <a16:creationId xmlns:a16="http://schemas.microsoft.com/office/drawing/2014/main" id="{4F8D1672-AC80-FA6A-54CE-6A10935B0D7F}"/>
+                  </a:ext>
+                </a:extLst>
+              </p:cNvPr>
+              <p:cNvPicPr/>
+              <p:nvPr/>
+            </p:nvPicPr>
+            <p:blipFill>
+              <a:blip r:embed="rId7"/>
+              <a:stretch>
+                <a:fillRect/>
+              </a:stretch>
+            </p:blipFill>
+            <p:spPr>
+              <a:xfrm>
+                <a:off x="6240802" y="7549499"/>
+                <a:ext cx="12600" cy="12600"/>
+              </a:xfrm>
+              <a:prstGeom prst="rect">
+                <a:avLst/>
+              </a:prstGeom>
+            </p:spPr>
+          </p:pic>
+        </mc:Fallback>
+      </mc:AlternateContent>
+      <mc:AlternateContent xmlns:mc="http://schemas.openxmlformats.org/markup-compatibility/2006">
+        <mc:Choice xmlns:p14="http://schemas.microsoft.com/office/powerpoint/2010/main" Requires="p14">
+          <p:contentPart p14:bwMode="auto" r:id="rId19">
+            <p14:nvContentPartPr>
+              <p14:cNvPr id="41" name="Ink 40">
+                <a:extLst>
+                  <a:ext uri="{FF2B5EF4-FFF2-40B4-BE49-F238E27FC236}">
+                    <a16:creationId xmlns:a16="http://schemas.microsoft.com/office/drawing/2014/main" id="{35FDEF86-5247-1FFE-5FDE-D5F027ABEDD5}"/>
+                  </a:ext>
+                </a:extLst>
+              </p14:cNvPr>
+              <p14:cNvContentPartPr/>
+              <p14:nvPr/>
+            </p14:nvContentPartPr>
+            <p14:xfrm>
+              <a:off x="5647522" y="6841019"/>
+              <a:ext cx="55080" cy="1267200"/>
+            </p14:xfrm>
+          </p:contentPart>
+        </mc:Choice>
+        <mc:Fallback>
+          <p:pic>
+            <p:nvPicPr>
+              <p:cNvPr id="41" name="Ink 40">
+                <a:extLst>
+                  <a:ext uri="{FF2B5EF4-FFF2-40B4-BE49-F238E27FC236}">
+                    <a16:creationId xmlns:a16="http://schemas.microsoft.com/office/drawing/2014/main" id="{35FDEF86-5247-1FFE-5FDE-D5F027ABEDD5}"/>
+                  </a:ext>
+                </a:extLst>
+              </p:cNvPr>
+              <p:cNvPicPr/>
+              <p:nvPr/>
+            </p:nvPicPr>
+            <p:blipFill>
+              <a:blip r:embed="rId13"/>
+              <a:stretch>
+                <a:fillRect/>
+              </a:stretch>
+            </p:blipFill>
+            <p:spPr>
+              <a:xfrm>
+                <a:off x="5641402" y="6834899"/>
+                <a:ext cx="67320" cy="1279440"/>
+              </a:xfrm>
+              <a:prstGeom prst="rect">
+                <a:avLst/>
+              </a:prstGeom>
+            </p:spPr>
+          </p:pic>
+        </mc:Fallback>
+      </mc:AlternateContent>
+      <p:pic>
+        <p:nvPicPr>
+          <p:cNvPr id="42" name="Picture 5">
+            <a:extLst>
+              <a:ext uri="{FF2B5EF4-FFF2-40B4-BE49-F238E27FC236}">
+                <a16:creationId xmlns:a16="http://schemas.microsoft.com/office/drawing/2014/main" id="{ADFEBEA8-C977-4F20-5713-4A194F6BC4A6}"/>
+              </a:ext>
+            </a:extLst>
+          </p:cNvPr>
+          <p:cNvPicPr>
+            <a:picLocks noChangeAspect="1" noChangeArrowheads="1"/>
+          </p:cNvPicPr>
+          <p:nvPr/>
+        </p:nvPicPr>
+        <p:blipFill>
+          <a:blip r:embed="rId2">
+            <a:extLst>
+              <a:ext uri="{28A0092B-C50C-407E-A947-70E740481C1C}">
+                <a14:useLocalDpi xmlns:a14="http://schemas.microsoft.com/office/drawing/2010/main" val="0"/>
+              </a:ext>
+            </a:extLst>
+          </a:blip>
+          <a:srcRect/>
+          <a:stretch>
+            <a:fillRect/>
+          </a:stretch>
+        </p:blipFill>
+        <p:spPr bwMode="auto">
+          <a:xfrm>
+            <a:off x="3148475" y="5776600"/>
+            <a:ext cx="2686050" cy="2128838"/>
+          </a:xfrm>
+          <a:prstGeom prst="rect">
+            <a:avLst/>
+          </a:prstGeom>
+          <a:noFill/>
+          <a:ln>
+            <a:noFill/>
+          </a:ln>
+          <a:effectLst/>
+          <a:extLst>
+            <a:ext uri="{909E8E84-426E-40DD-AFC4-6F175D3DCCD1}">
+              <a14:hiddenFill xmlns:a14="http://schemas.microsoft.com/office/drawing/2010/main">
+                <a:solidFill>
+                  <a:schemeClr val="accent1"/>
+                </a:solidFill>
+              </a14:hiddenFill>
+            </a:ext>
+            <a:ext uri="{91240B29-F687-4F45-9708-019B960494DF}">
+              <a14:hiddenLine xmlns:a14="http://schemas.microsoft.com/office/drawing/2010/main" w="9525">
+                <a:solidFill>
+                  <a:schemeClr val="tx1"/>
+                </a:solidFill>
+                <a:miter lim="800000"/>
+                <a:headEnd/>
+                <a:tailEnd/>
+              </a14:hiddenLine>
+            </a:ext>
+            <a:ext uri="{AF507438-7753-43E0-B8FC-AC1667EBCBE1}">
+              <a14:hiddenEffects xmlns:a14="http://schemas.microsoft.com/office/drawing/2010/main">
+                <a:effectLst>
+                  <a:outerShdw dist="35921" dir="2700000" algn="ctr" rotWithShape="0">
+                    <a:schemeClr val="bg2"/>
+                  </a:outerShdw>
+                </a:effectLst>
+              </a14:hiddenEffects>
+            </a:ext>
+          </a:extLst>
+        </p:spPr>
+      </p:pic>
+      <mc:AlternateContent xmlns:mc="http://schemas.openxmlformats.org/markup-compatibility/2006">
+        <mc:Choice xmlns:p14="http://schemas.microsoft.com/office/powerpoint/2010/main" Requires="p14">
+          <p:contentPart p14:bwMode="auto" r:id="rId20">
+            <p14:nvContentPartPr>
+              <p14:cNvPr id="43" name="Ink 42">
+                <a:extLst>
+                  <a:ext uri="{FF2B5EF4-FFF2-40B4-BE49-F238E27FC236}">
+                    <a16:creationId xmlns:a16="http://schemas.microsoft.com/office/drawing/2014/main" id="{9D986F7A-BEA0-12C3-A302-71E90C2D9BB9}"/>
+                  </a:ext>
+                </a:extLst>
+              </p14:cNvPr>
+              <p14:cNvContentPartPr/>
+              <p14:nvPr/>
+            </p14:nvContentPartPr>
+            <p14:xfrm>
+              <a:off x="3332477" y="6250179"/>
+              <a:ext cx="8640" cy="1252440"/>
+            </p14:xfrm>
+          </p:contentPart>
+        </mc:Choice>
+        <mc:Fallback>
+          <p:pic>
+            <p:nvPicPr>
+              <p:cNvPr id="43" name="Ink 42">
+                <a:extLst>
+                  <a:ext uri="{FF2B5EF4-FFF2-40B4-BE49-F238E27FC236}">
+                    <a16:creationId xmlns:a16="http://schemas.microsoft.com/office/drawing/2014/main" id="{9D986F7A-BEA0-12C3-A302-71E90C2D9BB9}"/>
+                  </a:ext>
+                </a:extLst>
+              </p:cNvPr>
+              <p:cNvPicPr/>
+              <p:nvPr/>
+            </p:nvPicPr>
+            <p:blipFill>
+              <a:blip r:embed="rId21"/>
+              <a:stretch>
+                <a:fillRect/>
+              </a:stretch>
+            </p:blipFill>
+            <p:spPr>
+              <a:xfrm>
+                <a:off x="3326357" y="6244059"/>
+                <a:ext cx="20880" cy="1264680"/>
+              </a:xfrm>
+              <a:prstGeom prst="rect">
+                <a:avLst/>
+              </a:prstGeom>
+            </p:spPr>
+          </p:pic>
+        </mc:Fallback>
+      </mc:AlternateContent>
+      <mc:AlternateContent xmlns:mc="http://schemas.openxmlformats.org/markup-compatibility/2006">
+        <mc:Choice xmlns:p14="http://schemas.microsoft.com/office/powerpoint/2010/main" Requires="p14">
+          <p:contentPart p14:bwMode="auto" r:id="rId22">
+            <p14:nvContentPartPr>
+              <p14:cNvPr id="44" name="Ink 43">
+                <a:extLst>
+                  <a:ext uri="{FF2B5EF4-FFF2-40B4-BE49-F238E27FC236}">
+                    <a16:creationId xmlns:a16="http://schemas.microsoft.com/office/drawing/2014/main" id="{6C93A683-7C3A-87C1-7B33-4E1E04FF8A48}"/>
+                  </a:ext>
+                </a:extLst>
+              </p14:cNvPr>
+              <p14:cNvContentPartPr/>
+              <p14:nvPr/>
+            </p14:nvContentPartPr>
+            <p14:xfrm>
+              <a:off x="3519407" y="6964659"/>
+              <a:ext cx="857880" cy="510840"/>
+            </p14:xfrm>
+          </p:contentPart>
+        </mc:Choice>
+        <mc:Fallback>
+          <p:pic>
+            <p:nvPicPr>
+              <p:cNvPr id="44" name="Ink 43">
+                <a:extLst>
+                  <a:ext uri="{FF2B5EF4-FFF2-40B4-BE49-F238E27FC236}">
+                    <a16:creationId xmlns:a16="http://schemas.microsoft.com/office/drawing/2014/main" id="{6C93A683-7C3A-87C1-7B33-4E1E04FF8A48}"/>
+                  </a:ext>
+                </a:extLst>
+              </p:cNvPr>
+              <p:cNvPicPr/>
+              <p:nvPr/>
+            </p:nvPicPr>
+            <p:blipFill>
+              <a:blip r:embed="rId23"/>
+              <a:stretch>
+                <a:fillRect/>
+              </a:stretch>
+            </p:blipFill>
+            <p:spPr>
+              <a:xfrm>
+                <a:off x="3513287" y="6958539"/>
+                <a:ext cx="870120" cy="523080"/>
+              </a:xfrm>
+              <a:prstGeom prst="rect">
+                <a:avLst/>
+              </a:prstGeom>
+            </p:spPr>
+          </p:pic>
+        </mc:Fallback>
+      </mc:AlternateContent>
+      <p:grpSp>
+        <p:nvGrpSpPr>
+          <p:cNvPr id="45" name="Group 44">
+            <a:extLst>
+              <a:ext uri="{FF2B5EF4-FFF2-40B4-BE49-F238E27FC236}">
+                <a16:creationId xmlns:a16="http://schemas.microsoft.com/office/drawing/2014/main" id="{332B83F4-E869-4DB6-2ED5-00F259BFDDF0}"/>
+              </a:ext>
+            </a:extLst>
+          </p:cNvPr>
+          <p:cNvGrpSpPr/>
+          <p:nvPr/>
+        </p:nvGrpSpPr>
+        <p:grpSpPr>
+          <a:xfrm>
+            <a:off x="4633514" y="6240567"/>
+            <a:ext cx="812880" cy="580320"/>
+            <a:chOff x="5148402" y="4214459"/>
+            <a:chExt cx="812880" cy="580320"/>
+          </a:xfrm>
+        </p:grpSpPr>
+        <mc:AlternateContent xmlns:mc="http://schemas.openxmlformats.org/markup-compatibility/2006">
+          <mc:Choice xmlns:p14="http://schemas.microsoft.com/office/powerpoint/2010/main" Requires="p14">
+            <p:contentPart p14:bwMode="auto" r:id="rId24">
+              <p14:nvContentPartPr>
+                <p14:cNvPr id="46" name="Ink 45">
+                  <a:extLst>
+                    <a:ext uri="{FF2B5EF4-FFF2-40B4-BE49-F238E27FC236}">
+                      <a16:creationId xmlns:a16="http://schemas.microsoft.com/office/drawing/2014/main" id="{BA2F032B-B5FF-CD28-F7ED-BA4B563C3C80}"/>
+                    </a:ext>
+                  </a:extLst>
+                </p14:cNvPr>
+                <p14:cNvContentPartPr/>
+                <p14:nvPr/>
+              </p14:nvContentPartPr>
+              <p14:xfrm>
+                <a:off x="5263242" y="4214459"/>
+                <a:ext cx="698040" cy="534600"/>
+              </p14:xfrm>
+            </p:contentPart>
+          </mc:Choice>
+          <mc:Fallback>
+            <p:pic>
+              <p:nvPicPr>
+                <p:cNvPr id="46" name="Ink 45">
+                  <a:extLst>
+                    <a:ext uri="{FF2B5EF4-FFF2-40B4-BE49-F238E27FC236}">
+                      <a16:creationId xmlns:a16="http://schemas.microsoft.com/office/drawing/2014/main" id="{BA2F032B-B5FF-CD28-F7ED-BA4B563C3C80}"/>
+                    </a:ext>
+                  </a:extLst>
+                </p:cNvPr>
+                <p:cNvPicPr/>
+                <p:nvPr/>
+              </p:nvPicPr>
+              <p:blipFill>
+                <a:blip r:embed="rId25"/>
+                <a:stretch>
+                  <a:fillRect/>
+                </a:stretch>
+              </p:blipFill>
+              <p:spPr>
+                <a:xfrm>
+                  <a:off x="5257122" y="4208339"/>
+                  <a:ext cx="710280" cy="546840"/>
+                </a:xfrm>
+                <a:prstGeom prst="rect">
+                  <a:avLst/>
+                </a:prstGeom>
+              </p:spPr>
+            </p:pic>
+          </mc:Fallback>
+        </mc:AlternateContent>
+        <mc:AlternateContent xmlns:mc="http://schemas.openxmlformats.org/markup-compatibility/2006">
+          <mc:Choice xmlns:p14="http://schemas.microsoft.com/office/powerpoint/2010/main" Requires="p14">
+            <p:contentPart p14:bwMode="auto" r:id="rId26">
+              <p14:nvContentPartPr>
+                <p14:cNvPr id="47" name="Ink 46">
+                  <a:extLst>
+                    <a:ext uri="{FF2B5EF4-FFF2-40B4-BE49-F238E27FC236}">
+                      <a16:creationId xmlns:a16="http://schemas.microsoft.com/office/drawing/2014/main" id="{570FFFC8-CEB1-CA22-3AB8-513ED51C7ED9}"/>
+                    </a:ext>
+                  </a:extLst>
+                </p14:cNvPr>
+                <p14:cNvContentPartPr/>
+                <p14:nvPr/>
+              </p14:nvContentPartPr>
+              <p14:xfrm>
+                <a:off x="5148402" y="4764179"/>
+                <a:ext cx="92160" cy="30600"/>
+              </p14:xfrm>
+            </p:contentPart>
+          </mc:Choice>
+          <mc:Fallback>
+            <p:pic>
+              <p:nvPicPr>
+                <p:cNvPr id="47" name="Ink 46">
+                  <a:extLst>
+                    <a:ext uri="{FF2B5EF4-FFF2-40B4-BE49-F238E27FC236}">
+                      <a16:creationId xmlns:a16="http://schemas.microsoft.com/office/drawing/2014/main" id="{570FFFC8-CEB1-CA22-3AB8-513ED51C7ED9}"/>
+                    </a:ext>
+                  </a:extLst>
+                </p:cNvPr>
+                <p:cNvPicPr/>
+                <p:nvPr/>
+              </p:nvPicPr>
+              <p:blipFill>
+                <a:blip r:embed="rId27"/>
+                <a:stretch>
+                  <a:fillRect/>
+                </a:stretch>
+              </p:blipFill>
+              <p:spPr>
+                <a:xfrm>
+                  <a:off x="5142282" y="4758059"/>
+                  <a:ext cx="104400" cy="42840"/>
+                </a:xfrm>
+                <a:prstGeom prst="rect">
+                  <a:avLst/>
+                </a:prstGeom>
+              </p:spPr>
+            </p:pic>
+          </mc:Fallback>
+        </mc:AlternateContent>
+        <mc:AlternateContent xmlns:mc="http://schemas.openxmlformats.org/markup-compatibility/2006">
+          <mc:Choice xmlns:p14="http://schemas.microsoft.com/office/powerpoint/2010/main" Requires="p14">
+            <p:contentPart p14:bwMode="auto" r:id="rId28">
+              <p14:nvContentPartPr>
+                <p14:cNvPr id="48" name="Ink 47">
+                  <a:extLst>
+                    <a:ext uri="{FF2B5EF4-FFF2-40B4-BE49-F238E27FC236}">
+                      <a16:creationId xmlns:a16="http://schemas.microsoft.com/office/drawing/2014/main" id="{C1290743-7805-9399-3EBA-E97114583E6F}"/>
+                    </a:ext>
+                  </a:extLst>
+                </p14:cNvPr>
+                <p14:cNvContentPartPr/>
+                <p14:nvPr/>
+              </p14:nvContentPartPr>
+              <p14:xfrm>
+                <a:off x="5232642" y="4721339"/>
+                <a:ext cx="121320" cy="40320"/>
+              </p14:xfrm>
+            </p:contentPart>
+          </mc:Choice>
+          <mc:Fallback>
+            <p:pic>
+              <p:nvPicPr>
+                <p:cNvPr id="48" name="Ink 47">
+                  <a:extLst>
+                    <a:ext uri="{FF2B5EF4-FFF2-40B4-BE49-F238E27FC236}">
+                      <a16:creationId xmlns:a16="http://schemas.microsoft.com/office/drawing/2014/main" id="{C1290743-7805-9399-3EBA-E97114583E6F}"/>
+                    </a:ext>
+                  </a:extLst>
+                </p:cNvPr>
+                <p:cNvPicPr/>
+                <p:nvPr/>
+              </p:nvPicPr>
+              <p:blipFill>
+                <a:blip r:embed="rId29"/>
+                <a:stretch>
+                  <a:fillRect/>
+                </a:stretch>
+              </p:blipFill>
+              <p:spPr>
+                <a:xfrm>
+                  <a:off x="5226522" y="4715219"/>
+                  <a:ext cx="133560" cy="52560"/>
+                </a:xfrm>
+                <a:prstGeom prst="rect">
+                  <a:avLst/>
+                </a:prstGeom>
+              </p:spPr>
+            </p:pic>
+          </mc:Fallback>
+        </mc:AlternateContent>
+      </p:grpSp>
+      <mc:AlternateContent xmlns:mc="http://schemas.openxmlformats.org/markup-compatibility/2006">
+        <mc:Choice xmlns:p14="http://schemas.microsoft.com/office/powerpoint/2010/main" Requires="p14">
+          <p:contentPart p14:bwMode="auto" r:id="rId30">
+            <p14:nvContentPartPr>
+              <p14:cNvPr id="49" name="Ink 48">
+                <a:extLst>
+                  <a:ext uri="{FF2B5EF4-FFF2-40B4-BE49-F238E27FC236}">
+                    <a16:creationId xmlns:a16="http://schemas.microsoft.com/office/drawing/2014/main" id="{99C1234C-7388-D2D0-D8BC-C60DDFEE60A1}"/>
+                  </a:ext>
+                </a:extLst>
+              </p14:cNvPr>
+              <p14:cNvContentPartPr/>
+              <p14:nvPr/>
+            </p14:nvContentPartPr>
+            <p14:xfrm>
+              <a:off x="4426757" y="6954649"/>
+              <a:ext cx="8280" cy="560520"/>
+            </p14:xfrm>
+          </p:contentPart>
+        </mc:Choice>
+        <mc:Fallback>
+          <p:pic>
+            <p:nvPicPr>
+              <p:cNvPr id="49" name="Ink 48">
+                <a:extLst>
+                  <a:ext uri="{FF2B5EF4-FFF2-40B4-BE49-F238E27FC236}">
+                    <a16:creationId xmlns:a16="http://schemas.microsoft.com/office/drawing/2014/main" id="{99C1234C-7388-D2D0-D8BC-C60DDFEE60A1}"/>
+                  </a:ext>
+                </a:extLst>
+              </p:cNvPr>
+              <p:cNvPicPr/>
+              <p:nvPr/>
+            </p:nvPicPr>
+            <p:blipFill>
+              <a:blip r:embed="rId31"/>
+              <a:stretch>
+                <a:fillRect/>
+              </a:stretch>
+            </p:blipFill>
+            <p:spPr>
+              <a:xfrm>
+                <a:off x="4420637" y="6948529"/>
+                <a:ext cx="20520" cy="572760"/>
+              </a:xfrm>
+              <a:prstGeom prst="rect">
+                <a:avLst/>
+              </a:prstGeom>
+            </p:spPr>
+          </p:pic>
+        </mc:Fallback>
+      </mc:AlternateContent>
+      <mc:AlternateContent xmlns:mc="http://schemas.openxmlformats.org/markup-compatibility/2006">
+        <mc:Choice xmlns:p14="http://schemas.microsoft.com/office/powerpoint/2010/main" Requires="p14">
+          <p:contentPart p14:bwMode="auto" r:id="rId32">
+            <p14:nvContentPartPr>
+              <p14:cNvPr id="50" name="Ink 49">
+                <a:extLst>
+                  <a:ext uri="{FF2B5EF4-FFF2-40B4-BE49-F238E27FC236}">
+                    <a16:creationId xmlns:a16="http://schemas.microsoft.com/office/drawing/2014/main" id="{14B28581-F3C5-1D01-C821-E6683DDBB745}"/>
+                  </a:ext>
+                </a:extLst>
+              </p14:cNvPr>
+              <p14:cNvContentPartPr/>
+              <p14:nvPr/>
+            </p14:nvContentPartPr>
+            <p14:xfrm>
+              <a:off x="5549907" y="6238352"/>
+              <a:ext cx="55440" cy="1236600"/>
+            </p14:xfrm>
+          </p:contentPart>
+        </mc:Choice>
+        <mc:Fallback>
+          <p:pic>
+            <p:nvPicPr>
+              <p:cNvPr id="50" name="Ink 49">
+                <a:extLst>
+                  <a:ext uri="{FF2B5EF4-FFF2-40B4-BE49-F238E27FC236}">
+                    <a16:creationId xmlns:a16="http://schemas.microsoft.com/office/drawing/2014/main" id="{14B28581-F3C5-1D01-C821-E6683DDBB745}"/>
+                  </a:ext>
+                </a:extLst>
+              </p:cNvPr>
+              <p:cNvPicPr/>
+              <p:nvPr/>
+            </p:nvPicPr>
+            <p:blipFill>
+              <a:blip r:embed="rId33"/>
+              <a:stretch>
+                <a:fillRect/>
+              </a:stretch>
+            </p:blipFill>
+            <p:spPr>
+              <a:xfrm>
+                <a:off x="5543787" y="6232232"/>
+                <a:ext cx="67680" cy="1248840"/>
+              </a:xfrm>
+              <a:prstGeom prst="rect">
+                <a:avLst/>
+              </a:prstGeom>
+            </p:spPr>
+          </p:pic>
+        </mc:Fallback>
+      </mc:AlternateContent>
+      <mc:AlternateContent xmlns:mc="http://schemas.openxmlformats.org/markup-compatibility/2006">
+        <mc:Choice xmlns:p14="http://schemas.microsoft.com/office/powerpoint/2010/main" Requires="p14">
+          <p:contentPart p14:bwMode="auto" r:id="rId34">
+            <p14:nvContentPartPr>
+              <p14:cNvPr id="51" name="Ink 50">
+                <a:extLst>
+                  <a:ext uri="{FF2B5EF4-FFF2-40B4-BE49-F238E27FC236}">
+                    <a16:creationId xmlns:a16="http://schemas.microsoft.com/office/drawing/2014/main" id="{9713CE73-4AF6-333F-2E60-1A8CBE51E305}"/>
+                  </a:ext>
+                </a:extLst>
+              </p14:cNvPr>
+              <p14:cNvContentPartPr/>
+              <p14:nvPr/>
+            </p14:nvContentPartPr>
+            <p14:xfrm>
+              <a:off x="3105507" y="5776472"/>
+              <a:ext cx="3007440" cy="2653920"/>
+            </p14:xfrm>
+          </p:contentPart>
+        </mc:Choice>
+        <mc:Fallback>
+          <p:pic>
+            <p:nvPicPr>
+              <p:cNvPr id="51" name="Ink 50">
+                <a:extLst>
+                  <a:ext uri="{FF2B5EF4-FFF2-40B4-BE49-F238E27FC236}">
+                    <a16:creationId xmlns:a16="http://schemas.microsoft.com/office/drawing/2014/main" id="{9713CE73-4AF6-333F-2E60-1A8CBE51E305}"/>
+                  </a:ext>
+                </a:extLst>
+              </p:cNvPr>
+              <p:cNvPicPr/>
+              <p:nvPr/>
+            </p:nvPicPr>
+            <p:blipFill>
+              <a:blip r:embed="rId35"/>
+              <a:stretch>
+                <a:fillRect/>
+              </a:stretch>
+            </p:blipFill>
+            <p:spPr>
+              <a:xfrm>
+                <a:off x="3099387" y="5770352"/>
+                <a:ext cx="3019680" cy="2666160"/>
+              </a:xfrm>
+              <a:prstGeom prst="rect">
+                <a:avLst/>
+              </a:prstGeom>
+            </p:spPr>
+          </p:pic>
+        </mc:Fallback>
+      </mc:AlternateContent>
+      <p:sp>
+        <p:nvSpPr>
+          <p:cNvPr id="52" name="TextBox 51">
+            <a:extLst>
+              <a:ext uri="{FF2B5EF4-FFF2-40B4-BE49-F238E27FC236}">
+                <a16:creationId xmlns:a16="http://schemas.microsoft.com/office/drawing/2014/main" id="{38655326-92A3-B097-810F-1B836788D589}"/>
+              </a:ext>
+            </a:extLst>
+          </p:cNvPr>
+          <p:cNvSpPr txBox="1"/>
+          <p:nvPr/>
+        </p:nvSpPr>
+        <p:spPr>
+          <a:xfrm>
+            <a:off x="3583755" y="7823688"/>
+            <a:ext cx="1484702" cy="461665"/>
+          </a:xfrm>
+          <a:prstGeom prst="rect">
+            <a:avLst/>
+          </a:prstGeom>
+          <a:noFill/>
+        </p:spPr>
+        <p:txBody>
+          <a:bodyPr wrap="none" rtlCol="0">
+            <a:spAutoFit/>
+          </a:bodyPr>
+          <a:lstStyle/>
+          <a:p>
+            <a:r>
+              <a:rPr lang="en-US" dirty="0"/>
+              <a:t>ANSWER</a:t>
+            </a:r>
+          </a:p>
+        </p:txBody>
+      </p:sp>
     </p:spTree>
   </p:cSld>
   <p:clrMapOvr>
@@ -9783,41 +13958,444 @@
           </a:p>
         </p:txBody>
       </p:sp>
-      <p:sp>
-        <p:nvSpPr>
-          <p:cNvPr id="2" name="TextBox 1">
+      <mc:AlternateContent xmlns:mc="http://schemas.openxmlformats.org/markup-compatibility/2006">
+        <mc:Choice xmlns:p14="http://schemas.microsoft.com/office/powerpoint/2010/main" Requires="p14">
+          <p:contentPart p14:bwMode="auto" r:id="rId3">
+            <p14:nvContentPartPr>
+              <p14:cNvPr id="3" name="Ink 2">
+                <a:extLst>
+                  <a:ext uri="{FF2B5EF4-FFF2-40B4-BE49-F238E27FC236}">
+                    <a16:creationId xmlns:a16="http://schemas.microsoft.com/office/drawing/2014/main" id="{A5C53ED3-45E5-F646-019D-A458217A4417}"/>
+                  </a:ext>
+                </a:extLst>
+              </p14:cNvPr>
+              <p14:cNvContentPartPr/>
+              <p14:nvPr/>
+            </p14:nvContentPartPr>
+            <p14:xfrm>
+              <a:off x="3941682" y="6116339"/>
+              <a:ext cx="360" cy="360"/>
+            </p14:xfrm>
+          </p:contentPart>
+        </mc:Choice>
+        <mc:Fallback>
+          <p:pic>
+            <p:nvPicPr>
+              <p:cNvPr id="3" name="Ink 2">
+                <a:extLst>
+                  <a:ext uri="{FF2B5EF4-FFF2-40B4-BE49-F238E27FC236}">
+                    <a16:creationId xmlns:a16="http://schemas.microsoft.com/office/drawing/2014/main" id="{A5C53ED3-45E5-F646-019D-A458217A4417}"/>
+                  </a:ext>
+                </a:extLst>
+              </p:cNvPr>
+              <p:cNvPicPr/>
+              <p:nvPr/>
+            </p:nvPicPr>
+            <p:blipFill>
+              <a:blip r:embed="rId4"/>
+              <a:stretch>
+                <a:fillRect/>
+              </a:stretch>
+            </p:blipFill>
+            <p:spPr>
+              <a:xfrm>
+                <a:off x="3935562" y="6110219"/>
+                <a:ext cx="12600" cy="12600"/>
+              </a:xfrm>
+              <a:prstGeom prst="rect">
+                <a:avLst/>
+              </a:prstGeom>
+            </p:spPr>
+          </p:pic>
+        </mc:Fallback>
+      </mc:AlternateContent>
+      <p:pic>
+        <p:nvPicPr>
+          <p:cNvPr id="5" name="Picture 4" descr="08">
             <a:extLst>
               <a:ext uri="{FF2B5EF4-FFF2-40B4-BE49-F238E27FC236}">
-                <a16:creationId xmlns:a16="http://schemas.microsoft.com/office/drawing/2014/main" id="{25994F80-3CC1-0071-8D65-C78EA83447DB}"/>
+                <a16:creationId xmlns:a16="http://schemas.microsoft.com/office/drawing/2014/main" id="{DE9C6FDC-51D6-4D94-0C1C-FF81F7C34BAE}"/>
               </a:ext>
             </a:extLst>
           </p:cNvPr>
-          <p:cNvSpPr txBox="1"/>
+          <p:cNvPicPr>
+            <a:picLocks noChangeAspect="1" noChangeArrowheads="1"/>
+          </p:cNvPicPr>
           <p:nvPr/>
-        </p:nvSpPr>
-        <p:spPr>
+        </p:nvPicPr>
+        <p:blipFill>
+          <a:blip r:embed="rId2">
+            <a:extLst>
+              <a:ext uri="{28A0092B-C50C-407E-A947-70E740481C1C}">
+                <a14:useLocalDpi xmlns:a14="http://schemas.microsoft.com/office/drawing/2010/main" val="0"/>
+              </a:ext>
+            </a:extLst>
+          </a:blip>
+          <a:srcRect/>
+          <a:stretch>
+            <a:fillRect/>
+          </a:stretch>
+        </p:blipFill>
+        <p:spPr bwMode="auto">
           <a:xfrm>
-            <a:off x="1066800" y="6324600"/>
-            <a:ext cx="1596912" cy="461665"/>
+            <a:off x="762000" y="5181600"/>
+            <a:ext cx="5715000" cy="3564731"/>
           </a:xfrm>
           <a:prstGeom prst="rect">
             <a:avLst/>
           </a:prstGeom>
           <a:noFill/>
+          <a:ln>
+            <a:noFill/>
+          </a:ln>
+          <a:extLst>
+            <a:ext uri="{909E8E84-426E-40DD-AFC4-6F175D3DCCD1}">
+              <a14:hiddenFill xmlns:a14="http://schemas.microsoft.com/office/drawing/2010/main">
+                <a:solidFill>
+                  <a:srgbClr val="FFFFFF"/>
+                </a:solidFill>
+              </a14:hiddenFill>
+            </a:ext>
+            <a:ext uri="{91240B29-F687-4F45-9708-019B960494DF}">
+              <a14:hiddenLine xmlns:a14="http://schemas.microsoft.com/office/drawing/2010/main" w="9525">
+                <a:solidFill>
+                  <a:srgbClr val="000000"/>
+                </a:solidFill>
+                <a:miter lim="800000"/>
+                <a:headEnd/>
+                <a:tailEnd/>
+              </a14:hiddenLine>
+            </a:ext>
+          </a:extLst>
         </p:spPr>
-        <p:txBody>
-          <a:bodyPr wrap="none" rtlCol="0">
-            <a:spAutoFit/>
-          </a:bodyPr>
-          <a:lstStyle/>
-          <a:p>
-            <a:r>
-              <a:rPr lang="en-US" dirty="0"/>
-              <a:t>USE PRIM</a:t>
-            </a:r>
-          </a:p>
-        </p:txBody>
-      </p:sp>
+      </p:pic>
+      <mc:AlternateContent xmlns:mc="http://schemas.openxmlformats.org/markup-compatibility/2006">
+        <mc:Choice xmlns:p14="http://schemas.microsoft.com/office/powerpoint/2010/main" Requires="p14">
+          <p:contentPart p14:bwMode="auto" r:id="rId5">
+            <p14:nvContentPartPr>
+              <p14:cNvPr id="9" name="Ink 8">
+                <a:extLst>
+                  <a:ext uri="{FF2B5EF4-FFF2-40B4-BE49-F238E27FC236}">
+                    <a16:creationId xmlns:a16="http://schemas.microsoft.com/office/drawing/2014/main" id="{E2F0EF7D-8E33-7712-EFF3-80BC65512DC1}"/>
+                  </a:ext>
+                </a:extLst>
+              </p14:cNvPr>
+              <p14:cNvContentPartPr/>
+              <p14:nvPr/>
+            </p14:nvContentPartPr>
+            <p14:xfrm>
+              <a:off x="3680682" y="6682979"/>
+              <a:ext cx="560160" cy="126000"/>
+            </p14:xfrm>
+          </p:contentPart>
+        </mc:Choice>
+        <mc:Fallback>
+          <p:pic>
+            <p:nvPicPr>
+              <p:cNvPr id="9" name="Ink 8">
+                <a:extLst>
+                  <a:ext uri="{FF2B5EF4-FFF2-40B4-BE49-F238E27FC236}">
+                    <a16:creationId xmlns:a16="http://schemas.microsoft.com/office/drawing/2014/main" id="{E2F0EF7D-8E33-7712-EFF3-80BC65512DC1}"/>
+                  </a:ext>
+                </a:extLst>
+              </p:cNvPr>
+              <p:cNvPicPr/>
+              <p:nvPr/>
+            </p:nvPicPr>
+            <p:blipFill>
+              <a:blip r:embed="rId6"/>
+              <a:stretch>
+                <a:fillRect/>
+              </a:stretch>
+            </p:blipFill>
+            <p:spPr>
+              <a:xfrm>
+                <a:off x="3674562" y="6676859"/>
+                <a:ext cx="572400" cy="138240"/>
+              </a:xfrm>
+              <a:prstGeom prst="rect">
+                <a:avLst/>
+              </a:prstGeom>
+            </p:spPr>
+          </p:pic>
+        </mc:Fallback>
+      </mc:AlternateContent>
+      <mc:AlternateContent xmlns:mc="http://schemas.openxmlformats.org/markup-compatibility/2006">
+        <mc:Choice xmlns:p14="http://schemas.microsoft.com/office/powerpoint/2010/main" Requires="p14">
+          <p:contentPart p14:bwMode="auto" r:id="rId7">
+            <p14:nvContentPartPr>
+              <p14:cNvPr id="10" name="Ink 9">
+                <a:extLst>
+                  <a:ext uri="{FF2B5EF4-FFF2-40B4-BE49-F238E27FC236}">
+                    <a16:creationId xmlns:a16="http://schemas.microsoft.com/office/drawing/2014/main" id="{5F3A278E-3C73-47D0-1715-6D70815549B2}"/>
+                  </a:ext>
+                </a:extLst>
+              </p14:cNvPr>
+              <p14:cNvContentPartPr/>
+              <p14:nvPr/>
+            </p14:nvContentPartPr>
+            <p14:xfrm>
+              <a:off x="4210602" y="6723299"/>
+              <a:ext cx="181800" cy="670680"/>
+            </p14:xfrm>
+          </p:contentPart>
+        </mc:Choice>
+        <mc:Fallback>
+          <p:pic>
+            <p:nvPicPr>
+              <p:cNvPr id="10" name="Ink 9">
+                <a:extLst>
+                  <a:ext uri="{FF2B5EF4-FFF2-40B4-BE49-F238E27FC236}">
+                    <a16:creationId xmlns:a16="http://schemas.microsoft.com/office/drawing/2014/main" id="{5F3A278E-3C73-47D0-1715-6D70815549B2}"/>
+                  </a:ext>
+                </a:extLst>
+              </p:cNvPr>
+              <p:cNvPicPr/>
+              <p:nvPr/>
+            </p:nvPicPr>
+            <p:blipFill>
+              <a:blip r:embed="rId8"/>
+              <a:stretch>
+                <a:fillRect/>
+              </a:stretch>
+            </p:blipFill>
+            <p:spPr>
+              <a:xfrm>
+                <a:off x="4204482" y="6717179"/>
+                <a:ext cx="194040" cy="682920"/>
+              </a:xfrm>
+              <a:prstGeom prst="rect">
+                <a:avLst/>
+              </a:prstGeom>
+            </p:spPr>
+          </p:pic>
+        </mc:Fallback>
+      </mc:AlternateContent>
+      <p:grpSp>
+        <p:nvGrpSpPr>
+          <p:cNvPr id="13" name="Group 12">
+            <a:extLst>
+              <a:ext uri="{FF2B5EF4-FFF2-40B4-BE49-F238E27FC236}">
+                <a16:creationId xmlns:a16="http://schemas.microsoft.com/office/drawing/2014/main" id="{03DFFD39-F6FA-6212-0CE0-A6D8FF56AD04}"/>
+              </a:ext>
+            </a:extLst>
+          </p:cNvPr>
+          <p:cNvGrpSpPr/>
+          <p:nvPr/>
+        </p:nvGrpSpPr>
+        <p:grpSpPr>
+          <a:xfrm>
+            <a:off x="1987602" y="5663099"/>
+            <a:ext cx="3964320" cy="2750040"/>
+            <a:chOff x="1987602" y="5663099"/>
+            <a:chExt cx="3964320" cy="2750040"/>
+          </a:xfrm>
+        </p:grpSpPr>
+        <mc:AlternateContent xmlns:mc="http://schemas.openxmlformats.org/markup-compatibility/2006">
+          <mc:Choice xmlns:p14="http://schemas.microsoft.com/office/powerpoint/2010/main" Requires="p14">
+            <p:contentPart p14:bwMode="auto" r:id="rId9">
+              <p14:nvContentPartPr>
+                <p14:cNvPr id="6" name="Ink 5">
+                  <a:extLst>
+                    <a:ext uri="{FF2B5EF4-FFF2-40B4-BE49-F238E27FC236}">
+                      <a16:creationId xmlns:a16="http://schemas.microsoft.com/office/drawing/2014/main" id="{A16794DC-5B9C-FA81-A077-53513E0EBB29}"/>
+                    </a:ext>
+                  </a:extLst>
+                </p14:cNvPr>
+                <p14:cNvContentPartPr/>
+                <p14:nvPr/>
+              </p14:nvContentPartPr>
+              <p14:xfrm>
+                <a:off x="1987602" y="5663099"/>
+                <a:ext cx="456120" cy="1221120"/>
+              </p14:xfrm>
+            </p:contentPart>
+          </mc:Choice>
+          <mc:Fallback>
+            <p:pic>
+              <p:nvPicPr>
+                <p:cNvPr id="6" name="Ink 5">
+                  <a:extLst>
+                    <a:ext uri="{FF2B5EF4-FFF2-40B4-BE49-F238E27FC236}">
+                      <a16:creationId xmlns:a16="http://schemas.microsoft.com/office/drawing/2014/main" id="{A16794DC-5B9C-FA81-A077-53513E0EBB29}"/>
+                    </a:ext>
+                  </a:extLst>
+                </p:cNvPr>
+                <p:cNvPicPr/>
+                <p:nvPr/>
+              </p:nvPicPr>
+              <p:blipFill>
+                <a:blip r:embed="rId10"/>
+                <a:stretch>
+                  <a:fillRect/>
+                </a:stretch>
+              </p:blipFill>
+              <p:spPr>
+                <a:xfrm>
+                  <a:off x="1981482" y="5656979"/>
+                  <a:ext cx="468360" cy="1233360"/>
+                </a:xfrm>
+                <a:prstGeom prst="rect">
+                  <a:avLst/>
+                </a:prstGeom>
+              </p:spPr>
+            </p:pic>
+          </mc:Fallback>
+        </mc:AlternateContent>
+        <mc:AlternateContent xmlns:mc="http://schemas.openxmlformats.org/markup-compatibility/2006">
+          <mc:Choice xmlns:p14="http://schemas.microsoft.com/office/powerpoint/2010/main" Requires="p14">
+            <p:contentPart p14:bwMode="auto" r:id="rId11">
+              <p14:nvContentPartPr>
+                <p14:cNvPr id="7" name="Ink 6">
+                  <a:extLst>
+                    <a:ext uri="{FF2B5EF4-FFF2-40B4-BE49-F238E27FC236}">
+                      <a16:creationId xmlns:a16="http://schemas.microsoft.com/office/drawing/2014/main" id="{E547FFEC-7392-6AF0-21DF-5739B91653F4}"/>
+                    </a:ext>
+                  </a:extLst>
+                </p14:cNvPr>
+                <p14:cNvContentPartPr/>
+                <p14:nvPr/>
+              </p14:nvContentPartPr>
+              <p14:xfrm>
+                <a:off x="2481882" y="5678579"/>
+                <a:ext cx="1041840" cy="1078560"/>
+              </p14:xfrm>
+            </p:contentPart>
+          </mc:Choice>
+          <mc:Fallback>
+            <p:pic>
+              <p:nvPicPr>
+                <p:cNvPr id="7" name="Ink 6">
+                  <a:extLst>
+                    <a:ext uri="{FF2B5EF4-FFF2-40B4-BE49-F238E27FC236}">
+                      <a16:creationId xmlns:a16="http://schemas.microsoft.com/office/drawing/2014/main" id="{E547FFEC-7392-6AF0-21DF-5739B91653F4}"/>
+                    </a:ext>
+                  </a:extLst>
+                </p:cNvPr>
+                <p:cNvPicPr/>
+                <p:nvPr/>
+              </p:nvPicPr>
+              <p:blipFill>
+                <a:blip r:embed="rId12"/>
+                <a:stretch>
+                  <a:fillRect/>
+                </a:stretch>
+              </p:blipFill>
+              <p:spPr>
+                <a:xfrm>
+                  <a:off x="2475762" y="5672459"/>
+                  <a:ext cx="1054080" cy="1090800"/>
+                </a:xfrm>
+                <a:prstGeom prst="rect">
+                  <a:avLst/>
+                </a:prstGeom>
+              </p:spPr>
+            </p:pic>
+          </mc:Fallback>
+        </mc:AlternateContent>
+        <mc:AlternateContent xmlns:mc="http://schemas.openxmlformats.org/markup-compatibility/2006">
+          <mc:Choice xmlns:p14="http://schemas.microsoft.com/office/powerpoint/2010/main" Requires="p14">
+            <p:contentPart p14:bwMode="auto" r:id="rId13">
+              <p14:nvContentPartPr>
+                <p14:cNvPr id="11" name="Ink 10">
+                  <a:extLst>
+                    <a:ext uri="{FF2B5EF4-FFF2-40B4-BE49-F238E27FC236}">
+                      <a16:creationId xmlns:a16="http://schemas.microsoft.com/office/drawing/2014/main" id="{F1C632EC-99D6-6BE2-4CC9-468FBDBEDE5F}"/>
+                    </a:ext>
+                  </a:extLst>
+                </p14:cNvPr>
+                <p14:cNvContentPartPr/>
+                <p14:nvPr/>
+              </p14:nvContentPartPr>
+              <p14:xfrm>
+                <a:off x="3152202" y="7345739"/>
+                <a:ext cx="1173960" cy="1067400"/>
+              </p14:xfrm>
+            </p:contentPart>
+          </mc:Choice>
+          <mc:Fallback>
+            <p:pic>
+              <p:nvPicPr>
+                <p:cNvPr id="11" name="Ink 10">
+                  <a:extLst>
+                    <a:ext uri="{FF2B5EF4-FFF2-40B4-BE49-F238E27FC236}">
+                      <a16:creationId xmlns:a16="http://schemas.microsoft.com/office/drawing/2014/main" id="{F1C632EC-99D6-6BE2-4CC9-468FBDBEDE5F}"/>
+                    </a:ext>
+                  </a:extLst>
+                </p:cNvPr>
+                <p:cNvPicPr/>
+                <p:nvPr/>
+              </p:nvPicPr>
+              <p:blipFill>
+                <a:blip r:embed="rId14"/>
+                <a:stretch>
+                  <a:fillRect/>
+                </a:stretch>
+              </p:blipFill>
+              <p:spPr>
+                <a:xfrm>
+                  <a:off x="3146082" y="7339619"/>
+                  <a:ext cx="1186200" cy="1079640"/>
+                </a:xfrm>
+                <a:prstGeom prst="rect">
+                  <a:avLst/>
+                </a:prstGeom>
+              </p:spPr>
+            </p:pic>
+          </mc:Fallback>
+        </mc:AlternateContent>
+        <mc:AlternateContent xmlns:mc="http://schemas.openxmlformats.org/markup-compatibility/2006">
+          <mc:Choice xmlns:p14="http://schemas.microsoft.com/office/powerpoint/2010/main" Requires="p14">
+            <p:contentPart p14:bwMode="auto" r:id="rId15">
+              <p14:nvContentPartPr>
+                <p14:cNvPr id="12" name="Ink 11">
+                  <a:extLst>
+                    <a:ext uri="{FF2B5EF4-FFF2-40B4-BE49-F238E27FC236}">
+                      <a16:creationId xmlns:a16="http://schemas.microsoft.com/office/drawing/2014/main" id="{39EC8651-0074-FC9C-5D28-51D91E54809C}"/>
+                    </a:ext>
+                  </a:extLst>
+                </p14:cNvPr>
+                <p14:cNvContentPartPr/>
+                <p14:nvPr/>
+              </p14:nvContentPartPr>
+              <p14:xfrm>
+                <a:off x="4402842" y="6838139"/>
+                <a:ext cx="1549080" cy="516600"/>
+              </p14:xfrm>
+            </p:contentPart>
+          </mc:Choice>
+          <mc:Fallback>
+            <p:pic>
+              <p:nvPicPr>
+                <p:cNvPr id="12" name="Ink 11">
+                  <a:extLst>
+                    <a:ext uri="{FF2B5EF4-FFF2-40B4-BE49-F238E27FC236}">
+                      <a16:creationId xmlns:a16="http://schemas.microsoft.com/office/drawing/2014/main" id="{39EC8651-0074-FC9C-5D28-51D91E54809C}"/>
+                    </a:ext>
+                  </a:extLst>
+                </p:cNvPr>
+                <p:cNvPicPr/>
+                <p:nvPr/>
+              </p:nvPicPr>
+              <p:blipFill>
+                <a:blip r:embed="rId16"/>
+                <a:stretch>
+                  <a:fillRect/>
+                </a:stretch>
+              </p:blipFill>
+              <p:spPr>
+                <a:xfrm>
+                  <a:off x="4396722" y="6832019"/>
+                  <a:ext cx="1561320" cy="528840"/>
+                </a:xfrm>
+                <a:prstGeom prst="rect">
+                  <a:avLst/>
+                </a:prstGeom>
+              </p:spPr>
+            </p:pic>
+          </mc:Fallback>
+        </mc:AlternateContent>
+      </p:grpSp>
     </p:spTree>
   </p:cSld>
   <p:clrMapOvr>
@@ -10256,6 +14834,194 @@
           </a:prstGeom>
         </p:spPr>
       </p:pic>
+      <p:sp>
+        <p:nvSpPr>
+          <p:cNvPr id="4" name="TextBox 3">
+            <a:extLst>
+              <a:ext uri="{FF2B5EF4-FFF2-40B4-BE49-F238E27FC236}">
+                <a16:creationId xmlns:a16="http://schemas.microsoft.com/office/drawing/2014/main" id="{E65B4056-2FB5-9AD9-84B9-B027E5605AB4}"/>
+              </a:ext>
+            </a:extLst>
+          </p:cNvPr>
+          <p:cNvSpPr txBox="1"/>
+          <p:nvPr/>
+        </p:nvSpPr>
+        <p:spPr>
+          <a:xfrm>
+            <a:off x="234185" y="3733800"/>
+            <a:ext cx="6301725" cy="4524315"/>
+          </a:xfrm>
+          <a:prstGeom prst="rect">
+            <a:avLst/>
+          </a:prstGeom>
+          <a:noFill/>
+        </p:spPr>
+        <p:txBody>
+          <a:bodyPr wrap="none" rtlCol="0">
+            <a:spAutoFit/>
+          </a:bodyPr>
+          <a:lstStyle/>
+          <a:p>
+            <a:r>
+              <a:rPr lang="en-US" sz="1800" dirty="0"/>
+              <a:t>Starting </a:t>
+            </a:r>
+            <a:r>
+              <a:rPr lang="en-US" sz="1800" dirty="0" err="1"/>
+              <a:t>predCounts</a:t>
+            </a:r>
+            <a:r>
+              <a:rPr lang="en-US" sz="1800" dirty="0"/>
+              <a:t>: [0:0, 1:1, 2:1, 3:3, 4:3, 5:2, 6:2, 7:0, 8:2, 9:2]</a:t>
+            </a:r>
+          </a:p>
+          <a:p>
+            <a:endParaRPr lang="en-US" sz="1800" dirty="0"/>
+          </a:p>
+          <a:p>
+            <a:r>
+              <a:rPr lang="en-US" sz="1800" dirty="0"/>
+              <a:t>Current Queue: [0, 7]</a:t>
+            </a:r>
+          </a:p>
+          <a:p>
+            <a:r>
+              <a:rPr lang="en-US" sz="1800" dirty="0"/>
+              <a:t>Processing: 0</a:t>
+            </a:r>
+          </a:p>
+          <a:p>
+            <a:r>
+              <a:rPr lang="en-US" sz="1800" dirty="0"/>
+              <a:t>	-&gt; Decrementing </a:t>
+            </a:r>
+            <a:r>
+              <a:rPr lang="en-US" sz="1800" dirty="0" err="1"/>
+              <a:t>predCount</a:t>
+            </a:r>
+            <a:r>
+              <a:rPr lang="en-US" sz="1800" dirty="0"/>
+              <a:t> for 1 (New count: 0)</a:t>
+            </a:r>
+          </a:p>
+          <a:p>
+            <a:r>
+              <a:rPr lang="en-US" sz="1800" dirty="0"/>
+              <a:t>	-&gt; 1 hit 0 </a:t>
+            </a:r>
+            <a:r>
+              <a:rPr lang="en-US" sz="1800" dirty="0" err="1"/>
+              <a:t>predCount</a:t>
+            </a:r>
+            <a:r>
+              <a:rPr lang="en-US" sz="1800" dirty="0"/>
+              <a:t>. Adding to queue.</a:t>
+            </a:r>
+          </a:p>
+          <a:p>
+            <a:r>
+              <a:rPr lang="en-US" sz="1800" dirty="0"/>
+              <a:t>	-&gt; Decrementing </a:t>
+            </a:r>
+            <a:r>
+              <a:rPr lang="en-US" sz="1800" dirty="0" err="1"/>
+              <a:t>predCount</a:t>
+            </a:r>
+            <a:r>
+              <a:rPr lang="en-US" sz="1800" dirty="0"/>
+              <a:t> for 5 (New count: 1)</a:t>
+            </a:r>
+          </a:p>
+          <a:p>
+            <a:r>
+              <a:rPr lang="en-US" sz="1800" dirty="0"/>
+              <a:t>Current </a:t>
+            </a:r>
+            <a:r>
+              <a:rPr lang="en-US" sz="1800" dirty="0" err="1"/>
+              <a:t>predCounts</a:t>
+            </a:r>
+            <a:r>
+              <a:rPr lang="en-US" sz="1800" dirty="0"/>
+              <a:t>: [0:0, 1:0, 2:1, 3:3, 4:3, 5:1, 6:2, 7:0, 8:2, 9:2]</a:t>
+            </a:r>
+          </a:p>
+          <a:p>
+            <a:endParaRPr lang="en-US" sz="1800" dirty="0"/>
+          </a:p>
+          <a:p>
+            <a:r>
+              <a:rPr lang="en-US" sz="1800" dirty="0"/>
+              <a:t>Current Queue: [7, 1]</a:t>
+            </a:r>
+          </a:p>
+          <a:p>
+            <a:r>
+              <a:rPr lang="en-US" sz="1800" dirty="0"/>
+              <a:t>Processing: 7</a:t>
+            </a:r>
+          </a:p>
+          <a:p>
+            <a:r>
+              <a:rPr lang="en-US" sz="1800" dirty="0"/>
+              <a:t>	-&gt; Decrementing </a:t>
+            </a:r>
+            <a:r>
+              <a:rPr lang="en-US" sz="1800" dirty="0" err="1"/>
+              <a:t>predCount</a:t>
+            </a:r>
+            <a:r>
+              <a:rPr lang="en-US" sz="1800" dirty="0"/>
+              <a:t> for 4 (New count: 2)</a:t>
+            </a:r>
+          </a:p>
+          <a:p>
+            <a:r>
+              <a:rPr lang="en-US" sz="1800" dirty="0"/>
+              <a:t>	-&gt; Decrementing </a:t>
+            </a:r>
+            <a:r>
+              <a:rPr lang="en-US" sz="1800" dirty="0" err="1"/>
+              <a:t>predCount</a:t>
+            </a:r>
+            <a:r>
+              <a:rPr lang="en-US" sz="1800" dirty="0"/>
+              <a:t> for 6 (New count: 1)</a:t>
+            </a:r>
+          </a:p>
+          <a:p>
+            <a:r>
+              <a:rPr lang="en-US" sz="1800" dirty="0"/>
+              <a:t>	-&gt; Decrementing </a:t>
+            </a:r>
+            <a:r>
+              <a:rPr lang="en-US" sz="1800" dirty="0" err="1"/>
+              <a:t>predCount</a:t>
+            </a:r>
+            <a:r>
+              <a:rPr lang="en-US" sz="1800" dirty="0"/>
+              <a:t> for 9 (New count: 1)</a:t>
+            </a:r>
+          </a:p>
+          <a:p>
+            <a:r>
+              <a:rPr lang="en-US" sz="1800" dirty="0"/>
+              <a:t>Current </a:t>
+            </a:r>
+            <a:r>
+              <a:rPr lang="en-US" sz="1800" dirty="0" err="1"/>
+              <a:t>predCounts</a:t>
+            </a:r>
+            <a:r>
+              <a:rPr lang="en-US" sz="1800" dirty="0"/>
+              <a:t>: [0:0, 1:0, 2:1, 3:3, 4:2, 5:1, 6:1, 7:0, 8:2, 9:1]</a:t>
+            </a:r>
+          </a:p>
+          <a:p>
+            <a:endParaRPr lang="en-US" sz="1800" dirty="0"/>
+          </a:p>
+        </p:txBody>
+      </p:sp>
     </p:spTree>
   </p:cSld>
   <p:clrMapOvr>
@@ -10281,254 +15047,364 @@
           <a:chExt cx="0" cy="0"/>
         </a:xfrm>
       </p:grpSpPr>
-      <p:pic>
-        <p:nvPicPr>
-          <p:cNvPr id="6146" name="Picture 4" descr="08">
+      <p:sp>
+        <p:nvSpPr>
+          <p:cNvPr id="3" name="Content Placeholder 2">
             <a:extLst>
               <a:ext uri="{FF2B5EF4-FFF2-40B4-BE49-F238E27FC236}">
-                <a16:creationId xmlns:a16="http://schemas.microsoft.com/office/drawing/2014/main" id="{9FE784F9-D9A7-4F7B-AD49-6C3E9EEF2890}"/>
-              </a:ext>
-            </a:extLst>
-          </p:cNvPr>
-          <p:cNvPicPr>
-            <a:picLocks noChangeAspect="1" noChangeArrowheads="1"/>
-          </p:cNvPicPr>
-          <p:nvPr/>
-        </p:nvPicPr>
-        <p:blipFill>
-          <a:blip r:embed="rId2">
-            <a:extLst>
-              <a:ext uri="{28A0092B-C50C-407E-A947-70E740481C1C}">
-                <a14:useLocalDpi xmlns:a14="http://schemas.microsoft.com/office/drawing/2010/main" val="0"/>
-              </a:ext>
-            </a:extLst>
-          </a:blip>
-          <a:srcRect/>
-          <a:stretch>
-            <a:fillRect/>
-          </a:stretch>
-        </p:blipFill>
-        <p:spPr bwMode="auto">
-          <a:xfrm>
-            <a:off x="533400" y="1219200"/>
-            <a:ext cx="5715000" cy="2514600"/>
-          </a:xfrm>
-          <a:prstGeom prst="rect">
-            <a:avLst/>
-          </a:prstGeom>
-          <a:noFill/>
-          <a:ln>
-            <a:noFill/>
-          </a:ln>
-          <a:extLst>
-            <a:ext uri="{909E8E84-426E-40DD-AFC4-6F175D3DCCD1}">
-              <a14:hiddenFill xmlns:a14="http://schemas.microsoft.com/office/drawing/2010/main">
-                <a:solidFill>
-                  <a:srgbClr val="FFFFFF"/>
-                </a:solidFill>
-              </a14:hiddenFill>
-            </a:ext>
-            <a:ext uri="{91240B29-F687-4F45-9708-019B960494DF}">
-              <a14:hiddenLine xmlns:a14="http://schemas.microsoft.com/office/drawing/2010/main" w="9525">
-                <a:solidFill>
-                  <a:srgbClr val="000000"/>
-                </a:solidFill>
-                <a:miter lim="800000"/>
-                <a:headEnd/>
-                <a:tailEnd/>
-              </a14:hiddenLine>
-            </a:ext>
-          </a:extLst>
-        </p:spPr>
-      </p:pic>
-      <p:sp>
-        <p:nvSpPr>
-          <p:cNvPr id="6147" name="Rectangle 5">
-            <a:extLst>
-              <a:ext uri="{FF2B5EF4-FFF2-40B4-BE49-F238E27FC236}">
-                <a16:creationId xmlns:a16="http://schemas.microsoft.com/office/drawing/2014/main" id="{FF2496EF-C9B8-49EF-A543-7502752ACE06}"/>
+                <a16:creationId xmlns:a16="http://schemas.microsoft.com/office/drawing/2014/main" id="{0E13CDE9-D2CA-531D-0E21-0D56FB4C66F0}"/>
               </a:ext>
             </a:extLst>
           </p:cNvPr>
           <p:cNvSpPr>
-            <a:spLocks noChangeArrowheads="1"/>
+            <a:spLocks noGrp="1"/>
           </p:cNvSpPr>
-          <p:nvPr/>
+          <p:nvPr>
+            <p:ph idx="1"/>
+          </p:nvPr>
         </p:nvSpPr>
-        <p:spPr bwMode="auto">
+        <p:spPr>
           <a:xfrm>
-            <a:off x="457200" y="609600"/>
-            <a:ext cx="5416868" cy="300082"/>
+            <a:off x="0" y="76200"/>
+            <a:ext cx="6858000" cy="9067800"/>
           </a:xfrm>
-          <a:prstGeom prst="rect">
-            <a:avLst/>
-          </a:prstGeom>
-          <a:noFill/>
-          <a:ln>
-            <a:noFill/>
-          </a:ln>
-          <a:extLst>
-            <a:ext uri="{909E8E84-426E-40DD-AFC4-6F175D3DCCD1}">
-              <a14:hiddenFill xmlns:a14="http://schemas.microsoft.com/office/drawing/2010/main">
-                <a:solidFill>
-                  <a:srgbClr val="FFFFFF"/>
-                </a:solidFill>
-              </a14:hiddenFill>
-            </a:ext>
-            <a:ext uri="{91240B29-F687-4F45-9708-019B960494DF}">
-              <a14:hiddenLine xmlns:a14="http://schemas.microsoft.com/office/drawing/2010/main" w="9525">
-                <a:solidFill>
-                  <a:srgbClr val="000000"/>
-                </a:solidFill>
-                <a:miter lim="800000"/>
-                <a:headEnd/>
-                <a:tailEnd/>
-              </a14:hiddenLine>
-            </a:ext>
-          </a:extLst>
         </p:spPr>
         <p:txBody>
-          <a:bodyPr wrap="none">
-            <a:spAutoFit/>
-          </a:bodyPr>
-          <a:lstStyle>
-            <a:lvl1pPr>
-              <a:spcBef>
-                <a:spcPct val="20000"/>
-              </a:spcBef>
-              <a:buChar char="•"/>
-              <a:defRPr sz="3200">
-                <a:solidFill>
-                  <a:schemeClr val="tx1"/>
-                </a:solidFill>
-                <a:latin typeface="Arial" panose="020B0604020202020204" pitchFamily="34" charset="0"/>
-              </a:defRPr>
-            </a:lvl1pPr>
-            <a:lvl2pPr marL="742950" indent="-285750">
-              <a:spcBef>
-                <a:spcPct val="20000"/>
-              </a:spcBef>
-              <a:buChar char="–"/>
-              <a:defRPr sz="2800">
-                <a:solidFill>
-                  <a:schemeClr val="tx1"/>
-                </a:solidFill>
-                <a:latin typeface="Arial" panose="020B0604020202020204" pitchFamily="34" charset="0"/>
-              </a:defRPr>
-            </a:lvl2pPr>
-            <a:lvl3pPr marL="1143000" indent="-228600">
-              <a:spcBef>
-                <a:spcPct val="20000"/>
-              </a:spcBef>
-              <a:buChar char="•"/>
-              <a:defRPr sz="2400">
-                <a:solidFill>
-                  <a:schemeClr val="tx1"/>
-                </a:solidFill>
-                <a:latin typeface="Arial" panose="020B0604020202020204" pitchFamily="34" charset="0"/>
-              </a:defRPr>
-            </a:lvl3pPr>
-            <a:lvl4pPr marL="1600200" indent="-228600">
-              <a:spcBef>
-                <a:spcPct val="20000"/>
-              </a:spcBef>
-              <a:buChar char="–"/>
-              <a:defRPr sz="2000">
-                <a:solidFill>
-                  <a:schemeClr val="tx1"/>
-                </a:solidFill>
-                <a:latin typeface="Arial" panose="020B0604020202020204" pitchFamily="34" charset="0"/>
-              </a:defRPr>
-            </a:lvl4pPr>
-            <a:lvl5pPr marL="2057400" indent="-228600">
-              <a:spcBef>
-                <a:spcPct val="20000"/>
-              </a:spcBef>
-              <a:buChar char="»"/>
-              <a:defRPr sz="2000">
-                <a:solidFill>
-                  <a:schemeClr val="tx1"/>
-                </a:solidFill>
-                <a:latin typeface="Arial" panose="020B0604020202020204" pitchFamily="34" charset="0"/>
-              </a:defRPr>
-            </a:lvl5pPr>
-            <a:lvl6pPr marL="2514600" indent="-228600" eaLnBrk="0" fontAlgn="base" hangingPunct="0">
-              <a:spcBef>
-                <a:spcPct val="20000"/>
-              </a:spcBef>
-              <a:spcAft>
-                <a:spcPct val="0"/>
-              </a:spcAft>
-              <a:buChar char="»"/>
-              <a:defRPr sz="2000">
-                <a:solidFill>
-                  <a:schemeClr val="tx1"/>
-                </a:solidFill>
-                <a:latin typeface="Arial" panose="020B0604020202020204" pitchFamily="34" charset="0"/>
-              </a:defRPr>
-            </a:lvl6pPr>
-            <a:lvl7pPr marL="2971800" indent="-228600" eaLnBrk="0" fontAlgn="base" hangingPunct="0">
-              <a:spcBef>
-                <a:spcPct val="20000"/>
-              </a:spcBef>
-              <a:spcAft>
-                <a:spcPct val="0"/>
-              </a:spcAft>
-              <a:buChar char="»"/>
-              <a:defRPr sz="2000">
-                <a:solidFill>
-                  <a:schemeClr val="tx1"/>
-                </a:solidFill>
-                <a:latin typeface="Arial" panose="020B0604020202020204" pitchFamily="34" charset="0"/>
-              </a:defRPr>
-            </a:lvl7pPr>
-            <a:lvl8pPr marL="3429000" indent="-228600" eaLnBrk="0" fontAlgn="base" hangingPunct="0">
-              <a:spcBef>
-                <a:spcPct val="20000"/>
-              </a:spcBef>
-              <a:spcAft>
-                <a:spcPct val="0"/>
-              </a:spcAft>
-              <a:buChar char="»"/>
-              <a:defRPr sz="2000">
-                <a:solidFill>
-                  <a:schemeClr val="tx1"/>
-                </a:solidFill>
-                <a:latin typeface="Arial" panose="020B0604020202020204" pitchFamily="34" charset="0"/>
-              </a:defRPr>
-            </a:lvl8pPr>
-            <a:lvl9pPr marL="3886200" indent="-228600" eaLnBrk="0" fontAlgn="base" hangingPunct="0">
-              <a:spcBef>
-                <a:spcPct val="20000"/>
-              </a:spcBef>
-              <a:spcAft>
-                <a:spcPct val="0"/>
-              </a:spcAft>
-              <a:buChar char="»"/>
-              <a:defRPr sz="2000">
-                <a:solidFill>
-                  <a:schemeClr val="tx1"/>
-                </a:solidFill>
-                <a:latin typeface="Arial" panose="020B0604020202020204" pitchFamily="34" charset="0"/>
-              </a:defRPr>
-            </a:lvl9pPr>
-          </a:lstStyle>
-          <a:p>
-            <a:pPr eaLnBrk="1" hangingPunct="1">
-              <a:spcBef>
-                <a:spcPct val="0"/>
-              </a:spcBef>
-              <a:buFontTx/>
+          <a:bodyPr/>
+          <a:lstStyle/>
+          <a:p>
+            <a:pPr marL="0" indent="0">
               <a:buNone/>
             </a:pPr>
             <a:r>
-              <a:rPr lang="en-US" altLang="en-US" sz="1350" dirty="0"/>
-              <a:t>10. List the nodes of the graph in a breadth first topological ordering.</a:t>
-            </a:r>
+              <a:rPr lang="en-US" sz="1800" dirty="0"/>
+              <a:t>Current Queue: [1]</a:t>
+            </a:r>
+          </a:p>
+          <a:p>
+            <a:pPr marL="0" indent="0">
+              <a:buNone/>
+            </a:pPr>
+            <a:r>
+              <a:rPr lang="en-US" sz="1800" dirty="0"/>
+              <a:t>Processing: 1</a:t>
+            </a:r>
+          </a:p>
+          <a:p>
+            <a:pPr marL="0" indent="0">
+              <a:buNone/>
+            </a:pPr>
+            <a:r>
+              <a:rPr lang="en-US" sz="1800" dirty="0"/>
+              <a:t>	-&gt; Decrementing </a:t>
+            </a:r>
+            <a:r>
+              <a:rPr lang="en-US" sz="1800" dirty="0" err="1"/>
+              <a:t>predCount</a:t>
+            </a:r>
+            <a:r>
+              <a:rPr lang="en-US" sz="1800" dirty="0"/>
+              <a:t> for 2 (New count: 0)</a:t>
+            </a:r>
+          </a:p>
+          <a:p>
+            <a:pPr marL="0" indent="0">
+              <a:buNone/>
+            </a:pPr>
+            <a:r>
+              <a:rPr lang="en-US" sz="1800" dirty="0"/>
+              <a:t>	-&gt; 2 hit 0 </a:t>
+            </a:r>
+            <a:r>
+              <a:rPr lang="en-US" sz="1800" dirty="0" err="1"/>
+              <a:t>predCount</a:t>
+            </a:r>
+            <a:r>
+              <a:rPr lang="en-US" sz="1800" dirty="0"/>
+              <a:t>. Adding to queue.</a:t>
+            </a:r>
+          </a:p>
+          <a:p>
+            <a:pPr marL="0" indent="0">
+              <a:buNone/>
+            </a:pPr>
+            <a:r>
+              <a:rPr lang="en-US" sz="1800" dirty="0"/>
+              <a:t>	-&gt; Decrementing </a:t>
+            </a:r>
+            <a:r>
+              <a:rPr lang="en-US" sz="1800" dirty="0" err="1"/>
+              <a:t>predCount</a:t>
+            </a:r>
+            <a:r>
+              <a:rPr lang="en-US" sz="1800" dirty="0"/>
+              <a:t> for 3 (New count: 2)</a:t>
+            </a:r>
+          </a:p>
+          <a:p>
+            <a:pPr marL="0" indent="0">
+              <a:buNone/>
+            </a:pPr>
+            <a:r>
+              <a:rPr lang="en-US" sz="1800" dirty="0"/>
+              <a:t>	-&gt; Decrementing </a:t>
+            </a:r>
+            <a:r>
+              <a:rPr lang="en-US" sz="1800" dirty="0" err="1"/>
+              <a:t>predCount</a:t>
+            </a:r>
+            <a:r>
+              <a:rPr lang="en-US" sz="1800" dirty="0"/>
+              <a:t> for 4 (New count: 1)</a:t>
+            </a:r>
+          </a:p>
+          <a:p>
+            <a:pPr marL="0" indent="0">
+              <a:buNone/>
+            </a:pPr>
+            <a:r>
+              <a:rPr lang="en-US" sz="1800" dirty="0"/>
+              <a:t>	-&gt; Decrementing </a:t>
+            </a:r>
+            <a:r>
+              <a:rPr lang="en-US" sz="1800" dirty="0" err="1"/>
+              <a:t>predCount</a:t>
+            </a:r>
+            <a:r>
+              <a:rPr lang="en-US" sz="1800" dirty="0"/>
+              <a:t> for 5 (New count: 0)</a:t>
+            </a:r>
+          </a:p>
+          <a:p>
+            <a:pPr marL="0" indent="0">
+              <a:buNone/>
+            </a:pPr>
+            <a:r>
+              <a:rPr lang="en-US" sz="1800" dirty="0"/>
+              <a:t>	-&gt; 5 hit 0 </a:t>
+            </a:r>
+            <a:r>
+              <a:rPr lang="en-US" sz="1800" dirty="0" err="1"/>
+              <a:t>predCount</a:t>
+            </a:r>
+            <a:r>
+              <a:rPr lang="en-US" sz="1800" dirty="0"/>
+              <a:t>. Adding to queue.</a:t>
+            </a:r>
+          </a:p>
+          <a:p>
+            <a:pPr marL="0" indent="0">
+              <a:buNone/>
+            </a:pPr>
+            <a:r>
+              <a:rPr lang="en-US" sz="1800" dirty="0"/>
+              <a:t>	-&gt; Decrementing </a:t>
+            </a:r>
+            <a:r>
+              <a:rPr lang="en-US" sz="1800" dirty="0" err="1"/>
+              <a:t>predCount</a:t>
+            </a:r>
+            <a:r>
+              <a:rPr lang="en-US" sz="1800" dirty="0"/>
+              <a:t> for 6 (New count: 0)</a:t>
+            </a:r>
+          </a:p>
+          <a:p>
+            <a:pPr marL="0" indent="0">
+              <a:buNone/>
+            </a:pPr>
+            <a:r>
+              <a:rPr lang="en-US" sz="1800" dirty="0"/>
+              <a:t>	-&gt; 6 hit 0 </a:t>
+            </a:r>
+            <a:r>
+              <a:rPr lang="en-US" sz="1800" dirty="0" err="1"/>
+              <a:t>predCount</a:t>
+            </a:r>
+            <a:r>
+              <a:rPr lang="en-US" sz="1800" dirty="0"/>
+              <a:t>. Adding to queue.</a:t>
+            </a:r>
+          </a:p>
+          <a:p>
+            <a:pPr marL="0" indent="0">
+              <a:buNone/>
+            </a:pPr>
+            <a:r>
+              <a:rPr lang="en-US" sz="1800" dirty="0"/>
+              <a:t>Current </a:t>
+            </a:r>
+            <a:r>
+              <a:rPr lang="en-US" sz="1800" dirty="0" err="1"/>
+              <a:t>predCounts</a:t>
+            </a:r>
+            <a:r>
+              <a:rPr lang="en-US" sz="1800" dirty="0"/>
+              <a:t>: [0:0, 1:0, 2:0, 3:2, 4:1, 5:0, 6:0, 7:0, 8:2, 9:1]</a:t>
+            </a:r>
+          </a:p>
+          <a:p>
+            <a:pPr marL="0" indent="0">
+              <a:buNone/>
+            </a:pPr>
+            <a:endParaRPr lang="en-US" sz="1800" dirty="0"/>
+          </a:p>
+          <a:p>
+            <a:pPr marL="0" indent="0">
+              <a:buNone/>
+            </a:pPr>
+            <a:r>
+              <a:rPr lang="en-US" sz="1800" dirty="0"/>
+              <a:t>Current Queue: [2, 5, 6]</a:t>
+            </a:r>
+          </a:p>
+          <a:p>
+            <a:pPr marL="0" indent="0">
+              <a:buNone/>
+            </a:pPr>
+            <a:r>
+              <a:rPr lang="en-US" sz="1800" dirty="0"/>
+              <a:t>Processing: 2</a:t>
+            </a:r>
+          </a:p>
+          <a:p>
+            <a:pPr marL="0" indent="0">
+              <a:buNone/>
+            </a:pPr>
+            <a:r>
+              <a:rPr lang="en-US" sz="1800" dirty="0"/>
+              <a:t>	-&gt; Decrementing </a:t>
+            </a:r>
+            <a:r>
+              <a:rPr lang="en-US" sz="1800" dirty="0" err="1"/>
+              <a:t>predCount</a:t>
+            </a:r>
+            <a:r>
+              <a:rPr lang="en-US" sz="1800" dirty="0"/>
+              <a:t> for 4 (New count: 0)</a:t>
+            </a:r>
+          </a:p>
+          <a:p>
+            <a:pPr marL="0" indent="0">
+              <a:buNone/>
+            </a:pPr>
+            <a:r>
+              <a:rPr lang="en-US" sz="1800" dirty="0"/>
+              <a:t>	-&gt; 4 hit 0 </a:t>
+            </a:r>
+            <a:r>
+              <a:rPr lang="en-US" sz="1800" dirty="0" err="1"/>
+              <a:t>predCount</a:t>
+            </a:r>
+            <a:r>
+              <a:rPr lang="en-US" sz="1800" dirty="0"/>
+              <a:t>. Adding to queue.</a:t>
+            </a:r>
+          </a:p>
+          <a:p>
+            <a:pPr marL="0" indent="0">
+              <a:buNone/>
+            </a:pPr>
+            <a:r>
+              <a:rPr lang="en-US" sz="1800" dirty="0"/>
+              <a:t>Current </a:t>
+            </a:r>
+            <a:r>
+              <a:rPr lang="en-US" sz="1800" dirty="0" err="1"/>
+              <a:t>predCounts</a:t>
+            </a:r>
+            <a:r>
+              <a:rPr lang="en-US" sz="1800" dirty="0"/>
+              <a:t>: [0:0, 1:0, 2:0, 3:2, 4:0, 5:0, 6:0, 7:0, 8:2, 9:1]</a:t>
+            </a:r>
+          </a:p>
+          <a:p>
+            <a:pPr marL="0" indent="0">
+              <a:buNone/>
+            </a:pPr>
+            <a:endParaRPr lang="en-US" sz="1800" dirty="0"/>
+          </a:p>
+          <a:p>
+            <a:pPr marL="0" indent="0">
+              <a:buNone/>
+            </a:pPr>
+            <a:r>
+              <a:rPr lang="en-US" sz="1800" dirty="0"/>
+              <a:t>Current Queue: [5, 6, 4]</a:t>
+            </a:r>
+          </a:p>
+          <a:p>
+            <a:pPr marL="0" indent="0">
+              <a:buNone/>
+            </a:pPr>
+            <a:r>
+              <a:rPr lang="en-US" sz="1800" dirty="0"/>
+              <a:t>Processing: 5</a:t>
+            </a:r>
+          </a:p>
+          <a:p>
+            <a:pPr marL="0" indent="0">
+              <a:buNone/>
+            </a:pPr>
+            <a:r>
+              <a:rPr lang="en-US" sz="1800" dirty="0"/>
+              <a:t>	-&gt; Decrementing </a:t>
+            </a:r>
+            <a:r>
+              <a:rPr lang="en-US" sz="1800" dirty="0" err="1"/>
+              <a:t>predCount</a:t>
+            </a:r>
+            <a:r>
+              <a:rPr lang="en-US" sz="1800" dirty="0"/>
+              <a:t> for 8 (New count: 1)</a:t>
+            </a:r>
+          </a:p>
+          <a:p>
+            <a:pPr marL="0" indent="0">
+              <a:buNone/>
+            </a:pPr>
+            <a:r>
+              <a:rPr lang="en-US" sz="1800" dirty="0"/>
+              <a:t>Current </a:t>
+            </a:r>
+            <a:r>
+              <a:rPr lang="en-US" sz="1800" dirty="0" err="1"/>
+              <a:t>predCounts</a:t>
+            </a:r>
+            <a:r>
+              <a:rPr lang="en-US" sz="1800" dirty="0"/>
+              <a:t>: [0:0, 1:0, 2:0, 3:2, 4:0, 5:0, 6:0, 7:0, 8:1, 9:1]</a:t>
+            </a:r>
+          </a:p>
+          <a:p>
+            <a:pPr marL="0" indent="0">
+              <a:buNone/>
+            </a:pPr>
+            <a:endParaRPr lang="en-US" sz="1800" dirty="0"/>
+          </a:p>
+          <a:p>
+            <a:pPr marL="0" indent="0">
+              <a:buNone/>
+            </a:pPr>
+            <a:r>
+              <a:rPr lang="en-US" sz="1800" dirty="0"/>
+              <a:t>Current Queue: [6, 4]</a:t>
+            </a:r>
+          </a:p>
+          <a:p>
+            <a:pPr marL="0" indent="0">
+              <a:buNone/>
+            </a:pPr>
+            <a:endParaRPr lang="en-US" sz="1800" dirty="0"/>
           </a:p>
         </p:txBody>
       </p:sp>
     </p:spTree>
+    <p:extLst>
+      <p:ext uri="{BB962C8B-B14F-4D97-AF65-F5344CB8AC3E}">
+        <p14:creationId xmlns:p14="http://schemas.microsoft.com/office/powerpoint/2010/main" val="2187607227"/>
+      </p:ext>
+    </p:extLst>
   </p:cSld>
   <p:clrMapOvr>
     <a:masterClrMapping/>
